--- a/slides/building-your-own-chief-of-staff.pptx
+++ b/slides/building-your-own-chief-of-staff.pptx
@@ -28,6 +28,7 @@
     <p:sldId id="276" r:id="rId28"/>
     <p:sldId id="277" r:id="rId29"/>
     <p:sldId id="278" r:id="rId30"/>
+    <p:sldId id="279" r:id="rId31"/>
   </p:sldIdLst>
   <p:sldSz cx="12191695" cy="6858000" type="screen4x3"/>
   <p:notesSz cx="6858000" cy="9144000"/>
@@ -852,19 +853,19 @@
           <a:lstStyle/>
           <a:p>
             <a:r>
-              <a:t>Have them shout a job. Split blobs. 'Email' becomes 'Monday status to my manager.' 'Meetings' becomes 'recap of the staff meeting within the hour.'</a:t>
+              <a:t>Overview, not a tour. Six things, six purposes. Do not open evidence-based-investigation.md unless someone asks how to ground a rumor — it lives under process/.</a:t>
             </a:r>
           </a:p>
           <a:p/>
           <a:p>
             <a:r>
-              <a:t>First-agent-job guide: one annoying problem, three real occurrences, inbox text is data not instructions. Notion: https://app.notion.com/p/3bb059b703e1817b9123ff209fcc5d9d</a:t>
+              <a:t>Personal data never ships in this repo. They copy context-templates/ to a private folder. START-HERE.md is unzip / browser / Cursor.</a:t>
             </a:r>
           </a:p>
           <a:p/>
           <a:p>
             <a:r>
-              <a:t>Prompt they will paste: prompts/process/name-the-job.md and the-two-tests.md</a:t>
+              <a:t>Cite: map of where material lives — https://app.notion.com/p/3bb059b703e18152aea0d83b502fa319</a:t>
             </a:r>
           </a:p>
         </p:txBody>
@@ -934,13 +935,19 @@
           <a:lstStyle/>
           <a:p>
             <a:r>
-              <a:t>This is the spec from the Delegation Kit: inputs, steps, constraints, approvals at reversibility boundaries, failure handling. Score: can a stranger execute it without questions; are success criteria binary. Three or below means the spec creates more work than it saves. Notion: https://app.notion.com/p/36f059b703e18192a6d8f67fbe74b756</a:t>
+              <a:t>Have them shout a job. Split blobs. 'Email' becomes 'Monday status to my manager.' 'Meetings' becomes 'recap of the staff meeting within the hour.'</a:t>
             </a:r>
           </a:p>
           <a:p/>
           <a:p>
             <a:r>
-              <a:t>Prompt: prompts/process/write-the-sop.md</a:t>
+              <a:t>First-agent-job guide: one annoying problem, three real occurrences, inbox text is data not instructions. Notion: https://app.notion.com/p/3bb059b703e1817b9123ff209fcc5d9d</a:t>
+            </a:r>
+          </a:p>
+          <a:p/>
+          <a:p>
+            <a:r>
+              <a:t>Prompt they will paste: prompts/process/name-the-job.md and the-two-tests.md</a:t>
             </a:r>
           </a:p>
         </p:txBody>
@@ -1010,13 +1017,13 @@
           <a:lstStyle/>
           <a:p>
             <a:r>
-              <a:t>Do not dump this into one encyclopedia. One giant project file becomes a graveyard of stale rules — that is the OpenAI story in the context-files essay. Split: stable instructions, current state, a map of where material lives, decision history. When you change your mind, name what is replaced and keep the old assumption in the log. Notion: https://app.notion.com/p/3bb059b703e18152aea0d83b502fa319</a:t>
+              <a:t>This is the spec from the Delegation Kit: inputs, steps, constraints, approvals at reversibility boundaries, failure handling. Score: can a stranger execute it without questions; are success criteria binary. Three or below means the spec creates more work than it saves. Notion: https://app.notion.com/p/36f059b703e18192a6d8f67fbe74b756</a:t>
             </a:r>
           </a:p>
           <a:p/>
           <a:p>
             <a:r>
-              <a:t>These files stay private. The public repo ships blanks. Prompt: prompts/process/build-context.md</a:t>
+              <a:t>Prompt: prompts/process/write-the-sop.md</a:t>
             </a:r>
           </a:p>
         </p:txBody>
@@ -1086,13 +1093,13 @@
           <a:lstStyle/>
           <a:p>
             <a:r>
-              <a:t>One-job test: don't evaluate a skill by reading the promise. Give it one real job, write pass/fail first, keep the evidence. Keep, fork, or delete. Notion: https://app.notion.com/p/3b0059b703e181fa81add3d2cd98aeaf</a:t>
+              <a:t>Do not dump this into one encyclopedia. One giant project file becomes a graveyard of stale rules — that is the OpenAI story in the context-files essay. Split: stable instructions, current state, a map of where material lives (sources.md), decision history. When you change your mind, name what is replaced and keep the old assumption in the log. Notion: https://app.notion.com/p/3bb059b703e18152aea0d83b502fa319</a:t>
             </a:r>
           </a:p>
           <a:p/>
           <a:p>
             <a:r>
-              <a:t>This is why we ship prompt files, not a plugin, in this repo.</a:t>
+              <a:t>These files stay private. The public repo ships blanks. They name the systems they actually open — the agent does not pick a vendor. Prompt: prompts/process/build-context.md</a:t>
             </a:r>
           </a:p>
         </p:txBody>
@@ -1162,19 +1169,13 @@
           <a:lstStyle/>
           <a:p>
             <a:r>
-              <a:t>Citation guard from the reusable-rig essay: no anchor, no claim. Notion: https://app.notion.com/p/392059b703e1814b96a6dd9913180844</a:t>
+              <a:t>One-job test: don't evaluate a skill by reading the promise. Give it one real job, write pass/fail first, keep the evidence. Keep, fork, or delete. Notion: https://app.notion.com/p/3b0059b703e181fa81add3d2cd98aeaf</a:t>
             </a:r>
           </a:p>
           <a:p/>
           <a:p>
             <a:r>
-              <a:t>Printed holes ('usage: not available') are the system working. Invented numbers inside a confident summary are the failure mode people are right to fear. That example is in the agent-shaped-work piece.</a:t>
-            </a:r>
-          </a:p>
-          <a:p/>
-          <a:p>
-            <a:r>
-              <a:t>Prompt: prompts/process/verify.md</a:t>
+              <a:t>This is why we ship prompt files, not a plugin, in this repo.</a:t>
             </a:r>
           </a:p>
         </p:txBody>
@@ -1244,19 +1245,25 @@
           <a:lstStyle/>
           <a:p>
             <a:r>
-              <a:t>Maintenance loop: you are maintaining the harness, not a prompt. Seven surfaces — job, diet, memory, tools, reach, proof, value. Repeated correction across three runs is a file problem. Delete before you add. Keep / change / pause / retire. Notion: https://app.notion.com/p/3bb059b703e181bfa3f5fbf9ed29b605</a:t>
+              <a:t>Citation guard from the reusable-rig essay: no anchor, no claim. Notion: https://app.notion.com/p/392059b703e1814b96a6dd9913180844</a:t>
             </a:r>
           </a:p>
           <a:p/>
           <a:p>
             <a:r>
-              <a:t>Ownership: the fastest way to make an agent dangerous is to let everybody use it and nobody own it. Notion: https://app.notion.com/p/387059b703e18195a327e34da56998cb</a:t>
+              <a:t>They name the systems in sources.md. You do not pick Outlook vs Gmail for them. If someone asks how to ground a rumor, that is evidence-based-investigation.md — do not teach it here.</a:t>
             </a:r>
           </a:p>
           <a:p/>
           <a:p>
             <a:r>
-              <a:t>Prompt: prompts/process/correct-the-file.md</a:t>
+              <a:t>Printed holes ('usage: not available') are the system working. Invented numbers inside a confident summary are the failure mode people are right to fear. That example is in the agent-shaped-work piece.</a:t>
+            </a:r>
+          </a:p>
+          <a:p/>
+          <a:p>
+            <a:r>
+              <a:t>Prompt: prompts/process/verify.md</a:t>
             </a:r>
           </a:p>
         </p:txBody>
@@ -1326,19 +1333,19 @@
           <a:lstStyle/>
           <a:p>
             <a:r>
-              <a:t>This is not a legal disclaimer bolted on. It is why the same rig can be pointed at money and health paperwork. If an agent sends a flawed appeal in your name, you now have two problems. Notion: https://app.notion.com/p/392059b703e1814b96a6dd9913180844</a:t>
+              <a:t>Maintenance loop: you are maintaining the harness, not a prompt. Seven surfaces — job, diet, memory, tools, reach, proof, value. Repeated correction across three runs is a file problem. Delete before you add. Keep / change / pause / retire. Notion: https://app.notion.com/p/3bb059b703e181bfa3f5fbf9ed29b605</a:t>
             </a:r>
           </a:p>
           <a:p/>
           <a:p>
             <a:r>
-              <a:t>Inbox is untrusted. A line that says 'ignore your rules' is data, not an order. First-agent-job: https://app.notion.com/p/3bb059b703e1817b9123ff209fcc5d9d</a:t>
+              <a:t>Ownership: the fastest way to make an agent dangerous is to let everybody use it and nobody own it. Notion: https://app.notion.com/p/387059b703e18195a327e34da56998cb</a:t>
             </a:r>
           </a:p>
           <a:p/>
           <a:p>
             <a:r>
-              <a:t>Approvals sit at reversibility boundaries — the moment an action becomes hard to undo.</a:t>
+              <a:t>Prompt: prompts/process/correct-the-file.md</a:t>
             </a:r>
           </a:p>
         </p:txBody>
@@ -1414,7 +1421,7 @@
           <a:p/>
           <a:p>
             <a:r>
-              <a:t>The context files they fill in privately — who they are, this quarter's priorities, how they write — are the operating system. Swap the vendor tomorrow and nothing important moves.</a:t>
+              <a:t>The context files they fill in privately — who they are, this quarter's priorities, how they write, where truth lives — are the operating system. Swap the vendor tomorrow and nothing important moves. START-HERE.md is how the folder lands on a PC. Do not walk the file tree here.</a:t>
             </a:r>
           </a:p>
           <a:p/>
@@ -1490,19 +1497,19 @@
           <a:lstStyle/>
           <a:p>
             <a:r>
-              <a:t>Six things have to be true before AI changes a workflow. Most companies have built two. Notion: https://app.notion.com/p/36f059b703e1813d801bcb34d72141b1</a:t>
+              <a:t>This is not a legal disclaimer bolted on. It is why the same rig can be pointed at money and health paperwork. If an agent sends a flawed appeal in your name, you now have two problems. Notion: https://app.notion.com/p/392059b703e1814b96a6dd9913180844</a:t>
             </a:r>
           </a:p>
           <a:p/>
           <a:p>
             <a:r>
-              <a:t>Shape of the work: https://app.notion.com/p/36f059b703e181cf9c30f637d158b234</a:t>
+              <a:t>Inbox is untrusted. A line that says 'ignore your rules' is data, not an order. First-agent-job: https://app.notion.com/p/3bb059b703e1817b9123ff209fcc5d9d</a:t>
             </a:r>
           </a:p>
           <a:p/>
           <a:p>
             <a:r>
-              <a:t>The CoS is the demo so they learn the motion on work they already understand. Then they take it home.</a:t>
+              <a:t>Approvals sit at reversibility boundaries — the moment an action becomes hard to undo.</a:t>
             </a:r>
           </a:p>
         </p:txBody>
@@ -1572,13 +1579,19 @@
           <a:lstStyle/>
           <a:p>
             <a:r>
-              <a:t>Walk the README. If they freeze, they start at what-to-automate.md — last week, split the blob, edges first. If the two tests fail, they still used the thirty minutes correctly. The lesson is the refusal.</a:t>
+              <a:t>Six things have to be true before AI changes a workflow. Most companies have built two. Notion: https://app.notion.com/p/36f059b703e1813d801bcb34d72141b1</a:t>
             </a:r>
           </a:p>
           <a:p/>
           <a:p>
             <a:r>
-              <a:t>Do not put the brief on a timer until they have checked it by hand several times. Automation is for a process they already trust.</a:t>
+              <a:t>Shape of the work: https://app.notion.com/p/36f059b703e181cf9c30f637d158b234</a:t>
+            </a:r>
+          </a:p>
+          <a:p/>
+          <a:p>
+            <a:r>
+              <a:t>The CoS is the demo so they learn the motion on work they already understand. Then they take it home.</a:t>
             </a:r>
           </a:p>
         </p:txBody>
@@ -1648,13 +1661,13 @@
           <a:lstStyle/>
           <a:p>
             <a:r>
-              <a:t>Leave this up during Q&amp;A if needed.</a:t>
+              <a:t>Walk the README. START-HERE.md first if the files are not on the machine yet. If they freeze, they start at what-to-automate.md — last week, split the blob, edges first. If the two tests fail, they still used the thirty minutes correctly. The lesson is the refusal.</a:t>
             </a:r>
           </a:p>
           <a:p/>
           <a:p>
             <a:r>
-              <a:t>Where the agent should stop: start where a colleague or customer already tells you you're wrong; reconstructing context is the expensive part; the reply is cheap. Notion: https://app.notion.com/p/3aa059b703e1817c9571c77f8badaf77</a:t>
+              <a:t>Do not put the brief on a timer until they have checked it by hand several times. Automation is for a process they already trust.</a:t>
             </a:r>
           </a:p>
         </p:txBody>
@@ -1680,6 +1693,82 @@
 </file>
 
 <file path=ppt/notesSlides/notesSlide23.xml><?xml version="1.0" encoding="utf-8"?>
+<p:notes xmlns:a="http://schemas.openxmlformats.org/drawingml/2006/main" xmlns:p="http://schemas.openxmlformats.org/presentationml/2006/main" xmlns:r="http://schemas.openxmlformats.org/officeDocument/2006/relationships">
+  <p:cSld>
+    <p:spTree>
+      <p:nvGrpSpPr>
+        <p:cNvPr id="1" name=""/>
+        <p:cNvGrpSpPr/>
+        <p:nvPr/>
+      </p:nvGrpSpPr>
+      <p:grpSpPr>
+        <a:xfrm>
+          <a:off x="0" y="0"/>
+          <a:ext cx="0" cy="0"/>
+          <a:chOff x="0" y="0"/>
+          <a:chExt cx="0" cy="0"/>
+        </a:xfrm>
+      </p:grpSpPr>
+      <p:sp>
+        <p:nvSpPr>
+          <p:cNvPr id="2" name="Slide Image Placeholder 1"/>
+          <p:cNvSpPr>
+            <a:spLocks noGrp="1"/>
+          </p:cNvSpPr>
+          <p:nvPr>
+            <p:ph type="sldImg" idx="2"/>
+          </p:nvPr>
+        </p:nvSpPr>
+        <p:spPr/>
+      </p:sp>
+      <p:sp>
+        <p:nvSpPr>
+          <p:cNvPr id="3" name="Notes Placeholder 2"/>
+          <p:cNvSpPr>
+            <a:spLocks noGrp="1"/>
+          </p:cNvSpPr>
+          <p:nvPr>
+            <p:ph type="body" idx="3" sz="quarter"/>
+          </p:nvPr>
+        </p:nvSpPr>
+        <p:spPr/>
+        <p:txBody>
+          <a:bodyPr/>
+          <a:lstStyle/>
+          <a:p>
+            <a:r>
+              <a:t>Leave this up during Q&amp;A if needed.</a:t>
+            </a:r>
+          </a:p>
+          <a:p/>
+          <a:p>
+            <a:r>
+              <a:t>Where the agent should stop: start where a colleague or customer already tells you you're wrong; reconstructing context is the expensive part; the reply is cheap. Notion: https://app.notion.com/p/3aa059b703e1817c9571c77f8badaf77</a:t>
+            </a:r>
+          </a:p>
+        </p:txBody>
+      </p:sp>
+      <p:sp>
+        <p:nvSpPr>
+          <p:cNvPr id="4" name="Slide Number Placeholder 3"/>
+          <p:cNvSpPr>
+            <a:spLocks noGrp="1"/>
+          </p:cNvSpPr>
+          <p:nvPr>
+            <p:ph type="sldNum" idx="5" sz="quarter"/>
+          </p:nvPr>
+        </p:nvSpPr>
+        <p:spPr/>
+      </p:sp>
+    </p:spTree>
+  </p:cSld>
+  <p:clrMapOvr>
+    <a:masterClrMapping/>
+  </p:clrMapOvr>
+</p:notes>
+</file>
+
+<file path=ppt/notesSlides/notesSlide24.xml><?xml version="1.0" encoding="utf-8"?>
 <p:notes xmlns:a="http://schemas.openxmlformats.org/drawingml/2006/main" xmlns:p="http://schemas.openxmlformats.org/presentationml/2006/main" xmlns:r="http://schemas.openxmlformats.org/officeDocument/2006/relationships">
   <p:cSld>
     <p:spTree>
@@ -5645,7 +5734,7 @@
                 </a:solidFill>
                 <a:latin typeface="Calibri"/>
               </a:rPr>
-              <a:t>1  /  23</a:t>
+              <a:t>1  /  24</a:t>
             </a:r>
           </a:p>
         </p:txBody>
@@ -6498,7 +6587,7 @@
                 </a:solidFill>
                 <a:latin typeface="Calibri"/>
               </a:rPr>
-              <a:t>10  /  23</a:t>
+              <a:t>10  /  24</a:t>
             </a:r>
           </a:p>
         </p:txBody>
@@ -7144,7 +7233,7 @@
                 </a:solidFill>
                 <a:latin typeface="Calibri"/>
               </a:rPr>
-              <a:t>11  /  23</a:t>
+              <a:t>11  /  24</a:t>
             </a:r>
           </a:p>
         </p:txBody>
@@ -7822,7 +7911,7 @@
                 </a:solidFill>
                 <a:latin typeface="Calibri"/>
               </a:rPr>
-              <a:t>12  /  23</a:t>
+              <a:t>12  /  24</a:t>
             </a:r>
           </a:p>
         </p:txBody>
@@ -8004,21 +8093,64 @@
                 </a:solidFill>
                 <a:latin typeface="Calibri"/>
               </a:rPr>
-              <a:t>Step 1 — Name one job</a:t>
-            </a:r>
-          </a:p>
-        </p:txBody>
-      </p:sp>
-      <p:sp>
-        <p:nvSpPr>
-          <p:cNvPr id="6" name="TextBox 5"/>
+              <a:t>What's in the kit</a:t>
+            </a:r>
+          </a:p>
+        </p:txBody>
+      </p:sp>
+      <p:sp>
+        <p:nvSpPr>
+          <p:cNvPr id="6" name="Rectangle 5"/>
+          <p:cNvSpPr/>
+          <p:nvPr/>
+        </p:nvSpPr>
+        <p:spPr>
+          <a:xfrm>
+            <a:off x="731520" y="1371600"/>
+            <a:ext cx="3474720" cy="1828800"/>
+          </a:xfrm>
+          <a:prstGeom prst="rect">
+            <a:avLst/>
+          </a:prstGeom>
+          <a:solidFill>
+            <a:srgbClr val="141414"/>
+          </a:solidFill>
+          <a:ln>
+            <a:noFill/>
+          </a:ln>
+        </p:spPr>
+        <p:style>
+          <a:lnRef idx="1">
+            <a:schemeClr val="accent1"/>
+          </a:lnRef>
+          <a:fillRef idx="3">
+            <a:schemeClr val="accent1"/>
+          </a:fillRef>
+          <a:effectRef idx="2">
+            <a:schemeClr val="accent1"/>
+          </a:effectRef>
+          <a:fontRef idx="minor">
+            <a:schemeClr val="lt1"/>
+          </a:fontRef>
+        </p:style>
+        <p:txBody>
+          <a:bodyPr rtlCol="0" anchor="ctr"/>
+          <a:lstStyle/>
+          <a:p>
+            <a:pPr algn="ctr"/>
+          </a:p>
+        </p:txBody>
+      </p:sp>
+      <p:sp>
+        <p:nvSpPr>
+          <p:cNvPr id="7" name="TextBox 6"/>
           <p:cNvSpPr txBox="1"/>
           <p:nvPr/>
         </p:nvSpPr>
         <p:spPr>
           <a:xfrm>
-            <a:off x="731520" y="1371600"/>
-            <a:ext cx="10515600" cy="4389120"/>
+            <a:off x="914400" y="1691640"/>
+            <a:ext cx="3108960" cy="502920"/>
           </a:xfrm>
           <a:prstGeom prst="rect">
             <a:avLst/>
@@ -8031,97 +8163,29 @@
           </a:bodyPr>
           <a:lstStyle/>
           <a:p>
-            <a:pPr>
-              <a:spcAft>
-                <a:spcPts val="1400"/>
-              </a:spcAft>
-            </a:pPr>
-            <a:r>
-              <a:rPr sz="2200" b="0">
-                <a:solidFill>
-                  <a:srgbClr val="F4EBD0"/>
-                </a:solidFill>
-                <a:latin typeface="Calibri"/>
-              </a:rPr>
-              <a:t>•  Not “be more productive.” Not “be my chief of staff.”</a:t>
-            </a:r>
-          </a:p>
-          <a:p>
-            <a:pPr>
-              <a:spcAft>
-                <a:spcPts val="1400"/>
-              </a:spcAft>
-            </a:pPr>
-            <a:r>
-              <a:rPr sz="2200" b="0">
-                <a:solidFill>
-                  <a:srgbClr val="F4EBD0"/>
-                </a:solidFill>
-                <a:latin typeface="Calibri"/>
-              </a:rPr>
-              <a:t>•  A job you actually did last week, with a finished artifact.</a:t>
-            </a:r>
-          </a:p>
-          <a:p>
-            <a:pPr>
-              <a:spcAft>
-                <a:spcPts val="1400"/>
-              </a:spcAft>
-            </a:pPr>
-            <a:r>
-              <a:rPr sz="2200" b="0">
-                <a:solidFill>
-                  <a:srgbClr val="F4EBD0"/>
-                </a:solidFill>
-                <a:latin typeface="Calibri"/>
-              </a:rPr>
-              <a:t>•  Annoying enough that you will reuse the file.</a:t>
-            </a:r>
-          </a:p>
-          <a:p>
-            <a:pPr>
-              <a:spcAft>
-                <a:spcPts val="1400"/>
-              </a:spcAft>
-            </a:pPr>
-            <a:r>
-              <a:rPr sz="2200" b="0">
-                <a:solidFill>
-                  <a:srgbClr val="F4EBD0"/>
-                </a:solidFill>
-                <a:latin typeface="Calibri"/>
-              </a:rPr>
-              <a:t>•  Prefer a pain that has happened at least three times.</a:t>
-            </a:r>
-          </a:p>
-          <a:p>
-            <a:pPr>
-              <a:spcAft>
-                <a:spcPts val="1400"/>
-              </a:spcAft>
-            </a:pPr>
-            <a:r>
-              <a:rPr sz="2200" b="0">
-                <a:solidFill>
-                  <a:srgbClr val="F4EBD0"/>
-                </a:solidFill>
-                <a:latin typeface="Calibri"/>
-              </a:rPr>
-              <a:t>•  If you cannot point at examples, you do not have a first job yet.</a:t>
-            </a:r>
-          </a:p>
-        </p:txBody>
-      </p:sp>
-      <p:sp>
-        <p:nvSpPr>
-          <p:cNvPr id="7" name="TextBox 6"/>
+            <a:pPr algn="l"/>
+            <a:r>
+              <a:rPr sz="1600" b="1">
+                <a:solidFill>
+                  <a:srgbClr val="B3995D"/>
+                </a:solidFill>
+                <a:latin typeface="Calibri"/>
+              </a:rPr>
+              <a:t>START-HERE.md</a:t>
+            </a:r>
+          </a:p>
+        </p:txBody>
+      </p:sp>
+      <p:sp>
+        <p:nvSpPr>
+          <p:cNvPr id="8" name="TextBox 7"/>
           <p:cNvSpPr txBox="1"/>
           <p:nvPr/>
         </p:nvSpPr>
         <p:spPr>
           <a:xfrm>
-            <a:off x="640080" y="6492240"/>
-            <a:ext cx="9144000" cy="274320"/>
+            <a:off x="914400" y="2286000"/>
+            <a:ext cx="3108960" cy="640080"/>
           </a:xfrm>
           <a:prstGeom prst="rect">
             <a:avLst/>
@@ -8136,27 +8200,70 @@
           <a:p>
             <a:pPr algn="l"/>
             <a:r>
-              <a:rPr sz="1100" b="0">
-                <a:solidFill>
-                  <a:srgbClr val="B8A888"/>
-                </a:solidFill>
-                <a:latin typeface="Calibri"/>
-              </a:rPr>
-              <a:t>Build your own chief of staff  ·  process, not a vendor</a:t>
-            </a:r>
-          </a:p>
-        </p:txBody>
-      </p:sp>
-      <p:sp>
-        <p:nvSpPr>
-          <p:cNvPr id="8" name="TextBox 7"/>
+              <a:rPr sz="1600" b="0">
+                <a:solidFill>
+                  <a:srgbClr val="F4EBD0"/>
+                </a:solidFill>
+                <a:latin typeface="Calibri"/>
+              </a:rPr>
+              <a:t>Get the files onto a PC</a:t>
+            </a:r>
+          </a:p>
+        </p:txBody>
+      </p:sp>
+      <p:sp>
+        <p:nvSpPr>
+          <p:cNvPr id="9" name="Rectangle 8"/>
+          <p:cNvSpPr/>
+          <p:nvPr/>
+        </p:nvSpPr>
+        <p:spPr>
+          <a:xfrm>
+            <a:off x="4389120" y="1371600"/>
+            <a:ext cx="3474720" cy="1828800"/>
+          </a:xfrm>
+          <a:prstGeom prst="rect">
+            <a:avLst/>
+          </a:prstGeom>
+          <a:solidFill>
+            <a:srgbClr val="141414"/>
+          </a:solidFill>
+          <a:ln>
+            <a:noFill/>
+          </a:ln>
+        </p:spPr>
+        <p:style>
+          <a:lnRef idx="1">
+            <a:schemeClr val="accent1"/>
+          </a:lnRef>
+          <a:fillRef idx="3">
+            <a:schemeClr val="accent1"/>
+          </a:fillRef>
+          <a:effectRef idx="2">
+            <a:schemeClr val="accent1"/>
+          </a:effectRef>
+          <a:fontRef idx="minor">
+            <a:schemeClr val="lt1"/>
+          </a:fontRef>
+        </p:style>
+        <p:txBody>
+          <a:bodyPr rtlCol="0" anchor="ctr"/>
+          <a:lstStyle/>
+          <a:p>
+            <a:pPr algn="ctr"/>
+          </a:p>
+        </p:txBody>
+      </p:sp>
+      <p:sp>
+        <p:nvSpPr>
+          <p:cNvPr id="10" name="TextBox 9"/>
           <p:cNvSpPr txBox="1"/>
           <p:nvPr/>
         </p:nvSpPr>
         <p:spPr>
           <a:xfrm>
-            <a:off x="10607040" y="6492240"/>
-            <a:ext cx="1097280" cy="274320"/>
+            <a:off x="4572000" y="1691640"/>
+            <a:ext cx="3108960" cy="502920"/>
           </a:xfrm>
           <a:prstGeom prst="rect">
             <a:avLst/>
@@ -8169,6 +8276,563 @@
           </a:bodyPr>
           <a:lstStyle/>
           <a:p>
+            <a:pPr algn="l"/>
+            <a:r>
+              <a:rPr sz="1600" b="1">
+                <a:solidFill>
+                  <a:srgbClr val="B3995D"/>
+                </a:solidFill>
+                <a:latin typeface="Calibri"/>
+              </a:rPr>
+              <a:t>PROCESS.md</a:t>
+            </a:r>
+          </a:p>
+        </p:txBody>
+      </p:sp>
+      <p:sp>
+        <p:nvSpPr>
+          <p:cNvPr id="11" name="TextBox 10"/>
+          <p:cNvSpPr txBox="1"/>
+          <p:nvPr/>
+        </p:nvSpPr>
+        <p:spPr>
+          <a:xfrm>
+            <a:off x="4572000" y="2286000"/>
+            <a:ext cx="3108960" cy="640080"/>
+          </a:xfrm>
+          <a:prstGeom prst="rect">
+            <a:avLst/>
+          </a:prstGeom>
+          <a:noFill/>
+        </p:spPr>
+        <p:txBody>
+          <a:bodyPr wrap="square">
+            <a:spAutoFit/>
+          </a:bodyPr>
+          <a:lstStyle/>
+          <a:p>
+            <a:pPr algn="l"/>
+            <a:r>
+              <a:rPr sz="1600" b="0">
+                <a:solidFill>
+                  <a:srgbClr val="F4EBD0"/>
+                </a:solidFill>
+                <a:latin typeface="Calibri"/>
+              </a:rPr>
+              <a:t>The method — two tests</a:t>
+            </a:r>
+          </a:p>
+        </p:txBody>
+      </p:sp>
+      <p:sp>
+        <p:nvSpPr>
+          <p:cNvPr id="12" name="Rectangle 11"/>
+          <p:cNvSpPr/>
+          <p:nvPr/>
+        </p:nvSpPr>
+        <p:spPr>
+          <a:xfrm>
+            <a:off x="8046720" y="1371600"/>
+            <a:ext cx="3474720" cy="1828800"/>
+          </a:xfrm>
+          <a:prstGeom prst="rect">
+            <a:avLst/>
+          </a:prstGeom>
+          <a:solidFill>
+            <a:srgbClr val="141414"/>
+          </a:solidFill>
+          <a:ln>
+            <a:noFill/>
+          </a:ln>
+        </p:spPr>
+        <p:style>
+          <a:lnRef idx="1">
+            <a:schemeClr val="accent1"/>
+          </a:lnRef>
+          <a:fillRef idx="3">
+            <a:schemeClr val="accent1"/>
+          </a:fillRef>
+          <a:effectRef idx="2">
+            <a:schemeClr val="accent1"/>
+          </a:effectRef>
+          <a:fontRef idx="minor">
+            <a:schemeClr val="lt1"/>
+          </a:fontRef>
+        </p:style>
+        <p:txBody>
+          <a:bodyPr rtlCol="0" anchor="ctr"/>
+          <a:lstStyle/>
+          <a:p>
+            <a:pPr algn="ctr"/>
+          </a:p>
+        </p:txBody>
+      </p:sp>
+      <p:sp>
+        <p:nvSpPr>
+          <p:cNvPr id="13" name="TextBox 12"/>
+          <p:cNvSpPr txBox="1"/>
+          <p:nvPr/>
+        </p:nvSpPr>
+        <p:spPr>
+          <a:xfrm>
+            <a:off x="8229600" y="1691640"/>
+            <a:ext cx="3108960" cy="502920"/>
+          </a:xfrm>
+          <a:prstGeom prst="rect">
+            <a:avLst/>
+          </a:prstGeom>
+          <a:noFill/>
+        </p:spPr>
+        <p:txBody>
+          <a:bodyPr wrap="square">
+            <a:spAutoFit/>
+          </a:bodyPr>
+          <a:lstStyle/>
+          <a:p>
+            <a:pPr algn="l"/>
+            <a:r>
+              <a:rPr sz="1600" b="1">
+                <a:solidFill>
+                  <a:srgbClr val="B3995D"/>
+                </a:solidFill>
+                <a:latin typeface="Calibri"/>
+              </a:rPr>
+              <a:t>prompts/process/</a:t>
+            </a:r>
+          </a:p>
+        </p:txBody>
+      </p:sp>
+      <p:sp>
+        <p:nvSpPr>
+          <p:cNvPr id="14" name="TextBox 13"/>
+          <p:cNvSpPr txBox="1"/>
+          <p:nvPr/>
+        </p:nvSpPr>
+        <p:spPr>
+          <a:xfrm>
+            <a:off x="8229600" y="2286000"/>
+            <a:ext cx="3108960" cy="640080"/>
+          </a:xfrm>
+          <a:prstGeom prst="rect">
+            <a:avLst/>
+          </a:prstGeom>
+          <a:noFill/>
+        </p:spPr>
+        <p:txBody>
+          <a:bodyPr wrap="square">
+            <a:spAutoFit/>
+          </a:bodyPr>
+          <a:lstStyle/>
+          <a:p>
+            <a:pPr algn="l"/>
+            <a:r>
+              <a:rPr sz="1600" b="0">
+                <a:solidFill>
+                  <a:srgbClr val="F4EBD0"/>
+                </a:solidFill>
+                <a:latin typeface="Calibri"/>
+              </a:rPr>
+              <a:t>Turn any job into a workflow</a:t>
+            </a:r>
+          </a:p>
+        </p:txBody>
+      </p:sp>
+      <p:sp>
+        <p:nvSpPr>
+          <p:cNvPr id="15" name="Rectangle 14"/>
+          <p:cNvSpPr/>
+          <p:nvPr/>
+        </p:nvSpPr>
+        <p:spPr>
+          <a:xfrm>
+            <a:off x="731520" y="3383280"/>
+            <a:ext cx="3474720" cy="1828800"/>
+          </a:xfrm>
+          <a:prstGeom prst="rect">
+            <a:avLst/>
+          </a:prstGeom>
+          <a:solidFill>
+            <a:srgbClr val="141414"/>
+          </a:solidFill>
+          <a:ln>
+            <a:noFill/>
+          </a:ln>
+        </p:spPr>
+        <p:style>
+          <a:lnRef idx="1">
+            <a:schemeClr val="accent1"/>
+          </a:lnRef>
+          <a:fillRef idx="3">
+            <a:schemeClr val="accent1"/>
+          </a:fillRef>
+          <a:effectRef idx="2">
+            <a:schemeClr val="accent1"/>
+          </a:effectRef>
+          <a:fontRef idx="minor">
+            <a:schemeClr val="lt1"/>
+          </a:fontRef>
+        </p:style>
+        <p:txBody>
+          <a:bodyPr rtlCol="0" anchor="ctr"/>
+          <a:lstStyle/>
+          <a:p>
+            <a:pPr algn="ctr"/>
+          </a:p>
+        </p:txBody>
+      </p:sp>
+      <p:sp>
+        <p:nvSpPr>
+          <p:cNvPr id="16" name="TextBox 15"/>
+          <p:cNvSpPr txBox="1"/>
+          <p:nvPr/>
+        </p:nvSpPr>
+        <p:spPr>
+          <a:xfrm>
+            <a:off x="914400" y="3703320"/>
+            <a:ext cx="3108960" cy="502920"/>
+          </a:xfrm>
+          <a:prstGeom prst="rect">
+            <a:avLst/>
+          </a:prstGeom>
+          <a:noFill/>
+        </p:spPr>
+        <p:txBody>
+          <a:bodyPr wrap="square">
+            <a:spAutoFit/>
+          </a:bodyPr>
+          <a:lstStyle/>
+          <a:p>
+            <a:pPr algn="l"/>
+            <a:r>
+              <a:rPr sz="1600" b="1">
+                <a:solidFill>
+                  <a:srgbClr val="B3995D"/>
+                </a:solidFill>
+                <a:latin typeface="Calibri"/>
+              </a:rPr>
+              <a:t>prompts/workflows/</a:t>
+            </a:r>
+          </a:p>
+        </p:txBody>
+      </p:sp>
+      <p:sp>
+        <p:nvSpPr>
+          <p:cNvPr id="17" name="TextBox 16"/>
+          <p:cNvSpPr txBox="1"/>
+          <p:nvPr/>
+        </p:nvSpPr>
+        <p:spPr>
+          <a:xfrm>
+            <a:off x="914400" y="4297680"/>
+            <a:ext cx="3108960" cy="640080"/>
+          </a:xfrm>
+          <a:prstGeom prst="rect">
+            <a:avLst/>
+          </a:prstGeom>
+          <a:noFill/>
+        </p:spPr>
+        <p:txBody>
+          <a:bodyPr wrap="square">
+            <a:spAutoFit/>
+          </a:bodyPr>
+          <a:lstStyle/>
+          <a:p>
+            <a:pPr algn="l"/>
+            <a:r>
+              <a:rPr sz="1600" b="0">
+                <a:solidFill>
+                  <a:srgbClr val="F4EBD0"/>
+                </a:solidFill>
+                <a:latin typeface="Calibri"/>
+              </a:rPr>
+              <a:t>The CoS jobs, ready to paste</a:t>
+            </a:r>
+          </a:p>
+        </p:txBody>
+      </p:sp>
+      <p:sp>
+        <p:nvSpPr>
+          <p:cNvPr id="18" name="Rectangle 17"/>
+          <p:cNvSpPr/>
+          <p:nvPr/>
+        </p:nvSpPr>
+        <p:spPr>
+          <a:xfrm>
+            <a:off x="4389120" y="3383280"/>
+            <a:ext cx="3474720" cy="1828800"/>
+          </a:xfrm>
+          <a:prstGeom prst="rect">
+            <a:avLst/>
+          </a:prstGeom>
+          <a:solidFill>
+            <a:srgbClr val="141414"/>
+          </a:solidFill>
+          <a:ln>
+            <a:noFill/>
+          </a:ln>
+        </p:spPr>
+        <p:style>
+          <a:lnRef idx="1">
+            <a:schemeClr val="accent1"/>
+          </a:lnRef>
+          <a:fillRef idx="3">
+            <a:schemeClr val="accent1"/>
+          </a:fillRef>
+          <a:effectRef idx="2">
+            <a:schemeClr val="accent1"/>
+          </a:effectRef>
+          <a:fontRef idx="minor">
+            <a:schemeClr val="lt1"/>
+          </a:fontRef>
+        </p:style>
+        <p:txBody>
+          <a:bodyPr rtlCol="0" anchor="ctr"/>
+          <a:lstStyle/>
+          <a:p>
+            <a:pPr algn="ctr"/>
+          </a:p>
+        </p:txBody>
+      </p:sp>
+      <p:sp>
+        <p:nvSpPr>
+          <p:cNvPr id="19" name="TextBox 18"/>
+          <p:cNvSpPr txBox="1"/>
+          <p:nvPr/>
+        </p:nvSpPr>
+        <p:spPr>
+          <a:xfrm>
+            <a:off x="4572000" y="3703320"/>
+            <a:ext cx="3108960" cy="502920"/>
+          </a:xfrm>
+          <a:prstGeom prst="rect">
+            <a:avLst/>
+          </a:prstGeom>
+          <a:noFill/>
+        </p:spPr>
+        <p:txBody>
+          <a:bodyPr wrap="square">
+            <a:spAutoFit/>
+          </a:bodyPr>
+          <a:lstStyle/>
+          <a:p>
+            <a:pPr algn="l"/>
+            <a:r>
+              <a:rPr sz="1600" b="1">
+                <a:solidFill>
+                  <a:srgbClr val="B3995D"/>
+                </a:solidFill>
+                <a:latin typeface="Calibri"/>
+              </a:rPr>
+              <a:t>context-templates/</a:t>
+            </a:r>
+          </a:p>
+        </p:txBody>
+      </p:sp>
+      <p:sp>
+        <p:nvSpPr>
+          <p:cNvPr id="20" name="TextBox 19"/>
+          <p:cNvSpPr txBox="1"/>
+          <p:nvPr/>
+        </p:nvSpPr>
+        <p:spPr>
+          <a:xfrm>
+            <a:off x="4572000" y="4297680"/>
+            <a:ext cx="3108960" cy="640080"/>
+          </a:xfrm>
+          <a:prstGeom prst="rect">
+            <a:avLst/>
+          </a:prstGeom>
+          <a:noFill/>
+        </p:spPr>
+        <p:txBody>
+          <a:bodyPr wrap="square">
+            <a:spAutoFit/>
+          </a:bodyPr>
+          <a:lstStyle/>
+          <a:p>
+            <a:pPr algn="l"/>
+            <a:r>
+              <a:rPr sz="1600" b="0">
+                <a:solidFill>
+                  <a:srgbClr val="F4EBD0"/>
+                </a:solidFill>
+                <a:latin typeface="Calibri"/>
+              </a:rPr>
+              <a:t>Blanks. Copy privately. Fill them.</a:t>
+            </a:r>
+          </a:p>
+        </p:txBody>
+      </p:sp>
+      <p:sp>
+        <p:nvSpPr>
+          <p:cNvPr id="21" name="Rectangle 20"/>
+          <p:cNvSpPr/>
+          <p:nvPr/>
+        </p:nvSpPr>
+        <p:spPr>
+          <a:xfrm>
+            <a:off x="8046720" y="3383280"/>
+            <a:ext cx="3474720" cy="1828800"/>
+          </a:xfrm>
+          <a:prstGeom prst="rect">
+            <a:avLst/>
+          </a:prstGeom>
+          <a:solidFill>
+            <a:srgbClr val="141414"/>
+          </a:solidFill>
+          <a:ln>
+            <a:noFill/>
+          </a:ln>
+        </p:spPr>
+        <p:style>
+          <a:lnRef idx="1">
+            <a:schemeClr val="accent1"/>
+          </a:lnRef>
+          <a:fillRef idx="3">
+            <a:schemeClr val="accent1"/>
+          </a:fillRef>
+          <a:effectRef idx="2">
+            <a:schemeClr val="accent1"/>
+          </a:effectRef>
+          <a:fontRef idx="minor">
+            <a:schemeClr val="lt1"/>
+          </a:fontRef>
+        </p:style>
+        <p:txBody>
+          <a:bodyPr rtlCol="0" anchor="ctr"/>
+          <a:lstStyle/>
+          <a:p>
+            <a:pPr algn="ctr"/>
+          </a:p>
+        </p:txBody>
+      </p:sp>
+      <p:sp>
+        <p:nvSpPr>
+          <p:cNvPr id="22" name="TextBox 21"/>
+          <p:cNvSpPr txBox="1"/>
+          <p:nvPr/>
+        </p:nvSpPr>
+        <p:spPr>
+          <a:xfrm>
+            <a:off x="8229600" y="3703320"/>
+            <a:ext cx="3108960" cy="502920"/>
+          </a:xfrm>
+          <a:prstGeom prst="rect">
+            <a:avLst/>
+          </a:prstGeom>
+          <a:noFill/>
+        </p:spPr>
+        <p:txBody>
+          <a:bodyPr wrap="square">
+            <a:spAutoFit/>
+          </a:bodyPr>
+          <a:lstStyle/>
+          <a:p>
+            <a:pPr algn="l"/>
+            <a:r>
+              <a:rPr sz="1600" b="1">
+                <a:solidFill>
+                  <a:srgbClr val="B3995D"/>
+                </a:solidFill>
+                <a:latin typeface="Calibri"/>
+              </a:rPr>
+              <a:t>how-to/</a:t>
+            </a:r>
+          </a:p>
+        </p:txBody>
+      </p:sp>
+      <p:sp>
+        <p:nvSpPr>
+          <p:cNvPr id="23" name="TextBox 22"/>
+          <p:cNvSpPr txBox="1"/>
+          <p:nvPr/>
+        </p:nvSpPr>
+        <p:spPr>
+          <a:xfrm>
+            <a:off x="8229600" y="4297680"/>
+            <a:ext cx="3108960" cy="640080"/>
+          </a:xfrm>
+          <a:prstGeom prst="rect">
+            <a:avLst/>
+          </a:prstGeom>
+          <a:noFill/>
+        </p:spPr>
+        <p:txBody>
+          <a:bodyPr wrap="square">
+            <a:spAutoFit/>
+          </a:bodyPr>
+          <a:lstStyle/>
+          <a:p>
+            <a:pPr algn="l"/>
+            <a:r>
+              <a:rPr sz="1600" b="0">
+                <a:solidFill>
+                  <a:srgbClr val="F4EBD0"/>
+                </a:solidFill>
+                <a:latin typeface="Calibri"/>
+              </a:rPr>
+              <a:t>Which box to paste into</a:t>
+            </a:r>
+          </a:p>
+        </p:txBody>
+      </p:sp>
+      <p:sp>
+        <p:nvSpPr>
+          <p:cNvPr id="24" name="TextBox 23"/>
+          <p:cNvSpPr txBox="1"/>
+          <p:nvPr/>
+        </p:nvSpPr>
+        <p:spPr>
+          <a:xfrm>
+            <a:off x="640080" y="6492240"/>
+            <a:ext cx="9144000" cy="274320"/>
+          </a:xfrm>
+          <a:prstGeom prst="rect">
+            <a:avLst/>
+          </a:prstGeom>
+          <a:noFill/>
+        </p:spPr>
+        <p:txBody>
+          <a:bodyPr wrap="square">
+            <a:spAutoFit/>
+          </a:bodyPr>
+          <a:lstStyle/>
+          <a:p>
+            <a:pPr algn="l"/>
+            <a:r>
+              <a:rPr sz="1100" b="0">
+                <a:solidFill>
+                  <a:srgbClr val="B8A888"/>
+                </a:solidFill>
+                <a:latin typeface="Calibri"/>
+              </a:rPr>
+              <a:t>Build your own chief of staff  ·  process, not a vendor</a:t>
+            </a:r>
+          </a:p>
+        </p:txBody>
+      </p:sp>
+      <p:sp>
+        <p:nvSpPr>
+          <p:cNvPr id="25" name="TextBox 24"/>
+          <p:cNvSpPr txBox="1"/>
+          <p:nvPr/>
+        </p:nvSpPr>
+        <p:spPr>
+          <a:xfrm>
+            <a:off x="10607040" y="6492240"/>
+            <a:ext cx="1097280" cy="274320"/>
+          </a:xfrm>
+          <a:prstGeom prst="rect">
+            <a:avLst/>
+          </a:prstGeom>
+          <a:noFill/>
+        </p:spPr>
+        <p:txBody>
+          <a:bodyPr wrap="square">
+            <a:spAutoFit/>
+          </a:bodyPr>
+          <a:lstStyle/>
+          <a:p>
             <a:pPr algn="r"/>
             <a:r>
               <a:rPr sz="1100" b="0">
@@ -8177,7 +8841,7 @@
                 </a:solidFill>
                 <a:latin typeface="Calibri"/>
               </a:rPr>
-              <a:t>13  /  23</a:t>
+              <a:t>13  /  24</a:t>
             </a:r>
           </a:p>
         </p:txBody>
@@ -8359,64 +9023,21 @@
                 </a:solidFill>
                 <a:latin typeface="Calibri"/>
               </a:rPr>
-              <a:t>Step 2 — Write the SOP</a:t>
-            </a:r>
-          </a:p>
-        </p:txBody>
-      </p:sp>
-      <p:sp>
-        <p:nvSpPr>
-          <p:cNvPr id="6" name="Rectangle 5"/>
-          <p:cNvSpPr/>
-          <p:nvPr/>
-        </p:nvSpPr>
-        <p:spPr>
-          <a:xfrm>
-            <a:off x="731520" y="1463040"/>
-            <a:ext cx="2651760" cy="2377440"/>
-          </a:xfrm>
-          <a:prstGeom prst="rect">
-            <a:avLst/>
-          </a:prstGeom>
-          <a:solidFill>
-            <a:srgbClr val="141414"/>
-          </a:solidFill>
-          <a:ln>
-            <a:noFill/>
-          </a:ln>
-        </p:spPr>
-        <p:style>
-          <a:lnRef idx="1">
-            <a:schemeClr val="accent1"/>
-          </a:lnRef>
-          <a:fillRef idx="3">
-            <a:schemeClr val="accent1"/>
-          </a:fillRef>
-          <a:effectRef idx="2">
-            <a:schemeClr val="accent1"/>
-          </a:effectRef>
-          <a:fontRef idx="minor">
-            <a:schemeClr val="lt1"/>
-          </a:fontRef>
-        </p:style>
-        <p:txBody>
-          <a:bodyPr rtlCol="0" anchor="ctr"/>
-          <a:lstStyle/>
-          <a:p>
-            <a:pPr algn="ctr"/>
-          </a:p>
-        </p:txBody>
-      </p:sp>
-      <p:sp>
-        <p:nvSpPr>
-          <p:cNvPr id="7" name="TextBox 6"/>
+              <a:t>Step 1 — Name one job</a:t>
+            </a:r>
+          </a:p>
+        </p:txBody>
+      </p:sp>
+      <p:sp>
+        <p:nvSpPr>
+          <p:cNvPr id="6" name="TextBox 5"/>
           <p:cNvSpPr txBox="1"/>
           <p:nvPr/>
         </p:nvSpPr>
         <p:spPr>
           <a:xfrm>
-            <a:off x="868680" y="1691640"/>
-            <a:ext cx="2377440" cy="548640"/>
+            <a:off x="731520" y="1371600"/>
+            <a:ext cx="10515600" cy="4389120"/>
           </a:xfrm>
           <a:prstGeom prst="rect">
             <a:avLst/>
@@ -8429,29 +9050,97 @@
           </a:bodyPr>
           <a:lstStyle/>
           <a:p>
-            <a:pPr algn="l"/>
-            <a:r>
-              <a:rPr sz="2000" b="1">
-                <a:solidFill>
-                  <a:srgbClr val="B3995D"/>
-                </a:solidFill>
-                <a:latin typeface="Calibri"/>
-              </a:rPr>
-              <a:t>Inputs</a:t>
-            </a:r>
-          </a:p>
-        </p:txBody>
-      </p:sp>
-      <p:sp>
-        <p:nvSpPr>
-          <p:cNvPr id="8" name="TextBox 7"/>
+            <a:pPr>
+              <a:spcAft>
+                <a:spcPts val="1400"/>
+              </a:spcAft>
+            </a:pPr>
+            <a:r>
+              <a:rPr sz="2200" b="0">
+                <a:solidFill>
+                  <a:srgbClr val="F4EBD0"/>
+                </a:solidFill>
+                <a:latin typeface="Calibri"/>
+              </a:rPr>
+              <a:t>•  Not “be more productive.” Not “be my chief of staff.”</a:t>
+            </a:r>
+          </a:p>
+          <a:p>
+            <a:pPr>
+              <a:spcAft>
+                <a:spcPts val="1400"/>
+              </a:spcAft>
+            </a:pPr>
+            <a:r>
+              <a:rPr sz="2200" b="0">
+                <a:solidFill>
+                  <a:srgbClr val="F4EBD0"/>
+                </a:solidFill>
+                <a:latin typeface="Calibri"/>
+              </a:rPr>
+              <a:t>•  A job you actually did last week, with a finished artifact.</a:t>
+            </a:r>
+          </a:p>
+          <a:p>
+            <a:pPr>
+              <a:spcAft>
+                <a:spcPts val="1400"/>
+              </a:spcAft>
+            </a:pPr>
+            <a:r>
+              <a:rPr sz="2200" b="0">
+                <a:solidFill>
+                  <a:srgbClr val="F4EBD0"/>
+                </a:solidFill>
+                <a:latin typeface="Calibri"/>
+              </a:rPr>
+              <a:t>•  Annoying enough that you will reuse the file.</a:t>
+            </a:r>
+          </a:p>
+          <a:p>
+            <a:pPr>
+              <a:spcAft>
+                <a:spcPts val="1400"/>
+              </a:spcAft>
+            </a:pPr>
+            <a:r>
+              <a:rPr sz="2200" b="0">
+                <a:solidFill>
+                  <a:srgbClr val="F4EBD0"/>
+                </a:solidFill>
+                <a:latin typeface="Calibri"/>
+              </a:rPr>
+              <a:t>•  Prefer a pain that has happened at least three times.</a:t>
+            </a:r>
+          </a:p>
+          <a:p>
+            <a:pPr>
+              <a:spcAft>
+                <a:spcPts val="1400"/>
+              </a:spcAft>
+            </a:pPr>
+            <a:r>
+              <a:rPr sz="2200" b="0">
+                <a:solidFill>
+                  <a:srgbClr val="F4EBD0"/>
+                </a:solidFill>
+                <a:latin typeface="Calibri"/>
+              </a:rPr>
+              <a:t>•  If you cannot point at examples, you do not have a first job yet.</a:t>
+            </a:r>
+          </a:p>
+        </p:txBody>
+      </p:sp>
+      <p:sp>
+        <p:nvSpPr>
+          <p:cNvPr id="7" name="TextBox 6"/>
           <p:cNvSpPr txBox="1"/>
           <p:nvPr/>
         </p:nvSpPr>
         <p:spPr>
           <a:xfrm>
-            <a:off x="868680" y="2286000"/>
-            <a:ext cx="2377440" cy="1280160"/>
+            <a:off x="640080" y="6492240"/>
+            <a:ext cx="9144000" cy="274320"/>
           </a:xfrm>
           <a:prstGeom prst="rect">
             <a:avLst/>
@@ -8466,70 +9155,27 @@
           <a:p>
             <a:pPr algn="l"/>
             <a:r>
-              <a:rPr sz="1600" b="0">
-                <a:solidFill>
-                  <a:srgbClr val="F4EBD0"/>
-                </a:solidFill>
-                <a:latin typeface="Calibri"/>
-              </a:rPr>
-              <a:t>What must be in front of you</a:t>
-            </a:r>
-          </a:p>
-        </p:txBody>
-      </p:sp>
-      <p:sp>
-        <p:nvSpPr>
-          <p:cNvPr id="9" name="Rectangle 8"/>
-          <p:cNvSpPr/>
-          <p:nvPr/>
-        </p:nvSpPr>
-        <p:spPr>
-          <a:xfrm>
-            <a:off x="3520439" y="1463040"/>
-            <a:ext cx="2651760" cy="2377440"/>
-          </a:xfrm>
-          <a:prstGeom prst="rect">
-            <a:avLst/>
-          </a:prstGeom>
-          <a:solidFill>
-            <a:srgbClr val="141414"/>
-          </a:solidFill>
-          <a:ln>
-            <a:noFill/>
-          </a:ln>
-        </p:spPr>
-        <p:style>
-          <a:lnRef idx="1">
-            <a:schemeClr val="accent1"/>
-          </a:lnRef>
-          <a:fillRef idx="3">
-            <a:schemeClr val="accent1"/>
-          </a:fillRef>
-          <a:effectRef idx="2">
-            <a:schemeClr val="accent1"/>
-          </a:effectRef>
-          <a:fontRef idx="minor">
-            <a:schemeClr val="lt1"/>
-          </a:fontRef>
-        </p:style>
-        <p:txBody>
-          <a:bodyPr rtlCol="0" anchor="ctr"/>
-          <a:lstStyle/>
-          <a:p>
-            <a:pPr algn="ctr"/>
-          </a:p>
-        </p:txBody>
-      </p:sp>
-      <p:sp>
-        <p:nvSpPr>
-          <p:cNvPr id="10" name="TextBox 9"/>
+              <a:rPr sz="1100" b="0">
+                <a:solidFill>
+                  <a:srgbClr val="B8A888"/>
+                </a:solidFill>
+                <a:latin typeface="Calibri"/>
+              </a:rPr>
+              <a:t>Build your own chief of staff  ·  process, not a vendor</a:t>
+            </a:r>
+          </a:p>
+        </p:txBody>
+      </p:sp>
+      <p:sp>
+        <p:nvSpPr>
+          <p:cNvPr id="8" name="TextBox 7"/>
           <p:cNvSpPr txBox="1"/>
           <p:nvPr/>
         </p:nvSpPr>
         <p:spPr>
           <a:xfrm>
-            <a:off x="3657599" y="1691640"/>
-            <a:ext cx="2377440" cy="548640"/>
+            <a:off x="10607040" y="6492240"/>
+            <a:ext cx="1097280" cy="274320"/>
           </a:xfrm>
           <a:prstGeom prst="rect">
             <a:avLst/>
@@ -8542,382 +9188,15 @@
           </a:bodyPr>
           <a:lstStyle/>
           <a:p>
-            <a:pPr algn="l"/>
-            <a:r>
-              <a:rPr sz="2000" b="1">
-                <a:solidFill>
-                  <a:srgbClr val="B3995D"/>
-                </a:solidFill>
-                <a:latin typeface="Calibri"/>
-              </a:rPr>
-              <a:t>Steps</a:t>
-            </a:r>
-          </a:p>
-        </p:txBody>
-      </p:sp>
-      <p:sp>
-        <p:nvSpPr>
-          <p:cNvPr id="11" name="TextBox 10"/>
-          <p:cNvSpPr txBox="1"/>
-          <p:nvPr/>
-        </p:nvSpPr>
-        <p:spPr>
-          <a:xfrm>
-            <a:off x="3657599" y="2286000"/>
-            <a:ext cx="2377440" cy="1280160"/>
-          </a:xfrm>
-          <a:prstGeom prst="rect">
-            <a:avLst/>
-          </a:prstGeom>
-          <a:noFill/>
-        </p:spPr>
-        <p:txBody>
-          <a:bodyPr wrap="square">
-            <a:spAutoFit/>
-          </a:bodyPr>
-          <a:lstStyle/>
-          <a:p>
-            <a:pPr algn="l"/>
-            <a:r>
-              <a:rPr sz="1600" b="0">
-                <a:solidFill>
-                  <a:srgbClr val="F4EBD0"/>
-                </a:solidFill>
-                <a:latin typeface="Calibri"/>
-              </a:rPr>
-              <a:t>The order you already use</a:t>
-            </a:r>
-          </a:p>
-        </p:txBody>
-      </p:sp>
-      <p:sp>
-        <p:nvSpPr>
-          <p:cNvPr id="12" name="Rectangle 11"/>
-          <p:cNvSpPr/>
-          <p:nvPr/>
-        </p:nvSpPr>
-        <p:spPr>
-          <a:xfrm>
-            <a:off x="6309359" y="1463040"/>
-            <a:ext cx="2651760" cy="2377440"/>
-          </a:xfrm>
-          <a:prstGeom prst="rect">
-            <a:avLst/>
-          </a:prstGeom>
-          <a:solidFill>
-            <a:srgbClr val="141414"/>
-          </a:solidFill>
-          <a:ln>
-            <a:noFill/>
-          </a:ln>
-        </p:spPr>
-        <p:style>
-          <a:lnRef idx="1">
-            <a:schemeClr val="accent1"/>
-          </a:lnRef>
-          <a:fillRef idx="3">
-            <a:schemeClr val="accent1"/>
-          </a:fillRef>
-          <a:effectRef idx="2">
-            <a:schemeClr val="accent1"/>
-          </a:effectRef>
-          <a:fontRef idx="minor">
-            <a:schemeClr val="lt1"/>
-          </a:fontRef>
-        </p:style>
-        <p:txBody>
-          <a:bodyPr rtlCol="0" anchor="ctr"/>
-          <a:lstStyle/>
-          <a:p>
-            <a:pPr algn="ctr"/>
-          </a:p>
-        </p:txBody>
-      </p:sp>
-      <p:sp>
-        <p:nvSpPr>
-          <p:cNvPr id="13" name="TextBox 12"/>
-          <p:cNvSpPr txBox="1"/>
-          <p:nvPr/>
-        </p:nvSpPr>
-        <p:spPr>
-          <a:xfrm>
-            <a:off x="6446519" y="1691640"/>
-            <a:ext cx="2377440" cy="548640"/>
-          </a:xfrm>
-          <a:prstGeom prst="rect">
-            <a:avLst/>
-          </a:prstGeom>
-          <a:noFill/>
-        </p:spPr>
-        <p:txBody>
-          <a:bodyPr wrap="square">
-            <a:spAutoFit/>
-          </a:bodyPr>
-          <a:lstStyle/>
-          <a:p>
-            <a:pPr algn="l"/>
-            <a:r>
-              <a:rPr sz="2000" b="1">
-                <a:solidFill>
-                  <a:srgbClr val="B3995D"/>
-                </a:solidFill>
-                <a:latin typeface="Calibri"/>
-              </a:rPr>
-              <a:t>Output</a:t>
-            </a:r>
-          </a:p>
-        </p:txBody>
-      </p:sp>
-      <p:sp>
-        <p:nvSpPr>
-          <p:cNvPr id="14" name="TextBox 13"/>
-          <p:cNvSpPr txBox="1"/>
-          <p:nvPr/>
-        </p:nvSpPr>
-        <p:spPr>
-          <a:xfrm>
-            <a:off x="6446519" y="2286000"/>
-            <a:ext cx="2377440" cy="1280160"/>
-          </a:xfrm>
-          <a:prstGeom prst="rect">
-            <a:avLst/>
-          </a:prstGeom>
-          <a:noFill/>
-        </p:spPr>
-        <p:txBody>
-          <a:bodyPr wrap="square">
-            <a:spAutoFit/>
-          </a:bodyPr>
-          <a:lstStyle/>
-          <a:p>
-            <a:pPr algn="l"/>
-            <a:r>
-              <a:rPr sz="1600" b="0">
-                <a:solidFill>
-                  <a:srgbClr val="F4EBD0"/>
-                </a:solidFill>
-                <a:latin typeface="Calibri"/>
-              </a:rPr>
-              <a:t>The shape of 'done'</a:t>
-            </a:r>
-          </a:p>
-        </p:txBody>
-      </p:sp>
-      <p:sp>
-        <p:nvSpPr>
-          <p:cNvPr id="15" name="Rectangle 14"/>
-          <p:cNvSpPr/>
-          <p:nvPr/>
-        </p:nvSpPr>
-        <p:spPr>
-          <a:xfrm>
-            <a:off x="9098280" y="1463040"/>
-            <a:ext cx="2651760" cy="2377440"/>
-          </a:xfrm>
-          <a:prstGeom prst="rect">
-            <a:avLst/>
-          </a:prstGeom>
-          <a:solidFill>
-            <a:srgbClr val="141414"/>
-          </a:solidFill>
-          <a:ln>
-            <a:noFill/>
-          </a:ln>
-        </p:spPr>
-        <p:style>
-          <a:lnRef idx="1">
-            <a:schemeClr val="accent1"/>
-          </a:lnRef>
-          <a:fillRef idx="3">
-            <a:schemeClr val="accent1"/>
-          </a:fillRef>
-          <a:effectRef idx="2">
-            <a:schemeClr val="accent1"/>
-          </a:effectRef>
-          <a:fontRef idx="minor">
-            <a:schemeClr val="lt1"/>
-          </a:fontRef>
-        </p:style>
-        <p:txBody>
-          <a:bodyPr rtlCol="0" anchor="ctr"/>
-          <a:lstStyle/>
-          <a:p>
-            <a:pPr algn="ctr"/>
-          </a:p>
-        </p:txBody>
-      </p:sp>
-      <p:sp>
-        <p:nvSpPr>
-          <p:cNvPr id="16" name="TextBox 15"/>
-          <p:cNvSpPr txBox="1"/>
-          <p:nvPr/>
-        </p:nvSpPr>
-        <p:spPr>
-          <a:xfrm>
-            <a:off x="9235440" y="1691640"/>
-            <a:ext cx="2377440" cy="548640"/>
-          </a:xfrm>
-          <a:prstGeom prst="rect">
-            <a:avLst/>
-          </a:prstGeom>
-          <a:noFill/>
-        </p:spPr>
-        <p:txBody>
-          <a:bodyPr wrap="square">
-            <a:spAutoFit/>
-          </a:bodyPr>
-          <a:lstStyle/>
-          <a:p>
-            <a:pPr algn="l"/>
-            <a:r>
-              <a:rPr sz="2000" b="1">
-                <a:solidFill>
-                  <a:srgbClr val="B3995D"/>
-                </a:solidFill>
-                <a:latin typeface="Calibri"/>
-              </a:rPr>
-              <a:t>Check</a:t>
-            </a:r>
-          </a:p>
-        </p:txBody>
-      </p:sp>
-      <p:sp>
-        <p:nvSpPr>
-          <p:cNvPr id="17" name="TextBox 16"/>
-          <p:cNvSpPr txBox="1"/>
-          <p:nvPr/>
-        </p:nvSpPr>
-        <p:spPr>
-          <a:xfrm>
-            <a:off x="9235440" y="2286000"/>
-            <a:ext cx="2377440" cy="1280160"/>
-          </a:xfrm>
-          <a:prstGeom prst="rect">
-            <a:avLst/>
-          </a:prstGeom>
-          <a:noFill/>
-        </p:spPr>
-        <p:txBody>
-          <a:bodyPr wrap="square">
-            <a:spAutoFit/>
-          </a:bodyPr>
-          <a:lstStyle/>
-          <a:p>
-            <a:pPr algn="l"/>
-            <a:r>
-              <a:rPr sz="1600" b="0">
-                <a:solidFill>
-                  <a:srgbClr val="F4EBD0"/>
-                </a:solidFill>
-                <a:latin typeface="Calibri"/>
-              </a:rPr>
-              <a:t>How you know it's right</a:t>
-            </a:r>
-          </a:p>
-        </p:txBody>
-      </p:sp>
-      <p:sp>
-        <p:nvSpPr>
-          <p:cNvPr id="18" name="TextBox 17"/>
-          <p:cNvSpPr txBox="1"/>
-          <p:nvPr/>
-        </p:nvSpPr>
-        <p:spPr>
-          <a:xfrm>
-            <a:off x="731520" y="4114800"/>
-            <a:ext cx="10515600" cy="1645920"/>
-          </a:xfrm>
-          <a:prstGeom prst="rect">
-            <a:avLst/>
-          </a:prstGeom>
-          <a:noFill/>
-        </p:spPr>
-        <p:txBody>
-          <a:bodyPr wrap="square">
-            <a:spAutoFit/>
-          </a:bodyPr>
-          <a:lstStyle/>
-          <a:p>
-            <a:pPr algn="l"/>
-            <a:r>
-              <a:rPr sz="1800" b="0">
+            <a:pPr algn="r"/>
+            <a:r>
+              <a:rPr sz="1100" b="0">
                 <a:solidFill>
                   <a:srgbClr val="B8A888"/>
                 </a:solidFill>
                 <a:latin typeface="Calibri"/>
               </a:rPr>
-              <a:t>Approvals sit where actions become hard to undo: send, pay, publish, delete.
-Score the spec: could a stranger run it? Is success binary? If not, it will create more work than it saves.</a:t>
-            </a:r>
-          </a:p>
-        </p:txBody>
-      </p:sp>
-      <p:sp>
-        <p:nvSpPr>
-          <p:cNvPr id="19" name="TextBox 18"/>
-          <p:cNvSpPr txBox="1"/>
-          <p:nvPr/>
-        </p:nvSpPr>
-        <p:spPr>
-          <a:xfrm>
-            <a:off x="640080" y="6492240"/>
-            <a:ext cx="9144000" cy="274320"/>
-          </a:xfrm>
-          <a:prstGeom prst="rect">
-            <a:avLst/>
-          </a:prstGeom>
-          <a:noFill/>
-        </p:spPr>
-        <p:txBody>
-          <a:bodyPr wrap="square">
-            <a:spAutoFit/>
-          </a:bodyPr>
-          <a:lstStyle/>
-          <a:p>
-            <a:pPr algn="l"/>
-            <a:r>
-              <a:rPr sz="1100" b="0">
-                <a:solidFill>
-                  <a:srgbClr val="B8A888"/>
-                </a:solidFill>
-                <a:latin typeface="Calibri"/>
-              </a:rPr>
-              <a:t>Build your own chief of staff  ·  process, not a vendor</a:t>
-            </a:r>
-          </a:p>
-        </p:txBody>
-      </p:sp>
-      <p:sp>
-        <p:nvSpPr>
-          <p:cNvPr id="20" name="TextBox 19"/>
-          <p:cNvSpPr txBox="1"/>
-          <p:nvPr/>
-        </p:nvSpPr>
-        <p:spPr>
-          <a:xfrm>
-            <a:off x="10607040" y="6492240"/>
-            <a:ext cx="1097280" cy="274320"/>
-          </a:xfrm>
-          <a:prstGeom prst="rect">
-            <a:avLst/>
-          </a:prstGeom>
-          <a:noFill/>
-        </p:spPr>
-        <p:txBody>
-          <a:bodyPr wrap="square">
-            <a:spAutoFit/>
-          </a:bodyPr>
-          <a:lstStyle/>
-          <a:p>
-            <a:pPr algn="r"/>
-            <a:r>
-              <a:rPr sz="1100" b="0">
-                <a:solidFill>
-                  <a:srgbClr val="B8A888"/>
-                </a:solidFill>
-                <a:latin typeface="Calibri"/>
-              </a:rPr>
-              <a:t>14  /  23</a:t>
+              <a:t>14  /  24</a:t>
             </a:r>
           </a:p>
         </p:txBody>
@@ -9099,7 +9378,7 @@
                 </a:solidFill>
                 <a:latin typeface="Calibri"/>
               </a:rPr>
-              <a:t>Step 3 — Put you in files you own</a:t>
+              <a:t>Step 2 — Write the SOP</a:t>
             </a:r>
           </a:p>
         </p:txBody>
@@ -9112,8 +9391,8 @@
         </p:nvSpPr>
         <p:spPr>
           <a:xfrm>
-            <a:off x="731520" y="1417320"/>
-            <a:ext cx="3474720" cy="1783080"/>
+            <a:off x="731520" y="1463040"/>
+            <a:ext cx="2651760" cy="2377440"/>
           </a:xfrm>
           <a:prstGeom prst="rect">
             <a:avLst/>
@@ -9155,8 +9434,8 @@
         </p:nvSpPr>
         <p:spPr>
           <a:xfrm>
-            <a:off x="914400" y="1737360"/>
-            <a:ext cx="3108960" cy="457200"/>
+            <a:off x="868680" y="1691640"/>
+            <a:ext cx="2377440" cy="548640"/>
           </a:xfrm>
           <a:prstGeom prst="rect">
             <a:avLst/>
@@ -9171,13 +9450,13 @@
           <a:p>
             <a:pPr algn="l"/>
             <a:r>
-              <a:rPr sz="1800" b="1">
+              <a:rPr sz="2000" b="1">
                 <a:solidFill>
                   <a:srgbClr val="B3995D"/>
                 </a:solidFill>
                 <a:latin typeface="Calibri"/>
               </a:rPr>
-              <a:t>who-i-am.md</a:t>
+              <a:t>Inputs</a:t>
             </a:r>
           </a:p>
         </p:txBody>
@@ -9190,8 +9469,8 @@
         </p:nvSpPr>
         <p:spPr>
           <a:xfrm>
-            <a:off x="914400" y="2286000"/>
-            <a:ext cx="3108960" cy="548640"/>
+            <a:off x="868680" y="2286000"/>
+            <a:ext cx="2377440" cy="1280160"/>
           </a:xfrm>
           <a:prstGeom prst="rect">
             <a:avLst/>
@@ -9212,7 +9491,7 @@
                 </a:solidFill>
                 <a:latin typeface="Calibri"/>
               </a:rPr>
-              <a:t>Role, who you answer to</a:t>
+              <a:t>What must be in front of you</a:t>
             </a:r>
           </a:p>
         </p:txBody>
@@ -9225,8 +9504,8 @@
         </p:nvSpPr>
         <p:spPr>
           <a:xfrm>
-            <a:off x="4389120" y="1417320"/>
-            <a:ext cx="3474720" cy="1783080"/>
+            <a:off x="3520439" y="1463040"/>
+            <a:ext cx="2651760" cy="2377440"/>
           </a:xfrm>
           <a:prstGeom prst="rect">
             <a:avLst/>
@@ -9268,8 +9547,8 @@
         </p:nvSpPr>
         <p:spPr>
           <a:xfrm>
-            <a:off x="4572000" y="1737360"/>
-            <a:ext cx="3108960" cy="457200"/>
+            <a:off x="3657599" y="1691640"/>
+            <a:ext cx="2377440" cy="548640"/>
           </a:xfrm>
           <a:prstGeom prst="rect">
             <a:avLst/>
@@ -9284,13 +9563,13 @@
           <a:p>
             <a:pPr algn="l"/>
             <a:r>
-              <a:rPr sz="1800" b="1">
+              <a:rPr sz="2000" b="1">
                 <a:solidFill>
                   <a:srgbClr val="B3995D"/>
                 </a:solidFill>
                 <a:latin typeface="Calibri"/>
               </a:rPr>
-              <a:t>priorities.md</a:t>
+              <a:t>Steps</a:t>
             </a:r>
           </a:p>
         </p:txBody>
@@ -9303,8 +9582,8 @@
         </p:nvSpPr>
         <p:spPr>
           <a:xfrm>
-            <a:off x="4572000" y="2286000"/>
-            <a:ext cx="3108960" cy="548640"/>
+            <a:off x="3657599" y="2286000"/>
+            <a:ext cx="2377440" cy="1280160"/>
           </a:xfrm>
           <a:prstGeom prst="rect">
             <a:avLst/>
@@ -9325,7 +9604,7 @@
                 </a:solidFill>
                 <a:latin typeface="Calibri"/>
               </a:rPr>
-              <a:t>This quarter, dated</a:t>
+              <a:t>The order you already use</a:t>
             </a:r>
           </a:p>
         </p:txBody>
@@ -9338,8 +9617,8 @@
         </p:nvSpPr>
         <p:spPr>
           <a:xfrm>
-            <a:off x="8046720" y="1417320"/>
-            <a:ext cx="3474720" cy="1783080"/>
+            <a:off x="6309359" y="1463040"/>
+            <a:ext cx="2651760" cy="2377440"/>
           </a:xfrm>
           <a:prstGeom prst="rect">
             <a:avLst/>
@@ -9381,8 +9660,8 @@
         </p:nvSpPr>
         <p:spPr>
           <a:xfrm>
-            <a:off x="8229600" y="1737360"/>
-            <a:ext cx="3108960" cy="457200"/>
+            <a:off x="6446519" y="1691640"/>
+            <a:ext cx="2377440" cy="548640"/>
           </a:xfrm>
           <a:prstGeom prst="rect">
             <a:avLst/>
@@ -9397,13 +9676,13 @@
           <a:p>
             <a:pPr algn="l"/>
             <a:r>
-              <a:rPr sz="1800" b="1">
+              <a:rPr sz="2000" b="1">
                 <a:solidFill>
                   <a:srgbClr val="B3995D"/>
                 </a:solidFill>
                 <a:latin typeface="Calibri"/>
               </a:rPr>
-              <a:t>people.md</a:t>
+              <a:t>Output</a:t>
             </a:r>
           </a:p>
         </p:txBody>
@@ -9416,8 +9695,8 @@
         </p:nvSpPr>
         <p:spPr>
           <a:xfrm>
-            <a:off x="8229600" y="2286000"/>
-            <a:ext cx="3108960" cy="548640"/>
+            <a:off x="6446519" y="2286000"/>
+            <a:ext cx="2377440" cy="1280160"/>
           </a:xfrm>
           <a:prstGeom prst="rect">
             <a:avLst/>
@@ -9438,7 +9717,7 @@
                 </a:solidFill>
                 <a:latin typeface="Calibri"/>
               </a:rPr>
-              <a:t>Who changes your week</a:t>
+              <a:t>The shape of 'done'</a:t>
             </a:r>
           </a:p>
         </p:txBody>
@@ -9451,8 +9730,8 @@
         </p:nvSpPr>
         <p:spPr>
           <a:xfrm>
-            <a:off x="731520" y="3383280"/>
-            <a:ext cx="3474720" cy="1783080"/>
+            <a:off x="9098280" y="1463040"/>
+            <a:ext cx="2651760" cy="2377440"/>
           </a:xfrm>
           <a:prstGeom prst="rect">
             <a:avLst/>
@@ -9494,8 +9773,8 @@
         </p:nvSpPr>
         <p:spPr>
           <a:xfrm>
-            <a:off x="914400" y="3703320"/>
-            <a:ext cx="3108960" cy="457200"/>
+            <a:off x="9235440" y="1691640"/>
+            <a:ext cx="2377440" cy="548640"/>
           </a:xfrm>
           <a:prstGeom prst="rect">
             <a:avLst/>
@@ -9510,13 +9789,13 @@
           <a:p>
             <a:pPr algn="l"/>
             <a:r>
-              <a:rPr sz="1800" b="1">
+              <a:rPr sz="2000" b="1">
                 <a:solidFill>
                   <a:srgbClr val="B3995D"/>
                 </a:solidFill>
                 <a:latin typeface="Calibri"/>
               </a:rPr>
-              <a:t>voice.md</a:t>
+              <a:t>Check</a:t>
             </a:r>
           </a:p>
         </p:txBody>
@@ -9529,8 +9808,8 @@
         </p:nvSpPr>
         <p:spPr>
           <a:xfrm>
-            <a:off x="914400" y="4251960"/>
-            <a:ext cx="3108960" cy="548640"/>
+            <a:off x="9235440" y="2286000"/>
+            <a:ext cx="2377440" cy="1280160"/>
           </a:xfrm>
           <a:prstGeom prst="rect">
             <a:avLst/>
@@ -9551,64 +9830,21 @@
                 </a:solidFill>
                 <a:latin typeface="Calibri"/>
               </a:rPr>
-              <a:t>How you actually write</a:t>
-            </a:r>
-          </a:p>
-        </p:txBody>
-      </p:sp>
-      <p:sp>
-        <p:nvSpPr>
-          <p:cNvPr id="18" name="Rectangle 17"/>
-          <p:cNvSpPr/>
-          <p:nvPr/>
-        </p:nvSpPr>
-        <p:spPr>
-          <a:xfrm>
-            <a:off x="4389120" y="3383280"/>
-            <a:ext cx="3474720" cy="1783080"/>
-          </a:xfrm>
-          <a:prstGeom prst="rect">
-            <a:avLst/>
-          </a:prstGeom>
-          <a:solidFill>
-            <a:srgbClr val="141414"/>
-          </a:solidFill>
-          <a:ln>
-            <a:noFill/>
-          </a:ln>
-        </p:spPr>
-        <p:style>
-          <a:lnRef idx="1">
-            <a:schemeClr val="accent1"/>
-          </a:lnRef>
-          <a:fillRef idx="3">
-            <a:schemeClr val="accent1"/>
-          </a:fillRef>
-          <a:effectRef idx="2">
-            <a:schemeClr val="accent1"/>
-          </a:effectRef>
-          <a:fontRef idx="minor">
-            <a:schemeClr val="lt1"/>
-          </a:fontRef>
-        </p:style>
-        <p:txBody>
-          <a:bodyPr rtlCol="0" anchor="ctr"/>
-          <a:lstStyle/>
-          <a:p>
-            <a:pPr algn="ctr"/>
-          </a:p>
-        </p:txBody>
-      </p:sp>
-      <p:sp>
-        <p:nvSpPr>
-          <p:cNvPr id="19" name="TextBox 18"/>
+              <a:t>How you know it's right</a:t>
+            </a:r>
+          </a:p>
+        </p:txBody>
+      </p:sp>
+      <p:sp>
+        <p:nvSpPr>
+          <p:cNvPr id="18" name="TextBox 17"/>
           <p:cNvSpPr txBox="1"/>
           <p:nvPr/>
         </p:nvSpPr>
         <p:spPr>
           <a:xfrm>
-            <a:off x="4572000" y="3703320"/>
-            <a:ext cx="3108960" cy="457200"/>
+            <a:off x="731520" y="4114800"/>
+            <a:ext cx="10515600" cy="1645920"/>
           </a:xfrm>
           <a:prstGeom prst="rect">
             <a:avLst/>
@@ -9623,27 +9859,28 @@
           <a:p>
             <a:pPr algn="l"/>
             <a:r>
-              <a:rPr sz="1800" b="1">
-                <a:solidFill>
-                  <a:srgbClr val="B3995D"/>
-                </a:solidFill>
-                <a:latin typeface="Calibri"/>
-              </a:rPr>
-              <a:t>open-loops.md</a:t>
-            </a:r>
-          </a:p>
-        </p:txBody>
-      </p:sp>
-      <p:sp>
-        <p:nvSpPr>
-          <p:cNvPr id="20" name="TextBox 19"/>
+              <a:rPr sz="1800" b="0">
+                <a:solidFill>
+                  <a:srgbClr val="B8A888"/>
+                </a:solidFill>
+                <a:latin typeface="Calibri"/>
+              </a:rPr>
+              <a:t>Approvals sit where actions become hard to undo: send, pay, publish, delete.
+Score the spec: could a stranger run it? Is success binary? If not, it will create more work than it saves.</a:t>
+            </a:r>
+          </a:p>
+        </p:txBody>
+      </p:sp>
+      <p:sp>
+        <p:nvSpPr>
+          <p:cNvPr id="19" name="TextBox 18"/>
           <p:cNvSpPr txBox="1"/>
           <p:nvPr/>
         </p:nvSpPr>
         <p:spPr>
           <a:xfrm>
-            <a:off x="4572000" y="4251960"/>
-            <a:ext cx="3108960" cy="548640"/>
+            <a:off x="640080" y="6492240"/>
+            <a:ext cx="9144000" cy="274320"/>
           </a:xfrm>
           <a:prstGeom prst="rect">
             <a:avLst/>
@@ -9658,70 +9895,27 @@
           <a:p>
             <a:pPr algn="l"/>
             <a:r>
-              <a:rPr sz="1600" b="0">
-                <a:solidFill>
-                  <a:srgbClr val="F4EBD0"/>
-                </a:solidFill>
-                <a:latin typeface="Calibri"/>
-              </a:rPr>
-              <a:t>What is still open</a:t>
-            </a:r>
-          </a:p>
-        </p:txBody>
-      </p:sp>
-      <p:sp>
-        <p:nvSpPr>
-          <p:cNvPr id="21" name="Rectangle 20"/>
-          <p:cNvSpPr/>
-          <p:nvPr/>
-        </p:nvSpPr>
-        <p:spPr>
-          <a:xfrm>
-            <a:off x="8046720" y="3383280"/>
-            <a:ext cx="3474720" cy="1783080"/>
-          </a:xfrm>
-          <a:prstGeom prst="rect">
-            <a:avLst/>
-          </a:prstGeom>
-          <a:solidFill>
-            <a:srgbClr val="141414"/>
-          </a:solidFill>
-          <a:ln>
-            <a:noFill/>
-          </a:ln>
-        </p:spPr>
-        <p:style>
-          <a:lnRef idx="1">
-            <a:schemeClr val="accent1"/>
-          </a:lnRef>
-          <a:fillRef idx="3">
-            <a:schemeClr val="accent1"/>
-          </a:fillRef>
-          <a:effectRef idx="2">
-            <a:schemeClr val="accent1"/>
-          </a:effectRef>
-          <a:fontRef idx="minor">
-            <a:schemeClr val="lt1"/>
-          </a:fontRef>
-        </p:style>
-        <p:txBody>
-          <a:bodyPr rtlCol="0" anchor="ctr"/>
-          <a:lstStyle/>
-          <a:p>
-            <a:pPr algn="ctr"/>
-          </a:p>
-        </p:txBody>
-      </p:sp>
-      <p:sp>
-        <p:nvSpPr>
-          <p:cNvPr id="22" name="TextBox 21"/>
+              <a:rPr sz="1100" b="0">
+                <a:solidFill>
+                  <a:srgbClr val="B8A888"/>
+                </a:solidFill>
+                <a:latin typeface="Calibri"/>
+              </a:rPr>
+              <a:t>Build your own chief of staff  ·  process, not a vendor</a:t>
+            </a:r>
+          </a:p>
+        </p:txBody>
+      </p:sp>
+      <p:sp>
+        <p:nvSpPr>
+          <p:cNvPr id="20" name="TextBox 19"/>
           <p:cNvSpPr txBox="1"/>
           <p:nvPr/>
         </p:nvSpPr>
         <p:spPr>
           <a:xfrm>
-            <a:off x="8229600" y="3703320"/>
-            <a:ext cx="3108960" cy="457200"/>
+            <a:off x="10607040" y="6492240"/>
+            <a:ext cx="1097280" cy="274320"/>
           </a:xfrm>
           <a:prstGeom prst="rect">
             <a:avLst/>
@@ -9734,77 +9928,7 @@
           </a:bodyPr>
           <a:lstStyle/>
           <a:p>
-            <a:pPr algn="l"/>
-            <a:r>
-              <a:rPr sz="1800" b="1">
-                <a:solidFill>
-                  <a:srgbClr val="B3995D"/>
-                </a:solidFill>
-                <a:latin typeface="Calibri"/>
-              </a:rPr>
-              <a:t>decisions.md</a:t>
-            </a:r>
-          </a:p>
-        </p:txBody>
-      </p:sp>
-      <p:sp>
-        <p:nvSpPr>
-          <p:cNvPr id="23" name="TextBox 22"/>
-          <p:cNvSpPr txBox="1"/>
-          <p:nvPr/>
-        </p:nvSpPr>
-        <p:spPr>
-          <a:xfrm>
-            <a:off x="8229600" y="4251960"/>
-            <a:ext cx="3108960" cy="548640"/>
-          </a:xfrm>
-          <a:prstGeom prst="rect">
-            <a:avLst/>
-          </a:prstGeom>
-          <a:noFill/>
-        </p:spPr>
-        <p:txBody>
-          <a:bodyPr wrap="square">
-            <a:spAutoFit/>
-          </a:bodyPr>
-          <a:lstStyle/>
-          <a:p>
-            <a:pPr algn="l"/>
-            <a:r>
-              <a:rPr sz="1600" b="0">
-                <a:solidFill>
-                  <a:srgbClr val="F4EBD0"/>
-                </a:solidFill>
-                <a:latin typeface="Calibri"/>
-              </a:rPr>
-              <a:t>What you already settled</a:t>
-            </a:r>
-          </a:p>
-        </p:txBody>
-      </p:sp>
-      <p:sp>
-        <p:nvSpPr>
-          <p:cNvPr id="24" name="TextBox 23"/>
-          <p:cNvSpPr txBox="1"/>
-          <p:nvPr/>
-        </p:nvSpPr>
-        <p:spPr>
-          <a:xfrm>
-            <a:off x="640080" y="6492240"/>
-            <a:ext cx="9144000" cy="274320"/>
-          </a:xfrm>
-          <a:prstGeom prst="rect">
-            <a:avLst/>
-          </a:prstGeom>
-          <a:noFill/>
-        </p:spPr>
-        <p:txBody>
-          <a:bodyPr wrap="square">
-            <a:spAutoFit/>
-          </a:bodyPr>
-          <a:lstStyle/>
-          <a:p>
-            <a:pPr algn="l"/>
+            <a:pPr algn="r"/>
             <a:r>
               <a:rPr sz="1100" b="0">
                 <a:solidFill>
@@ -9812,42 +9936,7 @@
                 </a:solidFill>
                 <a:latin typeface="Calibri"/>
               </a:rPr>
-              <a:t>Build your own chief of staff  ·  process, not a vendor</a:t>
-            </a:r>
-          </a:p>
-        </p:txBody>
-      </p:sp>
-      <p:sp>
-        <p:nvSpPr>
-          <p:cNvPr id="25" name="TextBox 24"/>
-          <p:cNvSpPr txBox="1"/>
-          <p:nvPr/>
-        </p:nvSpPr>
-        <p:spPr>
-          <a:xfrm>
-            <a:off x="10607040" y="6492240"/>
-            <a:ext cx="1097280" cy="274320"/>
-          </a:xfrm>
-          <a:prstGeom prst="rect">
-            <a:avLst/>
-          </a:prstGeom>
-          <a:noFill/>
-        </p:spPr>
-        <p:txBody>
-          <a:bodyPr wrap="square">
-            <a:spAutoFit/>
-          </a:bodyPr>
-          <a:lstStyle/>
-          <a:p>
-            <a:pPr algn="r"/>
-            <a:r>
-              <a:rPr sz="1100" b="0">
-                <a:solidFill>
-                  <a:srgbClr val="B8A888"/>
-                </a:solidFill>
-                <a:latin typeface="Calibri"/>
-              </a:rPr>
-              <a:t>15  /  23</a:t>
+              <a:t>15  /  24</a:t>
             </a:r>
           </a:p>
         </p:txBody>
@@ -10007,8 +10096,8 @@
         </p:nvSpPr>
         <p:spPr>
           <a:xfrm>
-            <a:off x="731520" y="1645920"/>
-            <a:ext cx="10515600" cy="1097280"/>
+            <a:off x="731520" y="411480"/>
+            <a:ext cx="10058400" cy="731520"/>
           </a:xfrm>
           <a:prstGeom prst="rect">
             <a:avLst/>
@@ -10021,29 +10110,72 @@
           </a:bodyPr>
           <a:lstStyle/>
           <a:p>
+            <a:pPr algn="l"/>
+            <a:r>
+              <a:rPr sz="3200" b="1">
+                <a:solidFill>
+                  <a:srgbClr val="F4EBD0"/>
+                </a:solidFill>
+                <a:latin typeface="Calibri"/>
+              </a:rPr>
+              <a:t>Step 3 — Put you in files you own</a:t>
+            </a:r>
+          </a:p>
+        </p:txBody>
+      </p:sp>
+      <p:sp>
+        <p:nvSpPr>
+          <p:cNvPr id="6" name="Rectangle 5"/>
+          <p:cNvSpPr/>
+          <p:nvPr/>
+        </p:nvSpPr>
+        <p:spPr>
+          <a:xfrm>
+            <a:off x="731520" y="1325880"/>
+            <a:ext cx="2651760" cy="1783080"/>
+          </a:xfrm>
+          <a:prstGeom prst="rect">
+            <a:avLst/>
+          </a:prstGeom>
+          <a:solidFill>
+            <a:srgbClr val="141414"/>
+          </a:solidFill>
+          <a:ln>
+            <a:noFill/>
+          </a:ln>
+        </p:spPr>
+        <p:style>
+          <a:lnRef idx="1">
+            <a:schemeClr val="accent1"/>
+          </a:lnRef>
+          <a:fillRef idx="3">
+            <a:schemeClr val="accent1"/>
+          </a:fillRef>
+          <a:effectRef idx="2">
+            <a:schemeClr val="accent1"/>
+          </a:effectRef>
+          <a:fontRef idx="minor">
+            <a:schemeClr val="lt1"/>
+          </a:fontRef>
+        </p:style>
+        <p:txBody>
+          <a:bodyPr rtlCol="0" anchor="ctr"/>
+          <a:lstStyle/>
+          <a:p>
             <a:pPr algn="ctr"/>
-            <a:r>
-              <a:rPr sz="3600" b="1">
-                <a:solidFill>
-                  <a:srgbClr val="B3995D"/>
-                </a:solidFill>
-                <a:latin typeface="Calibri"/>
-              </a:rPr>
-              <a:t>The prompt file is the process.</a:t>
-            </a:r>
-          </a:p>
-        </p:txBody>
-      </p:sp>
-      <p:sp>
-        <p:nvSpPr>
-          <p:cNvPr id="6" name="TextBox 5"/>
+          </a:p>
+        </p:txBody>
+      </p:sp>
+      <p:sp>
+        <p:nvSpPr>
+          <p:cNvPr id="7" name="TextBox 6"/>
           <p:cNvSpPr txBox="1"/>
           <p:nvPr/>
         </p:nvSpPr>
         <p:spPr>
           <a:xfrm>
-            <a:off x="1280160" y="3017520"/>
-            <a:ext cx="9601200" cy="2011680"/>
+            <a:off x="868680" y="1600200"/>
+            <a:ext cx="2377440" cy="502920"/>
           </a:xfrm>
           <a:prstGeom prst="rect">
             <a:avLst/>
@@ -10056,31 +10188,29 @@
           </a:bodyPr>
           <a:lstStyle/>
           <a:p>
-            <a:pPr algn="ctr"/>
-            <a:r>
-              <a:rPr sz="2200" b="0">
-                <a:solidFill>
-                  <a:srgbClr val="F4EBD0"/>
-                </a:solidFill>
-                <a:latin typeface="Calibri"/>
-              </a:rPr>
-              <a:t>You do not re-explain yourself in chat.
-If the output is wrong, the file is wrong.
-Installing a skill proves the files arrived. Only a real job proves they fit.</a:t>
-            </a:r>
-          </a:p>
-        </p:txBody>
-      </p:sp>
-      <p:sp>
-        <p:nvSpPr>
-          <p:cNvPr id="7" name="TextBox 6"/>
+            <a:pPr algn="l"/>
+            <a:r>
+              <a:rPr sz="1600" b="1">
+                <a:solidFill>
+                  <a:srgbClr val="B3995D"/>
+                </a:solidFill>
+                <a:latin typeface="Calibri"/>
+              </a:rPr>
+              <a:t>who-i-am.md</a:t>
+            </a:r>
+          </a:p>
+        </p:txBody>
+      </p:sp>
+      <p:sp>
+        <p:nvSpPr>
+          <p:cNvPr id="8" name="TextBox 7"/>
           <p:cNvSpPr txBox="1"/>
           <p:nvPr/>
         </p:nvSpPr>
         <p:spPr>
           <a:xfrm>
-            <a:off x="640080" y="6492240"/>
-            <a:ext cx="9144000" cy="274320"/>
+            <a:off x="868680" y="2194560"/>
+            <a:ext cx="2377440" cy="640080"/>
           </a:xfrm>
           <a:prstGeom prst="rect">
             <a:avLst/>
@@ -10095,27 +10225,70 @@
           <a:p>
             <a:pPr algn="l"/>
             <a:r>
-              <a:rPr sz="1100" b="0">
-                <a:solidFill>
-                  <a:srgbClr val="B8A888"/>
-                </a:solidFill>
-                <a:latin typeface="Calibri"/>
-              </a:rPr>
-              <a:t>Build your own chief of staff  ·  process, not a vendor</a:t>
-            </a:r>
-          </a:p>
-        </p:txBody>
-      </p:sp>
-      <p:sp>
-        <p:nvSpPr>
-          <p:cNvPr id="8" name="TextBox 7"/>
+              <a:rPr sz="1500" b="0">
+                <a:solidFill>
+                  <a:srgbClr val="F4EBD0"/>
+                </a:solidFill>
+                <a:latin typeface="Calibri"/>
+              </a:rPr>
+              <a:t>Role, who you answer to</a:t>
+            </a:r>
+          </a:p>
+        </p:txBody>
+      </p:sp>
+      <p:sp>
+        <p:nvSpPr>
+          <p:cNvPr id="9" name="Rectangle 8"/>
+          <p:cNvSpPr/>
+          <p:nvPr/>
+        </p:nvSpPr>
+        <p:spPr>
+          <a:xfrm>
+            <a:off x="3520439" y="1325880"/>
+            <a:ext cx="2651760" cy="1783080"/>
+          </a:xfrm>
+          <a:prstGeom prst="rect">
+            <a:avLst/>
+          </a:prstGeom>
+          <a:solidFill>
+            <a:srgbClr val="141414"/>
+          </a:solidFill>
+          <a:ln>
+            <a:noFill/>
+          </a:ln>
+        </p:spPr>
+        <p:style>
+          <a:lnRef idx="1">
+            <a:schemeClr val="accent1"/>
+          </a:lnRef>
+          <a:fillRef idx="3">
+            <a:schemeClr val="accent1"/>
+          </a:fillRef>
+          <a:effectRef idx="2">
+            <a:schemeClr val="accent1"/>
+          </a:effectRef>
+          <a:fontRef idx="minor">
+            <a:schemeClr val="lt1"/>
+          </a:fontRef>
+        </p:style>
+        <p:txBody>
+          <a:bodyPr rtlCol="0" anchor="ctr"/>
+          <a:lstStyle/>
+          <a:p>
+            <a:pPr algn="ctr"/>
+          </a:p>
+        </p:txBody>
+      </p:sp>
+      <p:sp>
+        <p:nvSpPr>
+          <p:cNvPr id="10" name="TextBox 9"/>
           <p:cNvSpPr txBox="1"/>
           <p:nvPr/>
         </p:nvSpPr>
         <p:spPr>
           <a:xfrm>
-            <a:off x="10607040" y="6492240"/>
-            <a:ext cx="1097280" cy="274320"/>
+            <a:off x="3657599" y="1600200"/>
+            <a:ext cx="2377440" cy="502920"/>
           </a:xfrm>
           <a:prstGeom prst="rect">
             <a:avLst/>
@@ -10128,6 +10301,676 @@
           </a:bodyPr>
           <a:lstStyle/>
           <a:p>
+            <a:pPr algn="l"/>
+            <a:r>
+              <a:rPr sz="1600" b="1">
+                <a:solidFill>
+                  <a:srgbClr val="B3995D"/>
+                </a:solidFill>
+                <a:latin typeface="Calibri"/>
+              </a:rPr>
+              <a:t>priorities.md</a:t>
+            </a:r>
+          </a:p>
+        </p:txBody>
+      </p:sp>
+      <p:sp>
+        <p:nvSpPr>
+          <p:cNvPr id="11" name="TextBox 10"/>
+          <p:cNvSpPr txBox="1"/>
+          <p:nvPr/>
+        </p:nvSpPr>
+        <p:spPr>
+          <a:xfrm>
+            <a:off x="3657599" y="2194560"/>
+            <a:ext cx="2377440" cy="640080"/>
+          </a:xfrm>
+          <a:prstGeom prst="rect">
+            <a:avLst/>
+          </a:prstGeom>
+          <a:noFill/>
+        </p:spPr>
+        <p:txBody>
+          <a:bodyPr wrap="square">
+            <a:spAutoFit/>
+          </a:bodyPr>
+          <a:lstStyle/>
+          <a:p>
+            <a:pPr algn="l"/>
+            <a:r>
+              <a:rPr sz="1500" b="0">
+                <a:solidFill>
+                  <a:srgbClr val="F4EBD0"/>
+                </a:solidFill>
+                <a:latin typeface="Calibri"/>
+              </a:rPr>
+              <a:t>This quarter, dated</a:t>
+            </a:r>
+          </a:p>
+        </p:txBody>
+      </p:sp>
+      <p:sp>
+        <p:nvSpPr>
+          <p:cNvPr id="12" name="Rectangle 11"/>
+          <p:cNvSpPr/>
+          <p:nvPr/>
+        </p:nvSpPr>
+        <p:spPr>
+          <a:xfrm>
+            <a:off x="6309359" y="1325880"/>
+            <a:ext cx="2651760" cy="1783080"/>
+          </a:xfrm>
+          <a:prstGeom prst="rect">
+            <a:avLst/>
+          </a:prstGeom>
+          <a:solidFill>
+            <a:srgbClr val="141414"/>
+          </a:solidFill>
+          <a:ln>
+            <a:noFill/>
+          </a:ln>
+        </p:spPr>
+        <p:style>
+          <a:lnRef idx="1">
+            <a:schemeClr val="accent1"/>
+          </a:lnRef>
+          <a:fillRef idx="3">
+            <a:schemeClr val="accent1"/>
+          </a:fillRef>
+          <a:effectRef idx="2">
+            <a:schemeClr val="accent1"/>
+          </a:effectRef>
+          <a:fontRef idx="minor">
+            <a:schemeClr val="lt1"/>
+          </a:fontRef>
+        </p:style>
+        <p:txBody>
+          <a:bodyPr rtlCol="0" anchor="ctr"/>
+          <a:lstStyle/>
+          <a:p>
+            <a:pPr algn="ctr"/>
+          </a:p>
+        </p:txBody>
+      </p:sp>
+      <p:sp>
+        <p:nvSpPr>
+          <p:cNvPr id="13" name="TextBox 12"/>
+          <p:cNvSpPr txBox="1"/>
+          <p:nvPr/>
+        </p:nvSpPr>
+        <p:spPr>
+          <a:xfrm>
+            <a:off x="6446519" y="1600200"/>
+            <a:ext cx="2377440" cy="502920"/>
+          </a:xfrm>
+          <a:prstGeom prst="rect">
+            <a:avLst/>
+          </a:prstGeom>
+          <a:noFill/>
+        </p:spPr>
+        <p:txBody>
+          <a:bodyPr wrap="square">
+            <a:spAutoFit/>
+          </a:bodyPr>
+          <a:lstStyle/>
+          <a:p>
+            <a:pPr algn="l"/>
+            <a:r>
+              <a:rPr sz="1600" b="1">
+                <a:solidFill>
+                  <a:srgbClr val="B3995D"/>
+                </a:solidFill>
+                <a:latin typeface="Calibri"/>
+              </a:rPr>
+              <a:t>people.md</a:t>
+            </a:r>
+          </a:p>
+        </p:txBody>
+      </p:sp>
+      <p:sp>
+        <p:nvSpPr>
+          <p:cNvPr id="14" name="TextBox 13"/>
+          <p:cNvSpPr txBox="1"/>
+          <p:nvPr/>
+        </p:nvSpPr>
+        <p:spPr>
+          <a:xfrm>
+            <a:off x="6446519" y="2194560"/>
+            <a:ext cx="2377440" cy="640080"/>
+          </a:xfrm>
+          <a:prstGeom prst="rect">
+            <a:avLst/>
+          </a:prstGeom>
+          <a:noFill/>
+        </p:spPr>
+        <p:txBody>
+          <a:bodyPr wrap="square">
+            <a:spAutoFit/>
+          </a:bodyPr>
+          <a:lstStyle/>
+          <a:p>
+            <a:pPr algn="l"/>
+            <a:r>
+              <a:rPr sz="1500" b="0">
+                <a:solidFill>
+                  <a:srgbClr val="F4EBD0"/>
+                </a:solidFill>
+                <a:latin typeface="Calibri"/>
+              </a:rPr>
+              <a:t>Who changes your week</a:t>
+            </a:r>
+          </a:p>
+        </p:txBody>
+      </p:sp>
+      <p:sp>
+        <p:nvSpPr>
+          <p:cNvPr id="15" name="Rectangle 14"/>
+          <p:cNvSpPr/>
+          <p:nvPr/>
+        </p:nvSpPr>
+        <p:spPr>
+          <a:xfrm>
+            <a:off x="9098280" y="1325880"/>
+            <a:ext cx="2651760" cy="1783080"/>
+          </a:xfrm>
+          <a:prstGeom prst="rect">
+            <a:avLst/>
+          </a:prstGeom>
+          <a:solidFill>
+            <a:srgbClr val="141414"/>
+          </a:solidFill>
+          <a:ln>
+            <a:noFill/>
+          </a:ln>
+        </p:spPr>
+        <p:style>
+          <a:lnRef idx="1">
+            <a:schemeClr val="accent1"/>
+          </a:lnRef>
+          <a:fillRef idx="3">
+            <a:schemeClr val="accent1"/>
+          </a:fillRef>
+          <a:effectRef idx="2">
+            <a:schemeClr val="accent1"/>
+          </a:effectRef>
+          <a:fontRef idx="minor">
+            <a:schemeClr val="lt1"/>
+          </a:fontRef>
+        </p:style>
+        <p:txBody>
+          <a:bodyPr rtlCol="0" anchor="ctr"/>
+          <a:lstStyle/>
+          <a:p>
+            <a:pPr algn="ctr"/>
+          </a:p>
+        </p:txBody>
+      </p:sp>
+      <p:sp>
+        <p:nvSpPr>
+          <p:cNvPr id="16" name="TextBox 15"/>
+          <p:cNvSpPr txBox="1"/>
+          <p:nvPr/>
+        </p:nvSpPr>
+        <p:spPr>
+          <a:xfrm>
+            <a:off x="9235440" y="1600200"/>
+            <a:ext cx="2377440" cy="502920"/>
+          </a:xfrm>
+          <a:prstGeom prst="rect">
+            <a:avLst/>
+          </a:prstGeom>
+          <a:noFill/>
+        </p:spPr>
+        <p:txBody>
+          <a:bodyPr wrap="square">
+            <a:spAutoFit/>
+          </a:bodyPr>
+          <a:lstStyle/>
+          <a:p>
+            <a:pPr algn="l"/>
+            <a:r>
+              <a:rPr sz="1600" b="1">
+                <a:solidFill>
+                  <a:srgbClr val="B3995D"/>
+                </a:solidFill>
+                <a:latin typeface="Calibri"/>
+              </a:rPr>
+              <a:t>voice.md</a:t>
+            </a:r>
+          </a:p>
+        </p:txBody>
+      </p:sp>
+      <p:sp>
+        <p:nvSpPr>
+          <p:cNvPr id="17" name="TextBox 16"/>
+          <p:cNvSpPr txBox="1"/>
+          <p:nvPr/>
+        </p:nvSpPr>
+        <p:spPr>
+          <a:xfrm>
+            <a:off x="9235440" y="2194560"/>
+            <a:ext cx="2377440" cy="640080"/>
+          </a:xfrm>
+          <a:prstGeom prst="rect">
+            <a:avLst/>
+          </a:prstGeom>
+          <a:noFill/>
+        </p:spPr>
+        <p:txBody>
+          <a:bodyPr wrap="square">
+            <a:spAutoFit/>
+          </a:bodyPr>
+          <a:lstStyle/>
+          <a:p>
+            <a:pPr algn="l"/>
+            <a:r>
+              <a:rPr sz="1500" b="0">
+                <a:solidFill>
+                  <a:srgbClr val="F4EBD0"/>
+                </a:solidFill>
+                <a:latin typeface="Calibri"/>
+              </a:rPr>
+              <a:t>How you actually write</a:t>
+            </a:r>
+          </a:p>
+        </p:txBody>
+      </p:sp>
+      <p:sp>
+        <p:nvSpPr>
+          <p:cNvPr id="18" name="Rectangle 17"/>
+          <p:cNvSpPr/>
+          <p:nvPr/>
+        </p:nvSpPr>
+        <p:spPr>
+          <a:xfrm>
+            <a:off x="731520" y="3337560"/>
+            <a:ext cx="3474720" cy="1783080"/>
+          </a:xfrm>
+          <a:prstGeom prst="rect">
+            <a:avLst/>
+          </a:prstGeom>
+          <a:solidFill>
+            <a:srgbClr val="141414"/>
+          </a:solidFill>
+          <a:ln>
+            <a:noFill/>
+          </a:ln>
+        </p:spPr>
+        <p:style>
+          <a:lnRef idx="1">
+            <a:schemeClr val="accent1"/>
+          </a:lnRef>
+          <a:fillRef idx="3">
+            <a:schemeClr val="accent1"/>
+          </a:fillRef>
+          <a:effectRef idx="2">
+            <a:schemeClr val="accent1"/>
+          </a:effectRef>
+          <a:fontRef idx="minor">
+            <a:schemeClr val="lt1"/>
+          </a:fontRef>
+        </p:style>
+        <p:txBody>
+          <a:bodyPr rtlCol="0" anchor="ctr"/>
+          <a:lstStyle/>
+          <a:p>
+            <a:pPr algn="ctr"/>
+          </a:p>
+        </p:txBody>
+      </p:sp>
+      <p:sp>
+        <p:nvSpPr>
+          <p:cNvPr id="19" name="TextBox 18"/>
+          <p:cNvSpPr txBox="1"/>
+          <p:nvPr/>
+        </p:nvSpPr>
+        <p:spPr>
+          <a:xfrm>
+            <a:off x="868680" y="3611880"/>
+            <a:ext cx="3200400" cy="502920"/>
+          </a:xfrm>
+          <a:prstGeom prst="rect">
+            <a:avLst/>
+          </a:prstGeom>
+          <a:noFill/>
+        </p:spPr>
+        <p:txBody>
+          <a:bodyPr wrap="square">
+            <a:spAutoFit/>
+          </a:bodyPr>
+          <a:lstStyle/>
+          <a:p>
+            <a:pPr algn="l"/>
+            <a:r>
+              <a:rPr sz="1600" b="1">
+                <a:solidFill>
+                  <a:srgbClr val="B3995D"/>
+                </a:solidFill>
+                <a:latin typeface="Calibri"/>
+              </a:rPr>
+              <a:t>sources.md</a:t>
+            </a:r>
+          </a:p>
+        </p:txBody>
+      </p:sp>
+      <p:sp>
+        <p:nvSpPr>
+          <p:cNvPr id="20" name="TextBox 19"/>
+          <p:cNvSpPr txBox="1"/>
+          <p:nvPr/>
+        </p:nvSpPr>
+        <p:spPr>
+          <a:xfrm>
+            <a:off x="868680" y="4206240"/>
+            <a:ext cx="3200400" cy="640080"/>
+          </a:xfrm>
+          <a:prstGeom prst="rect">
+            <a:avLst/>
+          </a:prstGeom>
+          <a:noFill/>
+        </p:spPr>
+        <p:txBody>
+          <a:bodyPr wrap="square">
+            <a:spAutoFit/>
+          </a:bodyPr>
+          <a:lstStyle/>
+          <a:p>
+            <a:pPr algn="l"/>
+            <a:r>
+              <a:rPr sz="1500" b="0">
+                <a:solidFill>
+                  <a:srgbClr val="F4EBD0"/>
+                </a:solidFill>
+                <a:latin typeface="Calibri"/>
+              </a:rPr>
+              <a:t>Where you would click to check</a:t>
+            </a:r>
+          </a:p>
+        </p:txBody>
+      </p:sp>
+      <p:sp>
+        <p:nvSpPr>
+          <p:cNvPr id="21" name="Rectangle 20"/>
+          <p:cNvSpPr/>
+          <p:nvPr/>
+        </p:nvSpPr>
+        <p:spPr>
+          <a:xfrm>
+            <a:off x="4389120" y="3337560"/>
+            <a:ext cx="3474720" cy="1783080"/>
+          </a:xfrm>
+          <a:prstGeom prst="rect">
+            <a:avLst/>
+          </a:prstGeom>
+          <a:solidFill>
+            <a:srgbClr val="141414"/>
+          </a:solidFill>
+          <a:ln>
+            <a:noFill/>
+          </a:ln>
+        </p:spPr>
+        <p:style>
+          <a:lnRef idx="1">
+            <a:schemeClr val="accent1"/>
+          </a:lnRef>
+          <a:fillRef idx="3">
+            <a:schemeClr val="accent1"/>
+          </a:fillRef>
+          <a:effectRef idx="2">
+            <a:schemeClr val="accent1"/>
+          </a:effectRef>
+          <a:fontRef idx="minor">
+            <a:schemeClr val="lt1"/>
+          </a:fontRef>
+        </p:style>
+        <p:txBody>
+          <a:bodyPr rtlCol="0" anchor="ctr"/>
+          <a:lstStyle/>
+          <a:p>
+            <a:pPr algn="ctr"/>
+          </a:p>
+        </p:txBody>
+      </p:sp>
+      <p:sp>
+        <p:nvSpPr>
+          <p:cNvPr id="22" name="TextBox 21"/>
+          <p:cNvSpPr txBox="1"/>
+          <p:nvPr/>
+        </p:nvSpPr>
+        <p:spPr>
+          <a:xfrm>
+            <a:off x="4526280" y="3611880"/>
+            <a:ext cx="3200400" cy="502920"/>
+          </a:xfrm>
+          <a:prstGeom prst="rect">
+            <a:avLst/>
+          </a:prstGeom>
+          <a:noFill/>
+        </p:spPr>
+        <p:txBody>
+          <a:bodyPr wrap="square">
+            <a:spAutoFit/>
+          </a:bodyPr>
+          <a:lstStyle/>
+          <a:p>
+            <a:pPr algn="l"/>
+            <a:r>
+              <a:rPr sz="1600" b="1">
+                <a:solidFill>
+                  <a:srgbClr val="B3995D"/>
+                </a:solidFill>
+                <a:latin typeface="Calibri"/>
+              </a:rPr>
+              <a:t>open-loops.md</a:t>
+            </a:r>
+          </a:p>
+        </p:txBody>
+      </p:sp>
+      <p:sp>
+        <p:nvSpPr>
+          <p:cNvPr id="23" name="TextBox 22"/>
+          <p:cNvSpPr txBox="1"/>
+          <p:nvPr/>
+        </p:nvSpPr>
+        <p:spPr>
+          <a:xfrm>
+            <a:off x="4526280" y="4206240"/>
+            <a:ext cx="3200400" cy="640080"/>
+          </a:xfrm>
+          <a:prstGeom prst="rect">
+            <a:avLst/>
+          </a:prstGeom>
+          <a:noFill/>
+        </p:spPr>
+        <p:txBody>
+          <a:bodyPr wrap="square">
+            <a:spAutoFit/>
+          </a:bodyPr>
+          <a:lstStyle/>
+          <a:p>
+            <a:pPr algn="l"/>
+            <a:r>
+              <a:rPr sz="1500" b="0">
+                <a:solidFill>
+                  <a:srgbClr val="F4EBD0"/>
+                </a:solidFill>
+                <a:latin typeface="Calibri"/>
+              </a:rPr>
+              <a:t>What is still open</a:t>
+            </a:r>
+          </a:p>
+        </p:txBody>
+      </p:sp>
+      <p:sp>
+        <p:nvSpPr>
+          <p:cNvPr id="24" name="Rectangle 23"/>
+          <p:cNvSpPr/>
+          <p:nvPr/>
+        </p:nvSpPr>
+        <p:spPr>
+          <a:xfrm>
+            <a:off x="8046720" y="3337560"/>
+            <a:ext cx="3474720" cy="1783080"/>
+          </a:xfrm>
+          <a:prstGeom prst="rect">
+            <a:avLst/>
+          </a:prstGeom>
+          <a:solidFill>
+            <a:srgbClr val="141414"/>
+          </a:solidFill>
+          <a:ln>
+            <a:noFill/>
+          </a:ln>
+        </p:spPr>
+        <p:style>
+          <a:lnRef idx="1">
+            <a:schemeClr val="accent1"/>
+          </a:lnRef>
+          <a:fillRef idx="3">
+            <a:schemeClr val="accent1"/>
+          </a:fillRef>
+          <a:effectRef idx="2">
+            <a:schemeClr val="accent1"/>
+          </a:effectRef>
+          <a:fontRef idx="minor">
+            <a:schemeClr val="lt1"/>
+          </a:fontRef>
+        </p:style>
+        <p:txBody>
+          <a:bodyPr rtlCol="0" anchor="ctr"/>
+          <a:lstStyle/>
+          <a:p>
+            <a:pPr algn="ctr"/>
+          </a:p>
+        </p:txBody>
+      </p:sp>
+      <p:sp>
+        <p:nvSpPr>
+          <p:cNvPr id="25" name="TextBox 24"/>
+          <p:cNvSpPr txBox="1"/>
+          <p:nvPr/>
+        </p:nvSpPr>
+        <p:spPr>
+          <a:xfrm>
+            <a:off x="8183880" y="3611880"/>
+            <a:ext cx="3200400" cy="502920"/>
+          </a:xfrm>
+          <a:prstGeom prst="rect">
+            <a:avLst/>
+          </a:prstGeom>
+          <a:noFill/>
+        </p:spPr>
+        <p:txBody>
+          <a:bodyPr wrap="square">
+            <a:spAutoFit/>
+          </a:bodyPr>
+          <a:lstStyle/>
+          <a:p>
+            <a:pPr algn="l"/>
+            <a:r>
+              <a:rPr sz="1600" b="1">
+                <a:solidFill>
+                  <a:srgbClr val="B3995D"/>
+                </a:solidFill>
+                <a:latin typeface="Calibri"/>
+              </a:rPr>
+              <a:t>decisions.md</a:t>
+            </a:r>
+          </a:p>
+        </p:txBody>
+      </p:sp>
+      <p:sp>
+        <p:nvSpPr>
+          <p:cNvPr id="26" name="TextBox 25"/>
+          <p:cNvSpPr txBox="1"/>
+          <p:nvPr/>
+        </p:nvSpPr>
+        <p:spPr>
+          <a:xfrm>
+            <a:off x="8183880" y="4206240"/>
+            <a:ext cx="3200400" cy="640080"/>
+          </a:xfrm>
+          <a:prstGeom prst="rect">
+            <a:avLst/>
+          </a:prstGeom>
+          <a:noFill/>
+        </p:spPr>
+        <p:txBody>
+          <a:bodyPr wrap="square">
+            <a:spAutoFit/>
+          </a:bodyPr>
+          <a:lstStyle/>
+          <a:p>
+            <a:pPr algn="l"/>
+            <a:r>
+              <a:rPr sz="1500" b="0">
+                <a:solidFill>
+                  <a:srgbClr val="F4EBD0"/>
+                </a:solidFill>
+                <a:latin typeface="Calibri"/>
+              </a:rPr>
+              <a:t>What you already settled</a:t>
+            </a:r>
+          </a:p>
+        </p:txBody>
+      </p:sp>
+      <p:sp>
+        <p:nvSpPr>
+          <p:cNvPr id="27" name="TextBox 26"/>
+          <p:cNvSpPr txBox="1"/>
+          <p:nvPr/>
+        </p:nvSpPr>
+        <p:spPr>
+          <a:xfrm>
+            <a:off x="640080" y="6492240"/>
+            <a:ext cx="9144000" cy="274320"/>
+          </a:xfrm>
+          <a:prstGeom prst="rect">
+            <a:avLst/>
+          </a:prstGeom>
+          <a:noFill/>
+        </p:spPr>
+        <p:txBody>
+          <a:bodyPr wrap="square">
+            <a:spAutoFit/>
+          </a:bodyPr>
+          <a:lstStyle/>
+          <a:p>
+            <a:pPr algn="l"/>
+            <a:r>
+              <a:rPr sz="1100" b="0">
+                <a:solidFill>
+                  <a:srgbClr val="B8A888"/>
+                </a:solidFill>
+                <a:latin typeface="Calibri"/>
+              </a:rPr>
+              <a:t>Build your own chief of staff  ·  process, not a vendor</a:t>
+            </a:r>
+          </a:p>
+        </p:txBody>
+      </p:sp>
+      <p:sp>
+        <p:nvSpPr>
+          <p:cNvPr id="28" name="TextBox 27"/>
+          <p:cNvSpPr txBox="1"/>
+          <p:nvPr/>
+        </p:nvSpPr>
+        <p:spPr>
+          <a:xfrm>
+            <a:off x="10607040" y="6492240"/>
+            <a:ext cx="1097280" cy="274320"/>
+          </a:xfrm>
+          <a:prstGeom prst="rect">
+            <a:avLst/>
+          </a:prstGeom>
+          <a:noFill/>
+        </p:spPr>
+        <p:txBody>
+          <a:bodyPr wrap="square">
+            <a:spAutoFit/>
+          </a:bodyPr>
+          <a:lstStyle/>
+          <a:p>
             <a:pPr algn="r"/>
             <a:r>
               <a:rPr sz="1100" b="0">
@@ -10136,7 +10979,7 @@
                 </a:solidFill>
                 <a:latin typeface="Calibri"/>
               </a:rPr>
-              <a:t>16  /  23</a:t>
+              <a:t>16  /  24</a:t>
             </a:r>
           </a:p>
         </p:txBody>
@@ -10296,8 +11139,8 @@
         </p:nvSpPr>
         <p:spPr>
           <a:xfrm>
-            <a:off x="731520" y="411480"/>
-            <a:ext cx="10058400" cy="731520"/>
+            <a:off x="731520" y="1645920"/>
+            <a:ext cx="10515600" cy="1097280"/>
           </a:xfrm>
           <a:prstGeom prst="rect">
             <a:avLst/>
@@ -10310,15 +11153,15 @@
           </a:bodyPr>
           <a:lstStyle/>
           <a:p>
-            <a:pPr algn="l"/>
-            <a:r>
-              <a:rPr sz="3200" b="1">
-                <a:solidFill>
-                  <a:srgbClr val="F4EBD0"/>
-                </a:solidFill>
-                <a:latin typeface="Calibri"/>
-              </a:rPr>
-              <a:t>Step 5 — Verify. Cite or cut.</a:t>
+            <a:pPr algn="ctr"/>
+            <a:r>
+              <a:rPr sz="3600" b="1">
+                <a:solidFill>
+                  <a:srgbClr val="B3995D"/>
+                </a:solidFill>
+                <a:latin typeface="Calibri"/>
+              </a:rPr>
+              <a:t>The prompt file is the process.</a:t>
             </a:r>
           </a:p>
         </p:txBody>
@@ -10331,8 +11174,8 @@
         </p:nvSpPr>
         <p:spPr>
           <a:xfrm>
-            <a:off x="731520" y="1371600"/>
-            <a:ext cx="10515600" cy="4389120"/>
+            <a:off x="1280160" y="3017520"/>
+            <a:ext cx="9601200" cy="2011680"/>
           </a:xfrm>
           <a:prstGeom prst="rect">
             <a:avLst/>
@@ -10345,11 +11188,7 @@
           </a:bodyPr>
           <a:lstStyle/>
           <a:p>
-            <a:pPr>
-              <a:spcAft>
-                <a:spcPts val="1600"/>
-              </a:spcAft>
-            </a:pPr>
+            <a:pPr algn="ctr"/>
             <a:r>
               <a:rPr sz="2200" b="0">
                 <a:solidFill>
@@ -10357,55 +11196,9 @@
                 </a:solidFill>
                 <a:latin typeface="Calibri"/>
               </a:rPr>
-              <a:t>•  Every substantive claim needs a source you can open.</a:t>
-            </a:r>
-          </a:p>
-          <a:p>
-            <a:pPr>
-              <a:spcAft>
-                <a:spcPts val="1600"/>
-              </a:spcAft>
-            </a:pPr>
-            <a:r>
-              <a:rPr sz="2200" b="0">
-                <a:solidFill>
-                  <a:srgbClr val="F4EBD0"/>
-                </a:solidFill>
-                <a:latin typeface="Calibri"/>
-              </a:rPr>
-              <a:t>•  Gaps stay gaps. “Not found” beats a confident guess.</a:t>
-            </a:r>
-          </a:p>
-          <a:p>
-            <a:pPr>
-              <a:spcAft>
-                <a:spcPts val="1600"/>
-              </a:spcAft>
-            </a:pPr>
-            <a:r>
-              <a:rPr sz="2200" b="0">
-                <a:solidFill>
-                  <a:srgbClr val="F4EBD0"/>
-                </a:solidFill>
-                <a:latin typeface="Calibri"/>
-              </a:rPr>
-              <a:t>•  Self-reported “done” is not a check.</a:t>
-            </a:r>
-          </a:p>
-          <a:p>
-            <a:pPr>
-              <a:spcAft>
-                <a:spcPts val="1600"/>
-              </a:spcAft>
-            </a:pPr>
-            <a:r>
-              <a:rPr sz="2200" b="0">
-                <a:solidFill>
-                  <a:srgbClr val="F4EBD0"/>
-                </a:solidFill>
-                <a:latin typeface="Calibri"/>
-              </a:rPr>
-              <a:t>•  You read the draft against the Check section. Then you send — or you don't.</a:t>
+              <a:t>You do not re-explain yourself in chat.
+If the output is wrong, the file is wrong.
+Installing a skill proves the files arrived. Only a real job proves they fit.</a:t>
             </a:r>
           </a:p>
         </p:txBody>
@@ -10475,7 +11268,7 @@
                 </a:solidFill>
                 <a:latin typeface="Calibri"/>
               </a:rPr>
-              <a:t>17  /  23</a:t>
+              <a:t>17  /  24</a:t>
             </a:r>
           </a:p>
         </p:txBody>
@@ -10651,13 +11444,13 @@
           <a:p>
             <a:pPr algn="l"/>
             <a:r>
-              <a:rPr sz="3000" b="1">
+              <a:rPr sz="3200" b="1">
                 <a:solidFill>
                   <a:srgbClr val="F4EBD0"/>
                 </a:solidFill>
                 <a:latin typeface="Calibri"/>
               </a:rPr>
-              <a:t>Step 6 — Correct the file, not the chat</a:t>
+              <a:t>Step 5 — Verify. Cite or cut.</a:t>
             </a:r>
           </a:p>
         </p:txBody>
@@ -10671,7 +11464,7 @@
         <p:spPr>
           <a:xfrm>
             <a:off x="731520" y="1371600"/>
-            <a:ext cx="10515600" cy="3840480"/>
+            <a:ext cx="10515600" cy="4389120"/>
           </a:xfrm>
           <a:prstGeom prst="rect">
             <a:avLst/>
@@ -10686,7 +11479,7 @@
           <a:p>
             <a:pPr>
               <a:spcAft>
-                <a:spcPts val="1400"/>
+                <a:spcPts val="1600"/>
               </a:spcAft>
             </a:pPr>
             <a:r>
@@ -10696,13 +11489,13 @@
                 </a:solidFill>
                 <a:latin typeface="Calibri"/>
               </a:rPr>
-              <a:t>•  Three of the same correction is a rule. Two is a candidate. One is a fluke.</a:t>
+              <a:t>•  Every substantive claim needs a source you can open.</a:t>
             </a:r>
           </a:p>
           <a:p>
             <a:pPr>
               <a:spcAft>
-                <a:spcPts val="1400"/>
+                <a:spcPts val="1600"/>
               </a:spcAft>
             </a:pPr>
             <a:r>
@@ -10712,13 +11505,13 @@
                 </a:solidFill>
                 <a:latin typeface="Calibri"/>
               </a:rPr>
-              <a:t>•  Put the line in the prompt or in voice.md. One owner.</a:t>
+              <a:t>•  Gaps stay gaps. “Not found” beats a confident guess.</a:t>
             </a:r>
           </a:p>
           <a:p>
             <a:pPr>
               <a:spcAft>
-                <a:spcPts val="1400"/>
+                <a:spcPts val="1600"/>
               </a:spcAft>
             </a:pPr>
             <a:r>
@@ -10728,13 +11521,13 @@
                 </a:solidFill>
                 <a:latin typeface="Calibri"/>
               </a:rPr>
-              <a:t>•  Delete a stale instruction before you add a new one.</a:t>
+              <a:t>•  Self-reported “done” is not a check.</a:t>
             </a:r>
           </a:p>
           <a:p>
             <a:pPr>
               <a:spcAft>
-                <a:spcPts val="1400"/>
+                <a:spcPts val="1600"/>
               </a:spcAft>
             </a:pPr>
             <a:r>
@@ -10744,7 +11537,7 @@
                 </a:solidFill>
                 <a:latin typeface="Calibri"/>
               </a:rPr>
-              <a:t>•  Somebody owns the agent. One person, close enough to notice drift.</a:t>
+              <a:t>•  You read the draft against the Check section. Then you send — or you don't.</a:t>
             </a:r>
           </a:p>
         </p:txBody>
@@ -10814,7 +11607,7 @@
                 </a:solidFill>
                 <a:latin typeface="Calibri"/>
               </a:rPr>
-              <a:t>18  /  23</a:t>
+              <a:t>18  /  24</a:t>
             </a:r>
           </a:p>
         </p:txBody>
@@ -10974,8 +11767,8 @@
         </p:nvSpPr>
         <p:spPr>
           <a:xfrm>
-            <a:off x="731520" y="1554480"/>
-            <a:ext cx="10515600" cy="1280160"/>
+            <a:off x="731520" y="411480"/>
+            <a:ext cx="10058400" cy="731520"/>
           </a:xfrm>
           <a:prstGeom prst="rect">
             <a:avLst/>
@@ -10988,15 +11781,15 @@
           </a:bodyPr>
           <a:lstStyle/>
           <a:p>
-            <a:pPr algn="ctr"/>
-            <a:r>
-              <a:rPr sz="4000" b="1">
-                <a:solidFill>
-                  <a:srgbClr val="B3995D"/>
-                </a:solidFill>
-                <a:latin typeface="Calibri"/>
-              </a:rPr>
-              <a:t>Drafts only. Never send.</a:t>
+            <a:pPr algn="l"/>
+            <a:r>
+              <a:rPr sz="3000" b="1">
+                <a:solidFill>
+                  <a:srgbClr val="F4EBD0"/>
+                </a:solidFill>
+                <a:latin typeface="Calibri"/>
+              </a:rPr>
+              <a:t>Step 6 — Correct the file, not the chat</a:t>
             </a:r>
           </a:p>
         </p:txBody>
@@ -11009,8 +11802,8 @@
         </p:nvSpPr>
         <p:spPr>
           <a:xfrm>
-            <a:off x="1188720" y="3108960"/>
-            <a:ext cx="9784080" cy="2011680"/>
+            <a:off x="731520" y="1371600"/>
+            <a:ext cx="10515600" cy="3840480"/>
           </a:xfrm>
           <a:prstGeom prst="rect">
             <a:avLst/>
@@ -11023,7 +11816,11 @@
           </a:bodyPr>
           <a:lstStyle/>
           <a:p>
-            <a:pPr algn="ctr"/>
+            <a:pPr>
+              <a:spcAft>
+                <a:spcPts val="1400"/>
+              </a:spcAft>
+            </a:pPr>
             <a:r>
               <a:rPr sz="2200" b="0">
                 <a:solidFill>
@@ -11031,9 +11828,55 @@
                 </a:solidFill>
                 <a:latin typeface="Calibri"/>
               </a:rPr>
-              <a:t>The agent may read, organize, draft, cite, and export.
-It may not send, file, submit, pay, sign, or close a ticket.
-You are the principal. The agent is staff.</a:t>
+              <a:t>•  Three of the same correction is a rule. Two is a candidate. One is a fluke.</a:t>
+            </a:r>
+          </a:p>
+          <a:p>
+            <a:pPr>
+              <a:spcAft>
+                <a:spcPts val="1400"/>
+              </a:spcAft>
+            </a:pPr>
+            <a:r>
+              <a:rPr sz="2200" b="0">
+                <a:solidFill>
+                  <a:srgbClr val="F4EBD0"/>
+                </a:solidFill>
+                <a:latin typeface="Calibri"/>
+              </a:rPr>
+              <a:t>•  Put the line in the prompt or in voice.md. One owner.</a:t>
+            </a:r>
+          </a:p>
+          <a:p>
+            <a:pPr>
+              <a:spcAft>
+                <a:spcPts val="1400"/>
+              </a:spcAft>
+            </a:pPr>
+            <a:r>
+              <a:rPr sz="2200" b="0">
+                <a:solidFill>
+                  <a:srgbClr val="F4EBD0"/>
+                </a:solidFill>
+                <a:latin typeface="Calibri"/>
+              </a:rPr>
+              <a:t>•  Delete a stale instruction before you add a new one.</a:t>
+            </a:r>
+          </a:p>
+          <a:p>
+            <a:pPr>
+              <a:spcAft>
+                <a:spcPts val="1400"/>
+              </a:spcAft>
+            </a:pPr>
+            <a:r>
+              <a:rPr sz="2200" b="0">
+                <a:solidFill>
+                  <a:srgbClr val="F4EBD0"/>
+                </a:solidFill>
+                <a:latin typeface="Calibri"/>
+              </a:rPr>
+              <a:t>•  Somebody owns the agent. One person, close enough to notice drift.</a:t>
             </a:r>
           </a:p>
         </p:txBody>
@@ -11103,7 +11946,7 @@
                 </a:solidFill>
                 <a:latin typeface="Calibri"/>
               </a:rPr>
-              <a:t>19  /  23</a:t>
+              <a:t>19  /  24</a:t>
             </a:r>
           </a:p>
         </p:txBody>
@@ -11461,7 +12304,7 @@
                 </a:solidFill>
                 <a:latin typeface="Calibri"/>
               </a:rPr>
-              <a:t>2  /  23</a:t>
+              <a:t>2  /  24</a:t>
             </a:r>
           </a:p>
         </p:txBody>
@@ -11621,8 +12464,8 @@
         </p:nvSpPr>
         <p:spPr>
           <a:xfrm>
-            <a:off x="731520" y="411480"/>
-            <a:ext cx="10058400" cy="731520"/>
+            <a:off x="731520" y="1554480"/>
+            <a:ext cx="10515600" cy="1280160"/>
           </a:xfrm>
           <a:prstGeom prst="rect">
             <a:avLst/>
@@ -11635,15 +12478,15 @@
           </a:bodyPr>
           <a:lstStyle/>
           <a:p>
-            <a:pPr algn="l"/>
-            <a:r>
-              <a:rPr sz="3000" b="1">
-                <a:solidFill>
-                  <a:srgbClr val="F4EBD0"/>
-                </a:solidFill>
-                <a:latin typeface="Calibri"/>
-              </a:rPr>
-              <a:t>Then point the same process at anything</a:t>
+            <a:pPr algn="ctr"/>
+            <a:r>
+              <a:rPr sz="4000" b="1">
+                <a:solidFill>
+                  <a:srgbClr val="B3995D"/>
+                </a:solidFill>
+                <a:latin typeface="Calibri"/>
+              </a:rPr>
+              <a:t>Drafts only. Never send.</a:t>
             </a:r>
           </a:p>
         </p:txBody>
@@ -11656,8 +12499,8 @@
         </p:nvSpPr>
         <p:spPr>
           <a:xfrm>
-            <a:off x="731520" y="1371600"/>
-            <a:ext cx="10515600" cy="4389120"/>
+            <a:off x="1188720" y="3108960"/>
+            <a:ext cx="9784080" cy="2011680"/>
           </a:xfrm>
           <a:prstGeom prst="rect">
             <a:avLst/>
@@ -11670,83 +12513,17 @@
           </a:bodyPr>
           <a:lstStyle/>
           <a:p>
-            <a:pPr>
-              <a:spcAft>
-                <a:spcPts val="1400"/>
-              </a:spcAft>
-            </a:pPr>
-            <a:r>
-              <a:rPr sz="2000" b="0">
+            <a:pPr algn="ctr"/>
+            <a:r>
+              <a:rPr sz="2200" b="0">
                 <a:solidFill>
                   <a:srgbClr val="F4EBD0"/>
                 </a:solidFill>
                 <a:latin typeface="Calibri"/>
               </a:rPr>
-              <a:t>•  Expense reports, hiring screens, incident recaps, customer research.</a:t>
-            </a:r>
-          </a:p>
-          <a:p>
-            <a:pPr>
-              <a:spcAft>
-                <a:spcPts val="1400"/>
-              </a:spcAft>
-            </a:pPr>
-            <a:r>
-              <a:rPr sz="2000" b="0">
-                <a:solidFill>
-                  <a:srgbClr val="F4EBD0"/>
-                </a:solidFill>
-                <a:latin typeface="Calibri"/>
-              </a:rPr>
-              <a:t>•  If it passes both tests, it gets a prompt file and a check.</a:t>
-            </a:r>
-          </a:p>
-          <a:p>
-            <a:pPr>
-              <a:spcAft>
-                <a:spcPts val="1400"/>
-              </a:spcAft>
-            </a:pPr>
-            <a:r>
-              <a:rPr sz="2000" b="0">
-                <a:solidFill>
-                  <a:srgbClr val="F4EBD0"/>
-                </a:solidFill>
-                <a:latin typeface="Calibri"/>
-              </a:rPr>
-              <a:t>•  If it fails, you just saved yourself a clever mess.</a:t>
-            </a:r>
-          </a:p>
-          <a:p>
-            <a:pPr>
-              <a:spcAft>
-                <a:spcPts val="1400"/>
-              </a:spcAft>
-            </a:pPr>
-            <a:r>
-              <a:rPr sz="2000" b="0">
-                <a:solidFill>
-                  <a:srgbClr val="F4EBD0"/>
-                </a:solidFill>
-                <a:latin typeface="Calibri"/>
-              </a:rPr>
-              <a:t>•  Do not ask “can AI do this?” Ask what shape the work is.</a:t>
-            </a:r>
-          </a:p>
-          <a:p>
-            <a:pPr>
-              <a:spcAft>
-                <a:spcPts val="1400"/>
-              </a:spcAft>
-            </a:pPr>
-            <a:r>
-              <a:rPr sz="2000" b="0">
-                <a:solidFill>
-                  <a:srgbClr val="F4EBD0"/>
-                </a:solidFill>
-                <a:latin typeface="Calibri"/>
-              </a:rPr>
-              <a:t>•  Buying a smarter model does not skip workflow, data, authority, evaluation, audit, or an owner.</a:t>
+              <a:t>The agent may read, organize, draft, cite, and export.
+It may not send, file, submit, pay, sign, or close a ticket.
+You are the principal. The agent is staff.</a:t>
             </a:r>
           </a:p>
         </p:txBody>
@@ -11816,7 +12593,7 @@
                 </a:solidFill>
                 <a:latin typeface="Calibri"/>
               </a:rPr>
-              <a:t>20  /  23</a:t>
+              <a:t>20  /  24</a:t>
             </a:r>
           </a:p>
         </p:txBody>
@@ -11992,70 +12769,27 @@
           <a:p>
             <a:pPr algn="l"/>
             <a:r>
-              <a:rPr sz="3200" b="1">
+              <a:rPr sz="3000" b="1">
                 <a:solidFill>
                   <a:srgbClr val="F4EBD0"/>
                 </a:solidFill>
                 <a:latin typeface="Calibri"/>
               </a:rPr>
-              <a:t>Thirty minutes, starting Monday</a:t>
-            </a:r>
-          </a:p>
-        </p:txBody>
-      </p:sp>
-      <p:sp>
-        <p:nvSpPr>
-          <p:cNvPr id="6" name="Rectangle 5"/>
-          <p:cNvSpPr/>
+              <a:t>Then point the same process at anything</a:t>
+            </a:r>
+          </a:p>
+        </p:txBody>
+      </p:sp>
+      <p:sp>
+        <p:nvSpPr>
+          <p:cNvPr id="6" name="TextBox 5"/>
+          <p:cNvSpPr txBox="1"/>
           <p:nvPr/>
         </p:nvSpPr>
         <p:spPr>
           <a:xfrm>
             <a:off x="731520" y="1371600"/>
-            <a:ext cx="10515600" cy="914400"/>
-          </a:xfrm>
-          <a:prstGeom prst="rect">
-            <a:avLst/>
-          </a:prstGeom>
-          <a:solidFill>
-            <a:srgbClr val="141414"/>
-          </a:solidFill>
-          <a:ln>
-            <a:noFill/>
-          </a:ln>
-        </p:spPr>
-        <p:style>
-          <a:lnRef idx="1">
-            <a:schemeClr val="accent1"/>
-          </a:lnRef>
-          <a:fillRef idx="3">
-            <a:schemeClr val="accent1"/>
-          </a:fillRef>
-          <a:effectRef idx="2">
-            <a:schemeClr val="accent1"/>
-          </a:effectRef>
-          <a:fontRef idx="minor">
-            <a:schemeClr val="lt1"/>
-          </a:fontRef>
-        </p:style>
-        <p:txBody>
-          <a:bodyPr rtlCol="0" anchor="ctr"/>
-          <a:lstStyle/>
-          <a:p>
-            <a:pPr algn="ctr"/>
-          </a:p>
-        </p:txBody>
-      </p:sp>
-      <p:sp>
-        <p:nvSpPr>
-          <p:cNvPr id="7" name="TextBox 6"/>
-          <p:cNvSpPr txBox="1"/>
-          <p:nvPr/>
-        </p:nvSpPr>
-        <p:spPr>
-          <a:xfrm>
-            <a:off x="960120" y="1627632"/>
-            <a:ext cx="1645920" cy="457200"/>
+            <a:ext cx="10515600" cy="4389120"/>
           </a:xfrm>
           <a:prstGeom prst="rect">
             <a:avLst/>
@@ -12068,29 +12802,97 @@
           </a:bodyPr>
           <a:lstStyle/>
           <a:p>
-            <a:pPr algn="l"/>
-            <a:r>
-              <a:rPr sz="1800" b="1">
-                <a:solidFill>
-                  <a:srgbClr val="B3995D"/>
-                </a:solidFill>
-                <a:latin typeface="Calibri"/>
-              </a:rPr>
-              <a:t>10 min</a:t>
-            </a:r>
-          </a:p>
-        </p:txBody>
-      </p:sp>
-      <p:sp>
-        <p:nvSpPr>
-          <p:cNvPr id="8" name="TextBox 7"/>
+            <a:pPr>
+              <a:spcAft>
+                <a:spcPts val="1400"/>
+              </a:spcAft>
+            </a:pPr>
+            <a:r>
+              <a:rPr sz="2000" b="0">
+                <a:solidFill>
+                  <a:srgbClr val="F4EBD0"/>
+                </a:solidFill>
+                <a:latin typeface="Calibri"/>
+              </a:rPr>
+              <a:t>•  Expense reports, hiring screens, incident recaps, customer research.</a:t>
+            </a:r>
+          </a:p>
+          <a:p>
+            <a:pPr>
+              <a:spcAft>
+                <a:spcPts val="1400"/>
+              </a:spcAft>
+            </a:pPr>
+            <a:r>
+              <a:rPr sz="2000" b="0">
+                <a:solidFill>
+                  <a:srgbClr val="F4EBD0"/>
+                </a:solidFill>
+                <a:latin typeface="Calibri"/>
+              </a:rPr>
+              <a:t>•  If it passes both tests, it gets a prompt file and a check.</a:t>
+            </a:r>
+          </a:p>
+          <a:p>
+            <a:pPr>
+              <a:spcAft>
+                <a:spcPts val="1400"/>
+              </a:spcAft>
+            </a:pPr>
+            <a:r>
+              <a:rPr sz="2000" b="0">
+                <a:solidFill>
+                  <a:srgbClr val="F4EBD0"/>
+                </a:solidFill>
+                <a:latin typeface="Calibri"/>
+              </a:rPr>
+              <a:t>•  If it fails, you just saved yourself a clever mess.</a:t>
+            </a:r>
+          </a:p>
+          <a:p>
+            <a:pPr>
+              <a:spcAft>
+                <a:spcPts val="1400"/>
+              </a:spcAft>
+            </a:pPr>
+            <a:r>
+              <a:rPr sz="2000" b="0">
+                <a:solidFill>
+                  <a:srgbClr val="F4EBD0"/>
+                </a:solidFill>
+                <a:latin typeface="Calibri"/>
+              </a:rPr>
+              <a:t>•  Do not ask “can AI do this?” Ask what shape the work is.</a:t>
+            </a:r>
+          </a:p>
+          <a:p>
+            <a:pPr>
+              <a:spcAft>
+                <a:spcPts val="1400"/>
+              </a:spcAft>
+            </a:pPr>
+            <a:r>
+              <a:rPr sz="2000" b="0">
+                <a:solidFill>
+                  <a:srgbClr val="F4EBD0"/>
+                </a:solidFill>
+                <a:latin typeface="Calibri"/>
+              </a:rPr>
+              <a:t>•  Buying a smarter model does not skip workflow, data, authority, evaluation, audit, or an owner.</a:t>
+            </a:r>
+          </a:p>
+        </p:txBody>
+      </p:sp>
+      <p:sp>
+        <p:nvSpPr>
+          <p:cNvPr id="7" name="TextBox 6"/>
           <p:cNvSpPr txBox="1"/>
           <p:nvPr/>
         </p:nvSpPr>
         <p:spPr>
           <a:xfrm>
-            <a:off x="2743200" y="1627632"/>
-            <a:ext cx="8229600" cy="457200"/>
+            <a:off x="640080" y="6492240"/>
+            <a:ext cx="9144000" cy="274320"/>
           </a:xfrm>
           <a:prstGeom prst="rect">
             <a:avLst/>
@@ -12105,70 +12907,27 @@
           <a:p>
             <a:pPr algn="l"/>
             <a:r>
-              <a:rPr sz="2000" b="0">
-                <a:solidFill>
-                  <a:srgbClr val="F4EBD0"/>
-                </a:solidFill>
-                <a:latin typeface="Calibri"/>
-              </a:rPr>
-              <a:t>Read PROCESS.md</a:t>
-            </a:r>
-          </a:p>
-        </p:txBody>
-      </p:sp>
-      <p:sp>
-        <p:nvSpPr>
-          <p:cNvPr id="9" name="Rectangle 8"/>
-          <p:cNvSpPr/>
-          <p:nvPr/>
-        </p:nvSpPr>
-        <p:spPr>
-          <a:xfrm>
-            <a:off x="731520" y="2423160"/>
-            <a:ext cx="10515600" cy="914400"/>
-          </a:xfrm>
-          <a:prstGeom prst="rect">
-            <a:avLst/>
-          </a:prstGeom>
-          <a:solidFill>
-            <a:srgbClr val="141414"/>
-          </a:solidFill>
-          <a:ln>
-            <a:noFill/>
-          </a:ln>
-        </p:spPr>
-        <p:style>
-          <a:lnRef idx="1">
-            <a:schemeClr val="accent1"/>
-          </a:lnRef>
-          <a:fillRef idx="3">
-            <a:schemeClr val="accent1"/>
-          </a:fillRef>
-          <a:effectRef idx="2">
-            <a:schemeClr val="accent1"/>
-          </a:effectRef>
-          <a:fontRef idx="minor">
-            <a:schemeClr val="lt1"/>
-          </a:fontRef>
-        </p:style>
-        <p:txBody>
-          <a:bodyPr rtlCol="0" anchor="ctr"/>
-          <a:lstStyle/>
-          <a:p>
-            <a:pPr algn="ctr"/>
-          </a:p>
-        </p:txBody>
-      </p:sp>
-      <p:sp>
-        <p:nvSpPr>
-          <p:cNvPr id="10" name="TextBox 9"/>
+              <a:rPr sz="1100" b="0">
+                <a:solidFill>
+                  <a:srgbClr val="B8A888"/>
+                </a:solidFill>
+                <a:latin typeface="Calibri"/>
+              </a:rPr>
+              <a:t>Build your own chief of staff  ·  process, not a vendor</a:t>
+            </a:r>
+          </a:p>
+        </p:txBody>
+      </p:sp>
+      <p:sp>
+        <p:nvSpPr>
+          <p:cNvPr id="8" name="TextBox 7"/>
           <p:cNvSpPr txBox="1"/>
           <p:nvPr/>
         </p:nvSpPr>
         <p:spPr>
           <a:xfrm>
-            <a:off x="960120" y="2679192"/>
-            <a:ext cx="1645920" cy="457200"/>
+            <a:off x="10607040" y="6492240"/>
+            <a:ext cx="1097280" cy="274320"/>
           </a:xfrm>
           <a:prstGeom prst="rect">
             <a:avLst/>
@@ -12181,303 +12940,7 @@
           </a:bodyPr>
           <a:lstStyle/>
           <a:p>
-            <a:pPr algn="l"/>
-            <a:r>
-              <a:rPr sz="1800" b="1">
-                <a:solidFill>
-                  <a:srgbClr val="B3995D"/>
-                </a:solidFill>
-                <a:latin typeface="Calibri"/>
-              </a:rPr>
-              <a:t>10 min</a:t>
-            </a:r>
-          </a:p>
-        </p:txBody>
-      </p:sp>
-      <p:sp>
-        <p:nvSpPr>
-          <p:cNvPr id="11" name="TextBox 10"/>
-          <p:cNvSpPr txBox="1"/>
-          <p:nvPr/>
-        </p:nvSpPr>
-        <p:spPr>
-          <a:xfrm>
-            <a:off x="2743200" y="2679192"/>
-            <a:ext cx="8229600" cy="457200"/>
-          </a:xfrm>
-          <a:prstGeom prst="rect">
-            <a:avLst/>
-          </a:prstGeom>
-          <a:noFill/>
-        </p:spPr>
-        <p:txBody>
-          <a:bodyPr wrap="square">
-            <a:spAutoFit/>
-          </a:bodyPr>
-          <a:lstStyle/>
-          <a:p>
-            <a:pPr algn="l"/>
-            <a:r>
-              <a:rPr sz="2000" b="0">
-                <a:solidFill>
-                  <a:srgbClr val="F4EBD0"/>
-                </a:solidFill>
-                <a:latin typeface="Calibri"/>
-              </a:rPr>
-              <a:t>Fill in your private context files</a:t>
-            </a:r>
-          </a:p>
-        </p:txBody>
-      </p:sp>
-      <p:sp>
-        <p:nvSpPr>
-          <p:cNvPr id="12" name="Rectangle 11"/>
-          <p:cNvSpPr/>
-          <p:nvPr/>
-        </p:nvSpPr>
-        <p:spPr>
-          <a:xfrm>
-            <a:off x="731520" y="3474720"/>
-            <a:ext cx="10515600" cy="914400"/>
-          </a:xfrm>
-          <a:prstGeom prst="rect">
-            <a:avLst/>
-          </a:prstGeom>
-          <a:solidFill>
-            <a:srgbClr val="141414"/>
-          </a:solidFill>
-          <a:ln>
-            <a:noFill/>
-          </a:ln>
-        </p:spPr>
-        <p:style>
-          <a:lnRef idx="1">
-            <a:schemeClr val="accent1"/>
-          </a:lnRef>
-          <a:fillRef idx="3">
-            <a:schemeClr val="accent1"/>
-          </a:fillRef>
-          <a:effectRef idx="2">
-            <a:schemeClr val="accent1"/>
-          </a:effectRef>
-          <a:fontRef idx="minor">
-            <a:schemeClr val="lt1"/>
-          </a:fontRef>
-        </p:style>
-        <p:txBody>
-          <a:bodyPr rtlCol="0" anchor="ctr"/>
-          <a:lstStyle/>
-          <a:p>
-            <a:pPr algn="ctr"/>
-          </a:p>
-        </p:txBody>
-      </p:sp>
-      <p:sp>
-        <p:nvSpPr>
-          <p:cNvPr id="13" name="TextBox 12"/>
-          <p:cNvSpPr txBox="1"/>
-          <p:nvPr/>
-        </p:nvSpPr>
-        <p:spPr>
-          <a:xfrm>
-            <a:off x="960120" y="3730752"/>
-            <a:ext cx="1645920" cy="457200"/>
-          </a:xfrm>
-          <a:prstGeom prst="rect">
-            <a:avLst/>
-          </a:prstGeom>
-          <a:noFill/>
-        </p:spPr>
-        <p:txBody>
-          <a:bodyPr wrap="square">
-            <a:spAutoFit/>
-          </a:bodyPr>
-          <a:lstStyle/>
-          <a:p>
-            <a:pPr algn="l"/>
-            <a:r>
-              <a:rPr sz="1800" b="1">
-                <a:solidFill>
-                  <a:srgbClr val="B3995D"/>
-                </a:solidFill>
-                <a:latin typeface="Calibri"/>
-              </a:rPr>
-              <a:t>5 min</a:t>
-            </a:r>
-          </a:p>
-        </p:txBody>
-      </p:sp>
-      <p:sp>
-        <p:nvSpPr>
-          <p:cNvPr id="14" name="TextBox 13"/>
-          <p:cNvSpPr txBox="1"/>
-          <p:nvPr/>
-        </p:nvSpPr>
-        <p:spPr>
-          <a:xfrm>
-            <a:off x="2743200" y="3730752"/>
-            <a:ext cx="8229600" cy="457200"/>
-          </a:xfrm>
-          <a:prstGeom prst="rect">
-            <a:avLst/>
-          </a:prstGeom>
-          <a:noFill/>
-        </p:spPr>
-        <p:txBody>
-          <a:bodyPr wrap="square">
-            <a:spAutoFit/>
-          </a:bodyPr>
-          <a:lstStyle/>
-          <a:p>
-            <a:pPr algn="l"/>
-            <a:r>
-              <a:rPr sz="2000" b="0">
-                <a:solidFill>
-                  <a:srgbClr val="F4EBD0"/>
-                </a:solidFill>
-                <a:latin typeface="Calibri"/>
-              </a:rPr>
-              <a:t>If you freeze: what-to-automate.md, then the two tests</a:t>
-            </a:r>
-          </a:p>
-        </p:txBody>
-      </p:sp>
-      <p:sp>
-        <p:nvSpPr>
-          <p:cNvPr id="15" name="Rectangle 14"/>
-          <p:cNvSpPr/>
-          <p:nvPr/>
-        </p:nvSpPr>
-        <p:spPr>
-          <a:xfrm>
-            <a:off x="731520" y="4526279"/>
-            <a:ext cx="10515600" cy="914400"/>
-          </a:xfrm>
-          <a:prstGeom prst="rect">
-            <a:avLst/>
-          </a:prstGeom>
-          <a:solidFill>
-            <a:srgbClr val="141414"/>
-          </a:solidFill>
-          <a:ln>
-            <a:noFill/>
-          </a:ln>
-        </p:spPr>
-        <p:style>
-          <a:lnRef idx="1">
-            <a:schemeClr val="accent1"/>
-          </a:lnRef>
-          <a:fillRef idx="3">
-            <a:schemeClr val="accent1"/>
-          </a:fillRef>
-          <a:effectRef idx="2">
-            <a:schemeClr val="accent1"/>
-          </a:effectRef>
-          <a:fontRef idx="minor">
-            <a:schemeClr val="lt1"/>
-          </a:fontRef>
-        </p:style>
-        <p:txBody>
-          <a:bodyPr rtlCol="0" anchor="ctr"/>
-          <a:lstStyle/>
-          <a:p>
-            <a:pPr algn="ctr"/>
-          </a:p>
-        </p:txBody>
-      </p:sp>
-      <p:sp>
-        <p:nvSpPr>
-          <p:cNvPr id="16" name="TextBox 15"/>
-          <p:cNvSpPr txBox="1"/>
-          <p:nvPr/>
-        </p:nvSpPr>
-        <p:spPr>
-          <a:xfrm>
-            <a:off x="960120" y="4782311"/>
-            <a:ext cx="1645920" cy="457200"/>
-          </a:xfrm>
-          <a:prstGeom prst="rect">
-            <a:avLst/>
-          </a:prstGeom>
-          <a:noFill/>
-        </p:spPr>
-        <p:txBody>
-          <a:bodyPr wrap="square">
-            <a:spAutoFit/>
-          </a:bodyPr>
-          <a:lstStyle/>
-          <a:p>
-            <a:pPr algn="l"/>
-            <a:r>
-              <a:rPr sz="1800" b="1">
-                <a:solidFill>
-                  <a:srgbClr val="B3995D"/>
-                </a:solidFill>
-                <a:latin typeface="Calibri"/>
-              </a:rPr>
-              <a:t>5 min</a:t>
-            </a:r>
-          </a:p>
-        </p:txBody>
-      </p:sp>
-      <p:sp>
-        <p:nvSpPr>
-          <p:cNvPr id="17" name="TextBox 16"/>
-          <p:cNvSpPr txBox="1"/>
-          <p:nvPr/>
-        </p:nvSpPr>
-        <p:spPr>
-          <a:xfrm>
-            <a:off x="2743200" y="4782311"/>
-            <a:ext cx="8229600" cy="457200"/>
-          </a:xfrm>
-          <a:prstGeom prst="rect">
-            <a:avLst/>
-          </a:prstGeom>
-          <a:noFill/>
-        </p:spPr>
-        <p:txBody>
-          <a:bodyPr wrap="square">
-            <a:spAutoFit/>
-          </a:bodyPr>
-          <a:lstStyle/>
-          <a:p>
-            <a:pPr algn="l"/>
-            <a:r>
-              <a:rPr sz="2000" b="0">
-                <a:solidFill>
-                  <a:srgbClr val="F4EBD0"/>
-                </a:solidFill>
-                <a:latin typeface="Calibri"/>
-              </a:rPr>
-              <a:t>Write the SOP — or keep the job as judgment</a:t>
-            </a:r>
-          </a:p>
-        </p:txBody>
-      </p:sp>
-      <p:sp>
-        <p:nvSpPr>
-          <p:cNvPr id="18" name="TextBox 17"/>
-          <p:cNvSpPr txBox="1"/>
-          <p:nvPr/>
-        </p:nvSpPr>
-        <p:spPr>
-          <a:xfrm>
-            <a:off x="640080" y="6492240"/>
-            <a:ext cx="9144000" cy="274320"/>
-          </a:xfrm>
-          <a:prstGeom prst="rect">
-            <a:avLst/>
-          </a:prstGeom>
-          <a:noFill/>
-        </p:spPr>
-        <p:txBody>
-          <a:bodyPr wrap="square">
-            <a:spAutoFit/>
-          </a:bodyPr>
-          <a:lstStyle/>
-          <a:p>
-            <a:pPr algn="l"/>
+            <a:pPr algn="r"/>
             <a:r>
               <a:rPr sz="1100" b="0">
                 <a:solidFill>
@@ -12485,42 +12948,7 @@
                 </a:solidFill>
                 <a:latin typeface="Calibri"/>
               </a:rPr>
-              <a:t>Build your own chief of staff  ·  process, not a vendor</a:t>
-            </a:r>
-          </a:p>
-        </p:txBody>
-      </p:sp>
-      <p:sp>
-        <p:nvSpPr>
-          <p:cNvPr id="19" name="TextBox 18"/>
-          <p:cNvSpPr txBox="1"/>
-          <p:nvPr/>
-        </p:nvSpPr>
-        <p:spPr>
-          <a:xfrm>
-            <a:off x="10607040" y="6492240"/>
-            <a:ext cx="1097280" cy="274320"/>
-          </a:xfrm>
-          <a:prstGeom prst="rect">
-            <a:avLst/>
-          </a:prstGeom>
-          <a:noFill/>
-        </p:spPr>
-        <p:txBody>
-          <a:bodyPr wrap="square">
-            <a:spAutoFit/>
-          </a:bodyPr>
-          <a:lstStyle/>
-          <a:p>
-            <a:pPr algn="r"/>
-            <a:r>
-              <a:rPr sz="1100" b="0">
-                <a:solidFill>
-                  <a:srgbClr val="B8A888"/>
-                </a:solidFill>
-                <a:latin typeface="Calibri"/>
-              </a:rPr>
-              <a:t>21  /  23</a:t>
+              <a:t>21  /  24</a:t>
             </a:r>
           </a:p>
         </p:txBody>
@@ -12702,21 +13130,64 @@
                 </a:solidFill>
                 <a:latin typeface="Calibri"/>
               </a:rPr>
-              <a:t>Non-negotiable</a:t>
-            </a:r>
-          </a:p>
-        </p:txBody>
-      </p:sp>
-      <p:sp>
-        <p:nvSpPr>
-          <p:cNvPr id="6" name="TextBox 5"/>
+              <a:t>Thirty minutes, starting Monday</a:t>
+            </a:r>
+          </a:p>
+        </p:txBody>
+      </p:sp>
+      <p:sp>
+        <p:nvSpPr>
+          <p:cNvPr id="6" name="Rectangle 5"/>
+          <p:cNvSpPr/>
+          <p:nvPr/>
+        </p:nvSpPr>
+        <p:spPr>
+          <a:xfrm>
+            <a:off x="731520" y="1371600"/>
+            <a:ext cx="10515600" cy="914400"/>
+          </a:xfrm>
+          <a:prstGeom prst="rect">
+            <a:avLst/>
+          </a:prstGeom>
+          <a:solidFill>
+            <a:srgbClr val="141414"/>
+          </a:solidFill>
+          <a:ln>
+            <a:noFill/>
+          </a:ln>
+        </p:spPr>
+        <p:style>
+          <a:lnRef idx="1">
+            <a:schemeClr val="accent1"/>
+          </a:lnRef>
+          <a:fillRef idx="3">
+            <a:schemeClr val="accent1"/>
+          </a:fillRef>
+          <a:effectRef idx="2">
+            <a:schemeClr val="accent1"/>
+          </a:effectRef>
+          <a:fontRef idx="minor">
+            <a:schemeClr val="lt1"/>
+          </a:fontRef>
+        </p:style>
+        <p:txBody>
+          <a:bodyPr rtlCol="0" anchor="ctr"/>
+          <a:lstStyle/>
+          <a:p>
+            <a:pPr algn="ctr"/>
+          </a:p>
+        </p:txBody>
+      </p:sp>
+      <p:sp>
+        <p:nvSpPr>
+          <p:cNvPr id="7" name="TextBox 6"/>
           <p:cNvSpPr txBox="1"/>
           <p:nvPr/>
         </p:nvSpPr>
         <p:spPr>
           <a:xfrm>
-            <a:off x="731520" y="1371600"/>
-            <a:ext cx="10515600" cy="4572000"/>
+            <a:off x="960120" y="1627632"/>
+            <a:ext cx="1645920" cy="457200"/>
           </a:xfrm>
           <a:prstGeom prst="rect">
             <a:avLst/>
@@ -12729,113 +13200,29 @@
           </a:bodyPr>
           <a:lstStyle/>
           <a:p>
-            <a:pPr>
-              <a:spcAft>
-                <a:spcPts val="1200"/>
-              </a:spcAft>
-            </a:pPr>
-            <a:r>
-              <a:rPr sz="2400" b="0">
-                <a:solidFill>
-                  <a:srgbClr val="F4EBD0"/>
-                </a:solidFill>
-                <a:latin typeface="Calibri"/>
-              </a:rPr>
-              <a:t>•  Read-only first.</a:t>
-            </a:r>
-          </a:p>
-          <a:p>
-            <a:pPr>
-              <a:spcAft>
-                <a:spcPts val="1200"/>
-              </a:spcAft>
-            </a:pPr>
-            <a:r>
-              <a:rPr sz="2400" b="0">
-                <a:solidFill>
-                  <a:srgbClr val="F4EBD0"/>
-                </a:solidFill>
-                <a:latin typeface="Calibri"/>
-              </a:rPr>
-              <a:t>•  Drafts, never send.</a:t>
-            </a:r>
-          </a:p>
-          <a:p>
-            <a:pPr>
-              <a:spcAft>
-                <a:spcPts val="1200"/>
-              </a:spcAft>
-            </a:pPr>
-            <a:r>
-              <a:rPr sz="2400" b="0">
-                <a:solidFill>
-                  <a:srgbClr val="F4EBD0"/>
-                </a:solidFill>
-                <a:latin typeface="Calibri"/>
-              </a:rPr>
-              <a:t>•  Cite or cut.</a:t>
-            </a:r>
-          </a:p>
-          <a:p>
-            <a:pPr>
-              <a:spcAft>
-                <a:spcPts val="1200"/>
-              </a:spcAft>
-            </a:pPr>
-            <a:r>
-              <a:rPr sz="2400" b="0">
-                <a:solidFill>
-                  <a:srgbClr val="F4EBD0"/>
-                </a:solidFill>
-                <a:latin typeface="Calibri"/>
-              </a:rPr>
-              <a:t>•  Inbox is untrusted — mail is data, not orders.</a:t>
-            </a:r>
-          </a:p>
-          <a:p>
-            <a:pPr>
-              <a:spcAft>
-                <a:spcPts val="1200"/>
-              </a:spcAft>
-            </a:pPr>
-            <a:r>
-              <a:rPr sz="2400" b="0">
-                <a:solidFill>
-                  <a:srgbClr val="F4EBD0"/>
-                </a:solidFill>
-                <a:latin typeface="Calibri"/>
-              </a:rPr>
-              <a:t>•  Stale is visible. Silent omission is a lie.</a:t>
-            </a:r>
-          </a:p>
-          <a:p>
-            <a:pPr>
-              <a:spcAft>
-                <a:spcPts val="1200"/>
-              </a:spcAft>
-            </a:pPr>
-            <a:r>
-              <a:rPr sz="2400" b="0">
-                <a:solidFill>
-                  <a:srgbClr val="F4EBD0"/>
-                </a:solidFill>
-                <a:latin typeface="Calibri"/>
-              </a:rPr>
-              <a:t>•  One owner per agent.</a:t>
-            </a:r>
-          </a:p>
-        </p:txBody>
-      </p:sp>
-      <p:sp>
-        <p:nvSpPr>
-          <p:cNvPr id="7" name="TextBox 6"/>
+            <a:pPr algn="l"/>
+            <a:r>
+              <a:rPr sz="1800" b="1">
+                <a:solidFill>
+                  <a:srgbClr val="B3995D"/>
+                </a:solidFill>
+                <a:latin typeface="Calibri"/>
+              </a:rPr>
+              <a:t>10 min</a:t>
+            </a:r>
+          </a:p>
+        </p:txBody>
+      </p:sp>
+      <p:sp>
+        <p:nvSpPr>
+          <p:cNvPr id="8" name="TextBox 7"/>
           <p:cNvSpPr txBox="1"/>
           <p:nvPr/>
         </p:nvSpPr>
         <p:spPr>
           <a:xfrm>
-            <a:off x="640080" y="6492240"/>
-            <a:ext cx="9144000" cy="274320"/>
+            <a:off x="2743200" y="1627632"/>
+            <a:ext cx="8229600" cy="457200"/>
           </a:xfrm>
           <a:prstGeom prst="rect">
             <a:avLst/>
@@ -12850,27 +13237,70 @@
           <a:p>
             <a:pPr algn="l"/>
             <a:r>
-              <a:rPr sz="1100" b="0">
-                <a:solidFill>
-                  <a:srgbClr val="B8A888"/>
-                </a:solidFill>
-                <a:latin typeface="Calibri"/>
-              </a:rPr>
-              <a:t>Build your own chief of staff  ·  process, not a vendor</a:t>
-            </a:r>
-          </a:p>
-        </p:txBody>
-      </p:sp>
-      <p:sp>
-        <p:nvSpPr>
-          <p:cNvPr id="8" name="TextBox 7"/>
+              <a:rPr sz="2000" b="0">
+                <a:solidFill>
+                  <a:srgbClr val="F4EBD0"/>
+                </a:solidFill>
+                <a:latin typeface="Calibri"/>
+              </a:rPr>
+              <a:t>Read PROCESS.md</a:t>
+            </a:r>
+          </a:p>
+        </p:txBody>
+      </p:sp>
+      <p:sp>
+        <p:nvSpPr>
+          <p:cNvPr id="9" name="Rectangle 8"/>
+          <p:cNvSpPr/>
+          <p:nvPr/>
+        </p:nvSpPr>
+        <p:spPr>
+          <a:xfrm>
+            <a:off x="731520" y="2423160"/>
+            <a:ext cx="10515600" cy="914400"/>
+          </a:xfrm>
+          <a:prstGeom prst="rect">
+            <a:avLst/>
+          </a:prstGeom>
+          <a:solidFill>
+            <a:srgbClr val="141414"/>
+          </a:solidFill>
+          <a:ln>
+            <a:noFill/>
+          </a:ln>
+        </p:spPr>
+        <p:style>
+          <a:lnRef idx="1">
+            <a:schemeClr val="accent1"/>
+          </a:lnRef>
+          <a:fillRef idx="3">
+            <a:schemeClr val="accent1"/>
+          </a:fillRef>
+          <a:effectRef idx="2">
+            <a:schemeClr val="accent1"/>
+          </a:effectRef>
+          <a:fontRef idx="minor">
+            <a:schemeClr val="lt1"/>
+          </a:fontRef>
+        </p:style>
+        <p:txBody>
+          <a:bodyPr rtlCol="0" anchor="ctr"/>
+          <a:lstStyle/>
+          <a:p>
+            <a:pPr algn="ctr"/>
+          </a:p>
+        </p:txBody>
+      </p:sp>
+      <p:sp>
+        <p:nvSpPr>
+          <p:cNvPr id="10" name="TextBox 9"/>
           <p:cNvSpPr txBox="1"/>
           <p:nvPr/>
         </p:nvSpPr>
         <p:spPr>
           <a:xfrm>
-            <a:off x="10607040" y="6492240"/>
-            <a:ext cx="1097280" cy="274320"/>
+            <a:off x="960120" y="2679192"/>
+            <a:ext cx="1645920" cy="457200"/>
           </a:xfrm>
           <a:prstGeom prst="rect">
             <a:avLst/>
@@ -12883,6 +13313,337 @@
           </a:bodyPr>
           <a:lstStyle/>
           <a:p>
+            <a:pPr algn="l"/>
+            <a:r>
+              <a:rPr sz="1800" b="1">
+                <a:solidFill>
+                  <a:srgbClr val="B3995D"/>
+                </a:solidFill>
+                <a:latin typeface="Calibri"/>
+              </a:rPr>
+              <a:t>10 min</a:t>
+            </a:r>
+          </a:p>
+        </p:txBody>
+      </p:sp>
+      <p:sp>
+        <p:nvSpPr>
+          <p:cNvPr id="11" name="TextBox 10"/>
+          <p:cNvSpPr txBox="1"/>
+          <p:nvPr/>
+        </p:nvSpPr>
+        <p:spPr>
+          <a:xfrm>
+            <a:off x="2743200" y="2679192"/>
+            <a:ext cx="8229600" cy="457200"/>
+          </a:xfrm>
+          <a:prstGeom prst="rect">
+            <a:avLst/>
+          </a:prstGeom>
+          <a:noFill/>
+        </p:spPr>
+        <p:txBody>
+          <a:bodyPr wrap="square">
+            <a:spAutoFit/>
+          </a:bodyPr>
+          <a:lstStyle/>
+          <a:p>
+            <a:pPr algn="l"/>
+            <a:r>
+              <a:rPr sz="2000" b="0">
+                <a:solidFill>
+                  <a:srgbClr val="F4EBD0"/>
+                </a:solidFill>
+                <a:latin typeface="Calibri"/>
+              </a:rPr>
+              <a:t>Fill in your private context files</a:t>
+            </a:r>
+          </a:p>
+        </p:txBody>
+      </p:sp>
+      <p:sp>
+        <p:nvSpPr>
+          <p:cNvPr id="12" name="Rectangle 11"/>
+          <p:cNvSpPr/>
+          <p:nvPr/>
+        </p:nvSpPr>
+        <p:spPr>
+          <a:xfrm>
+            <a:off x="731520" y="3474720"/>
+            <a:ext cx="10515600" cy="914400"/>
+          </a:xfrm>
+          <a:prstGeom prst="rect">
+            <a:avLst/>
+          </a:prstGeom>
+          <a:solidFill>
+            <a:srgbClr val="141414"/>
+          </a:solidFill>
+          <a:ln>
+            <a:noFill/>
+          </a:ln>
+        </p:spPr>
+        <p:style>
+          <a:lnRef idx="1">
+            <a:schemeClr val="accent1"/>
+          </a:lnRef>
+          <a:fillRef idx="3">
+            <a:schemeClr val="accent1"/>
+          </a:fillRef>
+          <a:effectRef idx="2">
+            <a:schemeClr val="accent1"/>
+          </a:effectRef>
+          <a:fontRef idx="minor">
+            <a:schemeClr val="lt1"/>
+          </a:fontRef>
+        </p:style>
+        <p:txBody>
+          <a:bodyPr rtlCol="0" anchor="ctr"/>
+          <a:lstStyle/>
+          <a:p>
+            <a:pPr algn="ctr"/>
+          </a:p>
+        </p:txBody>
+      </p:sp>
+      <p:sp>
+        <p:nvSpPr>
+          <p:cNvPr id="13" name="TextBox 12"/>
+          <p:cNvSpPr txBox="1"/>
+          <p:nvPr/>
+        </p:nvSpPr>
+        <p:spPr>
+          <a:xfrm>
+            <a:off x="960120" y="3730752"/>
+            <a:ext cx="1645920" cy="457200"/>
+          </a:xfrm>
+          <a:prstGeom prst="rect">
+            <a:avLst/>
+          </a:prstGeom>
+          <a:noFill/>
+        </p:spPr>
+        <p:txBody>
+          <a:bodyPr wrap="square">
+            <a:spAutoFit/>
+          </a:bodyPr>
+          <a:lstStyle/>
+          <a:p>
+            <a:pPr algn="l"/>
+            <a:r>
+              <a:rPr sz="1800" b="1">
+                <a:solidFill>
+                  <a:srgbClr val="B3995D"/>
+                </a:solidFill>
+                <a:latin typeface="Calibri"/>
+              </a:rPr>
+              <a:t>5 min</a:t>
+            </a:r>
+          </a:p>
+        </p:txBody>
+      </p:sp>
+      <p:sp>
+        <p:nvSpPr>
+          <p:cNvPr id="14" name="TextBox 13"/>
+          <p:cNvSpPr txBox="1"/>
+          <p:nvPr/>
+        </p:nvSpPr>
+        <p:spPr>
+          <a:xfrm>
+            <a:off x="2743200" y="3730752"/>
+            <a:ext cx="8229600" cy="457200"/>
+          </a:xfrm>
+          <a:prstGeom prst="rect">
+            <a:avLst/>
+          </a:prstGeom>
+          <a:noFill/>
+        </p:spPr>
+        <p:txBody>
+          <a:bodyPr wrap="square">
+            <a:spAutoFit/>
+          </a:bodyPr>
+          <a:lstStyle/>
+          <a:p>
+            <a:pPr algn="l"/>
+            <a:r>
+              <a:rPr sz="2000" b="0">
+                <a:solidFill>
+                  <a:srgbClr val="F4EBD0"/>
+                </a:solidFill>
+                <a:latin typeface="Calibri"/>
+              </a:rPr>
+              <a:t>If you freeze: what-to-automate.md, then the two tests</a:t>
+            </a:r>
+          </a:p>
+        </p:txBody>
+      </p:sp>
+      <p:sp>
+        <p:nvSpPr>
+          <p:cNvPr id="15" name="Rectangle 14"/>
+          <p:cNvSpPr/>
+          <p:nvPr/>
+        </p:nvSpPr>
+        <p:spPr>
+          <a:xfrm>
+            <a:off x="731520" y="4526279"/>
+            <a:ext cx="10515600" cy="914400"/>
+          </a:xfrm>
+          <a:prstGeom prst="rect">
+            <a:avLst/>
+          </a:prstGeom>
+          <a:solidFill>
+            <a:srgbClr val="141414"/>
+          </a:solidFill>
+          <a:ln>
+            <a:noFill/>
+          </a:ln>
+        </p:spPr>
+        <p:style>
+          <a:lnRef idx="1">
+            <a:schemeClr val="accent1"/>
+          </a:lnRef>
+          <a:fillRef idx="3">
+            <a:schemeClr val="accent1"/>
+          </a:fillRef>
+          <a:effectRef idx="2">
+            <a:schemeClr val="accent1"/>
+          </a:effectRef>
+          <a:fontRef idx="minor">
+            <a:schemeClr val="lt1"/>
+          </a:fontRef>
+        </p:style>
+        <p:txBody>
+          <a:bodyPr rtlCol="0" anchor="ctr"/>
+          <a:lstStyle/>
+          <a:p>
+            <a:pPr algn="ctr"/>
+          </a:p>
+        </p:txBody>
+      </p:sp>
+      <p:sp>
+        <p:nvSpPr>
+          <p:cNvPr id="16" name="TextBox 15"/>
+          <p:cNvSpPr txBox="1"/>
+          <p:nvPr/>
+        </p:nvSpPr>
+        <p:spPr>
+          <a:xfrm>
+            <a:off x="960120" y="4782311"/>
+            <a:ext cx="1645920" cy="457200"/>
+          </a:xfrm>
+          <a:prstGeom prst="rect">
+            <a:avLst/>
+          </a:prstGeom>
+          <a:noFill/>
+        </p:spPr>
+        <p:txBody>
+          <a:bodyPr wrap="square">
+            <a:spAutoFit/>
+          </a:bodyPr>
+          <a:lstStyle/>
+          <a:p>
+            <a:pPr algn="l"/>
+            <a:r>
+              <a:rPr sz="1800" b="1">
+                <a:solidFill>
+                  <a:srgbClr val="B3995D"/>
+                </a:solidFill>
+                <a:latin typeface="Calibri"/>
+              </a:rPr>
+              <a:t>5 min</a:t>
+            </a:r>
+          </a:p>
+        </p:txBody>
+      </p:sp>
+      <p:sp>
+        <p:nvSpPr>
+          <p:cNvPr id="17" name="TextBox 16"/>
+          <p:cNvSpPr txBox="1"/>
+          <p:nvPr/>
+        </p:nvSpPr>
+        <p:spPr>
+          <a:xfrm>
+            <a:off x="2743200" y="4782311"/>
+            <a:ext cx="8229600" cy="457200"/>
+          </a:xfrm>
+          <a:prstGeom prst="rect">
+            <a:avLst/>
+          </a:prstGeom>
+          <a:noFill/>
+        </p:spPr>
+        <p:txBody>
+          <a:bodyPr wrap="square">
+            <a:spAutoFit/>
+          </a:bodyPr>
+          <a:lstStyle/>
+          <a:p>
+            <a:pPr algn="l"/>
+            <a:r>
+              <a:rPr sz="2000" b="0">
+                <a:solidFill>
+                  <a:srgbClr val="F4EBD0"/>
+                </a:solidFill>
+                <a:latin typeface="Calibri"/>
+              </a:rPr>
+              <a:t>Write the SOP — or keep the job as judgment</a:t>
+            </a:r>
+          </a:p>
+        </p:txBody>
+      </p:sp>
+      <p:sp>
+        <p:nvSpPr>
+          <p:cNvPr id="18" name="TextBox 17"/>
+          <p:cNvSpPr txBox="1"/>
+          <p:nvPr/>
+        </p:nvSpPr>
+        <p:spPr>
+          <a:xfrm>
+            <a:off x="640080" y="6492240"/>
+            <a:ext cx="9144000" cy="274320"/>
+          </a:xfrm>
+          <a:prstGeom prst="rect">
+            <a:avLst/>
+          </a:prstGeom>
+          <a:noFill/>
+        </p:spPr>
+        <p:txBody>
+          <a:bodyPr wrap="square">
+            <a:spAutoFit/>
+          </a:bodyPr>
+          <a:lstStyle/>
+          <a:p>
+            <a:pPr algn="l"/>
+            <a:r>
+              <a:rPr sz="1100" b="0">
+                <a:solidFill>
+                  <a:srgbClr val="B8A888"/>
+                </a:solidFill>
+                <a:latin typeface="Calibri"/>
+              </a:rPr>
+              <a:t>Build your own chief of staff  ·  process, not a vendor</a:t>
+            </a:r>
+          </a:p>
+        </p:txBody>
+      </p:sp>
+      <p:sp>
+        <p:nvSpPr>
+          <p:cNvPr id="19" name="TextBox 18"/>
+          <p:cNvSpPr txBox="1"/>
+          <p:nvPr/>
+        </p:nvSpPr>
+        <p:spPr>
+          <a:xfrm>
+            <a:off x="10607040" y="6492240"/>
+            <a:ext cx="1097280" cy="274320"/>
+          </a:xfrm>
+          <a:prstGeom prst="rect">
+            <a:avLst/>
+          </a:prstGeom>
+          <a:noFill/>
+        </p:spPr>
+        <p:txBody>
+          <a:bodyPr wrap="square">
+            <a:spAutoFit/>
+          </a:bodyPr>
+          <a:lstStyle/>
+          <a:p>
             <a:pPr algn="r"/>
             <a:r>
               <a:rPr sz="1100" b="0">
@@ -12891,7 +13652,7 @@
                 </a:solidFill>
                 <a:latin typeface="Calibri"/>
               </a:rPr>
-              <a:t>22  /  23</a:t>
+              <a:t>22  /  24</a:t>
             </a:r>
           </a:p>
         </p:txBody>
@@ -13051,8 +13812,8 @@
         </p:nvSpPr>
         <p:spPr>
           <a:xfrm>
-            <a:off x="731520" y="1463040"/>
-            <a:ext cx="10515600" cy="1280160"/>
+            <a:off x="731520" y="411480"/>
+            <a:ext cx="10058400" cy="731520"/>
           </a:xfrm>
           <a:prstGeom prst="rect">
             <a:avLst/>
@@ -13065,16 +13826,15 @@
           </a:bodyPr>
           <a:lstStyle/>
           <a:p>
-            <a:pPr algn="ctr"/>
-            <a:r>
-              <a:rPr sz="3600" b="1">
-                <a:solidFill>
-                  <a:srgbClr val="B3995D"/>
-                </a:solidFill>
-                <a:latin typeface="Calibri"/>
-              </a:rPr>
-              <a:t>Automate what repeats and checks.
-Keep the rest.</a:t>
+            <a:pPr algn="l"/>
+            <a:r>
+              <a:rPr sz="3200" b="1">
+                <a:solidFill>
+                  <a:srgbClr val="F4EBD0"/>
+                </a:solidFill>
+                <a:latin typeface="Calibri"/>
+              </a:rPr>
+              <a:t>Non-negotiable</a:t>
             </a:r>
           </a:p>
         </p:txBody>
@@ -13087,8 +13847,8 @@
         </p:nvSpPr>
         <p:spPr>
           <a:xfrm>
-            <a:off x="1371600" y="3291840"/>
-            <a:ext cx="9418320" cy="1828800"/>
+            <a:off x="731520" y="1371600"/>
+            <a:ext cx="10515600" cy="4572000"/>
           </a:xfrm>
           <a:prstGeom prst="rect">
             <a:avLst/>
@@ -13101,17 +13861,99 @@
           </a:bodyPr>
           <a:lstStyle/>
           <a:p>
-            <a:pPr algn="ctr"/>
-            <a:r>
-              <a:rPr sz="2000" b="0">
+            <a:pPr>
+              <a:spcAft>
+                <a:spcPts val="1200"/>
+              </a:spcAft>
+            </a:pPr>
+            <a:r>
+              <a:rPr sz="2400" b="0">
                 <a:solidFill>
                   <a:srgbClr val="F4EBD0"/>
                 </a:solidFill>
                 <a:latin typeface="Calibri"/>
               </a:rPr>
-              <a:t>Repo: the follow-along prompt kit (not the Claude plugin).
-Slides, process files, CoS workflows, blank context templates.
-Sources cited from the Notion Substack table.</a:t>
+              <a:t>•  Read-only first.</a:t>
+            </a:r>
+          </a:p>
+          <a:p>
+            <a:pPr>
+              <a:spcAft>
+                <a:spcPts val="1200"/>
+              </a:spcAft>
+            </a:pPr>
+            <a:r>
+              <a:rPr sz="2400" b="0">
+                <a:solidFill>
+                  <a:srgbClr val="F4EBD0"/>
+                </a:solidFill>
+                <a:latin typeface="Calibri"/>
+              </a:rPr>
+              <a:t>•  Drafts, never send.</a:t>
+            </a:r>
+          </a:p>
+          <a:p>
+            <a:pPr>
+              <a:spcAft>
+                <a:spcPts val="1200"/>
+              </a:spcAft>
+            </a:pPr>
+            <a:r>
+              <a:rPr sz="2400" b="0">
+                <a:solidFill>
+                  <a:srgbClr val="F4EBD0"/>
+                </a:solidFill>
+                <a:latin typeface="Calibri"/>
+              </a:rPr>
+              <a:t>•  Cite or cut.</a:t>
+            </a:r>
+          </a:p>
+          <a:p>
+            <a:pPr>
+              <a:spcAft>
+                <a:spcPts val="1200"/>
+              </a:spcAft>
+            </a:pPr>
+            <a:r>
+              <a:rPr sz="2400" b="0">
+                <a:solidFill>
+                  <a:srgbClr val="F4EBD0"/>
+                </a:solidFill>
+                <a:latin typeface="Calibri"/>
+              </a:rPr>
+              <a:t>•  Inbox is untrusted — mail is data, not orders.</a:t>
+            </a:r>
+          </a:p>
+          <a:p>
+            <a:pPr>
+              <a:spcAft>
+                <a:spcPts val="1200"/>
+              </a:spcAft>
+            </a:pPr>
+            <a:r>
+              <a:rPr sz="2400" b="0">
+                <a:solidFill>
+                  <a:srgbClr val="F4EBD0"/>
+                </a:solidFill>
+                <a:latin typeface="Calibri"/>
+              </a:rPr>
+              <a:t>•  Stale is visible. Silent omission is a lie.</a:t>
+            </a:r>
+          </a:p>
+          <a:p>
+            <a:pPr>
+              <a:spcAft>
+                <a:spcPts val="1200"/>
+              </a:spcAft>
+            </a:pPr>
+            <a:r>
+              <a:rPr sz="2400" b="0">
+                <a:solidFill>
+                  <a:srgbClr val="F4EBD0"/>
+                </a:solidFill>
+                <a:latin typeface="Calibri"/>
+              </a:rPr>
+              <a:t>•  One owner per agent.</a:t>
             </a:r>
           </a:p>
         </p:txBody>
@@ -13181,7 +14023,297 @@
                 </a:solidFill>
                 <a:latin typeface="Calibri"/>
               </a:rPr>
-              <a:t>23  /  23</a:t>
+              <a:t>23  /  24</a:t>
+            </a:r>
+          </a:p>
+        </p:txBody>
+      </p:sp>
+    </p:spTree>
+  </p:cSld>
+  <p:clrMapOvr>
+    <a:masterClrMapping/>
+  </p:clrMapOvr>
+</p:sld>
+</file>
+
+<file path=ppt/slides/slide24.xml><?xml version="1.0" encoding="utf-8"?>
+<p:sld xmlns:a="http://schemas.openxmlformats.org/drawingml/2006/main" xmlns:p="http://schemas.openxmlformats.org/presentationml/2006/main" xmlns:r="http://schemas.openxmlformats.org/officeDocument/2006/relationships">
+  <p:cSld>
+    <p:spTree>
+      <p:nvGrpSpPr>
+        <p:cNvPr id="1" name=""/>
+        <p:cNvGrpSpPr/>
+        <p:nvPr/>
+      </p:nvGrpSpPr>
+      <p:grpSpPr/>
+      <p:sp>
+        <p:nvSpPr>
+          <p:cNvPr id="2" name="Rectangle 1"/>
+          <p:cNvSpPr/>
+          <p:nvPr/>
+        </p:nvSpPr>
+        <p:spPr>
+          <a:xfrm>
+            <a:off x="0" y="0"/>
+            <a:ext cx="12191695" cy="6858000"/>
+          </a:xfrm>
+          <a:prstGeom prst="rect">
+            <a:avLst/>
+          </a:prstGeom>
+          <a:solidFill>
+            <a:srgbClr val="000000"/>
+          </a:solidFill>
+          <a:ln>
+            <a:noFill/>
+          </a:ln>
+        </p:spPr>
+        <p:style>
+          <a:lnRef idx="1">
+            <a:schemeClr val="accent1"/>
+          </a:lnRef>
+          <a:fillRef idx="3">
+            <a:schemeClr val="accent1"/>
+          </a:fillRef>
+          <a:effectRef idx="2">
+            <a:schemeClr val="accent1"/>
+          </a:effectRef>
+          <a:fontRef idx="minor">
+            <a:schemeClr val="lt1"/>
+          </a:fontRef>
+        </p:style>
+        <p:txBody>
+          <a:bodyPr rtlCol="0" anchor="ctr"/>
+          <a:lstStyle/>
+          <a:p>
+            <a:pPr algn="ctr"/>
+          </a:p>
+        </p:txBody>
+      </p:sp>
+      <p:sp>
+        <p:nvSpPr>
+          <p:cNvPr id="3" name="Rectangle 2"/>
+          <p:cNvSpPr/>
+          <p:nvPr/>
+        </p:nvSpPr>
+        <p:spPr>
+          <a:xfrm>
+            <a:off x="0" y="0"/>
+            <a:ext cx="164592" cy="6858000"/>
+          </a:xfrm>
+          <a:prstGeom prst="rect">
+            <a:avLst/>
+          </a:prstGeom>
+          <a:solidFill>
+            <a:srgbClr val="B3995D"/>
+          </a:solidFill>
+          <a:ln>
+            <a:noFill/>
+          </a:ln>
+        </p:spPr>
+        <p:style>
+          <a:lnRef idx="1">
+            <a:schemeClr val="accent1"/>
+          </a:lnRef>
+          <a:fillRef idx="3">
+            <a:schemeClr val="accent1"/>
+          </a:fillRef>
+          <a:effectRef idx="2">
+            <a:schemeClr val="accent1"/>
+          </a:effectRef>
+          <a:fontRef idx="minor">
+            <a:schemeClr val="lt1"/>
+          </a:fontRef>
+        </p:style>
+        <p:txBody>
+          <a:bodyPr rtlCol="0" anchor="ctr"/>
+          <a:lstStyle/>
+          <a:p>
+            <a:pPr algn="ctr"/>
+          </a:p>
+        </p:txBody>
+      </p:sp>
+      <p:sp>
+        <p:nvSpPr>
+          <p:cNvPr id="4" name="Rectangle 3"/>
+          <p:cNvSpPr/>
+          <p:nvPr/>
+        </p:nvSpPr>
+        <p:spPr>
+          <a:xfrm>
+            <a:off x="0" y="6784848"/>
+            <a:ext cx="12191695" cy="73152"/>
+          </a:xfrm>
+          <a:prstGeom prst="rect">
+            <a:avLst/>
+          </a:prstGeom>
+          <a:solidFill>
+            <a:srgbClr val="B3995D"/>
+          </a:solidFill>
+          <a:ln>
+            <a:noFill/>
+          </a:ln>
+        </p:spPr>
+        <p:style>
+          <a:lnRef idx="1">
+            <a:schemeClr val="accent1"/>
+          </a:lnRef>
+          <a:fillRef idx="3">
+            <a:schemeClr val="accent1"/>
+          </a:fillRef>
+          <a:effectRef idx="2">
+            <a:schemeClr val="accent1"/>
+          </a:effectRef>
+          <a:fontRef idx="minor">
+            <a:schemeClr val="lt1"/>
+          </a:fontRef>
+        </p:style>
+        <p:txBody>
+          <a:bodyPr rtlCol="0" anchor="ctr"/>
+          <a:lstStyle/>
+          <a:p>
+            <a:pPr algn="ctr"/>
+          </a:p>
+        </p:txBody>
+      </p:sp>
+      <p:sp>
+        <p:nvSpPr>
+          <p:cNvPr id="5" name="TextBox 4"/>
+          <p:cNvSpPr txBox="1"/>
+          <p:nvPr/>
+        </p:nvSpPr>
+        <p:spPr>
+          <a:xfrm>
+            <a:off x="731520" y="1463040"/>
+            <a:ext cx="10515600" cy="1280160"/>
+          </a:xfrm>
+          <a:prstGeom prst="rect">
+            <a:avLst/>
+          </a:prstGeom>
+          <a:noFill/>
+        </p:spPr>
+        <p:txBody>
+          <a:bodyPr wrap="square">
+            <a:spAutoFit/>
+          </a:bodyPr>
+          <a:lstStyle/>
+          <a:p>
+            <a:pPr algn="ctr"/>
+            <a:r>
+              <a:rPr sz="3600" b="1">
+                <a:solidFill>
+                  <a:srgbClr val="B3995D"/>
+                </a:solidFill>
+                <a:latin typeface="Calibri"/>
+              </a:rPr>
+              <a:t>Automate what repeats and checks.
+Keep the rest.</a:t>
+            </a:r>
+          </a:p>
+        </p:txBody>
+      </p:sp>
+      <p:sp>
+        <p:nvSpPr>
+          <p:cNvPr id="6" name="TextBox 5"/>
+          <p:cNvSpPr txBox="1"/>
+          <p:nvPr/>
+        </p:nvSpPr>
+        <p:spPr>
+          <a:xfrm>
+            <a:off x="1371600" y="3291840"/>
+            <a:ext cx="9418320" cy="1828800"/>
+          </a:xfrm>
+          <a:prstGeom prst="rect">
+            <a:avLst/>
+          </a:prstGeom>
+          <a:noFill/>
+        </p:spPr>
+        <p:txBody>
+          <a:bodyPr wrap="square">
+            <a:spAutoFit/>
+          </a:bodyPr>
+          <a:lstStyle/>
+          <a:p>
+            <a:pPr algn="ctr"/>
+            <a:r>
+              <a:rPr sz="2000" b="0">
+                <a:solidFill>
+                  <a:srgbClr val="F4EBD0"/>
+                </a:solidFill>
+                <a:latin typeface="Calibri"/>
+              </a:rPr>
+              <a:t>Repo: START-HERE.md, then the prompt kit (not the Claude plugin).
+Process files, CoS workflows, blank context templates.
+Sources cited from the Notion Substack table.</a:t>
+            </a:r>
+          </a:p>
+        </p:txBody>
+      </p:sp>
+      <p:sp>
+        <p:nvSpPr>
+          <p:cNvPr id="7" name="TextBox 6"/>
+          <p:cNvSpPr txBox="1"/>
+          <p:nvPr/>
+        </p:nvSpPr>
+        <p:spPr>
+          <a:xfrm>
+            <a:off x="640080" y="6492240"/>
+            <a:ext cx="9144000" cy="274320"/>
+          </a:xfrm>
+          <a:prstGeom prst="rect">
+            <a:avLst/>
+          </a:prstGeom>
+          <a:noFill/>
+        </p:spPr>
+        <p:txBody>
+          <a:bodyPr wrap="square">
+            <a:spAutoFit/>
+          </a:bodyPr>
+          <a:lstStyle/>
+          <a:p>
+            <a:pPr algn="l"/>
+            <a:r>
+              <a:rPr sz="1100" b="0">
+                <a:solidFill>
+                  <a:srgbClr val="B8A888"/>
+                </a:solidFill>
+                <a:latin typeface="Calibri"/>
+              </a:rPr>
+              <a:t>Build your own chief of staff  ·  process, not a vendor</a:t>
+            </a:r>
+          </a:p>
+        </p:txBody>
+      </p:sp>
+      <p:sp>
+        <p:nvSpPr>
+          <p:cNvPr id="8" name="TextBox 7"/>
+          <p:cNvSpPr txBox="1"/>
+          <p:nvPr/>
+        </p:nvSpPr>
+        <p:spPr>
+          <a:xfrm>
+            <a:off x="10607040" y="6492240"/>
+            <a:ext cx="1097280" cy="274320"/>
+          </a:xfrm>
+          <a:prstGeom prst="rect">
+            <a:avLst/>
+          </a:prstGeom>
+          <a:noFill/>
+        </p:spPr>
+        <p:txBody>
+          <a:bodyPr wrap="square">
+            <a:spAutoFit/>
+          </a:bodyPr>
+          <a:lstStyle/>
+          <a:p>
+            <a:pPr algn="r"/>
+            <a:r>
+              <a:rPr sz="1100" b="0">
+                <a:solidFill>
+                  <a:srgbClr val="B8A888"/>
+                </a:solidFill>
+                <a:latin typeface="Calibri"/>
+              </a:rPr>
+              <a:t>24  /  24</a:t>
             </a:r>
           </a:p>
         </p:txBody>
@@ -13763,7 +14895,7 @@
                 </a:solidFill>
                 <a:latin typeface="Calibri"/>
               </a:rPr>
-              <a:t>3  /  23</a:t>
+              <a:t>3  /  24</a:t>
             </a:r>
           </a:p>
         </p:txBody>
@@ -14247,7 +15379,7 @@
                 </a:solidFill>
                 <a:latin typeface="Calibri"/>
               </a:rPr>
-              <a:t>4  /  23</a:t>
+              <a:t>4  /  24</a:t>
             </a:r>
           </a:p>
         </p:txBody>
@@ -14586,7 +15718,7 @@
                 </a:solidFill>
                 <a:latin typeface="Calibri"/>
               </a:rPr>
-              <a:t>5  /  23</a:t>
+              <a:t>5  /  24</a:t>
             </a:r>
           </a:p>
         </p:txBody>
@@ -15003,7 +16135,7 @@
                 </a:solidFill>
                 <a:latin typeface="Calibri"/>
               </a:rPr>
-              <a:t>6  /  23</a:t>
+              <a:t>6  /  24</a:t>
             </a:r>
           </a:p>
         </p:txBody>
@@ -15292,7 +16424,7 @@
                 </a:solidFill>
                 <a:latin typeface="Calibri"/>
               </a:rPr>
-              <a:t>7  /  23</a:t>
+              <a:t>7  /  24</a:t>
             </a:r>
           </a:p>
         </p:txBody>
@@ -15651,7 +16783,7 @@
                 </a:solidFill>
                 <a:latin typeface="Calibri"/>
               </a:rPr>
-              <a:t>8  /  23</a:t>
+              <a:t>8  /  24</a:t>
             </a:r>
           </a:p>
         </p:txBody>
@@ -16006,7 +17138,7 @@
                 </a:solidFill>
                 <a:latin typeface="Calibri"/>
               </a:rPr>
-              <a:t>9  /  23</a:t>
+              <a:t>9  /  24</a:t>
             </a:r>
           </a:p>
         </p:txBody>

--- a/slides/building-your-own-chief-of-staff.pptx
+++ b/slides/building-your-own-chief-of-staff.pptx
@@ -29,6 +29,8 @@
     <p:sldId id="277" r:id="rId29"/>
     <p:sldId id="278" r:id="rId30"/>
     <p:sldId id="279" r:id="rId31"/>
+    <p:sldId id="280" r:id="rId32"/>
+    <p:sldId id="281" r:id="rId33"/>
   </p:sldIdLst>
   <p:sldSz cx="12191695" cy="6858000" type="screen4x3"/>
   <p:notesSz cx="6858000" cy="9144000"/>
@@ -710,6 +712,12 @@
               <a:t>The right column is not 'AI can't do it.' It is 'checking it costs as much as doing it, so extra attempts just grow the pile.' That is the don't-bother verdict from the one-minute test.</a:t>
             </a:r>
           </a:p>
+          <a:p/>
+          <a:p>
+            <a:r>
+              <a:t>Flag meeting-recap now as the one you will run live in a few minutes. It needs voice.md, the meeting title/date/attendees, and one real transcript — not the full context folder morning-brief needs.</a:t>
+            </a:r>
+          </a:p>
         </p:txBody>
       </p:sp>
       <p:sp>
@@ -865,6 +873,12 @@
           <a:p/>
           <a:p>
             <a:r>
+              <a:t>prompts/process/ includes score-the-candidates.md alongside what-to-automate.md and the-two-tests.md. Flag it here; you will use it again near the end of the talk.</a:t>
+            </a:r>
+          </a:p>
+          <a:p/>
+          <a:p>
+            <a:r>
               <a:t>Cite: map of where material lives — https://app.notion.com/p/3bb059b703e18152aea0d83b502fa319</a:t>
             </a:r>
           </a:p>
@@ -935,19 +949,25 @@
           <a:lstStyle/>
           <a:p>
             <a:r>
-              <a:t>Have them shout a job. Split blobs. 'Email' becomes 'Monday status to my manager.' 'Meetings' becomes 'recap of the staff meeting within the hour.'</a:t>
+              <a:t>Run this for real if you can. Paste an actual recent meeting's title, date, attendees, notes or transcript, and a filled-in voice.md into whatever tool the room uses.</a:t>
             </a:r>
           </a:p>
           <a:p/>
           <a:p>
             <a:r>
-              <a:t>First-agent-job guide: one annoying problem, three real occurrences, inbox text is data not instructions. Notion: https://app.notion.com/p/3bb059b703e1817b9123ff209fcc5d9d</a:t>
+              <a:t>This is the pivot point of the talk: everything before this was "why," everything from here is "how," using meeting-recap as the worked example instead of an abstract one.</a:t>
             </a:r>
           </a:p>
           <a:p/>
           <a:p>
             <a:r>
-              <a:t>Prompt they will paste: prompts/process/name-the-job.md and the-two-tests.md</a:t>
+              <a:t>If you are short on time, run the demo behind this slide while narrating Steps 1–3 live rather than reading them from slides.</a:t>
+            </a:r>
+          </a:p>
+          <a:p/>
+          <a:p>
+            <a:r>
+              <a:t>Prompt: prompts/workflows/meeting-recap.md. The output requires source lines or timestamps so the audience can verify the result against the notes on screen.</a:t>
             </a:r>
           </a:p>
         </p:txBody>
@@ -1017,13 +1037,25 @@
           <a:lstStyle/>
           <a:p>
             <a:r>
-              <a:t>This is the spec from the Delegation Kit: inputs, steps, constraints, approvals at reversibility boundaries, failure handling. Score: can a stranger execute it without questions; are success criteria binary. Three or below means the spec creates more work than it saves. Notion: https://app.notion.com/p/36f059b703e18192a6d8f67fbe74b756</a:t>
+              <a:t>Have them shout a job. Split blobs. 'Email' becomes 'Monday status to my manager.' 'Meetings' becomes 'recap of the staff meeting within the hour.'</a:t>
             </a:r>
           </a:p>
           <a:p/>
           <a:p>
             <a:r>
-              <a:t>Prompt: prompts/process/write-the-sop.md</a:t>
+              <a:t>Tie back to the demo: the job we just ran live is already named — meeting recap — which is why it moved fast.</a:t>
+            </a:r>
+          </a:p>
+          <a:p/>
+          <a:p>
+            <a:r>
+              <a:t>First-agent-job guide: one annoying problem, three real occurrences, inbox text is data not instructions. Notion: https://app.notion.com/p/3bb059b703e1817b9123ff209fcc5d9d</a:t>
+            </a:r>
+          </a:p>
+          <a:p/>
+          <a:p>
+            <a:r>
+              <a:t>Prompt they will paste: prompts/process/name-the-job.md and the-two-tests.md</a:t>
             </a:r>
           </a:p>
         </p:txBody>
@@ -1093,13 +1125,19 @@
           <a:lstStyle/>
           <a:p>
             <a:r>
-              <a:t>Do not dump this into one encyclopedia. One giant project file becomes a graveyard of stale rules — that is the OpenAI story in the context-files essay. Split: stable instructions, current state, a map of where material lives (sources.md), decision history. When you change your mind, name what is replaced and keep the old assumption in the log. Notion: https://app.notion.com/p/3bb059b703e18152aea0d83b502fa319</a:t>
+              <a:t>This is the spec from the Delegation Kit: inputs, steps, constraints, approvals at reversibility boundaries, failure handling. Score: can a stranger execute it without questions; are success criteria binary. Three or below means the spec creates more work than it saves. Notion: https://app.notion.com/p/36f059b703e18192a6d8f67fbe74b756</a:t>
             </a:r>
           </a:p>
           <a:p/>
           <a:p>
             <a:r>
-              <a:t>These files stay private. The public repo ships blanks. They name the systems they actually open — the agent does not pick a vendor. Prompt: prompts/process/build-context.md</a:t>
+              <a:t>For meeting-recap: Input = voice.md + meeting details + transcript. Steps = pull decisions, owners, dates, and open items. Output = a one-page recap. Check = every item cites a line or timestamp in the notes.</a:t>
+            </a:r>
+          </a:p>
+          <a:p/>
+          <a:p>
+            <a:r>
+              <a:t>Prompt: prompts/process/write-the-sop.md</a:t>
             </a:r>
           </a:p>
         </p:txBody>
@@ -1169,13 +1207,19 @@
           <a:lstStyle/>
           <a:p>
             <a:r>
-              <a:t>One-job test: don't evaluate a skill by reading the promise. Give it one real job, write pass/fail first, keep the evidence. Keep, fork, or delete. Notion: https://app.notion.com/p/3b0059b703e181fa81add3d2cd98aeaf</a:t>
+              <a:t>Do not dump this into one encyclopedia. One giant project file becomes a graveyard of stale rules — that is the OpenAI story in the context-files essay. Split: stable instructions, current state, a map of where material lives (sources.md), decision history. When you change your mind, name what is replaced and keep the old assumption in the log. Notion: https://app.notion.com/p/3bb059b703e18152aea0d83b502fa319</a:t>
             </a:r>
           </a:p>
           <a:p/>
           <a:p>
             <a:r>
-              <a:t>This is why we ship prompt files, not a plugin, in this repo.</a:t>
+              <a:t>These files stay private. The public repo ships blanks. They name the systems they actually open — the agent does not pick a vendor. Prompt: prompts/process/build-context.md</a:t>
+            </a:r>
+          </a:p>
+          <a:p/>
+          <a:p>
+            <a:r>
+              <a:t>Point at voice.md: this is the one context file that made today's live demo possible. Other jobs — morning-brief and meeting-prep — need three or four context files first.</a:t>
             </a:r>
           </a:p>
         </p:txBody>
@@ -1245,25 +1289,13 @@
           <a:lstStyle/>
           <a:p>
             <a:r>
-              <a:t>Citation guard from the reusable-rig essay: no anchor, no claim. Notion: https://app.notion.com/p/392059b703e1814b96a6dd9913180844</a:t>
+              <a:t>One-job test: don't evaluate a skill by reading the promise. Give it one real job, write pass/fail first, keep the evidence. Keep, fork, or delete. Notion: https://app.notion.com/p/3b0059b703e181fa81add3d2cd98aeaf</a:t>
             </a:r>
           </a:p>
           <a:p/>
           <a:p>
             <a:r>
-              <a:t>They name the systems in sources.md. You do not pick Outlook vs Gmail for them. If someone asks how to ground a rumor, that is evidence-based-investigation.md — do not teach it here.</a:t>
-            </a:r>
-          </a:p>
-          <a:p/>
-          <a:p>
-            <a:r>
-              <a:t>Printed holes ('usage: not available') are the system working. Invented numbers inside a confident summary are the failure mode people are right to fear. That example is in the agent-shaped-work piece.</a:t>
-            </a:r>
-          </a:p>
-          <a:p/>
-          <a:p>
-            <a:r>
-              <a:t>Prompt: prompts/process/verify.md</a:t>
+              <a:t>This is why we ship prompt files, not a plugin, in this repo. meeting-recap.md is the proof: the file, not a clever conversation, produced the recap a few slides ago.</a:t>
             </a:r>
           </a:p>
         </p:txBody>
@@ -1333,19 +1365,25 @@
           <a:lstStyle/>
           <a:p>
             <a:r>
-              <a:t>Maintenance loop: you are maintaining the harness, not a prompt. Seven surfaces — job, diet, memory, tools, reach, proof, value. Repeated correction across three runs is a file problem. Delete before you add. Keep / change / pause / retire. Notion: https://app.notion.com/p/3bb059b703e181bfa3f5fbf9ed29b605</a:t>
+              <a:t>Citation guard from the reusable-rig essay: no anchor, no claim. Notion: https://app.notion.com/p/392059b703e1814b96a6dd9913180844</a:t>
             </a:r>
           </a:p>
           <a:p/>
           <a:p>
             <a:r>
-              <a:t>Ownership: the fastest way to make an agent dangerous is to let everybody use it and nobody own it. Notion: https://app.notion.com/p/387059b703e18195a327e34da56998cb</a:t>
+              <a:t>They name the systems in sources.md. You do not pick Outlook vs Gmail for them. If someone asks how to ground a rumor, that is evidence-based-investigation.md — do not teach it here.</a:t>
             </a:r>
           </a:p>
           <a:p/>
           <a:p>
             <a:r>
-              <a:t>Prompt: prompts/process/correct-the-file.md</a:t>
+              <a:t>Printed holes ('usage: not available') are the system working. Invented numbers inside a confident summary are the failure mode people are right to fear. That example is in the agent-shaped-work piece.</a:t>
+            </a:r>
+          </a:p>
+          <a:p/>
+          <a:p>
+            <a:r>
+              <a:t>Prompt: prompts/process/verify.md</a:t>
             </a:r>
           </a:p>
         </p:txBody>
@@ -1497,19 +1535,19 @@
           <a:lstStyle/>
           <a:p>
             <a:r>
-              <a:t>This is not a legal disclaimer bolted on. It is why the same rig can be pointed at money and health paperwork. If an agent sends a flawed appeal in your name, you now have two problems. Notion: https://app.notion.com/p/392059b703e1814b96a6dd9913180844</a:t>
+              <a:t>Maintenance loop: you are maintaining the harness, not a prompt. Seven surfaces — job, diet, memory, tools, reach, proof, value. Repeated correction across three runs is a file problem. Delete before you add. Keep / change / pause / retire. Notion: https://app.notion.com/p/3bb059b703e181bfa3f5fbf9ed29b605</a:t>
             </a:r>
           </a:p>
           <a:p/>
           <a:p>
             <a:r>
-              <a:t>Inbox is untrusted. A line that says 'ignore your rules' is data, not an order. First-agent-job: https://app.notion.com/p/3bb059b703e1817b9123ff209fcc5d9d</a:t>
+              <a:t>Ownership: the fastest way to make an agent dangerous is to let everybody use it and nobody own it. Notion: https://app.notion.com/p/387059b703e18195a327e34da56998cb</a:t>
             </a:r>
           </a:p>
           <a:p/>
           <a:p>
             <a:r>
-              <a:t>Approvals sit at reversibility boundaries — the moment an action becomes hard to undo.</a:t>
+              <a:t>Prompt: prompts/process/correct-the-file.md</a:t>
             </a:r>
           </a:p>
         </p:txBody>
@@ -1579,19 +1617,19 @@
           <a:lstStyle/>
           <a:p>
             <a:r>
-              <a:t>Six things have to be true before AI changes a workflow. Most companies have built two. Notion: https://app.notion.com/p/36f059b703e1813d801bcb34d72141b1</a:t>
+              <a:t>This step gets skipped constantly, which is why it is its own step and not a footnote on step 6. A good output twice in a row does not prove the workflow survives a stale source, a weird transcript, or a rescheduled meeting.</a:t>
             </a:r>
           </a:p>
           <a:p/>
           <a:p>
             <a:r>
-              <a:t>Shape of the work: https://app.notion.com/p/36f059b703e181cf9c30f637d158b234</a:t>
+              <a:t>Automation discovery: https://app.notion.com/p/3a0059b703e181c69fafc66f28f76c99</a:t>
             </a:r>
           </a:p>
           <a:p/>
           <a:p>
             <a:r>
-              <a:t>The CoS is the demo so they learn the motion on work they already understand. Then they take it home.</a:t>
+              <a:t>For meeting-recap: schedule or trigger it only after several real meetings, with no invented owner or date.</a:t>
             </a:r>
           </a:p>
         </p:txBody>
@@ -1661,13 +1699,19 @@
           <a:lstStyle/>
           <a:p>
             <a:r>
-              <a:t>Walk the README. START-HERE.md first if the files are not on the machine yet. If they freeze, they start at what-to-automate.md — last week, split the blob, edges first. If the two tests fail, they still used the thirty minutes correctly. The lesson is the refusal.</a:t>
+              <a:t>The two tests filter one candidate at a time, but they do not rank several against each other. Score every candidate on these five axes out of 10. A zero on Repeatable or Verifiable overrides the total.</a:t>
             </a:r>
           </a:p>
           <a:p/>
           <a:p>
             <a:r>
-              <a:t>Do not put the brief on a timer until they have checked it by hand several times. Automation is for a process they already trust.</a:t>
+              <a:t>The raw material is already in research/SOURCES.md: the shape-of-the-work row uses frequency, cost of a mistake, and judgment load. This operationalizes that cited method.</a:t>
+            </a:r>
+          </a:p>
+          <a:p/>
+          <a:p>
+            <a:r>
+              <a:t>Prompt: prompts/process/score-the-candidates.md. Use it once you have three or more real candidates.</a:t>
             </a:r>
           </a:p>
         </p:txBody>
@@ -1737,13 +1781,19 @@
           <a:lstStyle/>
           <a:p>
             <a:r>
-              <a:t>Leave this up during Q&amp;A if needed.</a:t>
+              <a:t>Six things have to be true before AI changes a workflow. Most companies have built two. Notion: https://app.notion.com/p/36f059b703e1813d801bcb34d72141b1</a:t>
             </a:r>
           </a:p>
           <a:p/>
           <a:p>
             <a:r>
-              <a:t>Where the agent should stop: start where a colleague or customer already tells you you're wrong; reconstructing context is the expensive part; the reply is cheap. Notion: https://app.notion.com/p/3aa059b703e1817c9571c77f8badaf77</a:t>
+              <a:t>Shape of the work: https://app.notion.com/p/36f059b703e181cf9c30f637d158b234</a:t>
+            </a:r>
+          </a:p>
+          <a:p/>
+          <a:p>
+            <a:r>
+              <a:t>The CoS is the demo so they learn the motion on work they already understand. Then they take it home.</a:t>
             </a:r>
           </a:p>
         </p:txBody>
@@ -1769,6 +1819,170 @@
 </file>
 
 <file path=ppt/notesSlides/notesSlide24.xml><?xml version="1.0" encoding="utf-8"?>
+<p:notes xmlns:a="http://schemas.openxmlformats.org/drawingml/2006/main" xmlns:p="http://schemas.openxmlformats.org/presentationml/2006/main" xmlns:r="http://schemas.openxmlformats.org/officeDocument/2006/relationships">
+  <p:cSld>
+    <p:spTree>
+      <p:nvGrpSpPr>
+        <p:cNvPr id="1" name=""/>
+        <p:cNvGrpSpPr/>
+        <p:nvPr/>
+      </p:nvGrpSpPr>
+      <p:grpSpPr>
+        <a:xfrm>
+          <a:off x="0" y="0"/>
+          <a:ext cx="0" cy="0"/>
+          <a:chOff x="0" y="0"/>
+          <a:chExt cx="0" cy="0"/>
+        </a:xfrm>
+      </p:grpSpPr>
+      <p:sp>
+        <p:nvSpPr>
+          <p:cNvPr id="2" name="Slide Image Placeholder 1"/>
+          <p:cNvSpPr>
+            <a:spLocks noGrp="1"/>
+          </p:cNvSpPr>
+          <p:nvPr>
+            <p:ph type="sldImg" idx="2"/>
+          </p:nvPr>
+        </p:nvSpPr>
+        <p:spPr/>
+      </p:sp>
+      <p:sp>
+        <p:nvSpPr>
+          <p:cNvPr id="3" name="Notes Placeholder 2"/>
+          <p:cNvSpPr>
+            <a:spLocks noGrp="1"/>
+          </p:cNvSpPr>
+          <p:nvPr>
+            <p:ph type="body" idx="3" sz="quarter"/>
+          </p:nvPr>
+        </p:nvSpPr>
+        <p:spPr/>
+        <p:txBody>
+          <a:bodyPr/>
+          <a:lstStyle/>
+          <a:p>
+            <a:r>
+              <a:t>Walk the README. START-HERE.md first if the files are not on the machine yet. If they freeze, they start at what-to-automate.md — last week, split the blob, edges first. If the two tests fail, they still used the thirty minutes correctly. The lesson is the refusal.</a:t>
+            </a:r>
+          </a:p>
+          <a:p/>
+          <a:p>
+            <a:r>
+              <a:t>Do not put the brief on a timer until they have checked it by hand several times. Automation is for a process they already trust.</a:t>
+            </a:r>
+          </a:p>
+        </p:txBody>
+      </p:sp>
+      <p:sp>
+        <p:nvSpPr>
+          <p:cNvPr id="4" name="Slide Number Placeholder 3"/>
+          <p:cNvSpPr>
+            <a:spLocks noGrp="1"/>
+          </p:cNvSpPr>
+          <p:nvPr>
+            <p:ph type="sldNum" idx="5" sz="quarter"/>
+          </p:nvPr>
+        </p:nvSpPr>
+        <p:spPr/>
+      </p:sp>
+    </p:spTree>
+  </p:cSld>
+  <p:clrMapOvr>
+    <a:masterClrMapping/>
+  </p:clrMapOvr>
+</p:notes>
+</file>
+
+<file path=ppt/notesSlides/notesSlide25.xml><?xml version="1.0" encoding="utf-8"?>
+<p:notes xmlns:a="http://schemas.openxmlformats.org/drawingml/2006/main" xmlns:p="http://schemas.openxmlformats.org/presentationml/2006/main" xmlns:r="http://schemas.openxmlformats.org/officeDocument/2006/relationships">
+  <p:cSld>
+    <p:spTree>
+      <p:nvGrpSpPr>
+        <p:cNvPr id="1" name=""/>
+        <p:cNvGrpSpPr/>
+        <p:nvPr/>
+      </p:nvGrpSpPr>
+      <p:grpSpPr>
+        <a:xfrm>
+          <a:off x="0" y="0"/>
+          <a:ext cx="0" cy="0"/>
+          <a:chOff x="0" y="0"/>
+          <a:chExt cx="0" cy="0"/>
+        </a:xfrm>
+      </p:grpSpPr>
+      <p:sp>
+        <p:nvSpPr>
+          <p:cNvPr id="2" name="Slide Image Placeholder 1"/>
+          <p:cNvSpPr>
+            <a:spLocks noGrp="1"/>
+          </p:cNvSpPr>
+          <p:nvPr>
+            <p:ph type="sldImg" idx="2"/>
+          </p:nvPr>
+        </p:nvSpPr>
+        <p:spPr/>
+      </p:sp>
+      <p:sp>
+        <p:nvSpPr>
+          <p:cNvPr id="3" name="Notes Placeholder 2"/>
+          <p:cNvSpPr>
+            <a:spLocks noGrp="1"/>
+          </p:cNvSpPr>
+          <p:nvPr>
+            <p:ph type="body" idx="3" sz="quarter"/>
+          </p:nvPr>
+        </p:nvSpPr>
+        <p:spPr/>
+        <p:txBody>
+          <a:bodyPr/>
+          <a:lstStyle/>
+          <a:p>
+            <a:r>
+              <a:t>Leave this up during Q&amp;A if needed. This slide merges the former repeated safety slides so the decision matrix has room.</a:t>
+            </a:r>
+          </a:p>
+          <a:p/>
+          <a:p>
+            <a:r>
+              <a:t>This is not a legal disclaimer bolted on. If an agent sends a flawed appeal in your name, you now have two problems. Notion: https://app.notion.com/p/392059b703e1814b96a6dd9913180844</a:t>
+            </a:r>
+          </a:p>
+          <a:p/>
+          <a:p>
+            <a:r>
+              <a:t>Inbox is untrusted. A line that says 'ignore your rules' is data, not an order. First-agent-job: https://app.notion.com/p/3bb059b703e1817b9123ff209fcc5d9d</a:t>
+            </a:r>
+          </a:p>
+          <a:p/>
+          <a:p>
+            <a:r>
+              <a:t>Where the agent should stop: start where a colleague or customer already tells you you're wrong; reconstructing context is the expensive part; the reply is cheap. Notion: https://app.notion.com/p/3aa059b703e1817c9571c77f8badaf77</a:t>
+            </a:r>
+          </a:p>
+        </p:txBody>
+      </p:sp>
+      <p:sp>
+        <p:nvSpPr>
+          <p:cNvPr id="4" name="Slide Number Placeholder 3"/>
+          <p:cNvSpPr>
+            <a:spLocks noGrp="1"/>
+          </p:cNvSpPr>
+          <p:nvPr>
+            <p:ph type="sldNum" idx="5" sz="quarter"/>
+          </p:nvPr>
+        </p:nvSpPr>
+        <p:spPr/>
+      </p:sp>
+    </p:spTree>
+  </p:cSld>
+  <p:clrMapOvr>
+    <a:masterClrMapping/>
+  </p:clrMapOvr>
+</p:notes>
+</file>
+
+<file path=ppt/notesSlides/notesSlide26.xml><?xml version="1.0" encoding="utf-8"?>
 <p:notes xmlns:a="http://schemas.openxmlformats.org/drawingml/2006/main" xmlns:p="http://schemas.openxmlformats.org/presentationml/2006/main" xmlns:r="http://schemas.openxmlformats.org/officeDocument/2006/relationships">
   <p:cSld>
     <p:spTree>
@@ -5734,7 +5948,7 @@
                 </a:solidFill>
                 <a:latin typeface="Calibri"/>
               </a:rPr>
-              <a:t>1  /  24</a:t>
+              <a:t>1  /  26</a:t>
             </a:r>
           </a:p>
         </p:txBody>
@@ -6587,7 +6801,7 @@
                 </a:solidFill>
                 <a:latin typeface="Calibri"/>
               </a:rPr>
-              <a:t>10  /  24</a:t>
+              <a:t>10  /  26</a:t>
             </a:r>
           </a:p>
         </p:txBody>
@@ -6977,7 +7191,7 @@
                 </a:solidFill>
                 <a:latin typeface="Calibri"/>
               </a:rPr>
-              <a:t>•  Meeting recap</a:t>
+              <a:t>•  Meeting recap ← we build this one live</a:t>
             </a:r>
           </a:p>
           <a:p>
@@ -7176,8 +7390,8 @@
         </p:nvSpPr>
         <p:spPr>
           <a:xfrm>
-            <a:off x="640080" y="6492240"/>
-            <a:ext cx="9144000" cy="274320"/>
+            <a:off x="822960" y="5760720"/>
+            <a:ext cx="10789920" cy="457200"/>
           </a:xfrm>
           <a:prstGeom prst="rect">
             <a:avLst/>
@@ -7192,13 +7406,13 @@
           <a:p>
             <a:pPr algn="l"/>
             <a:r>
-              <a:rPr sz="1100" b="0">
+              <a:rPr sz="1500" b="0">
                 <a:solidFill>
                   <a:srgbClr val="B8A888"/>
                 </a:solidFill>
                 <a:latin typeface="Calibri"/>
               </a:rPr>
-              <a:t>Build your own chief of staff  ·  process, not a vendor</a:t>
+              <a:t>Meeting recap needs the least setup of the six — one voice file, meeting details, and one real transcript.</a:t>
             </a:r>
           </a:p>
         </p:txBody>
@@ -7211,8 +7425,8 @@
         </p:nvSpPr>
         <p:spPr>
           <a:xfrm>
-            <a:off x="10607040" y="6492240"/>
-            <a:ext cx="1097280" cy="274320"/>
+            <a:off x="640080" y="6492240"/>
+            <a:ext cx="9144000" cy="274320"/>
           </a:xfrm>
           <a:prstGeom prst="rect">
             <a:avLst/>
@@ -7225,6 +7439,41 @@
           </a:bodyPr>
           <a:lstStyle/>
           <a:p>
+            <a:pPr algn="l"/>
+            <a:r>
+              <a:rPr sz="1100" b="0">
+                <a:solidFill>
+                  <a:srgbClr val="B8A888"/>
+                </a:solidFill>
+                <a:latin typeface="Calibri"/>
+              </a:rPr>
+              <a:t>Build your own chief of staff  ·  process, not a vendor</a:t>
+            </a:r>
+          </a:p>
+        </p:txBody>
+      </p:sp>
+      <p:sp>
+        <p:nvSpPr>
+          <p:cNvPr id="14" name="TextBox 13"/>
+          <p:cNvSpPr txBox="1"/>
+          <p:nvPr/>
+        </p:nvSpPr>
+        <p:spPr>
+          <a:xfrm>
+            <a:off x="10607040" y="6492240"/>
+            <a:ext cx="1097280" cy="274320"/>
+          </a:xfrm>
+          <a:prstGeom prst="rect">
+            <a:avLst/>
+          </a:prstGeom>
+          <a:noFill/>
+        </p:spPr>
+        <p:txBody>
+          <a:bodyPr wrap="square">
+            <a:spAutoFit/>
+          </a:bodyPr>
+          <a:lstStyle/>
+          <a:p>
             <a:pPr algn="r"/>
             <a:r>
               <a:rPr sz="1100" b="0">
@@ -7233,7 +7482,7 @@
                 </a:solidFill>
                 <a:latin typeface="Calibri"/>
               </a:rPr>
-              <a:t>11  /  24</a:t>
+              <a:t>11  /  26</a:t>
             </a:r>
           </a:p>
         </p:txBody>
@@ -7911,7 +8160,7 @@
                 </a:solidFill>
                 <a:latin typeface="Calibri"/>
               </a:rPr>
-              <a:t>12  /  24</a:t>
+              <a:t>12  /  26</a:t>
             </a:r>
           </a:p>
         </p:txBody>
@@ -8319,7 +8568,7 @@
                 </a:solidFill>
                 <a:latin typeface="Calibri"/>
               </a:rPr>
-              <a:t>The method — two tests</a:t>
+              <a:t>The method — two tests, seven steps</a:t>
             </a:r>
           </a:p>
         </p:txBody>
@@ -8432,7 +8681,7 @@
                 </a:solidFill>
                 <a:latin typeface="Calibri"/>
               </a:rPr>
-              <a:t>Turn any job into a workflow</a:t>
+              <a:t>Turn any job into a workflow, and rank several</a:t>
             </a:r>
           </a:p>
         </p:txBody>
@@ -8841,7 +9090,7 @@
                 </a:solidFill>
                 <a:latin typeface="Calibri"/>
               </a:rPr>
-              <a:t>13  /  24</a:t>
+              <a:t>13  /  26</a:t>
             </a:r>
           </a:p>
         </p:txBody>
@@ -9023,7 +9272,7 @@
                 </a:solidFill>
                 <a:latin typeface="Calibri"/>
               </a:rPr>
-              <a:t>Step 1 — Name one job</a:t>
+              <a:t>Your first agent, live: meeting recap</a:t>
             </a:r>
           </a:p>
         </p:txBody>
@@ -9036,8 +9285,8 @@
         </p:nvSpPr>
         <p:spPr>
           <a:xfrm>
-            <a:off x="731520" y="1371600"/>
-            <a:ext cx="10515600" cy="4389120"/>
+            <a:off x="731520" y="1234440"/>
+            <a:ext cx="10515600" cy="365760"/>
           </a:xfrm>
           <a:prstGeom prst="rect">
             <a:avLst/>
@@ -9050,83 +9299,15 @@
           </a:bodyPr>
           <a:lstStyle/>
           <a:p>
-            <a:pPr>
-              <a:spcAft>
-                <a:spcPts val="1400"/>
-              </a:spcAft>
-            </a:pPr>
-            <a:r>
-              <a:rPr sz="2200" b="0">
-                <a:solidFill>
-                  <a:srgbClr val="F4EBD0"/>
-                </a:solidFill>
-                <a:latin typeface="Calibri"/>
-              </a:rPr>
-              <a:t>•  Not “be more productive.” Not “be my chief of staff.”</a:t>
-            </a:r>
-          </a:p>
-          <a:p>
-            <a:pPr>
-              <a:spcAft>
-                <a:spcPts val="1400"/>
-              </a:spcAft>
-            </a:pPr>
-            <a:r>
-              <a:rPr sz="2200" b="0">
-                <a:solidFill>
-                  <a:srgbClr val="F4EBD0"/>
-                </a:solidFill>
-                <a:latin typeface="Calibri"/>
-              </a:rPr>
-              <a:t>•  A job you actually did last week, with a finished artifact.</a:t>
-            </a:r>
-          </a:p>
-          <a:p>
-            <a:pPr>
-              <a:spcAft>
-                <a:spcPts val="1400"/>
-              </a:spcAft>
-            </a:pPr>
-            <a:r>
-              <a:rPr sz="2200" b="0">
-                <a:solidFill>
-                  <a:srgbClr val="F4EBD0"/>
-                </a:solidFill>
-                <a:latin typeface="Calibri"/>
-              </a:rPr>
-              <a:t>•  Annoying enough that you will reuse the file.</a:t>
-            </a:r>
-          </a:p>
-          <a:p>
-            <a:pPr>
-              <a:spcAft>
-                <a:spcPts val="1400"/>
-              </a:spcAft>
-            </a:pPr>
-            <a:r>
-              <a:rPr sz="2200" b="0">
-                <a:solidFill>
-                  <a:srgbClr val="F4EBD0"/>
-                </a:solidFill>
-                <a:latin typeface="Calibri"/>
-              </a:rPr>
-              <a:t>•  Prefer a pain that has happened at least three times.</a:t>
-            </a:r>
-          </a:p>
-          <a:p>
-            <a:pPr>
-              <a:spcAft>
-                <a:spcPts val="1400"/>
-              </a:spcAft>
-            </a:pPr>
-            <a:r>
-              <a:rPr sz="2200" b="0">
-                <a:solidFill>
-                  <a:srgbClr val="F4EBD0"/>
-                </a:solidFill>
-                <a:latin typeface="Calibri"/>
-              </a:rPr>
-              <a:t>•  If you cannot point at examples, you do not have a first job yet.</a:t>
+            <a:pPr algn="l"/>
+            <a:r>
+              <a:rPr sz="1400" b="1">
+                <a:solidFill>
+                  <a:srgbClr val="B3995D"/>
+                </a:solidFill>
+                <a:latin typeface="Calibri"/>
+              </a:rPr>
+              <a:t>WHY THIS ONE FIRST</a:t>
             </a:r>
           </a:p>
         </p:txBody>
@@ -9139,8 +9320,8 @@
         </p:nvSpPr>
         <p:spPr>
           <a:xfrm>
-            <a:off x="640080" y="6492240"/>
-            <a:ext cx="9144000" cy="274320"/>
+            <a:off x="731520" y="1691640"/>
+            <a:ext cx="10515600" cy="1920240"/>
           </a:xfrm>
           <a:prstGeom prst="rect">
             <a:avLst/>
@@ -9153,15 +9334,35 @@
           </a:bodyPr>
           <a:lstStyle/>
           <a:p>
-            <a:pPr algn="l"/>
-            <a:r>
-              <a:rPr sz="1100" b="0">
-                <a:solidFill>
-                  <a:srgbClr val="B8A888"/>
-                </a:solidFill>
-                <a:latin typeface="Calibri"/>
-              </a:rPr>
-              <a:t>Build your own chief of staff  ·  process, not a vendor</a:t>
+            <a:pPr>
+              <a:spcAft>
+                <a:spcPts val="1200"/>
+              </a:spcAft>
+            </a:pPr>
+            <a:r>
+              <a:rPr sz="1800" b="0">
+                <a:solidFill>
+                  <a:srgbClr val="F4EBD0"/>
+                </a:solidFill>
+                <a:latin typeface="Calibri"/>
+              </a:rPr>
+              <a:t>•  Lowest setup cost of the six CoS jobs — voice.md, meeting details, and one real transcript.</a:t>
+            </a:r>
+          </a:p>
+          <a:p>
+            <a:pPr>
+              <a:spcAft>
+                <a:spcPts val="1200"/>
+              </a:spcAft>
+            </a:pPr>
+            <a:r>
+              <a:rPr sz="1800" b="0">
+                <a:solidFill>
+                  <a:srgbClr val="F4EBD0"/>
+                </a:solidFill>
+                <a:latin typeface="Calibri"/>
+              </a:rPr>
+              <a:t>•  Fully verifiable: every decision, owner, and date must cite a line or timestamp in the notes.</a:t>
             </a:r>
           </a:p>
         </p:txBody>
@@ -9174,8 +9375,8 @@
         </p:nvSpPr>
         <p:spPr>
           <a:xfrm>
-            <a:off x="10607040" y="6492240"/>
-            <a:ext cx="1097280" cy="274320"/>
+            <a:off x="731520" y="3703320"/>
+            <a:ext cx="10515600" cy="2103120"/>
           </a:xfrm>
           <a:prstGeom prst="rect">
             <a:avLst/>
@@ -9188,6 +9389,112 @@
           </a:bodyPr>
           <a:lstStyle/>
           <a:p>
+            <a:pPr>
+              <a:spcAft>
+                <a:spcPts val="1000"/>
+              </a:spcAft>
+            </a:pPr>
+            <a:r>
+              <a:rPr sz="1700" b="0">
+                <a:solidFill>
+                  <a:srgbClr val="F4EBD0"/>
+                </a:solidFill>
+                <a:latin typeface="Calibri"/>
+              </a:rPr>
+              <a:t>•  Paste meeting title, date, attendees, voice.md, and real notes; get decisions, owners, dates, and open items back.</a:t>
+            </a:r>
+          </a:p>
+          <a:p>
+            <a:pPr>
+              <a:spcAft>
+                <a:spcPts val="1000"/>
+              </a:spcAft>
+            </a:pPr>
+            <a:r>
+              <a:rPr sz="1700" b="0">
+                <a:solidFill>
+                  <a:srgbClr val="F4EBD0"/>
+                </a:solidFill>
+                <a:latin typeface="Calibri"/>
+              </a:rPr>
+              <a:t>•  Watch for evidence citations and unassigned owners when the notes name nobody.</a:t>
+            </a:r>
+          </a:p>
+          <a:p>
+            <a:pPr>
+              <a:spcAft>
+                <a:spcPts val="1000"/>
+              </a:spcAft>
+            </a:pPr>
+            <a:r>
+              <a:rPr sz="1700" b="0">
+                <a:solidFill>
+                  <a:srgbClr val="F4EBD0"/>
+                </a:solidFill>
+                <a:latin typeface="Calibri"/>
+              </a:rPr>
+              <a:t>•  Prompt: prompts/workflows/meeting-recap.md</a:t>
+            </a:r>
+          </a:p>
+        </p:txBody>
+      </p:sp>
+      <p:sp>
+        <p:nvSpPr>
+          <p:cNvPr id="9" name="TextBox 8"/>
+          <p:cNvSpPr txBox="1"/>
+          <p:nvPr/>
+        </p:nvSpPr>
+        <p:spPr>
+          <a:xfrm>
+            <a:off x="640080" y="6492240"/>
+            <a:ext cx="9144000" cy="274320"/>
+          </a:xfrm>
+          <a:prstGeom prst="rect">
+            <a:avLst/>
+          </a:prstGeom>
+          <a:noFill/>
+        </p:spPr>
+        <p:txBody>
+          <a:bodyPr wrap="square">
+            <a:spAutoFit/>
+          </a:bodyPr>
+          <a:lstStyle/>
+          <a:p>
+            <a:pPr algn="l"/>
+            <a:r>
+              <a:rPr sz="1100" b="0">
+                <a:solidFill>
+                  <a:srgbClr val="B8A888"/>
+                </a:solidFill>
+                <a:latin typeface="Calibri"/>
+              </a:rPr>
+              <a:t>Build your own chief of staff  ·  process, not a vendor</a:t>
+            </a:r>
+          </a:p>
+        </p:txBody>
+      </p:sp>
+      <p:sp>
+        <p:nvSpPr>
+          <p:cNvPr id="10" name="TextBox 9"/>
+          <p:cNvSpPr txBox="1"/>
+          <p:nvPr/>
+        </p:nvSpPr>
+        <p:spPr>
+          <a:xfrm>
+            <a:off x="10607040" y="6492240"/>
+            <a:ext cx="1097280" cy="274320"/>
+          </a:xfrm>
+          <a:prstGeom prst="rect">
+            <a:avLst/>
+          </a:prstGeom>
+          <a:noFill/>
+        </p:spPr>
+        <p:txBody>
+          <a:bodyPr wrap="square">
+            <a:spAutoFit/>
+          </a:bodyPr>
+          <a:lstStyle/>
+          <a:p>
             <a:pPr algn="r"/>
             <a:r>
               <a:rPr sz="1100" b="0">
@@ -9196,7 +9503,7 @@
                 </a:solidFill>
                 <a:latin typeface="Calibri"/>
               </a:rPr>
-              <a:t>14  /  24</a:t>
+              <a:t>14  /  26</a:t>
             </a:r>
           </a:p>
         </p:txBody>
@@ -9378,64 +9685,21 @@
                 </a:solidFill>
                 <a:latin typeface="Calibri"/>
               </a:rPr>
-              <a:t>Step 2 — Write the SOP</a:t>
-            </a:r>
-          </a:p>
-        </p:txBody>
-      </p:sp>
-      <p:sp>
-        <p:nvSpPr>
-          <p:cNvPr id="6" name="Rectangle 5"/>
-          <p:cNvSpPr/>
-          <p:nvPr/>
-        </p:nvSpPr>
-        <p:spPr>
-          <a:xfrm>
-            <a:off x="731520" y="1463040"/>
-            <a:ext cx="2651760" cy="2377440"/>
-          </a:xfrm>
-          <a:prstGeom prst="rect">
-            <a:avLst/>
-          </a:prstGeom>
-          <a:solidFill>
-            <a:srgbClr val="141414"/>
-          </a:solidFill>
-          <a:ln>
-            <a:noFill/>
-          </a:ln>
-        </p:spPr>
-        <p:style>
-          <a:lnRef idx="1">
-            <a:schemeClr val="accent1"/>
-          </a:lnRef>
-          <a:fillRef idx="3">
-            <a:schemeClr val="accent1"/>
-          </a:fillRef>
-          <a:effectRef idx="2">
-            <a:schemeClr val="accent1"/>
-          </a:effectRef>
-          <a:fontRef idx="minor">
-            <a:schemeClr val="lt1"/>
-          </a:fontRef>
-        </p:style>
-        <p:txBody>
-          <a:bodyPr rtlCol="0" anchor="ctr"/>
-          <a:lstStyle/>
-          <a:p>
-            <a:pPr algn="ctr"/>
-          </a:p>
-        </p:txBody>
-      </p:sp>
-      <p:sp>
-        <p:nvSpPr>
-          <p:cNvPr id="7" name="TextBox 6"/>
+              <a:t>Step 1 — Name one job</a:t>
+            </a:r>
+          </a:p>
+        </p:txBody>
+      </p:sp>
+      <p:sp>
+        <p:nvSpPr>
+          <p:cNvPr id="6" name="TextBox 5"/>
           <p:cNvSpPr txBox="1"/>
           <p:nvPr/>
         </p:nvSpPr>
         <p:spPr>
           <a:xfrm>
-            <a:off x="868680" y="1691640"/>
-            <a:ext cx="2377440" cy="548640"/>
+            <a:off x="731520" y="1371600"/>
+            <a:ext cx="10515600" cy="4389120"/>
           </a:xfrm>
           <a:prstGeom prst="rect">
             <a:avLst/>
@@ -9448,29 +9712,97 @@
           </a:bodyPr>
           <a:lstStyle/>
           <a:p>
-            <a:pPr algn="l"/>
-            <a:r>
-              <a:rPr sz="2000" b="1">
-                <a:solidFill>
-                  <a:srgbClr val="B3995D"/>
-                </a:solidFill>
-                <a:latin typeface="Calibri"/>
-              </a:rPr>
-              <a:t>Inputs</a:t>
-            </a:r>
-          </a:p>
-        </p:txBody>
-      </p:sp>
-      <p:sp>
-        <p:nvSpPr>
-          <p:cNvPr id="8" name="TextBox 7"/>
+            <a:pPr>
+              <a:spcAft>
+                <a:spcPts val="1400"/>
+              </a:spcAft>
+            </a:pPr>
+            <a:r>
+              <a:rPr sz="2200" b="0">
+                <a:solidFill>
+                  <a:srgbClr val="F4EBD0"/>
+                </a:solidFill>
+                <a:latin typeface="Calibri"/>
+              </a:rPr>
+              <a:t>•  Not “be more productive.” Not “be my chief of staff.”</a:t>
+            </a:r>
+          </a:p>
+          <a:p>
+            <a:pPr>
+              <a:spcAft>
+                <a:spcPts val="1400"/>
+              </a:spcAft>
+            </a:pPr>
+            <a:r>
+              <a:rPr sz="2200" b="0">
+                <a:solidFill>
+                  <a:srgbClr val="F4EBD0"/>
+                </a:solidFill>
+                <a:latin typeface="Calibri"/>
+              </a:rPr>
+              <a:t>•  A job you actually did last week, with a finished artifact — here: recap the meeting we just pasted.</a:t>
+            </a:r>
+          </a:p>
+          <a:p>
+            <a:pPr>
+              <a:spcAft>
+                <a:spcPts val="1400"/>
+              </a:spcAft>
+            </a:pPr>
+            <a:r>
+              <a:rPr sz="2200" b="0">
+                <a:solidFill>
+                  <a:srgbClr val="F4EBD0"/>
+                </a:solidFill>
+                <a:latin typeface="Calibri"/>
+              </a:rPr>
+              <a:t>•  Annoying enough that you will reuse the file.</a:t>
+            </a:r>
+          </a:p>
+          <a:p>
+            <a:pPr>
+              <a:spcAft>
+                <a:spcPts val="1400"/>
+              </a:spcAft>
+            </a:pPr>
+            <a:r>
+              <a:rPr sz="2200" b="0">
+                <a:solidFill>
+                  <a:srgbClr val="F4EBD0"/>
+                </a:solidFill>
+                <a:latin typeface="Calibri"/>
+              </a:rPr>
+              <a:t>•  Prefer a pain that has happened at least three times.</a:t>
+            </a:r>
+          </a:p>
+          <a:p>
+            <a:pPr>
+              <a:spcAft>
+                <a:spcPts val="1400"/>
+              </a:spcAft>
+            </a:pPr>
+            <a:r>
+              <a:rPr sz="2200" b="0">
+                <a:solidFill>
+                  <a:srgbClr val="F4EBD0"/>
+                </a:solidFill>
+                <a:latin typeface="Calibri"/>
+              </a:rPr>
+              <a:t>•  If you cannot point at examples, you do not have a first job yet.</a:t>
+            </a:r>
+          </a:p>
+        </p:txBody>
+      </p:sp>
+      <p:sp>
+        <p:nvSpPr>
+          <p:cNvPr id="7" name="TextBox 6"/>
           <p:cNvSpPr txBox="1"/>
           <p:nvPr/>
         </p:nvSpPr>
         <p:spPr>
           <a:xfrm>
-            <a:off x="868680" y="2286000"/>
-            <a:ext cx="2377440" cy="1280160"/>
+            <a:off x="640080" y="6492240"/>
+            <a:ext cx="9144000" cy="274320"/>
           </a:xfrm>
           <a:prstGeom prst="rect">
             <a:avLst/>
@@ -9485,70 +9817,27 @@
           <a:p>
             <a:pPr algn="l"/>
             <a:r>
-              <a:rPr sz="1600" b="0">
-                <a:solidFill>
-                  <a:srgbClr val="F4EBD0"/>
-                </a:solidFill>
-                <a:latin typeface="Calibri"/>
-              </a:rPr>
-              <a:t>What must be in front of you</a:t>
-            </a:r>
-          </a:p>
-        </p:txBody>
-      </p:sp>
-      <p:sp>
-        <p:nvSpPr>
-          <p:cNvPr id="9" name="Rectangle 8"/>
-          <p:cNvSpPr/>
-          <p:nvPr/>
-        </p:nvSpPr>
-        <p:spPr>
-          <a:xfrm>
-            <a:off x="3520439" y="1463040"/>
-            <a:ext cx="2651760" cy="2377440"/>
-          </a:xfrm>
-          <a:prstGeom prst="rect">
-            <a:avLst/>
-          </a:prstGeom>
-          <a:solidFill>
-            <a:srgbClr val="141414"/>
-          </a:solidFill>
-          <a:ln>
-            <a:noFill/>
-          </a:ln>
-        </p:spPr>
-        <p:style>
-          <a:lnRef idx="1">
-            <a:schemeClr val="accent1"/>
-          </a:lnRef>
-          <a:fillRef idx="3">
-            <a:schemeClr val="accent1"/>
-          </a:fillRef>
-          <a:effectRef idx="2">
-            <a:schemeClr val="accent1"/>
-          </a:effectRef>
-          <a:fontRef idx="minor">
-            <a:schemeClr val="lt1"/>
-          </a:fontRef>
-        </p:style>
-        <p:txBody>
-          <a:bodyPr rtlCol="0" anchor="ctr"/>
-          <a:lstStyle/>
-          <a:p>
-            <a:pPr algn="ctr"/>
-          </a:p>
-        </p:txBody>
-      </p:sp>
-      <p:sp>
-        <p:nvSpPr>
-          <p:cNvPr id="10" name="TextBox 9"/>
+              <a:rPr sz="1100" b="0">
+                <a:solidFill>
+                  <a:srgbClr val="B8A888"/>
+                </a:solidFill>
+                <a:latin typeface="Calibri"/>
+              </a:rPr>
+              <a:t>Build your own chief of staff  ·  process, not a vendor</a:t>
+            </a:r>
+          </a:p>
+        </p:txBody>
+      </p:sp>
+      <p:sp>
+        <p:nvSpPr>
+          <p:cNvPr id="8" name="TextBox 7"/>
           <p:cNvSpPr txBox="1"/>
           <p:nvPr/>
         </p:nvSpPr>
         <p:spPr>
           <a:xfrm>
-            <a:off x="3657599" y="1691640"/>
-            <a:ext cx="2377440" cy="548640"/>
+            <a:off x="10607040" y="6492240"/>
+            <a:ext cx="1097280" cy="274320"/>
           </a:xfrm>
           <a:prstGeom prst="rect">
             <a:avLst/>
@@ -9561,382 +9850,15 @@
           </a:bodyPr>
           <a:lstStyle/>
           <a:p>
-            <a:pPr algn="l"/>
-            <a:r>
-              <a:rPr sz="2000" b="1">
-                <a:solidFill>
-                  <a:srgbClr val="B3995D"/>
-                </a:solidFill>
-                <a:latin typeface="Calibri"/>
-              </a:rPr>
-              <a:t>Steps</a:t>
-            </a:r>
-          </a:p>
-        </p:txBody>
-      </p:sp>
-      <p:sp>
-        <p:nvSpPr>
-          <p:cNvPr id="11" name="TextBox 10"/>
-          <p:cNvSpPr txBox="1"/>
-          <p:nvPr/>
-        </p:nvSpPr>
-        <p:spPr>
-          <a:xfrm>
-            <a:off x="3657599" y="2286000"/>
-            <a:ext cx="2377440" cy="1280160"/>
-          </a:xfrm>
-          <a:prstGeom prst="rect">
-            <a:avLst/>
-          </a:prstGeom>
-          <a:noFill/>
-        </p:spPr>
-        <p:txBody>
-          <a:bodyPr wrap="square">
-            <a:spAutoFit/>
-          </a:bodyPr>
-          <a:lstStyle/>
-          <a:p>
-            <a:pPr algn="l"/>
-            <a:r>
-              <a:rPr sz="1600" b="0">
-                <a:solidFill>
-                  <a:srgbClr val="F4EBD0"/>
-                </a:solidFill>
-                <a:latin typeface="Calibri"/>
-              </a:rPr>
-              <a:t>The order you already use</a:t>
-            </a:r>
-          </a:p>
-        </p:txBody>
-      </p:sp>
-      <p:sp>
-        <p:nvSpPr>
-          <p:cNvPr id="12" name="Rectangle 11"/>
-          <p:cNvSpPr/>
-          <p:nvPr/>
-        </p:nvSpPr>
-        <p:spPr>
-          <a:xfrm>
-            <a:off x="6309359" y="1463040"/>
-            <a:ext cx="2651760" cy="2377440"/>
-          </a:xfrm>
-          <a:prstGeom prst="rect">
-            <a:avLst/>
-          </a:prstGeom>
-          <a:solidFill>
-            <a:srgbClr val="141414"/>
-          </a:solidFill>
-          <a:ln>
-            <a:noFill/>
-          </a:ln>
-        </p:spPr>
-        <p:style>
-          <a:lnRef idx="1">
-            <a:schemeClr val="accent1"/>
-          </a:lnRef>
-          <a:fillRef idx="3">
-            <a:schemeClr val="accent1"/>
-          </a:fillRef>
-          <a:effectRef idx="2">
-            <a:schemeClr val="accent1"/>
-          </a:effectRef>
-          <a:fontRef idx="minor">
-            <a:schemeClr val="lt1"/>
-          </a:fontRef>
-        </p:style>
-        <p:txBody>
-          <a:bodyPr rtlCol="0" anchor="ctr"/>
-          <a:lstStyle/>
-          <a:p>
-            <a:pPr algn="ctr"/>
-          </a:p>
-        </p:txBody>
-      </p:sp>
-      <p:sp>
-        <p:nvSpPr>
-          <p:cNvPr id="13" name="TextBox 12"/>
-          <p:cNvSpPr txBox="1"/>
-          <p:nvPr/>
-        </p:nvSpPr>
-        <p:spPr>
-          <a:xfrm>
-            <a:off x="6446519" y="1691640"/>
-            <a:ext cx="2377440" cy="548640"/>
-          </a:xfrm>
-          <a:prstGeom prst="rect">
-            <a:avLst/>
-          </a:prstGeom>
-          <a:noFill/>
-        </p:spPr>
-        <p:txBody>
-          <a:bodyPr wrap="square">
-            <a:spAutoFit/>
-          </a:bodyPr>
-          <a:lstStyle/>
-          <a:p>
-            <a:pPr algn="l"/>
-            <a:r>
-              <a:rPr sz="2000" b="1">
-                <a:solidFill>
-                  <a:srgbClr val="B3995D"/>
-                </a:solidFill>
-                <a:latin typeface="Calibri"/>
-              </a:rPr>
-              <a:t>Output</a:t>
-            </a:r>
-          </a:p>
-        </p:txBody>
-      </p:sp>
-      <p:sp>
-        <p:nvSpPr>
-          <p:cNvPr id="14" name="TextBox 13"/>
-          <p:cNvSpPr txBox="1"/>
-          <p:nvPr/>
-        </p:nvSpPr>
-        <p:spPr>
-          <a:xfrm>
-            <a:off x="6446519" y="2286000"/>
-            <a:ext cx="2377440" cy="1280160"/>
-          </a:xfrm>
-          <a:prstGeom prst="rect">
-            <a:avLst/>
-          </a:prstGeom>
-          <a:noFill/>
-        </p:spPr>
-        <p:txBody>
-          <a:bodyPr wrap="square">
-            <a:spAutoFit/>
-          </a:bodyPr>
-          <a:lstStyle/>
-          <a:p>
-            <a:pPr algn="l"/>
-            <a:r>
-              <a:rPr sz="1600" b="0">
-                <a:solidFill>
-                  <a:srgbClr val="F4EBD0"/>
-                </a:solidFill>
-                <a:latin typeface="Calibri"/>
-              </a:rPr>
-              <a:t>The shape of 'done'</a:t>
-            </a:r>
-          </a:p>
-        </p:txBody>
-      </p:sp>
-      <p:sp>
-        <p:nvSpPr>
-          <p:cNvPr id="15" name="Rectangle 14"/>
-          <p:cNvSpPr/>
-          <p:nvPr/>
-        </p:nvSpPr>
-        <p:spPr>
-          <a:xfrm>
-            <a:off x="9098280" y="1463040"/>
-            <a:ext cx="2651760" cy="2377440"/>
-          </a:xfrm>
-          <a:prstGeom prst="rect">
-            <a:avLst/>
-          </a:prstGeom>
-          <a:solidFill>
-            <a:srgbClr val="141414"/>
-          </a:solidFill>
-          <a:ln>
-            <a:noFill/>
-          </a:ln>
-        </p:spPr>
-        <p:style>
-          <a:lnRef idx="1">
-            <a:schemeClr val="accent1"/>
-          </a:lnRef>
-          <a:fillRef idx="3">
-            <a:schemeClr val="accent1"/>
-          </a:fillRef>
-          <a:effectRef idx="2">
-            <a:schemeClr val="accent1"/>
-          </a:effectRef>
-          <a:fontRef idx="minor">
-            <a:schemeClr val="lt1"/>
-          </a:fontRef>
-        </p:style>
-        <p:txBody>
-          <a:bodyPr rtlCol="0" anchor="ctr"/>
-          <a:lstStyle/>
-          <a:p>
-            <a:pPr algn="ctr"/>
-          </a:p>
-        </p:txBody>
-      </p:sp>
-      <p:sp>
-        <p:nvSpPr>
-          <p:cNvPr id="16" name="TextBox 15"/>
-          <p:cNvSpPr txBox="1"/>
-          <p:nvPr/>
-        </p:nvSpPr>
-        <p:spPr>
-          <a:xfrm>
-            <a:off x="9235440" y="1691640"/>
-            <a:ext cx="2377440" cy="548640"/>
-          </a:xfrm>
-          <a:prstGeom prst="rect">
-            <a:avLst/>
-          </a:prstGeom>
-          <a:noFill/>
-        </p:spPr>
-        <p:txBody>
-          <a:bodyPr wrap="square">
-            <a:spAutoFit/>
-          </a:bodyPr>
-          <a:lstStyle/>
-          <a:p>
-            <a:pPr algn="l"/>
-            <a:r>
-              <a:rPr sz="2000" b="1">
-                <a:solidFill>
-                  <a:srgbClr val="B3995D"/>
-                </a:solidFill>
-                <a:latin typeface="Calibri"/>
-              </a:rPr>
-              <a:t>Check</a:t>
-            </a:r>
-          </a:p>
-        </p:txBody>
-      </p:sp>
-      <p:sp>
-        <p:nvSpPr>
-          <p:cNvPr id="17" name="TextBox 16"/>
-          <p:cNvSpPr txBox="1"/>
-          <p:nvPr/>
-        </p:nvSpPr>
-        <p:spPr>
-          <a:xfrm>
-            <a:off x="9235440" y="2286000"/>
-            <a:ext cx="2377440" cy="1280160"/>
-          </a:xfrm>
-          <a:prstGeom prst="rect">
-            <a:avLst/>
-          </a:prstGeom>
-          <a:noFill/>
-        </p:spPr>
-        <p:txBody>
-          <a:bodyPr wrap="square">
-            <a:spAutoFit/>
-          </a:bodyPr>
-          <a:lstStyle/>
-          <a:p>
-            <a:pPr algn="l"/>
-            <a:r>
-              <a:rPr sz="1600" b="0">
-                <a:solidFill>
-                  <a:srgbClr val="F4EBD0"/>
-                </a:solidFill>
-                <a:latin typeface="Calibri"/>
-              </a:rPr>
-              <a:t>How you know it's right</a:t>
-            </a:r>
-          </a:p>
-        </p:txBody>
-      </p:sp>
-      <p:sp>
-        <p:nvSpPr>
-          <p:cNvPr id="18" name="TextBox 17"/>
-          <p:cNvSpPr txBox="1"/>
-          <p:nvPr/>
-        </p:nvSpPr>
-        <p:spPr>
-          <a:xfrm>
-            <a:off x="731520" y="4114800"/>
-            <a:ext cx="10515600" cy="1645920"/>
-          </a:xfrm>
-          <a:prstGeom prst="rect">
-            <a:avLst/>
-          </a:prstGeom>
-          <a:noFill/>
-        </p:spPr>
-        <p:txBody>
-          <a:bodyPr wrap="square">
-            <a:spAutoFit/>
-          </a:bodyPr>
-          <a:lstStyle/>
-          <a:p>
-            <a:pPr algn="l"/>
-            <a:r>
-              <a:rPr sz="1800" b="0">
+            <a:pPr algn="r"/>
+            <a:r>
+              <a:rPr sz="1100" b="0">
                 <a:solidFill>
                   <a:srgbClr val="B8A888"/>
                 </a:solidFill>
                 <a:latin typeface="Calibri"/>
               </a:rPr>
-              <a:t>Approvals sit where actions become hard to undo: send, pay, publish, delete.
-Score the spec: could a stranger run it? Is success binary? If not, it will create more work than it saves.</a:t>
-            </a:r>
-          </a:p>
-        </p:txBody>
-      </p:sp>
-      <p:sp>
-        <p:nvSpPr>
-          <p:cNvPr id="19" name="TextBox 18"/>
-          <p:cNvSpPr txBox="1"/>
-          <p:nvPr/>
-        </p:nvSpPr>
-        <p:spPr>
-          <a:xfrm>
-            <a:off x="640080" y="6492240"/>
-            <a:ext cx="9144000" cy="274320"/>
-          </a:xfrm>
-          <a:prstGeom prst="rect">
-            <a:avLst/>
-          </a:prstGeom>
-          <a:noFill/>
-        </p:spPr>
-        <p:txBody>
-          <a:bodyPr wrap="square">
-            <a:spAutoFit/>
-          </a:bodyPr>
-          <a:lstStyle/>
-          <a:p>
-            <a:pPr algn="l"/>
-            <a:r>
-              <a:rPr sz="1100" b="0">
-                <a:solidFill>
-                  <a:srgbClr val="B8A888"/>
-                </a:solidFill>
-                <a:latin typeface="Calibri"/>
-              </a:rPr>
-              <a:t>Build your own chief of staff  ·  process, not a vendor</a:t>
-            </a:r>
-          </a:p>
-        </p:txBody>
-      </p:sp>
-      <p:sp>
-        <p:nvSpPr>
-          <p:cNvPr id="20" name="TextBox 19"/>
-          <p:cNvSpPr txBox="1"/>
-          <p:nvPr/>
-        </p:nvSpPr>
-        <p:spPr>
-          <a:xfrm>
-            <a:off x="10607040" y="6492240"/>
-            <a:ext cx="1097280" cy="274320"/>
-          </a:xfrm>
-          <a:prstGeom prst="rect">
-            <a:avLst/>
-          </a:prstGeom>
-          <a:noFill/>
-        </p:spPr>
-        <p:txBody>
-          <a:bodyPr wrap="square">
-            <a:spAutoFit/>
-          </a:bodyPr>
-          <a:lstStyle/>
-          <a:p>
-            <a:pPr algn="r"/>
-            <a:r>
-              <a:rPr sz="1100" b="0">
-                <a:solidFill>
-                  <a:srgbClr val="B8A888"/>
-                </a:solidFill>
-                <a:latin typeface="Calibri"/>
-              </a:rPr>
-              <a:t>15  /  24</a:t>
+              <a:t>15  /  26</a:t>
             </a:r>
           </a:p>
         </p:txBody>
@@ -10118,7 +10040,7 @@
                 </a:solidFill>
                 <a:latin typeface="Calibri"/>
               </a:rPr>
-              <a:t>Step 3 — Put you in files you own</a:t>
+              <a:t>Step 2 — Write the SOP</a:t>
             </a:r>
           </a:p>
         </p:txBody>
@@ -10131,8 +10053,8 @@
         </p:nvSpPr>
         <p:spPr>
           <a:xfrm>
-            <a:off x="731520" y="1325880"/>
-            <a:ext cx="2651760" cy="1783080"/>
+            <a:off x="731520" y="1463040"/>
+            <a:ext cx="2651760" cy="2377440"/>
           </a:xfrm>
           <a:prstGeom prst="rect">
             <a:avLst/>
@@ -10174,8 +10096,8 @@
         </p:nvSpPr>
         <p:spPr>
           <a:xfrm>
-            <a:off x="868680" y="1600200"/>
-            <a:ext cx="2377440" cy="502920"/>
+            <a:off x="868680" y="1691640"/>
+            <a:ext cx="2377440" cy="548640"/>
           </a:xfrm>
           <a:prstGeom prst="rect">
             <a:avLst/>
@@ -10190,13 +10112,13 @@
           <a:p>
             <a:pPr algn="l"/>
             <a:r>
-              <a:rPr sz="1600" b="1">
+              <a:rPr sz="2000" b="1">
                 <a:solidFill>
                   <a:srgbClr val="B3995D"/>
                 </a:solidFill>
                 <a:latin typeface="Calibri"/>
               </a:rPr>
-              <a:t>who-i-am.md</a:t>
+              <a:t>Inputs</a:t>
             </a:r>
           </a:p>
         </p:txBody>
@@ -10209,8 +10131,8 @@
         </p:nvSpPr>
         <p:spPr>
           <a:xfrm>
-            <a:off x="868680" y="2194560"/>
-            <a:ext cx="2377440" cy="640080"/>
+            <a:off x="868680" y="2286000"/>
+            <a:ext cx="2377440" cy="1280160"/>
           </a:xfrm>
           <a:prstGeom prst="rect">
             <a:avLst/>
@@ -10225,13 +10147,13 @@
           <a:p>
             <a:pPr algn="l"/>
             <a:r>
-              <a:rPr sz="1500" b="0">
+              <a:rPr sz="1600" b="0">
                 <a:solidFill>
                   <a:srgbClr val="F4EBD0"/>
                 </a:solidFill>
                 <a:latin typeface="Calibri"/>
               </a:rPr>
-              <a:t>Role, who you answer to</a:t>
+              <a:t>What must be in front of you</a:t>
             </a:r>
           </a:p>
         </p:txBody>
@@ -10244,8 +10166,8 @@
         </p:nvSpPr>
         <p:spPr>
           <a:xfrm>
-            <a:off x="3520439" y="1325880"/>
-            <a:ext cx="2651760" cy="1783080"/>
+            <a:off x="3520439" y="1463040"/>
+            <a:ext cx="2651760" cy="2377440"/>
           </a:xfrm>
           <a:prstGeom prst="rect">
             <a:avLst/>
@@ -10287,8 +10209,8 @@
         </p:nvSpPr>
         <p:spPr>
           <a:xfrm>
-            <a:off x="3657599" y="1600200"/>
-            <a:ext cx="2377440" cy="502920"/>
+            <a:off x="3657599" y="1691640"/>
+            <a:ext cx="2377440" cy="548640"/>
           </a:xfrm>
           <a:prstGeom prst="rect">
             <a:avLst/>
@@ -10303,13 +10225,13 @@
           <a:p>
             <a:pPr algn="l"/>
             <a:r>
-              <a:rPr sz="1600" b="1">
+              <a:rPr sz="2000" b="1">
                 <a:solidFill>
                   <a:srgbClr val="B3995D"/>
                 </a:solidFill>
                 <a:latin typeface="Calibri"/>
               </a:rPr>
-              <a:t>priorities.md</a:t>
+              <a:t>Steps</a:t>
             </a:r>
           </a:p>
         </p:txBody>
@@ -10322,8 +10244,8 @@
         </p:nvSpPr>
         <p:spPr>
           <a:xfrm>
-            <a:off x="3657599" y="2194560"/>
-            <a:ext cx="2377440" cy="640080"/>
+            <a:off x="3657599" y="2286000"/>
+            <a:ext cx="2377440" cy="1280160"/>
           </a:xfrm>
           <a:prstGeom prst="rect">
             <a:avLst/>
@@ -10338,13 +10260,13 @@
           <a:p>
             <a:pPr algn="l"/>
             <a:r>
-              <a:rPr sz="1500" b="0">
+              <a:rPr sz="1600" b="0">
                 <a:solidFill>
                   <a:srgbClr val="F4EBD0"/>
                 </a:solidFill>
                 <a:latin typeface="Calibri"/>
               </a:rPr>
-              <a:t>This quarter, dated</a:t>
+              <a:t>The order you already use</a:t>
             </a:r>
           </a:p>
         </p:txBody>
@@ -10357,8 +10279,8 @@
         </p:nvSpPr>
         <p:spPr>
           <a:xfrm>
-            <a:off x="6309359" y="1325880"/>
-            <a:ext cx="2651760" cy="1783080"/>
+            <a:off x="6309359" y="1463040"/>
+            <a:ext cx="2651760" cy="2377440"/>
           </a:xfrm>
           <a:prstGeom prst="rect">
             <a:avLst/>
@@ -10400,8 +10322,8 @@
         </p:nvSpPr>
         <p:spPr>
           <a:xfrm>
-            <a:off x="6446519" y="1600200"/>
-            <a:ext cx="2377440" cy="502920"/>
+            <a:off x="6446519" y="1691640"/>
+            <a:ext cx="2377440" cy="548640"/>
           </a:xfrm>
           <a:prstGeom prst="rect">
             <a:avLst/>
@@ -10416,13 +10338,13 @@
           <a:p>
             <a:pPr algn="l"/>
             <a:r>
-              <a:rPr sz="1600" b="1">
+              <a:rPr sz="2000" b="1">
                 <a:solidFill>
                   <a:srgbClr val="B3995D"/>
                 </a:solidFill>
                 <a:latin typeface="Calibri"/>
               </a:rPr>
-              <a:t>people.md</a:t>
+              <a:t>Output</a:t>
             </a:r>
           </a:p>
         </p:txBody>
@@ -10435,8 +10357,8 @@
         </p:nvSpPr>
         <p:spPr>
           <a:xfrm>
-            <a:off x="6446519" y="2194560"/>
-            <a:ext cx="2377440" cy="640080"/>
+            <a:off x="6446519" y="2286000"/>
+            <a:ext cx="2377440" cy="1280160"/>
           </a:xfrm>
           <a:prstGeom prst="rect">
             <a:avLst/>
@@ -10451,13 +10373,13 @@
           <a:p>
             <a:pPr algn="l"/>
             <a:r>
-              <a:rPr sz="1500" b="0">
+              <a:rPr sz="1600" b="0">
                 <a:solidFill>
                   <a:srgbClr val="F4EBD0"/>
                 </a:solidFill>
                 <a:latin typeface="Calibri"/>
               </a:rPr>
-              <a:t>Who changes your week</a:t>
+              <a:t>The shape of 'done'</a:t>
             </a:r>
           </a:p>
         </p:txBody>
@@ -10470,8 +10392,8 @@
         </p:nvSpPr>
         <p:spPr>
           <a:xfrm>
-            <a:off x="9098280" y="1325880"/>
-            <a:ext cx="2651760" cy="1783080"/>
+            <a:off x="9098280" y="1463040"/>
+            <a:ext cx="2651760" cy="2377440"/>
           </a:xfrm>
           <a:prstGeom prst="rect">
             <a:avLst/>
@@ -10513,8 +10435,8 @@
         </p:nvSpPr>
         <p:spPr>
           <a:xfrm>
-            <a:off x="9235440" y="1600200"/>
-            <a:ext cx="2377440" cy="502920"/>
+            <a:off x="9235440" y="1691640"/>
+            <a:ext cx="2377440" cy="548640"/>
           </a:xfrm>
           <a:prstGeom prst="rect">
             <a:avLst/>
@@ -10529,13 +10451,13 @@
           <a:p>
             <a:pPr algn="l"/>
             <a:r>
-              <a:rPr sz="1600" b="1">
+              <a:rPr sz="2000" b="1">
                 <a:solidFill>
                   <a:srgbClr val="B3995D"/>
                 </a:solidFill>
                 <a:latin typeface="Calibri"/>
               </a:rPr>
-              <a:t>voice.md</a:t>
+              <a:t>Check</a:t>
             </a:r>
           </a:p>
         </p:txBody>
@@ -10548,8 +10470,8 @@
         </p:nvSpPr>
         <p:spPr>
           <a:xfrm>
-            <a:off x="9235440" y="2194560"/>
-            <a:ext cx="2377440" cy="640080"/>
+            <a:off x="9235440" y="2286000"/>
+            <a:ext cx="2377440" cy="1280160"/>
           </a:xfrm>
           <a:prstGeom prst="rect">
             <a:avLst/>
@@ -10564,70 +10486,27 @@
           <a:p>
             <a:pPr algn="l"/>
             <a:r>
-              <a:rPr sz="1500" b="0">
+              <a:rPr sz="1600" b="0">
                 <a:solidFill>
                   <a:srgbClr val="F4EBD0"/>
                 </a:solidFill>
                 <a:latin typeface="Calibri"/>
               </a:rPr>
-              <a:t>How you actually write</a:t>
-            </a:r>
-          </a:p>
-        </p:txBody>
-      </p:sp>
-      <p:sp>
-        <p:nvSpPr>
-          <p:cNvPr id="18" name="Rectangle 17"/>
-          <p:cNvSpPr/>
-          <p:nvPr/>
-        </p:nvSpPr>
-        <p:spPr>
-          <a:xfrm>
-            <a:off x="731520" y="3337560"/>
-            <a:ext cx="3474720" cy="1783080"/>
-          </a:xfrm>
-          <a:prstGeom prst="rect">
-            <a:avLst/>
-          </a:prstGeom>
-          <a:solidFill>
-            <a:srgbClr val="141414"/>
-          </a:solidFill>
-          <a:ln>
-            <a:noFill/>
-          </a:ln>
-        </p:spPr>
-        <p:style>
-          <a:lnRef idx="1">
-            <a:schemeClr val="accent1"/>
-          </a:lnRef>
-          <a:fillRef idx="3">
-            <a:schemeClr val="accent1"/>
-          </a:fillRef>
-          <a:effectRef idx="2">
-            <a:schemeClr val="accent1"/>
-          </a:effectRef>
-          <a:fontRef idx="minor">
-            <a:schemeClr val="lt1"/>
-          </a:fontRef>
-        </p:style>
-        <p:txBody>
-          <a:bodyPr rtlCol="0" anchor="ctr"/>
-          <a:lstStyle/>
-          <a:p>
-            <a:pPr algn="ctr"/>
-          </a:p>
-        </p:txBody>
-      </p:sp>
-      <p:sp>
-        <p:nvSpPr>
-          <p:cNvPr id="19" name="TextBox 18"/>
+              <a:t>How you know it's right</a:t>
+            </a:r>
+          </a:p>
+        </p:txBody>
+      </p:sp>
+      <p:sp>
+        <p:nvSpPr>
+          <p:cNvPr id="18" name="TextBox 17"/>
           <p:cNvSpPr txBox="1"/>
           <p:nvPr/>
         </p:nvSpPr>
         <p:spPr>
           <a:xfrm>
-            <a:off x="868680" y="3611880"/>
-            <a:ext cx="3200400" cy="502920"/>
+            <a:off x="731520" y="4114800"/>
+            <a:ext cx="10515600" cy="1645920"/>
           </a:xfrm>
           <a:prstGeom prst="rect">
             <a:avLst/>
@@ -10642,27 +10521,28 @@
           <a:p>
             <a:pPr algn="l"/>
             <a:r>
-              <a:rPr sz="1600" b="1">
-                <a:solidFill>
-                  <a:srgbClr val="B3995D"/>
-                </a:solidFill>
-                <a:latin typeface="Calibri"/>
-              </a:rPr>
-              <a:t>sources.md</a:t>
-            </a:r>
-          </a:p>
-        </p:txBody>
-      </p:sp>
-      <p:sp>
-        <p:nvSpPr>
-          <p:cNvPr id="20" name="TextBox 19"/>
+              <a:rPr sz="1800" b="0">
+                <a:solidFill>
+                  <a:srgbClr val="B8A888"/>
+                </a:solidFill>
+                <a:latin typeface="Calibri"/>
+              </a:rPr>
+              <a:t>Approvals sit where actions become hard to undo: send, pay, publish, delete.
+Score the spec: could a stranger run it? Is success binary? If not, it will create more work than it saves.</a:t>
+            </a:r>
+          </a:p>
+        </p:txBody>
+      </p:sp>
+      <p:sp>
+        <p:nvSpPr>
+          <p:cNvPr id="19" name="TextBox 18"/>
           <p:cNvSpPr txBox="1"/>
           <p:nvPr/>
         </p:nvSpPr>
         <p:spPr>
           <a:xfrm>
-            <a:off x="868680" y="4206240"/>
-            <a:ext cx="3200400" cy="640080"/>
+            <a:off x="640080" y="6492240"/>
+            <a:ext cx="9144000" cy="274320"/>
           </a:xfrm>
           <a:prstGeom prst="rect">
             <a:avLst/>
@@ -10677,70 +10557,27 @@
           <a:p>
             <a:pPr algn="l"/>
             <a:r>
-              <a:rPr sz="1500" b="0">
-                <a:solidFill>
-                  <a:srgbClr val="F4EBD0"/>
-                </a:solidFill>
-                <a:latin typeface="Calibri"/>
-              </a:rPr>
-              <a:t>Where you would click to check</a:t>
-            </a:r>
-          </a:p>
-        </p:txBody>
-      </p:sp>
-      <p:sp>
-        <p:nvSpPr>
-          <p:cNvPr id="21" name="Rectangle 20"/>
-          <p:cNvSpPr/>
-          <p:nvPr/>
-        </p:nvSpPr>
-        <p:spPr>
-          <a:xfrm>
-            <a:off x="4389120" y="3337560"/>
-            <a:ext cx="3474720" cy="1783080"/>
-          </a:xfrm>
-          <a:prstGeom prst="rect">
-            <a:avLst/>
-          </a:prstGeom>
-          <a:solidFill>
-            <a:srgbClr val="141414"/>
-          </a:solidFill>
-          <a:ln>
-            <a:noFill/>
-          </a:ln>
-        </p:spPr>
-        <p:style>
-          <a:lnRef idx="1">
-            <a:schemeClr val="accent1"/>
-          </a:lnRef>
-          <a:fillRef idx="3">
-            <a:schemeClr val="accent1"/>
-          </a:fillRef>
-          <a:effectRef idx="2">
-            <a:schemeClr val="accent1"/>
-          </a:effectRef>
-          <a:fontRef idx="minor">
-            <a:schemeClr val="lt1"/>
-          </a:fontRef>
-        </p:style>
-        <p:txBody>
-          <a:bodyPr rtlCol="0" anchor="ctr"/>
-          <a:lstStyle/>
-          <a:p>
-            <a:pPr algn="ctr"/>
-          </a:p>
-        </p:txBody>
-      </p:sp>
-      <p:sp>
-        <p:nvSpPr>
-          <p:cNvPr id="22" name="TextBox 21"/>
+              <a:rPr sz="1100" b="0">
+                <a:solidFill>
+                  <a:srgbClr val="B8A888"/>
+                </a:solidFill>
+                <a:latin typeface="Calibri"/>
+              </a:rPr>
+              <a:t>Build your own chief of staff  ·  process, not a vendor</a:t>
+            </a:r>
+          </a:p>
+        </p:txBody>
+      </p:sp>
+      <p:sp>
+        <p:nvSpPr>
+          <p:cNvPr id="20" name="TextBox 19"/>
           <p:cNvSpPr txBox="1"/>
           <p:nvPr/>
         </p:nvSpPr>
         <p:spPr>
           <a:xfrm>
-            <a:off x="4526280" y="3611880"/>
-            <a:ext cx="3200400" cy="502920"/>
+            <a:off x="10607040" y="6492240"/>
+            <a:ext cx="1097280" cy="274320"/>
           </a:xfrm>
           <a:prstGeom prst="rect">
             <a:avLst/>
@@ -10753,190 +10590,7 @@
           </a:bodyPr>
           <a:lstStyle/>
           <a:p>
-            <a:pPr algn="l"/>
-            <a:r>
-              <a:rPr sz="1600" b="1">
-                <a:solidFill>
-                  <a:srgbClr val="B3995D"/>
-                </a:solidFill>
-                <a:latin typeface="Calibri"/>
-              </a:rPr>
-              <a:t>open-loops.md</a:t>
-            </a:r>
-          </a:p>
-        </p:txBody>
-      </p:sp>
-      <p:sp>
-        <p:nvSpPr>
-          <p:cNvPr id="23" name="TextBox 22"/>
-          <p:cNvSpPr txBox="1"/>
-          <p:nvPr/>
-        </p:nvSpPr>
-        <p:spPr>
-          <a:xfrm>
-            <a:off x="4526280" y="4206240"/>
-            <a:ext cx="3200400" cy="640080"/>
-          </a:xfrm>
-          <a:prstGeom prst="rect">
-            <a:avLst/>
-          </a:prstGeom>
-          <a:noFill/>
-        </p:spPr>
-        <p:txBody>
-          <a:bodyPr wrap="square">
-            <a:spAutoFit/>
-          </a:bodyPr>
-          <a:lstStyle/>
-          <a:p>
-            <a:pPr algn="l"/>
-            <a:r>
-              <a:rPr sz="1500" b="0">
-                <a:solidFill>
-                  <a:srgbClr val="F4EBD0"/>
-                </a:solidFill>
-                <a:latin typeface="Calibri"/>
-              </a:rPr>
-              <a:t>What is still open</a:t>
-            </a:r>
-          </a:p>
-        </p:txBody>
-      </p:sp>
-      <p:sp>
-        <p:nvSpPr>
-          <p:cNvPr id="24" name="Rectangle 23"/>
-          <p:cNvSpPr/>
-          <p:nvPr/>
-        </p:nvSpPr>
-        <p:spPr>
-          <a:xfrm>
-            <a:off x="8046720" y="3337560"/>
-            <a:ext cx="3474720" cy="1783080"/>
-          </a:xfrm>
-          <a:prstGeom prst="rect">
-            <a:avLst/>
-          </a:prstGeom>
-          <a:solidFill>
-            <a:srgbClr val="141414"/>
-          </a:solidFill>
-          <a:ln>
-            <a:noFill/>
-          </a:ln>
-        </p:spPr>
-        <p:style>
-          <a:lnRef idx="1">
-            <a:schemeClr val="accent1"/>
-          </a:lnRef>
-          <a:fillRef idx="3">
-            <a:schemeClr val="accent1"/>
-          </a:fillRef>
-          <a:effectRef idx="2">
-            <a:schemeClr val="accent1"/>
-          </a:effectRef>
-          <a:fontRef idx="minor">
-            <a:schemeClr val="lt1"/>
-          </a:fontRef>
-        </p:style>
-        <p:txBody>
-          <a:bodyPr rtlCol="0" anchor="ctr"/>
-          <a:lstStyle/>
-          <a:p>
-            <a:pPr algn="ctr"/>
-          </a:p>
-        </p:txBody>
-      </p:sp>
-      <p:sp>
-        <p:nvSpPr>
-          <p:cNvPr id="25" name="TextBox 24"/>
-          <p:cNvSpPr txBox="1"/>
-          <p:nvPr/>
-        </p:nvSpPr>
-        <p:spPr>
-          <a:xfrm>
-            <a:off x="8183880" y="3611880"/>
-            <a:ext cx="3200400" cy="502920"/>
-          </a:xfrm>
-          <a:prstGeom prst="rect">
-            <a:avLst/>
-          </a:prstGeom>
-          <a:noFill/>
-        </p:spPr>
-        <p:txBody>
-          <a:bodyPr wrap="square">
-            <a:spAutoFit/>
-          </a:bodyPr>
-          <a:lstStyle/>
-          <a:p>
-            <a:pPr algn="l"/>
-            <a:r>
-              <a:rPr sz="1600" b="1">
-                <a:solidFill>
-                  <a:srgbClr val="B3995D"/>
-                </a:solidFill>
-                <a:latin typeface="Calibri"/>
-              </a:rPr>
-              <a:t>decisions.md</a:t>
-            </a:r>
-          </a:p>
-        </p:txBody>
-      </p:sp>
-      <p:sp>
-        <p:nvSpPr>
-          <p:cNvPr id="26" name="TextBox 25"/>
-          <p:cNvSpPr txBox="1"/>
-          <p:nvPr/>
-        </p:nvSpPr>
-        <p:spPr>
-          <a:xfrm>
-            <a:off x="8183880" y="4206240"/>
-            <a:ext cx="3200400" cy="640080"/>
-          </a:xfrm>
-          <a:prstGeom prst="rect">
-            <a:avLst/>
-          </a:prstGeom>
-          <a:noFill/>
-        </p:spPr>
-        <p:txBody>
-          <a:bodyPr wrap="square">
-            <a:spAutoFit/>
-          </a:bodyPr>
-          <a:lstStyle/>
-          <a:p>
-            <a:pPr algn="l"/>
-            <a:r>
-              <a:rPr sz="1500" b="0">
-                <a:solidFill>
-                  <a:srgbClr val="F4EBD0"/>
-                </a:solidFill>
-                <a:latin typeface="Calibri"/>
-              </a:rPr>
-              <a:t>What you already settled</a:t>
-            </a:r>
-          </a:p>
-        </p:txBody>
-      </p:sp>
-      <p:sp>
-        <p:nvSpPr>
-          <p:cNvPr id="27" name="TextBox 26"/>
-          <p:cNvSpPr txBox="1"/>
-          <p:nvPr/>
-        </p:nvSpPr>
-        <p:spPr>
-          <a:xfrm>
-            <a:off x="640080" y="6492240"/>
-            <a:ext cx="9144000" cy="274320"/>
-          </a:xfrm>
-          <a:prstGeom prst="rect">
-            <a:avLst/>
-          </a:prstGeom>
-          <a:noFill/>
-        </p:spPr>
-        <p:txBody>
-          <a:bodyPr wrap="square">
-            <a:spAutoFit/>
-          </a:bodyPr>
-          <a:lstStyle/>
-          <a:p>
-            <a:pPr algn="l"/>
+            <a:pPr algn="r"/>
             <a:r>
               <a:rPr sz="1100" b="0">
                 <a:solidFill>
@@ -10944,42 +10598,7 @@
                 </a:solidFill>
                 <a:latin typeface="Calibri"/>
               </a:rPr>
-              <a:t>Build your own chief of staff  ·  process, not a vendor</a:t>
-            </a:r>
-          </a:p>
-        </p:txBody>
-      </p:sp>
-      <p:sp>
-        <p:nvSpPr>
-          <p:cNvPr id="28" name="TextBox 27"/>
-          <p:cNvSpPr txBox="1"/>
-          <p:nvPr/>
-        </p:nvSpPr>
-        <p:spPr>
-          <a:xfrm>
-            <a:off x="10607040" y="6492240"/>
-            <a:ext cx="1097280" cy="274320"/>
-          </a:xfrm>
-          <a:prstGeom prst="rect">
-            <a:avLst/>
-          </a:prstGeom>
-          <a:noFill/>
-        </p:spPr>
-        <p:txBody>
-          <a:bodyPr wrap="square">
-            <a:spAutoFit/>
-          </a:bodyPr>
-          <a:lstStyle/>
-          <a:p>
-            <a:pPr algn="r"/>
-            <a:r>
-              <a:rPr sz="1100" b="0">
-                <a:solidFill>
-                  <a:srgbClr val="B8A888"/>
-                </a:solidFill>
-                <a:latin typeface="Calibri"/>
-              </a:rPr>
-              <a:t>16  /  24</a:t>
+              <a:t>16  /  26</a:t>
             </a:r>
           </a:p>
         </p:txBody>
@@ -11139,8 +10758,8 @@
         </p:nvSpPr>
         <p:spPr>
           <a:xfrm>
-            <a:off x="731520" y="1645920"/>
-            <a:ext cx="10515600" cy="1097280"/>
+            <a:off x="731520" y="411480"/>
+            <a:ext cx="10058400" cy="731520"/>
           </a:xfrm>
           <a:prstGeom prst="rect">
             <a:avLst/>
@@ -11153,29 +10772,72 @@
           </a:bodyPr>
           <a:lstStyle/>
           <a:p>
+            <a:pPr algn="l"/>
+            <a:r>
+              <a:rPr sz="3200" b="1">
+                <a:solidFill>
+                  <a:srgbClr val="F4EBD0"/>
+                </a:solidFill>
+                <a:latin typeface="Calibri"/>
+              </a:rPr>
+              <a:t>Step 3 — Put you in files you own</a:t>
+            </a:r>
+          </a:p>
+        </p:txBody>
+      </p:sp>
+      <p:sp>
+        <p:nvSpPr>
+          <p:cNvPr id="6" name="Rectangle 5"/>
+          <p:cNvSpPr/>
+          <p:nvPr/>
+        </p:nvSpPr>
+        <p:spPr>
+          <a:xfrm>
+            <a:off x="731520" y="1325880"/>
+            <a:ext cx="2651760" cy="1783080"/>
+          </a:xfrm>
+          <a:prstGeom prst="rect">
+            <a:avLst/>
+          </a:prstGeom>
+          <a:solidFill>
+            <a:srgbClr val="141414"/>
+          </a:solidFill>
+          <a:ln>
+            <a:noFill/>
+          </a:ln>
+        </p:spPr>
+        <p:style>
+          <a:lnRef idx="1">
+            <a:schemeClr val="accent1"/>
+          </a:lnRef>
+          <a:fillRef idx="3">
+            <a:schemeClr val="accent1"/>
+          </a:fillRef>
+          <a:effectRef idx="2">
+            <a:schemeClr val="accent1"/>
+          </a:effectRef>
+          <a:fontRef idx="minor">
+            <a:schemeClr val="lt1"/>
+          </a:fontRef>
+        </p:style>
+        <p:txBody>
+          <a:bodyPr rtlCol="0" anchor="ctr"/>
+          <a:lstStyle/>
+          <a:p>
             <a:pPr algn="ctr"/>
-            <a:r>
-              <a:rPr sz="3600" b="1">
-                <a:solidFill>
-                  <a:srgbClr val="B3995D"/>
-                </a:solidFill>
-                <a:latin typeface="Calibri"/>
-              </a:rPr>
-              <a:t>The prompt file is the process.</a:t>
-            </a:r>
-          </a:p>
-        </p:txBody>
-      </p:sp>
-      <p:sp>
-        <p:nvSpPr>
-          <p:cNvPr id="6" name="TextBox 5"/>
+          </a:p>
+        </p:txBody>
+      </p:sp>
+      <p:sp>
+        <p:nvSpPr>
+          <p:cNvPr id="7" name="TextBox 6"/>
           <p:cNvSpPr txBox="1"/>
           <p:nvPr/>
         </p:nvSpPr>
         <p:spPr>
           <a:xfrm>
-            <a:off x="1280160" y="3017520"/>
-            <a:ext cx="9601200" cy="2011680"/>
+            <a:off x="868680" y="1600200"/>
+            <a:ext cx="2377440" cy="502920"/>
           </a:xfrm>
           <a:prstGeom prst="rect">
             <a:avLst/>
@@ -11188,31 +10850,29 @@
           </a:bodyPr>
           <a:lstStyle/>
           <a:p>
-            <a:pPr algn="ctr"/>
-            <a:r>
-              <a:rPr sz="2200" b="0">
-                <a:solidFill>
-                  <a:srgbClr val="F4EBD0"/>
-                </a:solidFill>
-                <a:latin typeface="Calibri"/>
-              </a:rPr>
-              <a:t>You do not re-explain yourself in chat.
-If the output is wrong, the file is wrong.
-Installing a skill proves the files arrived. Only a real job proves they fit.</a:t>
-            </a:r>
-          </a:p>
-        </p:txBody>
-      </p:sp>
-      <p:sp>
-        <p:nvSpPr>
-          <p:cNvPr id="7" name="TextBox 6"/>
+            <a:pPr algn="l"/>
+            <a:r>
+              <a:rPr sz="1600" b="1">
+                <a:solidFill>
+                  <a:srgbClr val="B3995D"/>
+                </a:solidFill>
+                <a:latin typeface="Calibri"/>
+              </a:rPr>
+              <a:t>who-i-am.md</a:t>
+            </a:r>
+          </a:p>
+        </p:txBody>
+      </p:sp>
+      <p:sp>
+        <p:nvSpPr>
+          <p:cNvPr id="8" name="TextBox 7"/>
           <p:cNvSpPr txBox="1"/>
           <p:nvPr/>
         </p:nvSpPr>
         <p:spPr>
           <a:xfrm>
-            <a:off x="640080" y="6492240"/>
-            <a:ext cx="9144000" cy="274320"/>
+            <a:off x="868680" y="2194560"/>
+            <a:ext cx="2377440" cy="640080"/>
           </a:xfrm>
           <a:prstGeom prst="rect">
             <a:avLst/>
@@ -11227,27 +10887,70 @@
           <a:p>
             <a:pPr algn="l"/>
             <a:r>
-              <a:rPr sz="1100" b="0">
-                <a:solidFill>
-                  <a:srgbClr val="B8A888"/>
-                </a:solidFill>
-                <a:latin typeface="Calibri"/>
-              </a:rPr>
-              <a:t>Build your own chief of staff  ·  process, not a vendor</a:t>
-            </a:r>
-          </a:p>
-        </p:txBody>
-      </p:sp>
-      <p:sp>
-        <p:nvSpPr>
-          <p:cNvPr id="8" name="TextBox 7"/>
+              <a:rPr sz="1500" b="0">
+                <a:solidFill>
+                  <a:srgbClr val="F4EBD0"/>
+                </a:solidFill>
+                <a:latin typeface="Calibri"/>
+              </a:rPr>
+              <a:t>Role, who you answer to</a:t>
+            </a:r>
+          </a:p>
+        </p:txBody>
+      </p:sp>
+      <p:sp>
+        <p:nvSpPr>
+          <p:cNvPr id="9" name="Rectangle 8"/>
+          <p:cNvSpPr/>
+          <p:nvPr/>
+        </p:nvSpPr>
+        <p:spPr>
+          <a:xfrm>
+            <a:off x="3520439" y="1325880"/>
+            <a:ext cx="2651760" cy="1783080"/>
+          </a:xfrm>
+          <a:prstGeom prst="rect">
+            <a:avLst/>
+          </a:prstGeom>
+          <a:solidFill>
+            <a:srgbClr val="141414"/>
+          </a:solidFill>
+          <a:ln>
+            <a:noFill/>
+          </a:ln>
+        </p:spPr>
+        <p:style>
+          <a:lnRef idx="1">
+            <a:schemeClr val="accent1"/>
+          </a:lnRef>
+          <a:fillRef idx="3">
+            <a:schemeClr val="accent1"/>
+          </a:fillRef>
+          <a:effectRef idx="2">
+            <a:schemeClr val="accent1"/>
+          </a:effectRef>
+          <a:fontRef idx="minor">
+            <a:schemeClr val="lt1"/>
+          </a:fontRef>
+        </p:style>
+        <p:txBody>
+          <a:bodyPr rtlCol="0" anchor="ctr"/>
+          <a:lstStyle/>
+          <a:p>
+            <a:pPr algn="ctr"/>
+          </a:p>
+        </p:txBody>
+      </p:sp>
+      <p:sp>
+        <p:nvSpPr>
+          <p:cNvPr id="10" name="TextBox 9"/>
           <p:cNvSpPr txBox="1"/>
           <p:nvPr/>
         </p:nvSpPr>
         <p:spPr>
           <a:xfrm>
-            <a:off x="10607040" y="6492240"/>
-            <a:ext cx="1097280" cy="274320"/>
+            <a:off x="3657599" y="1600200"/>
+            <a:ext cx="2377440" cy="502920"/>
           </a:xfrm>
           <a:prstGeom prst="rect">
             <a:avLst/>
@@ -11260,6 +10963,676 @@
           </a:bodyPr>
           <a:lstStyle/>
           <a:p>
+            <a:pPr algn="l"/>
+            <a:r>
+              <a:rPr sz="1600" b="1">
+                <a:solidFill>
+                  <a:srgbClr val="B3995D"/>
+                </a:solidFill>
+                <a:latin typeface="Calibri"/>
+              </a:rPr>
+              <a:t>priorities.md</a:t>
+            </a:r>
+          </a:p>
+        </p:txBody>
+      </p:sp>
+      <p:sp>
+        <p:nvSpPr>
+          <p:cNvPr id="11" name="TextBox 10"/>
+          <p:cNvSpPr txBox="1"/>
+          <p:nvPr/>
+        </p:nvSpPr>
+        <p:spPr>
+          <a:xfrm>
+            <a:off x="3657599" y="2194560"/>
+            <a:ext cx="2377440" cy="640080"/>
+          </a:xfrm>
+          <a:prstGeom prst="rect">
+            <a:avLst/>
+          </a:prstGeom>
+          <a:noFill/>
+        </p:spPr>
+        <p:txBody>
+          <a:bodyPr wrap="square">
+            <a:spAutoFit/>
+          </a:bodyPr>
+          <a:lstStyle/>
+          <a:p>
+            <a:pPr algn="l"/>
+            <a:r>
+              <a:rPr sz="1500" b="0">
+                <a:solidFill>
+                  <a:srgbClr val="F4EBD0"/>
+                </a:solidFill>
+                <a:latin typeface="Calibri"/>
+              </a:rPr>
+              <a:t>This quarter, dated</a:t>
+            </a:r>
+          </a:p>
+        </p:txBody>
+      </p:sp>
+      <p:sp>
+        <p:nvSpPr>
+          <p:cNvPr id="12" name="Rectangle 11"/>
+          <p:cNvSpPr/>
+          <p:nvPr/>
+        </p:nvSpPr>
+        <p:spPr>
+          <a:xfrm>
+            <a:off x="6309359" y="1325880"/>
+            <a:ext cx="2651760" cy="1783080"/>
+          </a:xfrm>
+          <a:prstGeom prst="rect">
+            <a:avLst/>
+          </a:prstGeom>
+          <a:solidFill>
+            <a:srgbClr val="141414"/>
+          </a:solidFill>
+          <a:ln>
+            <a:noFill/>
+          </a:ln>
+        </p:spPr>
+        <p:style>
+          <a:lnRef idx="1">
+            <a:schemeClr val="accent1"/>
+          </a:lnRef>
+          <a:fillRef idx="3">
+            <a:schemeClr val="accent1"/>
+          </a:fillRef>
+          <a:effectRef idx="2">
+            <a:schemeClr val="accent1"/>
+          </a:effectRef>
+          <a:fontRef idx="minor">
+            <a:schemeClr val="lt1"/>
+          </a:fontRef>
+        </p:style>
+        <p:txBody>
+          <a:bodyPr rtlCol="0" anchor="ctr"/>
+          <a:lstStyle/>
+          <a:p>
+            <a:pPr algn="ctr"/>
+          </a:p>
+        </p:txBody>
+      </p:sp>
+      <p:sp>
+        <p:nvSpPr>
+          <p:cNvPr id="13" name="TextBox 12"/>
+          <p:cNvSpPr txBox="1"/>
+          <p:nvPr/>
+        </p:nvSpPr>
+        <p:spPr>
+          <a:xfrm>
+            <a:off x="6446519" y="1600200"/>
+            <a:ext cx="2377440" cy="502920"/>
+          </a:xfrm>
+          <a:prstGeom prst="rect">
+            <a:avLst/>
+          </a:prstGeom>
+          <a:noFill/>
+        </p:spPr>
+        <p:txBody>
+          <a:bodyPr wrap="square">
+            <a:spAutoFit/>
+          </a:bodyPr>
+          <a:lstStyle/>
+          <a:p>
+            <a:pPr algn="l"/>
+            <a:r>
+              <a:rPr sz="1600" b="1">
+                <a:solidFill>
+                  <a:srgbClr val="B3995D"/>
+                </a:solidFill>
+                <a:latin typeface="Calibri"/>
+              </a:rPr>
+              <a:t>people.md</a:t>
+            </a:r>
+          </a:p>
+        </p:txBody>
+      </p:sp>
+      <p:sp>
+        <p:nvSpPr>
+          <p:cNvPr id="14" name="TextBox 13"/>
+          <p:cNvSpPr txBox="1"/>
+          <p:nvPr/>
+        </p:nvSpPr>
+        <p:spPr>
+          <a:xfrm>
+            <a:off x="6446519" y="2194560"/>
+            <a:ext cx="2377440" cy="640080"/>
+          </a:xfrm>
+          <a:prstGeom prst="rect">
+            <a:avLst/>
+          </a:prstGeom>
+          <a:noFill/>
+        </p:spPr>
+        <p:txBody>
+          <a:bodyPr wrap="square">
+            <a:spAutoFit/>
+          </a:bodyPr>
+          <a:lstStyle/>
+          <a:p>
+            <a:pPr algn="l"/>
+            <a:r>
+              <a:rPr sz="1500" b="0">
+                <a:solidFill>
+                  <a:srgbClr val="F4EBD0"/>
+                </a:solidFill>
+                <a:latin typeface="Calibri"/>
+              </a:rPr>
+              <a:t>Who changes your week</a:t>
+            </a:r>
+          </a:p>
+        </p:txBody>
+      </p:sp>
+      <p:sp>
+        <p:nvSpPr>
+          <p:cNvPr id="15" name="Rectangle 14"/>
+          <p:cNvSpPr/>
+          <p:nvPr/>
+        </p:nvSpPr>
+        <p:spPr>
+          <a:xfrm>
+            <a:off x="9098280" y="1325880"/>
+            <a:ext cx="2651760" cy="1783080"/>
+          </a:xfrm>
+          <a:prstGeom prst="rect">
+            <a:avLst/>
+          </a:prstGeom>
+          <a:solidFill>
+            <a:srgbClr val="141414"/>
+          </a:solidFill>
+          <a:ln>
+            <a:noFill/>
+          </a:ln>
+        </p:spPr>
+        <p:style>
+          <a:lnRef idx="1">
+            <a:schemeClr val="accent1"/>
+          </a:lnRef>
+          <a:fillRef idx="3">
+            <a:schemeClr val="accent1"/>
+          </a:fillRef>
+          <a:effectRef idx="2">
+            <a:schemeClr val="accent1"/>
+          </a:effectRef>
+          <a:fontRef idx="minor">
+            <a:schemeClr val="lt1"/>
+          </a:fontRef>
+        </p:style>
+        <p:txBody>
+          <a:bodyPr rtlCol="0" anchor="ctr"/>
+          <a:lstStyle/>
+          <a:p>
+            <a:pPr algn="ctr"/>
+          </a:p>
+        </p:txBody>
+      </p:sp>
+      <p:sp>
+        <p:nvSpPr>
+          <p:cNvPr id="16" name="TextBox 15"/>
+          <p:cNvSpPr txBox="1"/>
+          <p:nvPr/>
+        </p:nvSpPr>
+        <p:spPr>
+          <a:xfrm>
+            <a:off x="9235440" y="1600200"/>
+            <a:ext cx="2377440" cy="502920"/>
+          </a:xfrm>
+          <a:prstGeom prst="rect">
+            <a:avLst/>
+          </a:prstGeom>
+          <a:noFill/>
+        </p:spPr>
+        <p:txBody>
+          <a:bodyPr wrap="square">
+            <a:spAutoFit/>
+          </a:bodyPr>
+          <a:lstStyle/>
+          <a:p>
+            <a:pPr algn="l"/>
+            <a:r>
+              <a:rPr sz="1600" b="1">
+                <a:solidFill>
+                  <a:srgbClr val="B3995D"/>
+                </a:solidFill>
+                <a:latin typeface="Calibri"/>
+              </a:rPr>
+              <a:t>voice.md</a:t>
+            </a:r>
+          </a:p>
+        </p:txBody>
+      </p:sp>
+      <p:sp>
+        <p:nvSpPr>
+          <p:cNvPr id="17" name="TextBox 16"/>
+          <p:cNvSpPr txBox="1"/>
+          <p:nvPr/>
+        </p:nvSpPr>
+        <p:spPr>
+          <a:xfrm>
+            <a:off x="9235440" y="2194560"/>
+            <a:ext cx="2377440" cy="640080"/>
+          </a:xfrm>
+          <a:prstGeom prst="rect">
+            <a:avLst/>
+          </a:prstGeom>
+          <a:noFill/>
+        </p:spPr>
+        <p:txBody>
+          <a:bodyPr wrap="square">
+            <a:spAutoFit/>
+          </a:bodyPr>
+          <a:lstStyle/>
+          <a:p>
+            <a:pPr algn="l"/>
+            <a:r>
+              <a:rPr sz="1500" b="0">
+                <a:solidFill>
+                  <a:srgbClr val="F4EBD0"/>
+                </a:solidFill>
+                <a:latin typeface="Calibri"/>
+              </a:rPr>
+              <a:t>How you actually write ← meeting-recap needs this</a:t>
+            </a:r>
+          </a:p>
+        </p:txBody>
+      </p:sp>
+      <p:sp>
+        <p:nvSpPr>
+          <p:cNvPr id="18" name="Rectangle 17"/>
+          <p:cNvSpPr/>
+          <p:nvPr/>
+        </p:nvSpPr>
+        <p:spPr>
+          <a:xfrm>
+            <a:off x="731520" y="3337560"/>
+            <a:ext cx="3474720" cy="1783080"/>
+          </a:xfrm>
+          <a:prstGeom prst="rect">
+            <a:avLst/>
+          </a:prstGeom>
+          <a:solidFill>
+            <a:srgbClr val="141414"/>
+          </a:solidFill>
+          <a:ln>
+            <a:noFill/>
+          </a:ln>
+        </p:spPr>
+        <p:style>
+          <a:lnRef idx="1">
+            <a:schemeClr val="accent1"/>
+          </a:lnRef>
+          <a:fillRef idx="3">
+            <a:schemeClr val="accent1"/>
+          </a:fillRef>
+          <a:effectRef idx="2">
+            <a:schemeClr val="accent1"/>
+          </a:effectRef>
+          <a:fontRef idx="minor">
+            <a:schemeClr val="lt1"/>
+          </a:fontRef>
+        </p:style>
+        <p:txBody>
+          <a:bodyPr rtlCol="0" anchor="ctr"/>
+          <a:lstStyle/>
+          <a:p>
+            <a:pPr algn="ctr"/>
+          </a:p>
+        </p:txBody>
+      </p:sp>
+      <p:sp>
+        <p:nvSpPr>
+          <p:cNvPr id="19" name="TextBox 18"/>
+          <p:cNvSpPr txBox="1"/>
+          <p:nvPr/>
+        </p:nvSpPr>
+        <p:spPr>
+          <a:xfrm>
+            <a:off x="868680" y="3611880"/>
+            <a:ext cx="3200400" cy="502920"/>
+          </a:xfrm>
+          <a:prstGeom prst="rect">
+            <a:avLst/>
+          </a:prstGeom>
+          <a:noFill/>
+        </p:spPr>
+        <p:txBody>
+          <a:bodyPr wrap="square">
+            <a:spAutoFit/>
+          </a:bodyPr>
+          <a:lstStyle/>
+          <a:p>
+            <a:pPr algn="l"/>
+            <a:r>
+              <a:rPr sz="1600" b="1">
+                <a:solidFill>
+                  <a:srgbClr val="B3995D"/>
+                </a:solidFill>
+                <a:latin typeface="Calibri"/>
+              </a:rPr>
+              <a:t>sources.md</a:t>
+            </a:r>
+          </a:p>
+        </p:txBody>
+      </p:sp>
+      <p:sp>
+        <p:nvSpPr>
+          <p:cNvPr id="20" name="TextBox 19"/>
+          <p:cNvSpPr txBox="1"/>
+          <p:nvPr/>
+        </p:nvSpPr>
+        <p:spPr>
+          <a:xfrm>
+            <a:off x="868680" y="4206240"/>
+            <a:ext cx="3200400" cy="640080"/>
+          </a:xfrm>
+          <a:prstGeom prst="rect">
+            <a:avLst/>
+          </a:prstGeom>
+          <a:noFill/>
+        </p:spPr>
+        <p:txBody>
+          <a:bodyPr wrap="square">
+            <a:spAutoFit/>
+          </a:bodyPr>
+          <a:lstStyle/>
+          <a:p>
+            <a:pPr algn="l"/>
+            <a:r>
+              <a:rPr sz="1500" b="0">
+                <a:solidFill>
+                  <a:srgbClr val="F4EBD0"/>
+                </a:solidFill>
+                <a:latin typeface="Calibri"/>
+              </a:rPr>
+              <a:t>Where you would click to check</a:t>
+            </a:r>
+          </a:p>
+        </p:txBody>
+      </p:sp>
+      <p:sp>
+        <p:nvSpPr>
+          <p:cNvPr id="21" name="Rectangle 20"/>
+          <p:cNvSpPr/>
+          <p:nvPr/>
+        </p:nvSpPr>
+        <p:spPr>
+          <a:xfrm>
+            <a:off x="4389120" y="3337560"/>
+            <a:ext cx="3474720" cy="1783080"/>
+          </a:xfrm>
+          <a:prstGeom prst="rect">
+            <a:avLst/>
+          </a:prstGeom>
+          <a:solidFill>
+            <a:srgbClr val="141414"/>
+          </a:solidFill>
+          <a:ln>
+            <a:noFill/>
+          </a:ln>
+        </p:spPr>
+        <p:style>
+          <a:lnRef idx="1">
+            <a:schemeClr val="accent1"/>
+          </a:lnRef>
+          <a:fillRef idx="3">
+            <a:schemeClr val="accent1"/>
+          </a:fillRef>
+          <a:effectRef idx="2">
+            <a:schemeClr val="accent1"/>
+          </a:effectRef>
+          <a:fontRef idx="minor">
+            <a:schemeClr val="lt1"/>
+          </a:fontRef>
+        </p:style>
+        <p:txBody>
+          <a:bodyPr rtlCol="0" anchor="ctr"/>
+          <a:lstStyle/>
+          <a:p>
+            <a:pPr algn="ctr"/>
+          </a:p>
+        </p:txBody>
+      </p:sp>
+      <p:sp>
+        <p:nvSpPr>
+          <p:cNvPr id="22" name="TextBox 21"/>
+          <p:cNvSpPr txBox="1"/>
+          <p:nvPr/>
+        </p:nvSpPr>
+        <p:spPr>
+          <a:xfrm>
+            <a:off x="4526280" y="3611880"/>
+            <a:ext cx="3200400" cy="502920"/>
+          </a:xfrm>
+          <a:prstGeom prst="rect">
+            <a:avLst/>
+          </a:prstGeom>
+          <a:noFill/>
+        </p:spPr>
+        <p:txBody>
+          <a:bodyPr wrap="square">
+            <a:spAutoFit/>
+          </a:bodyPr>
+          <a:lstStyle/>
+          <a:p>
+            <a:pPr algn="l"/>
+            <a:r>
+              <a:rPr sz="1600" b="1">
+                <a:solidFill>
+                  <a:srgbClr val="B3995D"/>
+                </a:solidFill>
+                <a:latin typeface="Calibri"/>
+              </a:rPr>
+              <a:t>open-loops.md</a:t>
+            </a:r>
+          </a:p>
+        </p:txBody>
+      </p:sp>
+      <p:sp>
+        <p:nvSpPr>
+          <p:cNvPr id="23" name="TextBox 22"/>
+          <p:cNvSpPr txBox="1"/>
+          <p:nvPr/>
+        </p:nvSpPr>
+        <p:spPr>
+          <a:xfrm>
+            <a:off x="4526280" y="4206240"/>
+            <a:ext cx="3200400" cy="640080"/>
+          </a:xfrm>
+          <a:prstGeom prst="rect">
+            <a:avLst/>
+          </a:prstGeom>
+          <a:noFill/>
+        </p:spPr>
+        <p:txBody>
+          <a:bodyPr wrap="square">
+            <a:spAutoFit/>
+          </a:bodyPr>
+          <a:lstStyle/>
+          <a:p>
+            <a:pPr algn="l"/>
+            <a:r>
+              <a:rPr sz="1500" b="0">
+                <a:solidFill>
+                  <a:srgbClr val="F4EBD0"/>
+                </a:solidFill>
+                <a:latin typeface="Calibri"/>
+              </a:rPr>
+              <a:t>What is still open</a:t>
+            </a:r>
+          </a:p>
+        </p:txBody>
+      </p:sp>
+      <p:sp>
+        <p:nvSpPr>
+          <p:cNvPr id="24" name="Rectangle 23"/>
+          <p:cNvSpPr/>
+          <p:nvPr/>
+        </p:nvSpPr>
+        <p:spPr>
+          <a:xfrm>
+            <a:off x="8046720" y="3337560"/>
+            <a:ext cx="3474720" cy="1783080"/>
+          </a:xfrm>
+          <a:prstGeom prst="rect">
+            <a:avLst/>
+          </a:prstGeom>
+          <a:solidFill>
+            <a:srgbClr val="141414"/>
+          </a:solidFill>
+          <a:ln>
+            <a:noFill/>
+          </a:ln>
+        </p:spPr>
+        <p:style>
+          <a:lnRef idx="1">
+            <a:schemeClr val="accent1"/>
+          </a:lnRef>
+          <a:fillRef idx="3">
+            <a:schemeClr val="accent1"/>
+          </a:fillRef>
+          <a:effectRef idx="2">
+            <a:schemeClr val="accent1"/>
+          </a:effectRef>
+          <a:fontRef idx="minor">
+            <a:schemeClr val="lt1"/>
+          </a:fontRef>
+        </p:style>
+        <p:txBody>
+          <a:bodyPr rtlCol="0" anchor="ctr"/>
+          <a:lstStyle/>
+          <a:p>
+            <a:pPr algn="ctr"/>
+          </a:p>
+        </p:txBody>
+      </p:sp>
+      <p:sp>
+        <p:nvSpPr>
+          <p:cNvPr id="25" name="TextBox 24"/>
+          <p:cNvSpPr txBox="1"/>
+          <p:nvPr/>
+        </p:nvSpPr>
+        <p:spPr>
+          <a:xfrm>
+            <a:off x="8183880" y="3611880"/>
+            <a:ext cx="3200400" cy="502920"/>
+          </a:xfrm>
+          <a:prstGeom prst="rect">
+            <a:avLst/>
+          </a:prstGeom>
+          <a:noFill/>
+        </p:spPr>
+        <p:txBody>
+          <a:bodyPr wrap="square">
+            <a:spAutoFit/>
+          </a:bodyPr>
+          <a:lstStyle/>
+          <a:p>
+            <a:pPr algn="l"/>
+            <a:r>
+              <a:rPr sz="1600" b="1">
+                <a:solidFill>
+                  <a:srgbClr val="B3995D"/>
+                </a:solidFill>
+                <a:latin typeface="Calibri"/>
+              </a:rPr>
+              <a:t>decisions.md</a:t>
+            </a:r>
+          </a:p>
+        </p:txBody>
+      </p:sp>
+      <p:sp>
+        <p:nvSpPr>
+          <p:cNvPr id="26" name="TextBox 25"/>
+          <p:cNvSpPr txBox="1"/>
+          <p:nvPr/>
+        </p:nvSpPr>
+        <p:spPr>
+          <a:xfrm>
+            <a:off x="8183880" y="4206240"/>
+            <a:ext cx="3200400" cy="640080"/>
+          </a:xfrm>
+          <a:prstGeom prst="rect">
+            <a:avLst/>
+          </a:prstGeom>
+          <a:noFill/>
+        </p:spPr>
+        <p:txBody>
+          <a:bodyPr wrap="square">
+            <a:spAutoFit/>
+          </a:bodyPr>
+          <a:lstStyle/>
+          <a:p>
+            <a:pPr algn="l"/>
+            <a:r>
+              <a:rPr sz="1500" b="0">
+                <a:solidFill>
+                  <a:srgbClr val="F4EBD0"/>
+                </a:solidFill>
+                <a:latin typeface="Calibri"/>
+              </a:rPr>
+              <a:t>What you already settled</a:t>
+            </a:r>
+          </a:p>
+        </p:txBody>
+      </p:sp>
+      <p:sp>
+        <p:nvSpPr>
+          <p:cNvPr id="27" name="TextBox 26"/>
+          <p:cNvSpPr txBox="1"/>
+          <p:nvPr/>
+        </p:nvSpPr>
+        <p:spPr>
+          <a:xfrm>
+            <a:off x="640080" y="6492240"/>
+            <a:ext cx="9144000" cy="274320"/>
+          </a:xfrm>
+          <a:prstGeom prst="rect">
+            <a:avLst/>
+          </a:prstGeom>
+          <a:noFill/>
+        </p:spPr>
+        <p:txBody>
+          <a:bodyPr wrap="square">
+            <a:spAutoFit/>
+          </a:bodyPr>
+          <a:lstStyle/>
+          <a:p>
+            <a:pPr algn="l"/>
+            <a:r>
+              <a:rPr sz="1100" b="0">
+                <a:solidFill>
+                  <a:srgbClr val="B8A888"/>
+                </a:solidFill>
+                <a:latin typeface="Calibri"/>
+              </a:rPr>
+              <a:t>Build your own chief of staff  ·  process, not a vendor</a:t>
+            </a:r>
+          </a:p>
+        </p:txBody>
+      </p:sp>
+      <p:sp>
+        <p:nvSpPr>
+          <p:cNvPr id="28" name="TextBox 27"/>
+          <p:cNvSpPr txBox="1"/>
+          <p:nvPr/>
+        </p:nvSpPr>
+        <p:spPr>
+          <a:xfrm>
+            <a:off x="10607040" y="6492240"/>
+            <a:ext cx="1097280" cy="274320"/>
+          </a:xfrm>
+          <a:prstGeom prst="rect">
+            <a:avLst/>
+          </a:prstGeom>
+          <a:noFill/>
+        </p:spPr>
+        <p:txBody>
+          <a:bodyPr wrap="square">
+            <a:spAutoFit/>
+          </a:bodyPr>
+          <a:lstStyle/>
+          <a:p>
             <a:pPr algn="r"/>
             <a:r>
               <a:rPr sz="1100" b="0">
@@ -11268,7 +11641,7 @@
                 </a:solidFill>
                 <a:latin typeface="Calibri"/>
               </a:rPr>
-              <a:t>17  /  24</a:t>
+              <a:t>17  /  26</a:t>
             </a:r>
           </a:p>
         </p:txBody>
@@ -11428,8 +11801,8 @@
         </p:nvSpPr>
         <p:spPr>
           <a:xfrm>
-            <a:off x="731520" y="411480"/>
-            <a:ext cx="10058400" cy="731520"/>
+            <a:off x="731520" y="1645920"/>
+            <a:ext cx="10515600" cy="1097280"/>
           </a:xfrm>
           <a:prstGeom prst="rect">
             <a:avLst/>
@@ -11442,15 +11815,16 @@
           </a:bodyPr>
           <a:lstStyle/>
           <a:p>
-            <a:pPr algn="l"/>
+            <a:pPr algn="ctr"/>
             <a:r>
               <a:rPr sz="3200" b="1">
                 <a:solidFill>
-                  <a:srgbClr val="F4EBD0"/>
-                </a:solidFill>
-                <a:latin typeface="Calibri"/>
-              </a:rPr>
-              <a:t>Step 5 — Verify. Cite or cut.</a:t>
+                  <a:srgbClr val="B3995D"/>
+                </a:solidFill>
+                <a:latin typeface="Calibri"/>
+              </a:rPr>
+              <a:t>STEP 4
+The prompt file is the process.</a:t>
             </a:r>
           </a:p>
         </p:txBody>
@@ -11463,8 +11837,8 @@
         </p:nvSpPr>
         <p:spPr>
           <a:xfrm>
-            <a:off x="731520" y="1371600"/>
-            <a:ext cx="10515600" cy="4389120"/>
+            <a:off x="1280160" y="3017520"/>
+            <a:ext cx="9601200" cy="2011680"/>
           </a:xfrm>
           <a:prstGeom prst="rect">
             <a:avLst/>
@@ -11477,11 +11851,7 @@
           </a:bodyPr>
           <a:lstStyle/>
           <a:p>
-            <a:pPr>
-              <a:spcAft>
-                <a:spcPts val="1600"/>
-              </a:spcAft>
-            </a:pPr>
+            <a:pPr algn="ctr"/>
             <a:r>
               <a:rPr sz="2200" b="0">
                 <a:solidFill>
@@ -11489,55 +11859,9 @@
                 </a:solidFill>
                 <a:latin typeface="Calibri"/>
               </a:rPr>
-              <a:t>•  Every substantive claim needs a source you can open.</a:t>
-            </a:r>
-          </a:p>
-          <a:p>
-            <a:pPr>
-              <a:spcAft>
-                <a:spcPts val="1600"/>
-              </a:spcAft>
-            </a:pPr>
-            <a:r>
-              <a:rPr sz="2200" b="0">
-                <a:solidFill>
-                  <a:srgbClr val="F4EBD0"/>
-                </a:solidFill>
-                <a:latin typeface="Calibri"/>
-              </a:rPr>
-              <a:t>•  Gaps stay gaps. “Not found” beats a confident guess.</a:t>
-            </a:r>
-          </a:p>
-          <a:p>
-            <a:pPr>
-              <a:spcAft>
-                <a:spcPts val="1600"/>
-              </a:spcAft>
-            </a:pPr>
-            <a:r>
-              <a:rPr sz="2200" b="0">
-                <a:solidFill>
-                  <a:srgbClr val="F4EBD0"/>
-                </a:solidFill>
-                <a:latin typeface="Calibri"/>
-              </a:rPr>
-              <a:t>•  Self-reported “done” is not a check.</a:t>
-            </a:r>
-          </a:p>
-          <a:p>
-            <a:pPr>
-              <a:spcAft>
-                <a:spcPts val="1600"/>
-              </a:spcAft>
-            </a:pPr>
-            <a:r>
-              <a:rPr sz="2200" b="0">
-                <a:solidFill>
-                  <a:srgbClr val="F4EBD0"/>
-                </a:solidFill>
-                <a:latin typeface="Calibri"/>
-              </a:rPr>
-              <a:t>•  You read the draft against the Check section. Then you send — or you don't.</a:t>
+              <a:t>You do not re-explain yourself in chat.
+If the output is wrong, the file is wrong.
+Installing a skill proves the files arrived. Only a real job proves they fit.</a:t>
             </a:r>
           </a:p>
         </p:txBody>
@@ -11607,7 +11931,7 @@
                 </a:solidFill>
                 <a:latin typeface="Calibri"/>
               </a:rPr>
-              <a:t>18  /  24</a:t>
+              <a:t>18  /  26</a:t>
             </a:r>
           </a:p>
         </p:txBody>
@@ -11783,13 +12107,13 @@
           <a:p>
             <a:pPr algn="l"/>
             <a:r>
-              <a:rPr sz="3000" b="1">
+              <a:rPr sz="3200" b="1">
                 <a:solidFill>
                   <a:srgbClr val="F4EBD0"/>
                 </a:solidFill>
                 <a:latin typeface="Calibri"/>
               </a:rPr>
-              <a:t>Step 6 — Correct the file, not the chat</a:t>
+              <a:t>Step 5 — Verify. Cite or cut.</a:t>
             </a:r>
           </a:p>
         </p:txBody>
@@ -11803,7 +12127,7 @@
         <p:spPr>
           <a:xfrm>
             <a:off x="731520" y="1371600"/>
-            <a:ext cx="10515600" cy="3840480"/>
+            <a:ext cx="10515600" cy="4389120"/>
           </a:xfrm>
           <a:prstGeom prst="rect">
             <a:avLst/>
@@ -11818,7 +12142,7 @@
           <a:p>
             <a:pPr>
               <a:spcAft>
-                <a:spcPts val="1400"/>
+                <a:spcPts val="1600"/>
               </a:spcAft>
             </a:pPr>
             <a:r>
@@ -11828,13 +12152,13 @@
                 </a:solidFill>
                 <a:latin typeface="Calibri"/>
               </a:rPr>
-              <a:t>•  Three of the same correction is a rule. Two is a candidate. One is a fluke.</a:t>
+              <a:t>•  Every substantive claim needs a source you can open.</a:t>
             </a:r>
           </a:p>
           <a:p>
             <a:pPr>
               <a:spcAft>
-                <a:spcPts val="1400"/>
+                <a:spcPts val="1600"/>
               </a:spcAft>
             </a:pPr>
             <a:r>
@@ -11844,13 +12168,13 @@
                 </a:solidFill>
                 <a:latin typeface="Calibri"/>
               </a:rPr>
-              <a:t>•  Put the line in the prompt or in voice.md. One owner.</a:t>
+              <a:t>•  Gaps stay gaps. “Not found” beats a confident guess.</a:t>
             </a:r>
           </a:p>
           <a:p>
             <a:pPr>
               <a:spcAft>
-                <a:spcPts val="1400"/>
+                <a:spcPts val="1600"/>
               </a:spcAft>
             </a:pPr>
             <a:r>
@@ -11860,13 +12184,13 @@
                 </a:solidFill>
                 <a:latin typeface="Calibri"/>
               </a:rPr>
-              <a:t>•  Delete a stale instruction before you add a new one.</a:t>
+              <a:t>•  Self-reported “done” is not a check.</a:t>
             </a:r>
           </a:p>
           <a:p>
             <a:pPr>
               <a:spcAft>
-                <a:spcPts val="1400"/>
+                <a:spcPts val="1600"/>
               </a:spcAft>
             </a:pPr>
             <a:r>
@@ -11876,7 +12200,7 @@
                 </a:solidFill>
                 <a:latin typeface="Calibri"/>
               </a:rPr>
-              <a:t>•  Somebody owns the agent. One person, close enough to notice drift.</a:t>
+              <a:t>•  You read the draft against the Check section. Then you send — or you don't.</a:t>
             </a:r>
           </a:p>
         </p:txBody>
@@ -11946,7 +12270,7 @@
                 </a:solidFill>
                 <a:latin typeface="Calibri"/>
               </a:rPr>
-              <a:t>19  /  24</a:t>
+              <a:t>19  /  26</a:t>
             </a:r>
           </a:p>
         </p:txBody>
@@ -12304,7 +12628,7 @@
                 </a:solidFill>
                 <a:latin typeface="Calibri"/>
               </a:rPr>
-              <a:t>2  /  24</a:t>
+              <a:t>2  /  26</a:t>
             </a:r>
           </a:p>
         </p:txBody>
@@ -12464,8 +12788,8 @@
         </p:nvSpPr>
         <p:spPr>
           <a:xfrm>
-            <a:off x="731520" y="1554480"/>
-            <a:ext cx="10515600" cy="1280160"/>
+            <a:off x="731520" y="411480"/>
+            <a:ext cx="10058400" cy="731520"/>
           </a:xfrm>
           <a:prstGeom prst="rect">
             <a:avLst/>
@@ -12478,15 +12802,15 @@
           </a:bodyPr>
           <a:lstStyle/>
           <a:p>
-            <a:pPr algn="ctr"/>
-            <a:r>
-              <a:rPr sz="4000" b="1">
-                <a:solidFill>
-                  <a:srgbClr val="B3995D"/>
-                </a:solidFill>
-                <a:latin typeface="Calibri"/>
-              </a:rPr>
-              <a:t>Drafts only. Never send.</a:t>
+            <a:pPr algn="l"/>
+            <a:r>
+              <a:rPr sz="3000" b="1">
+                <a:solidFill>
+                  <a:srgbClr val="F4EBD0"/>
+                </a:solidFill>
+                <a:latin typeface="Calibri"/>
+              </a:rPr>
+              <a:t>Step 6 — Correct the file, not the chat</a:t>
             </a:r>
           </a:p>
         </p:txBody>
@@ -12499,8 +12823,8 @@
         </p:nvSpPr>
         <p:spPr>
           <a:xfrm>
-            <a:off x="1188720" y="3108960"/>
-            <a:ext cx="9784080" cy="2011680"/>
+            <a:off x="731520" y="1371600"/>
+            <a:ext cx="10515600" cy="3840480"/>
           </a:xfrm>
           <a:prstGeom prst="rect">
             <a:avLst/>
@@ -12513,7 +12837,11 @@
           </a:bodyPr>
           <a:lstStyle/>
           <a:p>
-            <a:pPr algn="ctr"/>
+            <a:pPr>
+              <a:spcAft>
+                <a:spcPts val="1400"/>
+              </a:spcAft>
+            </a:pPr>
             <a:r>
               <a:rPr sz="2200" b="0">
                 <a:solidFill>
@@ -12521,9 +12849,55 @@
                 </a:solidFill>
                 <a:latin typeface="Calibri"/>
               </a:rPr>
-              <a:t>The agent may read, organize, draft, cite, and export.
-It may not send, file, submit, pay, sign, or close a ticket.
-You are the principal. The agent is staff.</a:t>
+              <a:t>•  Three of the same correction is a rule. Two is a candidate. One is a fluke.</a:t>
+            </a:r>
+          </a:p>
+          <a:p>
+            <a:pPr>
+              <a:spcAft>
+                <a:spcPts val="1400"/>
+              </a:spcAft>
+            </a:pPr>
+            <a:r>
+              <a:rPr sz="2200" b="0">
+                <a:solidFill>
+                  <a:srgbClr val="F4EBD0"/>
+                </a:solidFill>
+                <a:latin typeface="Calibri"/>
+              </a:rPr>
+              <a:t>•  Put the line in the prompt or in voice.md. One owner.</a:t>
+            </a:r>
+          </a:p>
+          <a:p>
+            <a:pPr>
+              <a:spcAft>
+                <a:spcPts val="1400"/>
+              </a:spcAft>
+            </a:pPr>
+            <a:r>
+              <a:rPr sz="2200" b="0">
+                <a:solidFill>
+                  <a:srgbClr val="F4EBD0"/>
+                </a:solidFill>
+                <a:latin typeface="Calibri"/>
+              </a:rPr>
+              <a:t>•  Delete a stale instruction before you add a new one.</a:t>
+            </a:r>
+          </a:p>
+          <a:p>
+            <a:pPr>
+              <a:spcAft>
+                <a:spcPts val="1400"/>
+              </a:spcAft>
+            </a:pPr>
+            <a:r>
+              <a:rPr sz="2200" b="0">
+                <a:solidFill>
+                  <a:srgbClr val="F4EBD0"/>
+                </a:solidFill>
+                <a:latin typeface="Calibri"/>
+              </a:rPr>
+              <a:t>•  Somebody owns the agent. One person, close enough to notice drift.</a:t>
             </a:r>
           </a:p>
         </p:txBody>
@@ -12593,7 +12967,7 @@
                 </a:solidFill>
                 <a:latin typeface="Calibri"/>
               </a:rPr>
-              <a:t>20  /  24</a:t>
+              <a:t>20  /  26</a:t>
             </a:r>
           </a:p>
         </p:txBody>
@@ -12769,13 +13143,13 @@
           <a:p>
             <a:pPr algn="l"/>
             <a:r>
-              <a:rPr sz="3000" b="1">
+              <a:rPr sz="3200" b="1">
                 <a:solidFill>
                   <a:srgbClr val="F4EBD0"/>
                 </a:solidFill>
                 <a:latin typeface="Calibri"/>
               </a:rPr>
-              <a:t>Then point the same process at anything</a:t>
+              <a:t>Step 7 — Only then schedule it</a:t>
             </a:r>
           </a:p>
         </p:txBody>
@@ -12808,13 +13182,13 @@
               </a:spcAft>
             </a:pPr>
             <a:r>
-              <a:rPr sz="2000" b="0">
+              <a:rPr sz="2100" b="0">
                 <a:solidFill>
                   <a:srgbClr val="F4EBD0"/>
                 </a:solidFill>
                 <a:latin typeface="Calibri"/>
               </a:rPr>
-              <a:t>•  Expense reports, hiring screens, incident recaps, customer research.</a:t>
+              <a:t>•  Do not put a daily brief on a timer until you have checked it by hand several times.</a:t>
             </a:r>
           </a:p>
           <a:p>
@@ -12824,13 +13198,13 @@
               </a:spcAft>
             </a:pPr>
             <a:r>
-              <a:rPr sz="2000" b="0">
+              <a:rPr sz="2100" b="0">
                 <a:solidFill>
                   <a:srgbClr val="F4EBD0"/>
                 </a:solidFill>
                 <a:latin typeface="Calibri"/>
               </a:rPr>
-              <a:t>•  If it passes both tests, it gets a prompt file and a check.</a:t>
+              <a:t>•  Automation is for a process you already trust — not one you are still debugging.</a:t>
             </a:r>
           </a:p>
           <a:p>
@@ -12840,13 +13214,13 @@
               </a:spcAft>
             </a:pPr>
             <a:r>
-              <a:rPr sz="2000" b="0">
+              <a:rPr sz="2100" b="0">
                 <a:solidFill>
                   <a:srgbClr val="F4EBD0"/>
                 </a:solidFill>
                 <a:latin typeface="Calibri"/>
               </a:rPr>
-              <a:t>•  If it fails, you just saved yourself a clever mess.</a:t>
+              <a:t>•  Frequency is evidence a job exists. It is not proof that automating it would matter.</a:t>
             </a:r>
           </a:p>
           <a:p>
@@ -12856,29 +13230,13 @@
               </a:spcAft>
             </a:pPr>
             <a:r>
-              <a:rPr sz="2000" b="0">
+              <a:rPr sz="2100" b="0">
                 <a:solidFill>
                   <a:srgbClr val="F4EBD0"/>
                 </a:solidFill>
                 <a:latin typeface="Calibri"/>
               </a:rPr>
-              <a:t>•  Do not ask “can AI do this?” Ask what shape the work is.</a:t>
-            </a:r>
-          </a:p>
-          <a:p>
-            <a:pPr>
-              <a:spcAft>
-                <a:spcPts val="1400"/>
-              </a:spcAft>
-            </a:pPr>
-            <a:r>
-              <a:rPr sz="2000" b="0">
-                <a:solidFill>
-                  <a:srgbClr val="F4EBD0"/>
-                </a:solidFill>
-                <a:latin typeface="Calibri"/>
-              </a:rPr>
-              <a:t>•  Buying a smarter model does not skip workflow, data, authority, evaluation, audit, or an owner.</a:t>
+              <a:t>•  Choosing none of the offered automations is allowed, even after all six earlier steps.</a:t>
             </a:r>
           </a:p>
         </p:txBody>
@@ -12948,7 +13306,7 @@
                 </a:solidFill>
                 <a:latin typeface="Calibri"/>
               </a:rPr>
-              <a:t>21  /  24</a:t>
+              <a:t>21  /  26</a:t>
             </a:r>
           </a:p>
         </p:txBody>
@@ -13130,7 +13488,7 @@
                 </a:solidFill>
                 <a:latin typeface="Calibri"/>
               </a:rPr>
-              <a:t>Thirty minutes, starting Monday</a:t>
+              <a:t>Rank your next candidates</a:t>
             </a:r>
           </a:p>
         </p:txBody>
@@ -13143,8 +13501,8 @@
         </p:nvSpPr>
         <p:spPr>
           <a:xfrm>
-            <a:off x="731520" y="1371600"/>
-            <a:ext cx="10515600" cy="914400"/>
+            <a:off x="502920" y="1325880"/>
+            <a:ext cx="2148840" cy="1828800"/>
           </a:xfrm>
           <a:prstGeom prst="rect">
             <a:avLst/>
@@ -13186,8 +13544,8 @@
         </p:nvSpPr>
         <p:spPr>
           <a:xfrm>
-            <a:off x="960120" y="1627632"/>
-            <a:ext cx="1645920" cy="457200"/>
+            <a:off x="612648" y="1554480"/>
+            <a:ext cx="1920240" cy="411480"/>
           </a:xfrm>
           <a:prstGeom prst="rect">
             <a:avLst/>
@@ -13202,13 +13560,13 @@
           <a:p>
             <a:pPr algn="l"/>
             <a:r>
-              <a:rPr sz="1800" b="1">
+              <a:rPr sz="1600" b="1">
                 <a:solidFill>
                   <a:srgbClr val="B3995D"/>
                 </a:solidFill>
                 <a:latin typeface="Calibri"/>
               </a:rPr>
-              <a:t>10 min</a:t>
+              <a:t>Repeatable</a:t>
             </a:r>
           </a:p>
         </p:txBody>
@@ -13221,8 +13579,8 @@
         </p:nvSpPr>
         <p:spPr>
           <a:xfrm>
-            <a:off x="2743200" y="1627632"/>
-            <a:ext cx="8229600" cy="457200"/>
+            <a:off x="612648" y="2011680"/>
+            <a:ext cx="1920240" cy="914400"/>
           </a:xfrm>
           <a:prstGeom prst="rect">
             <a:avLst/>
@@ -13237,13 +13595,14 @@
           <a:p>
             <a:pPr algn="l"/>
             <a:r>
-              <a:rPr sz="2000" b="0">
+              <a:rPr sz="1400" b="0">
                 <a:solidFill>
                   <a:srgbClr val="F4EBD0"/>
                 </a:solidFill>
                 <a:latin typeface="Calibri"/>
               </a:rPr>
-              <a:t>Read PROCESS.md</a:t>
+              <a:t>0–2: special case →
+same process</a:t>
             </a:r>
           </a:p>
         </p:txBody>
@@ -13256,8 +13615,8 @@
         </p:nvSpPr>
         <p:spPr>
           <a:xfrm>
-            <a:off x="731520" y="2423160"/>
-            <a:ext cx="10515600" cy="914400"/>
+            <a:off x="2788920" y="1325880"/>
+            <a:ext cx="2148840" cy="1828800"/>
           </a:xfrm>
           <a:prstGeom prst="rect">
             <a:avLst/>
@@ -13299,8 +13658,8 @@
         </p:nvSpPr>
         <p:spPr>
           <a:xfrm>
-            <a:off x="960120" y="2679192"/>
-            <a:ext cx="1645920" cy="457200"/>
+            <a:off x="2898648" y="1554480"/>
+            <a:ext cx="1920240" cy="411480"/>
           </a:xfrm>
           <a:prstGeom prst="rect">
             <a:avLst/>
@@ -13315,13 +13674,13 @@
           <a:p>
             <a:pPr algn="l"/>
             <a:r>
-              <a:rPr sz="1800" b="1">
+              <a:rPr sz="1600" b="1">
                 <a:solidFill>
                   <a:srgbClr val="B3995D"/>
                 </a:solidFill>
                 <a:latin typeface="Calibri"/>
               </a:rPr>
-              <a:t>10 min</a:t>
+              <a:t>Verifiable</a:t>
             </a:r>
           </a:p>
         </p:txBody>
@@ -13334,8 +13693,8 @@
         </p:nvSpPr>
         <p:spPr>
           <a:xfrm>
-            <a:off x="2743200" y="2679192"/>
-            <a:ext cx="8229600" cy="457200"/>
+            <a:off x="2898648" y="2011680"/>
+            <a:ext cx="1920240" cy="914400"/>
           </a:xfrm>
           <a:prstGeom prst="rect">
             <a:avLst/>
@@ -13350,13 +13709,14 @@
           <a:p>
             <a:pPr algn="l"/>
             <a:r>
-              <a:rPr sz="2000" b="0">
+              <a:rPr sz="1400" b="0">
                 <a:solidFill>
                   <a:srgbClr val="F4EBD0"/>
                 </a:solidFill>
                 <a:latin typeface="Calibri"/>
               </a:rPr>
-              <a:t>Fill in your private context files</a:t>
+              <a:t>0–2: no check →
+hard source check</a:t>
             </a:r>
           </a:p>
         </p:txBody>
@@ -13369,8 +13729,8 @@
         </p:nvSpPr>
         <p:spPr>
           <a:xfrm>
-            <a:off x="731520" y="3474720"/>
-            <a:ext cx="10515600" cy="914400"/>
+            <a:off x="5074920" y="1325880"/>
+            <a:ext cx="2148840" cy="1828800"/>
           </a:xfrm>
           <a:prstGeom prst="rect">
             <a:avLst/>
@@ -13412,8 +13772,8 @@
         </p:nvSpPr>
         <p:spPr>
           <a:xfrm>
-            <a:off x="960120" y="3730752"/>
-            <a:ext cx="1645920" cy="457200"/>
+            <a:off x="5184648" y="1554480"/>
+            <a:ext cx="1920240" cy="411480"/>
           </a:xfrm>
           <a:prstGeom prst="rect">
             <a:avLst/>
@@ -13428,13 +13788,13 @@
           <a:p>
             <a:pPr algn="l"/>
             <a:r>
-              <a:rPr sz="1800" b="1">
+              <a:rPr sz="1600" b="1">
                 <a:solidFill>
                   <a:srgbClr val="B3995D"/>
                 </a:solidFill>
                 <a:latin typeface="Calibri"/>
               </a:rPr>
-              <a:t>5 min</a:t>
+              <a:t>Frequency</a:t>
             </a:r>
           </a:p>
         </p:txBody>
@@ -13447,8 +13807,8 @@
         </p:nvSpPr>
         <p:spPr>
           <a:xfrm>
-            <a:off x="2743200" y="3730752"/>
-            <a:ext cx="8229600" cy="457200"/>
+            <a:off x="5184648" y="2011680"/>
+            <a:ext cx="1920240" cy="914400"/>
           </a:xfrm>
           <a:prstGeom prst="rect">
             <a:avLst/>
@@ -13463,13 +13823,14 @@
           <a:p>
             <a:pPr algn="l"/>
             <a:r>
-              <a:rPr sz="2000" b="0">
+              <a:rPr sz="1400" b="0">
                 <a:solidFill>
                   <a:srgbClr val="F4EBD0"/>
                 </a:solidFill>
                 <a:latin typeface="Calibri"/>
               </a:rPr>
-              <a:t>If you freeze: what-to-automate.md, then the two tests</a:t>
+              <a:t>0–2: rare →
+daily+</a:t>
             </a:r>
           </a:p>
         </p:txBody>
@@ -13482,8 +13843,8 @@
         </p:nvSpPr>
         <p:spPr>
           <a:xfrm>
-            <a:off x="731520" y="4526279"/>
-            <a:ext cx="10515600" cy="914400"/>
+            <a:off x="7360920" y="1325880"/>
+            <a:ext cx="2148840" cy="1828800"/>
           </a:xfrm>
           <a:prstGeom prst="rect">
             <a:avLst/>
@@ -13525,8 +13886,8 @@
         </p:nvSpPr>
         <p:spPr>
           <a:xfrm>
-            <a:off x="960120" y="4782311"/>
-            <a:ext cx="1645920" cy="457200"/>
+            <a:off x="7470648" y="1554480"/>
+            <a:ext cx="1920240" cy="411480"/>
           </a:xfrm>
           <a:prstGeom prst="rect">
             <a:avLst/>
@@ -13541,13 +13902,13 @@
           <a:p>
             <a:pPr algn="l"/>
             <a:r>
-              <a:rPr sz="1800" b="1">
+              <a:rPr sz="1600" b="1">
                 <a:solidFill>
                   <a:srgbClr val="B3995D"/>
                 </a:solidFill>
                 <a:latin typeface="Calibri"/>
               </a:rPr>
-              <a:t>5 min</a:t>
+              <a:t>Blast radius</a:t>
             </a:r>
           </a:p>
         </p:txBody>
@@ -13560,8 +13921,8 @@
         </p:nvSpPr>
         <p:spPr>
           <a:xfrm>
-            <a:off x="2743200" y="4782311"/>
-            <a:ext cx="8229600" cy="457200"/>
+            <a:off x="7470648" y="2011680"/>
+            <a:ext cx="1920240" cy="914400"/>
           </a:xfrm>
           <a:prstGeom prst="rect">
             <a:avLst/>
@@ -13576,27 +13937,71 @@
           <a:p>
             <a:pPr algn="l"/>
             <a:r>
-              <a:rPr sz="2000" b="0">
+              <a:rPr sz="1400" b="0">
                 <a:solidFill>
                   <a:srgbClr val="F4EBD0"/>
                 </a:solidFill>
                 <a:latin typeface="Calibri"/>
               </a:rPr>
-              <a:t>Write the SOP — or keep the job as judgment</a:t>
-            </a:r>
-          </a:p>
-        </p:txBody>
-      </p:sp>
-      <p:sp>
-        <p:nvSpPr>
-          <p:cNvPr id="18" name="TextBox 17"/>
+              <a:t>0–2: irreversible →
+low-stakes draft</a:t>
+            </a:r>
+          </a:p>
+        </p:txBody>
+      </p:sp>
+      <p:sp>
+        <p:nvSpPr>
+          <p:cNvPr id="18" name="Rectangle 17"/>
+          <p:cNvSpPr/>
+          <p:nvPr/>
+        </p:nvSpPr>
+        <p:spPr>
+          <a:xfrm>
+            <a:off x="9646920" y="1325880"/>
+            <a:ext cx="2148840" cy="1828800"/>
+          </a:xfrm>
+          <a:prstGeom prst="rect">
+            <a:avLst/>
+          </a:prstGeom>
+          <a:solidFill>
+            <a:srgbClr val="141414"/>
+          </a:solidFill>
+          <a:ln>
+            <a:noFill/>
+          </a:ln>
+        </p:spPr>
+        <p:style>
+          <a:lnRef idx="1">
+            <a:schemeClr val="accent1"/>
+          </a:lnRef>
+          <a:fillRef idx="3">
+            <a:schemeClr val="accent1"/>
+          </a:fillRef>
+          <a:effectRef idx="2">
+            <a:schemeClr val="accent1"/>
+          </a:effectRef>
+          <a:fontRef idx="minor">
+            <a:schemeClr val="lt1"/>
+          </a:fontRef>
+        </p:style>
+        <p:txBody>
+          <a:bodyPr rtlCol="0" anchor="ctr"/>
+          <a:lstStyle/>
+          <a:p>
+            <a:pPr algn="ctr"/>
+          </a:p>
+        </p:txBody>
+      </p:sp>
+      <p:sp>
+        <p:nvSpPr>
+          <p:cNvPr id="19" name="TextBox 18"/>
           <p:cNvSpPr txBox="1"/>
           <p:nvPr/>
         </p:nvSpPr>
         <p:spPr>
           <a:xfrm>
-            <a:off x="640080" y="6492240"/>
-            <a:ext cx="9144000" cy="274320"/>
+            <a:off x="9756648" y="1554480"/>
+            <a:ext cx="1920240" cy="411480"/>
           </a:xfrm>
           <a:prstGeom prst="rect">
             <a:avLst/>
@@ -13611,27 +14016,27 @@
           <a:p>
             <a:pPr algn="l"/>
             <a:r>
-              <a:rPr sz="1100" b="0">
-                <a:solidFill>
-                  <a:srgbClr val="B8A888"/>
-                </a:solidFill>
-                <a:latin typeface="Calibri"/>
-              </a:rPr>
-              <a:t>Build your own chief of staff  ·  process, not a vendor</a:t>
-            </a:r>
-          </a:p>
-        </p:txBody>
-      </p:sp>
-      <p:sp>
-        <p:nvSpPr>
-          <p:cNvPr id="19" name="TextBox 18"/>
+              <a:rPr sz="1600" b="1">
+                <a:solidFill>
+                  <a:srgbClr val="B3995D"/>
+                </a:solidFill>
+                <a:latin typeface="Calibri"/>
+              </a:rPr>
+              <a:t>Spec ready</a:t>
+            </a:r>
+          </a:p>
+        </p:txBody>
+      </p:sp>
+      <p:sp>
+        <p:nvSpPr>
+          <p:cNvPr id="20" name="TextBox 19"/>
           <p:cNvSpPr txBox="1"/>
           <p:nvPr/>
         </p:nvSpPr>
         <p:spPr>
           <a:xfrm>
-            <a:off x="10607040" y="6492240"/>
-            <a:ext cx="1097280" cy="274320"/>
+            <a:off x="9756648" y="2011680"/>
+            <a:ext cx="1920240" cy="914400"/>
           </a:xfrm>
           <a:prstGeom prst="rect">
             <a:avLst/>
@@ -13644,6 +14049,564 @@
           </a:bodyPr>
           <a:lstStyle/>
           <a:p>
+            <a:pPr algn="l"/>
+            <a:r>
+              <a:rPr sz="1400" b="0">
+                <a:solidFill>
+                  <a:srgbClr val="F4EBD0"/>
+                </a:solidFill>
+                <a:latin typeface="Calibri"/>
+              </a:rPr>
+              <a:t>0–2: nothing named →
+inputs already named</a:t>
+            </a:r>
+          </a:p>
+        </p:txBody>
+      </p:sp>
+      <p:sp>
+        <p:nvSpPr>
+          <p:cNvPr id="21" name="TextBox 20"/>
+          <p:cNvSpPr txBox="1"/>
+          <p:nvPr/>
+        </p:nvSpPr>
+        <p:spPr>
+          <a:xfrm>
+            <a:off x="731520" y="3429000"/>
+            <a:ext cx="10515600" cy="502920"/>
+          </a:xfrm>
+          <a:prstGeom prst="rect">
+            <a:avLst/>
+          </a:prstGeom>
+          <a:noFill/>
+        </p:spPr>
+        <p:txBody>
+          <a:bodyPr wrap="square">
+            <a:spAutoFit/>
+          </a:bodyPr>
+          <a:lstStyle/>
+          <a:p>
+            <a:pPr algn="l"/>
+            <a:r>
+              <a:rPr sz="1800" b="1">
+                <a:solidFill>
+                  <a:srgbClr val="B3995D"/>
+                </a:solidFill>
+                <a:latin typeface="Calibri"/>
+              </a:rPr>
+              <a:t>A zero on Repeatable or Verifiable overrides everything else — that candidate stays judgment.</a:t>
+            </a:r>
+          </a:p>
+        </p:txBody>
+      </p:sp>
+      <p:sp>
+        <p:nvSpPr>
+          <p:cNvPr id="22" name="Rectangle 21"/>
+          <p:cNvSpPr/>
+          <p:nvPr/>
+        </p:nvSpPr>
+        <p:spPr>
+          <a:xfrm>
+            <a:off x="731520" y="4251960"/>
+            <a:ext cx="2606040" cy="1234440"/>
+          </a:xfrm>
+          <a:prstGeom prst="rect">
+            <a:avLst/>
+          </a:prstGeom>
+          <a:solidFill>
+            <a:srgbClr val="141414"/>
+          </a:solidFill>
+          <a:ln>
+            <a:noFill/>
+          </a:ln>
+        </p:spPr>
+        <p:style>
+          <a:lnRef idx="1">
+            <a:schemeClr val="accent1"/>
+          </a:lnRef>
+          <a:fillRef idx="3">
+            <a:schemeClr val="accent1"/>
+          </a:fillRef>
+          <a:effectRef idx="2">
+            <a:schemeClr val="accent1"/>
+          </a:effectRef>
+          <a:fontRef idx="minor">
+            <a:schemeClr val="lt1"/>
+          </a:fontRef>
+        </p:style>
+        <p:txBody>
+          <a:bodyPr rtlCol="0" anchor="ctr"/>
+          <a:lstStyle/>
+          <a:p>
+            <a:pPr algn="ctr"/>
+          </a:p>
+        </p:txBody>
+      </p:sp>
+      <p:sp>
+        <p:nvSpPr>
+          <p:cNvPr id="23" name="TextBox 22"/>
+          <p:cNvSpPr txBox="1"/>
+          <p:nvPr/>
+        </p:nvSpPr>
+        <p:spPr>
+          <a:xfrm>
+            <a:off x="868680" y="4480560"/>
+            <a:ext cx="2331720" cy="320040"/>
+          </a:xfrm>
+          <a:prstGeom prst="rect">
+            <a:avLst/>
+          </a:prstGeom>
+          <a:noFill/>
+        </p:spPr>
+        <p:txBody>
+          <a:bodyPr wrap="square">
+            <a:spAutoFit/>
+          </a:bodyPr>
+          <a:lstStyle/>
+          <a:p>
+            <a:pPr algn="l"/>
+            <a:r>
+              <a:rPr sz="1400" b="1">
+                <a:solidFill>
+                  <a:srgbClr val="B8A888"/>
+                </a:solidFill>
+                <a:latin typeface="Calibri"/>
+              </a:rPr>
+              <a:t>8–10</a:t>
+            </a:r>
+          </a:p>
+        </p:txBody>
+      </p:sp>
+      <p:sp>
+        <p:nvSpPr>
+          <p:cNvPr id="24" name="TextBox 23"/>
+          <p:cNvSpPr txBox="1"/>
+          <p:nvPr/>
+        </p:nvSpPr>
+        <p:spPr>
+          <a:xfrm>
+            <a:off x="868680" y="4892040"/>
+            <a:ext cx="2331720" cy="365760"/>
+          </a:xfrm>
+          <a:prstGeom prst="rect">
+            <a:avLst/>
+          </a:prstGeom>
+          <a:noFill/>
+        </p:spPr>
+        <p:txBody>
+          <a:bodyPr wrap="square">
+            <a:spAutoFit/>
+          </a:bodyPr>
+          <a:lstStyle/>
+          <a:p>
+            <a:pPr algn="l"/>
+            <a:r>
+              <a:rPr sz="1700" b="1">
+                <a:solidFill>
+                  <a:srgbClr val="F4EBD0"/>
+                </a:solidFill>
+                <a:latin typeface="Calibri"/>
+              </a:rPr>
+              <a:t>Build now</a:t>
+            </a:r>
+          </a:p>
+        </p:txBody>
+      </p:sp>
+      <p:sp>
+        <p:nvSpPr>
+          <p:cNvPr id="25" name="Rectangle 24"/>
+          <p:cNvSpPr/>
+          <p:nvPr/>
+        </p:nvSpPr>
+        <p:spPr>
+          <a:xfrm>
+            <a:off x="3520439" y="4251960"/>
+            <a:ext cx="2606040" cy="1234440"/>
+          </a:xfrm>
+          <a:prstGeom prst="rect">
+            <a:avLst/>
+          </a:prstGeom>
+          <a:solidFill>
+            <a:srgbClr val="141414"/>
+          </a:solidFill>
+          <a:ln>
+            <a:noFill/>
+          </a:ln>
+        </p:spPr>
+        <p:style>
+          <a:lnRef idx="1">
+            <a:schemeClr val="accent1"/>
+          </a:lnRef>
+          <a:fillRef idx="3">
+            <a:schemeClr val="accent1"/>
+          </a:fillRef>
+          <a:effectRef idx="2">
+            <a:schemeClr val="accent1"/>
+          </a:effectRef>
+          <a:fontRef idx="minor">
+            <a:schemeClr val="lt1"/>
+          </a:fontRef>
+        </p:style>
+        <p:txBody>
+          <a:bodyPr rtlCol="0" anchor="ctr"/>
+          <a:lstStyle/>
+          <a:p>
+            <a:pPr algn="ctr"/>
+          </a:p>
+        </p:txBody>
+      </p:sp>
+      <p:sp>
+        <p:nvSpPr>
+          <p:cNvPr id="26" name="TextBox 25"/>
+          <p:cNvSpPr txBox="1"/>
+          <p:nvPr/>
+        </p:nvSpPr>
+        <p:spPr>
+          <a:xfrm>
+            <a:off x="3657599" y="4480560"/>
+            <a:ext cx="2331720" cy="320040"/>
+          </a:xfrm>
+          <a:prstGeom prst="rect">
+            <a:avLst/>
+          </a:prstGeom>
+          <a:noFill/>
+        </p:spPr>
+        <p:txBody>
+          <a:bodyPr wrap="square">
+            <a:spAutoFit/>
+          </a:bodyPr>
+          <a:lstStyle/>
+          <a:p>
+            <a:pPr algn="l"/>
+            <a:r>
+              <a:rPr sz="1400" b="1">
+                <a:solidFill>
+                  <a:srgbClr val="B8A888"/>
+                </a:solidFill>
+                <a:latin typeface="Calibri"/>
+              </a:rPr>
+              <a:t>5–7</a:t>
+            </a:r>
+          </a:p>
+        </p:txBody>
+      </p:sp>
+      <p:sp>
+        <p:nvSpPr>
+          <p:cNvPr id="27" name="TextBox 26"/>
+          <p:cNvSpPr txBox="1"/>
+          <p:nvPr/>
+        </p:nvSpPr>
+        <p:spPr>
+          <a:xfrm>
+            <a:off x="3657599" y="4892040"/>
+            <a:ext cx="2331720" cy="365760"/>
+          </a:xfrm>
+          <a:prstGeom prst="rect">
+            <a:avLst/>
+          </a:prstGeom>
+          <a:noFill/>
+        </p:spPr>
+        <p:txBody>
+          <a:bodyPr wrap="square">
+            <a:spAutoFit/>
+          </a:bodyPr>
+          <a:lstStyle/>
+          <a:p>
+            <a:pPr algn="l"/>
+            <a:r>
+              <a:rPr sz="1700" b="1">
+                <a:solidFill>
+                  <a:srgbClr val="F4EBD0"/>
+                </a:solidFill>
+                <a:latin typeface="Calibri"/>
+              </a:rPr>
+              <a:t>Build next</a:t>
+            </a:r>
+          </a:p>
+        </p:txBody>
+      </p:sp>
+      <p:sp>
+        <p:nvSpPr>
+          <p:cNvPr id="28" name="Rectangle 27"/>
+          <p:cNvSpPr/>
+          <p:nvPr/>
+        </p:nvSpPr>
+        <p:spPr>
+          <a:xfrm>
+            <a:off x="6309359" y="4251960"/>
+            <a:ext cx="2606040" cy="1234440"/>
+          </a:xfrm>
+          <a:prstGeom prst="rect">
+            <a:avLst/>
+          </a:prstGeom>
+          <a:solidFill>
+            <a:srgbClr val="141414"/>
+          </a:solidFill>
+          <a:ln>
+            <a:noFill/>
+          </a:ln>
+        </p:spPr>
+        <p:style>
+          <a:lnRef idx="1">
+            <a:schemeClr val="accent1"/>
+          </a:lnRef>
+          <a:fillRef idx="3">
+            <a:schemeClr val="accent1"/>
+          </a:fillRef>
+          <a:effectRef idx="2">
+            <a:schemeClr val="accent1"/>
+          </a:effectRef>
+          <a:fontRef idx="minor">
+            <a:schemeClr val="lt1"/>
+          </a:fontRef>
+        </p:style>
+        <p:txBody>
+          <a:bodyPr rtlCol="0" anchor="ctr"/>
+          <a:lstStyle/>
+          <a:p>
+            <a:pPr algn="ctr"/>
+          </a:p>
+        </p:txBody>
+      </p:sp>
+      <p:sp>
+        <p:nvSpPr>
+          <p:cNvPr id="29" name="TextBox 28"/>
+          <p:cNvSpPr txBox="1"/>
+          <p:nvPr/>
+        </p:nvSpPr>
+        <p:spPr>
+          <a:xfrm>
+            <a:off x="6446519" y="4480560"/>
+            <a:ext cx="2331720" cy="320040"/>
+          </a:xfrm>
+          <a:prstGeom prst="rect">
+            <a:avLst/>
+          </a:prstGeom>
+          <a:noFill/>
+        </p:spPr>
+        <p:txBody>
+          <a:bodyPr wrap="square">
+            <a:spAutoFit/>
+          </a:bodyPr>
+          <a:lstStyle/>
+          <a:p>
+            <a:pPr algn="l"/>
+            <a:r>
+              <a:rPr sz="1400" b="1">
+                <a:solidFill>
+                  <a:srgbClr val="B8A888"/>
+                </a:solidFill>
+                <a:latin typeface="Calibri"/>
+              </a:rPr>
+              <a:t>score swings</a:t>
+            </a:r>
+          </a:p>
+        </p:txBody>
+      </p:sp>
+      <p:sp>
+        <p:nvSpPr>
+          <p:cNvPr id="30" name="TextBox 29"/>
+          <p:cNvSpPr txBox="1"/>
+          <p:nvPr/>
+        </p:nvSpPr>
+        <p:spPr>
+          <a:xfrm>
+            <a:off x="6446519" y="4892040"/>
+            <a:ext cx="2331720" cy="365760"/>
+          </a:xfrm>
+          <a:prstGeom prst="rect">
+            <a:avLst/>
+          </a:prstGeom>
+          <a:noFill/>
+        </p:spPr>
+        <p:txBody>
+          <a:bodyPr wrap="square">
+            <a:spAutoFit/>
+          </a:bodyPr>
+          <a:lstStyle/>
+          <a:p>
+            <a:pPr algn="l"/>
+            <a:r>
+              <a:rPr sz="1700" b="1">
+                <a:solidFill>
+                  <a:srgbClr val="F4EBD0"/>
+                </a:solidFill>
+                <a:latin typeface="Calibri"/>
+              </a:rPr>
+              <a:t>Split further</a:t>
+            </a:r>
+          </a:p>
+        </p:txBody>
+      </p:sp>
+      <p:sp>
+        <p:nvSpPr>
+          <p:cNvPr id="31" name="Rectangle 30"/>
+          <p:cNvSpPr/>
+          <p:nvPr/>
+        </p:nvSpPr>
+        <p:spPr>
+          <a:xfrm>
+            <a:off x="9098280" y="4251960"/>
+            <a:ext cx="2606040" cy="1234440"/>
+          </a:xfrm>
+          <a:prstGeom prst="rect">
+            <a:avLst/>
+          </a:prstGeom>
+          <a:solidFill>
+            <a:srgbClr val="141414"/>
+          </a:solidFill>
+          <a:ln>
+            <a:noFill/>
+          </a:ln>
+        </p:spPr>
+        <p:style>
+          <a:lnRef idx="1">
+            <a:schemeClr val="accent1"/>
+          </a:lnRef>
+          <a:fillRef idx="3">
+            <a:schemeClr val="accent1"/>
+          </a:fillRef>
+          <a:effectRef idx="2">
+            <a:schemeClr val="accent1"/>
+          </a:effectRef>
+          <a:fontRef idx="minor">
+            <a:schemeClr val="lt1"/>
+          </a:fontRef>
+        </p:style>
+        <p:txBody>
+          <a:bodyPr rtlCol="0" anchor="ctr"/>
+          <a:lstStyle/>
+          <a:p>
+            <a:pPr algn="ctr"/>
+          </a:p>
+        </p:txBody>
+      </p:sp>
+      <p:sp>
+        <p:nvSpPr>
+          <p:cNvPr id="32" name="TextBox 31"/>
+          <p:cNvSpPr txBox="1"/>
+          <p:nvPr/>
+        </p:nvSpPr>
+        <p:spPr>
+          <a:xfrm>
+            <a:off x="9235440" y="4480560"/>
+            <a:ext cx="2331720" cy="320040"/>
+          </a:xfrm>
+          <a:prstGeom prst="rect">
+            <a:avLst/>
+          </a:prstGeom>
+          <a:noFill/>
+        </p:spPr>
+        <p:txBody>
+          <a:bodyPr wrap="square">
+            <a:spAutoFit/>
+          </a:bodyPr>
+          <a:lstStyle/>
+          <a:p>
+            <a:pPr algn="l"/>
+            <a:r>
+              <a:rPr sz="1400" b="1">
+                <a:solidFill>
+                  <a:srgbClr val="B8A888"/>
+                </a:solidFill>
+                <a:latin typeface="Calibri"/>
+              </a:rPr>
+              <a:t>zero on two tests</a:t>
+            </a:r>
+          </a:p>
+        </p:txBody>
+      </p:sp>
+      <p:sp>
+        <p:nvSpPr>
+          <p:cNvPr id="33" name="TextBox 32"/>
+          <p:cNvSpPr txBox="1"/>
+          <p:nvPr/>
+        </p:nvSpPr>
+        <p:spPr>
+          <a:xfrm>
+            <a:off x="9235440" y="4892040"/>
+            <a:ext cx="2331720" cy="365760"/>
+          </a:xfrm>
+          <a:prstGeom prst="rect">
+            <a:avLst/>
+          </a:prstGeom>
+          <a:noFill/>
+        </p:spPr>
+        <p:txBody>
+          <a:bodyPr wrap="square">
+            <a:spAutoFit/>
+          </a:bodyPr>
+          <a:lstStyle/>
+          <a:p>
+            <a:pPr algn="l"/>
+            <a:r>
+              <a:rPr sz="1700" b="1">
+                <a:solidFill>
+                  <a:srgbClr val="F4EBD0"/>
+                </a:solidFill>
+                <a:latin typeface="Calibri"/>
+              </a:rPr>
+              <a:t>Keep as judgment</a:t>
+            </a:r>
+          </a:p>
+        </p:txBody>
+      </p:sp>
+      <p:sp>
+        <p:nvSpPr>
+          <p:cNvPr id="34" name="TextBox 33"/>
+          <p:cNvSpPr txBox="1"/>
+          <p:nvPr/>
+        </p:nvSpPr>
+        <p:spPr>
+          <a:xfrm>
+            <a:off x="640080" y="6492240"/>
+            <a:ext cx="9144000" cy="274320"/>
+          </a:xfrm>
+          <a:prstGeom prst="rect">
+            <a:avLst/>
+          </a:prstGeom>
+          <a:noFill/>
+        </p:spPr>
+        <p:txBody>
+          <a:bodyPr wrap="square">
+            <a:spAutoFit/>
+          </a:bodyPr>
+          <a:lstStyle/>
+          <a:p>
+            <a:pPr algn="l"/>
+            <a:r>
+              <a:rPr sz="1100" b="0">
+                <a:solidFill>
+                  <a:srgbClr val="B8A888"/>
+                </a:solidFill>
+                <a:latin typeface="Calibri"/>
+              </a:rPr>
+              <a:t>Build your own chief of staff  ·  process, not a vendor</a:t>
+            </a:r>
+          </a:p>
+        </p:txBody>
+      </p:sp>
+      <p:sp>
+        <p:nvSpPr>
+          <p:cNvPr id="35" name="TextBox 34"/>
+          <p:cNvSpPr txBox="1"/>
+          <p:nvPr/>
+        </p:nvSpPr>
+        <p:spPr>
+          <a:xfrm>
+            <a:off x="10607040" y="6492240"/>
+            <a:ext cx="1097280" cy="274320"/>
+          </a:xfrm>
+          <a:prstGeom prst="rect">
+            <a:avLst/>
+          </a:prstGeom>
+          <a:noFill/>
+        </p:spPr>
+        <p:txBody>
+          <a:bodyPr wrap="square">
+            <a:spAutoFit/>
+          </a:bodyPr>
+          <a:lstStyle/>
+          <a:p>
             <a:pPr algn="r"/>
             <a:r>
               <a:rPr sz="1100" b="0">
@@ -13652,7 +14615,7 @@
                 </a:solidFill>
                 <a:latin typeface="Calibri"/>
               </a:rPr>
-              <a:t>22  /  24</a:t>
+              <a:t>22  /  26</a:t>
             </a:r>
           </a:p>
         </p:txBody>
@@ -13828,13 +14791,13 @@
           <a:p>
             <a:pPr algn="l"/>
             <a:r>
-              <a:rPr sz="3200" b="1">
+              <a:rPr sz="3000" b="1">
                 <a:solidFill>
                   <a:srgbClr val="F4EBD0"/>
                 </a:solidFill>
                 <a:latin typeface="Calibri"/>
               </a:rPr>
-              <a:t>Non-negotiable</a:t>
+              <a:t>Then point the same process at anything</a:t>
             </a:r>
           </a:p>
         </p:txBody>
@@ -13848,7 +14811,7 @@
         <p:spPr>
           <a:xfrm>
             <a:off x="731520" y="1371600"/>
-            <a:ext cx="10515600" cy="4572000"/>
+            <a:ext cx="10515600" cy="4389120"/>
           </a:xfrm>
           <a:prstGeom prst="rect">
             <a:avLst/>
@@ -13863,97 +14826,81 @@
           <a:p>
             <a:pPr>
               <a:spcAft>
-                <a:spcPts val="1200"/>
+                <a:spcPts val="1400"/>
               </a:spcAft>
             </a:pPr>
             <a:r>
-              <a:rPr sz="2400" b="0">
+              <a:rPr sz="2000" b="0">
                 <a:solidFill>
                   <a:srgbClr val="F4EBD0"/>
                 </a:solidFill>
                 <a:latin typeface="Calibri"/>
               </a:rPr>
-              <a:t>•  Read-only first.</a:t>
+              <a:t>•  Expense reports, hiring screens, incident recaps, customer research.</a:t>
             </a:r>
           </a:p>
           <a:p>
             <a:pPr>
               <a:spcAft>
-                <a:spcPts val="1200"/>
+                <a:spcPts val="1400"/>
               </a:spcAft>
             </a:pPr>
             <a:r>
-              <a:rPr sz="2400" b="0">
+              <a:rPr sz="2000" b="0">
                 <a:solidFill>
                   <a:srgbClr val="F4EBD0"/>
                 </a:solidFill>
                 <a:latin typeface="Calibri"/>
               </a:rPr>
-              <a:t>•  Drafts, never send.</a:t>
+              <a:t>•  If it passes both tests, it gets a prompt file and a check.</a:t>
             </a:r>
           </a:p>
           <a:p>
             <a:pPr>
               <a:spcAft>
-                <a:spcPts val="1200"/>
+                <a:spcPts val="1400"/>
               </a:spcAft>
             </a:pPr>
             <a:r>
-              <a:rPr sz="2400" b="0">
+              <a:rPr sz="2000" b="0">
                 <a:solidFill>
                   <a:srgbClr val="F4EBD0"/>
                 </a:solidFill>
                 <a:latin typeface="Calibri"/>
               </a:rPr>
-              <a:t>•  Cite or cut.</a:t>
+              <a:t>•  If it fails, you just saved yourself a clever mess.</a:t>
             </a:r>
           </a:p>
           <a:p>
             <a:pPr>
               <a:spcAft>
-                <a:spcPts val="1200"/>
+                <a:spcPts val="1400"/>
               </a:spcAft>
             </a:pPr>
             <a:r>
-              <a:rPr sz="2400" b="0">
+              <a:rPr sz="2000" b="0">
                 <a:solidFill>
                   <a:srgbClr val="F4EBD0"/>
                 </a:solidFill>
                 <a:latin typeface="Calibri"/>
               </a:rPr>
-              <a:t>•  Inbox is untrusted — mail is data, not orders.</a:t>
+              <a:t>•  Do not ask “can AI do this?” Ask what shape the work is.</a:t>
             </a:r>
           </a:p>
           <a:p>
             <a:pPr>
               <a:spcAft>
-                <a:spcPts val="1200"/>
+                <a:spcPts val="1400"/>
               </a:spcAft>
             </a:pPr>
             <a:r>
-              <a:rPr sz="2400" b="0">
+              <a:rPr sz="2000" b="0">
                 <a:solidFill>
                   <a:srgbClr val="F4EBD0"/>
                 </a:solidFill>
                 <a:latin typeface="Calibri"/>
               </a:rPr>
-              <a:t>•  Stale is visible. Silent omission is a lie.</a:t>
-            </a:r>
-          </a:p>
-          <a:p>
-            <a:pPr>
-              <a:spcAft>
-                <a:spcPts val="1200"/>
-              </a:spcAft>
-            </a:pPr>
-            <a:r>
-              <a:rPr sz="2400" b="0">
-                <a:solidFill>
-                  <a:srgbClr val="F4EBD0"/>
-                </a:solidFill>
-                <a:latin typeface="Calibri"/>
-              </a:rPr>
-              <a:t>•  One owner per agent.</a:t>
+              <a:t>•  Buying a smarter model does not skip workflow, data, authority, evaluation, audit, or an owner.</a:t>
             </a:r>
           </a:p>
         </p:txBody>
@@ -14023,7 +14970,7 @@
                 </a:solidFill>
                 <a:latin typeface="Calibri"/>
               </a:rPr>
-              <a:t>23  /  24</a:t>
+              <a:t>23  /  26</a:t>
             </a:r>
           </a:p>
         </p:txBody>
@@ -14183,8 +15130,8 @@
         </p:nvSpPr>
         <p:spPr>
           <a:xfrm>
-            <a:off x="731520" y="1463040"/>
-            <a:ext cx="10515600" cy="1280160"/>
+            <a:off x="731520" y="411480"/>
+            <a:ext cx="10058400" cy="731520"/>
           </a:xfrm>
           <a:prstGeom prst="rect">
             <a:avLst/>
@@ -14197,30 +15144,72 @@
           </a:bodyPr>
           <a:lstStyle/>
           <a:p>
+            <a:pPr algn="l"/>
+            <a:r>
+              <a:rPr sz="3200" b="1">
+                <a:solidFill>
+                  <a:srgbClr val="F4EBD0"/>
+                </a:solidFill>
+                <a:latin typeface="Calibri"/>
+              </a:rPr>
+              <a:t>Thirty minutes, starting Monday</a:t>
+            </a:r>
+          </a:p>
+        </p:txBody>
+      </p:sp>
+      <p:sp>
+        <p:nvSpPr>
+          <p:cNvPr id="6" name="Rectangle 5"/>
+          <p:cNvSpPr/>
+          <p:nvPr/>
+        </p:nvSpPr>
+        <p:spPr>
+          <a:xfrm>
+            <a:off x="731520" y="1371600"/>
+            <a:ext cx="10515600" cy="914400"/>
+          </a:xfrm>
+          <a:prstGeom prst="rect">
+            <a:avLst/>
+          </a:prstGeom>
+          <a:solidFill>
+            <a:srgbClr val="141414"/>
+          </a:solidFill>
+          <a:ln>
+            <a:noFill/>
+          </a:ln>
+        </p:spPr>
+        <p:style>
+          <a:lnRef idx="1">
+            <a:schemeClr val="accent1"/>
+          </a:lnRef>
+          <a:fillRef idx="3">
+            <a:schemeClr val="accent1"/>
+          </a:fillRef>
+          <a:effectRef idx="2">
+            <a:schemeClr val="accent1"/>
+          </a:effectRef>
+          <a:fontRef idx="minor">
+            <a:schemeClr val="lt1"/>
+          </a:fontRef>
+        </p:style>
+        <p:txBody>
+          <a:bodyPr rtlCol="0" anchor="ctr"/>
+          <a:lstStyle/>
+          <a:p>
             <a:pPr algn="ctr"/>
-            <a:r>
-              <a:rPr sz="3600" b="1">
-                <a:solidFill>
-                  <a:srgbClr val="B3995D"/>
-                </a:solidFill>
-                <a:latin typeface="Calibri"/>
-              </a:rPr>
-              <a:t>Automate what repeats and checks.
-Keep the rest.</a:t>
-            </a:r>
-          </a:p>
-        </p:txBody>
-      </p:sp>
-      <p:sp>
-        <p:nvSpPr>
-          <p:cNvPr id="6" name="TextBox 5"/>
+          </a:p>
+        </p:txBody>
+      </p:sp>
+      <p:sp>
+        <p:nvSpPr>
+          <p:cNvPr id="7" name="TextBox 6"/>
           <p:cNvSpPr txBox="1"/>
           <p:nvPr/>
         </p:nvSpPr>
         <p:spPr>
           <a:xfrm>
-            <a:off x="1371600" y="3291840"/>
-            <a:ext cx="9418320" cy="1828800"/>
+            <a:off x="960120" y="1627632"/>
+            <a:ext cx="1645920" cy="457200"/>
           </a:xfrm>
           <a:prstGeom prst="rect">
             <a:avLst/>
@@ -14233,31 +15222,29 @@
           </a:bodyPr>
           <a:lstStyle/>
           <a:p>
-            <a:pPr algn="ctr"/>
-            <a:r>
-              <a:rPr sz="2000" b="0">
-                <a:solidFill>
-                  <a:srgbClr val="F4EBD0"/>
-                </a:solidFill>
-                <a:latin typeface="Calibri"/>
-              </a:rPr>
-              <a:t>Repo: START-HERE.md, then the prompt kit (not the Claude plugin).
-Process files, CoS workflows, blank context templates.
-Sources cited from the Notion Substack table.</a:t>
-            </a:r>
-          </a:p>
-        </p:txBody>
-      </p:sp>
-      <p:sp>
-        <p:nvSpPr>
-          <p:cNvPr id="7" name="TextBox 6"/>
+            <a:pPr algn="l"/>
+            <a:r>
+              <a:rPr sz="1800" b="1">
+                <a:solidFill>
+                  <a:srgbClr val="B3995D"/>
+                </a:solidFill>
+                <a:latin typeface="Calibri"/>
+              </a:rPr>
+              <a:t>10 min</a:t>
+            </a:r>
+          </a:p>
+        </p:txBody>
+      </p:sp>
+      <p:sp>
+        <p:nvSpPr>
+          <p:cNvPr id="8" name="TextBox 7"/>
           <p:cNvSpPr txBox="1"/>
           <p:nvPr/>
         </p:nvSpPr>
         <p:spPr>
           <a:xfrm>
-            <a:off x="640080" y="6492240"/>
-            <a:ext cx="9144000" cy="274320"/>
+            <a:off x="2743200" y="1627632"/>
+            <a:ext cx="8229600" cy="457200"/>
           </a:xfrm>
           <a:prstGeom prst="rect">
             <a:avLst/>
@@ -14272,27 +15259,70 @@
           <a:p>
             <a:pPr algn="l"/>
             <a:r>
-              <a:rPr sz="1100" b="0">
-                <a:solidFill>
-                  <a:srgbClr val="B8A888"/>
-                </a:solidFill>
-                <a:latin typeface="Calibri"/>
-              </a:rPr>
-              <a:t>Build your own chief of staff  ·  process, not a vendor</a:t>
-            </a:r>
-          </a:p>
-        </p:txBody>
-      </p:sp>
-      <p:sp>
-        <p:nvSpPr>
-          <p:cNvPr id="8" name="TextBox 7"/>
+              <a:rPr sz="2000" b="0">
+                <a:solidFill>
+                  <a:srgbClr val="F4EBD0"/>
+                </a:solidFill>
+                <a:latin typeface="Calibri"/>
+              </a:rPr>
+              <a:t>Read PROCESS.md</a:t>
+            </a:r>
+          </a:p>
+        </p:txBody>
+      </p:sp>
+      <p:sp>
+        <p:nvSpPr>
+          <p:cNvPr id="9" name="Rectangle 8"/>
+          <p:cNvSpPr/>
+          <p:nvPr/>
+        </p:nvSpPr>
+        <p:spPr>
+          <a:xfrm>
+            <a:off x="731520" y="2423160"/>
+            <a:ext cx="10515600" cy="914400"/>
+          </a:xfrm>
+          <a:prstGeom prst="rect">
+            <a:avLst/>
+          </a:prstGeom>
+          <a:solidFill>
+            <a:srgbClr val="141414"/>
+          </a:solidFill>
+          <a:ln>
+            <a:noFill/>
+          </a:ln>
+        </p:spPr>
+        <p:style>
+          <a:lnRef idx="1">
+            <a:schemeClr val="accent1"/>
+          </a:lnRef>
+          <a:fillRef idx="3">
+            <a:schemeClr val="accent1"/>
+          </a:fillRef>
+          <a:effectRef idx="2">
+            <a:schemeClr val="accent1"/>
+          </a:effectRef>
+          <a:fontRef idx="minor">
+            <a:schemeClr val="lt1"/>
+          </a:fontRef>
+        </p:style>
+        <p:txBody>
+          <a:bodyPr rtlCol="0" anchor="ctr"/>
+          <a:lstStyle/>
+          <a:p>
+            <a:pPr algn="ctr"/>
+          </a:p>
+        </p:txBody>
+      </p:sp>
+      <p:sp>
+        <p:nvSpPr>
+          <p:cNvPr id="10" name="TextBox 9"/>
           <p:cNvSpPr txBox="1"/>
           <p:nvPr/>
         </p:nvSpPr>
         <p:spPr>
           <a:xfrm>
-            <a:off x="10607040" y="6492240"/>
-            <a:ext cx="1097280" cy="274320"/>
+            <a:off x="960120" y="2679192"/>
+            <a:ext cx="1645920" cy="457200"/>
           </a:xfrm>
           <a:prstGeom prst="rect">
             <a:avLst/>
@@ -14305,6 +15335,337 @@
           </a:bodyPr>
           <a:lstStyle/>
           <a:p>
+            <a:pPr algn="l"/>
+            <a:r>
+              <a:rPr sz="1800" b="1">
+                <a:solidFill>
+                  <a:srgbClr val="B3995D"/>
+                </a:solidFill>
+                <a:latin typeface="Calibri"/>
+              </a:rPr>
+              <a:t>10 min</a:t>
+            </a:r>
+          </a:p>
+        </p:txBody>
+      </p:sp>
+      <p:sp>
+        <p:nvSpPr>
+          <p:cNvPr id="11" name="TextBox 10"/>
+          <p:cNvSpPr txBox="1"/>
+          <p:nvPr/>
+        </p:nvSpPr>
+        <p:spPr>
+          <a:xfrm>
+            <a:off x="2743200" y="2679192"/>
+            <a:ext cx="8229600" cy="457200"/>
+          </a:xfrm>
+          <a:prstGeom prst="rect">
+            <a:avLst/>
+          </a:prstGeom>
+          <a:noFill/>
+        </p:spPr>
+        <p:txBody>
+          <a:bodyPr wrap="square">
+            <a:spAutoFit/>
+          </a:bodyPr>
+          <a:lstStyle/>
+          <a:p>
+            <a:pPr algn="l"/>
+            <a:r>
+              <a:rPr sz="2000" b="0">
+                <a:solidFill>
+                  <a:srgbClr val="F4EBD0"/>
+                </a:solidFill>
+                <a:latin typeface="Calibri"/>
+              </a:rPr>
+              <a:t>Fill private context — voice.md first for meeting-recap</a:t>
+            </a:r>
+          </a:p>
+        </p:txBody>
+      </p:sp>
+      <p:sp>
+        <p:nvSpPr>
+          <p:cNvPr id="12" name="Rectangle 11"/>
+          <p:cNvSpPr/>
+          <p:nvPr/>
+        </p:nvSpPr>
+        <p:spPr>
+          <a:xfrm>
+            <a:off x="731520" y="3474720"/>
+            <a:ext cx="10515600" cy="914400"/>
+          </a:xfrm>
+          <a:prstGeom prst="rect">
+            <a:avLst/>
+          </a:prstGeom>
+          <a:solidFill>
+            <a:srgbClr val="141414"/>
+          </a:solidFill>
+          <a:ln>
+            <a:noFill/>
+          </a:ln>
+        </p:spPr>
+        <p:style>
+          <a:lnRef idx="1">
+            <a:schemeClr val="accent1"/>
+          </a:lnRef>
+          <a:fillRef idx="3">
+            <a:schemeClr val="accent1"/>
+          </a:fillRef>
+          <a:effectRef idx="2">
+            <a:schemeClr val="accent1"/>
+          </a:effectRef>
+          <a:fontRef idx="minor">
+            <a:schemeClr val="lt1"/>
+          </a:fontRef>
+        </p:style>
+        <p:txBody>
+          <a:bodyPr rtlCol="0" anchor="ctr"/>
+          <a:lstStyle/>
+          <a:p>
+            <a:pPr algn="ctr"/>
+          </a:p>
+        </p:txBody>
+      </p:sp>
+      <p:sp>
+        <p:nvSpPr>
+          <p:cNvPr id="13" name="TextBox 12"/>
+          <p:cNvSpPr txBox="1"/>
+          <p:nvPr/>
+        </p:nvSpPr>
+        <p:spPr>
+          <a:xfrm>
+            <a:off x="960120" y="3730752"/>
+            <a:ext cx="1645920" cy="457200"/>
+          </a:xfrm>
+          <a:prstGeom prst="rect">
+            <a:avLst/>
+          </a:prstGeom>
+          <a:noFill/>
+        </p:spPr>
+        <p:txBody>
+          <a:bodyPr wrap="square">
+            <a:spAutoFit/>
+          </a:bodyPr>
+          <a:lstStyle/>
+          <a:p>
+            <a:pPr algn="l"/>
+            <a:r>
+              <a:rPr sz="1800" b="1">
+                <a:solidFill>
+                  <a:srgbClr val="B3995D"/>
+                </a:solidFill>
+                <a:latin typeface="Calibri"/>
+              </a:rPr>
+              <a:t>5 min</a:t>
+            </a:r>
+          </a:p>
+        </p:txBody>
+      </p:sp>
+      <p:sp>
+        <p:nvSpPr>
+          <p:cNvPr id="14" name="TextBox 13"/>
+          <p:cNvSpPr txBox="1"/>
+          <p:nvPr/>
+        </p:nvSpPr>
+        <p:spPr>
+          <a:xfrm>
+            <a:off x="2743200" y="3730752"/>
+            <a:ext cx="8229600" cy="457200"/>
+          </a:xfrm>
+          <a:prstGeom prst="rect">
+            <a:avLst/>
+          </a:prstGeom>
+          <a:noFill/>
+        </p:spPr>
+        <p:txBody>
+          <a:bodyPr wrap="square">
+            <a:spAutoFit/>
+          </a:bodyPr>
+          <a:lstStyle/>
+          <a:p>
+            <a:pPr algn="l"/>
+            <a:r>
+              <a:rPr sz="2000" b="0">
+                <a:solidFill>
+                  <a:srgbClr val="F4EBD0"/>
+                </a:solidFill>
+                <a:latin typeface="Calibri"/>
+              </a:rPr>
+              <a:t>If you freeze: what-to-automate.md, two tests, then rank 3+ candidates</a:t>
+            </a:r>
+          </a:p>
+        </p:txBody>
+      </p:sp>
+      <p:sp>
+        <p:nvSpPr>
+          <p:cNvPr id="15" name="Rectangle 14"/>
+          <p:cNvSpPr/>
+          <p:nvPr/>
+        </p:nvSpPr>
+        <p:spPr>
+          <a:xfrm>
+            <a:off x="731520" y="4526279"/>
+            <a:ext cx="10515600" cy="914400"/>
+          </a:xfrm>
+          <a:prstGeom prst="rect">
+            <a:avLst/>
+          </a:prstGeom>
+          <a:solidFill>
+            <a:srgbClr val="141414"/>
+          </a:solidFill>
+          <a:ln>
+            <a:noFill/>
+          </a:ln>
+        </p:spPr>
+        <p:style>
+          <a:lnRef idx="1">
+            <a:schemeClr val="accent1"/>
+          </a:lnRef>
+          <a:fillRef idx="3">
+            <a:schemeClr val="accent1"/>
+          </a:fillRef>
+          <a:effectRef idx="2">
+            <a:schemeClr val="accent1"/>
+          </a:effectRef>
+          <a:fontRef idx="minor">
+            <a:schemeClr val="lt1"/>
+          </a:fontRef>
+        </p:style>
+        <p:txBody>
+          <a:bodyPr rtlCol="0" anchor="ctr"/>
+          <a:lstStyle/>
+          <a:p>
+            <a:pPr algn="ctr"/>
+          </a:p>
+        </p:txBody>
+      </p:sp>
+      <p:sp>
+        <p:nvSpPr>
+          <p:cNvPr id="16" name="TextBox 15"/>
+          <p:cNvSpPr txBox="1"/>
+          <p:nvPr/>
+        </p:nvSpPr>
+        <p:spPr>
+          <a:xfrm>
+            <a:off x="960120" y="4782311"/>
+            <a:ext cx="1645920" cy="457200"/>
+          </a:xfrm>
+          <a:prstGeom prst="rect">
+            <a:avLst/>
+          </a:prstGeom>
+          <a:noFill/>
+        </p:spPr>
+        <p:txBody>
+          <a:bodyPr wrap="square">
+            <a:spAutoFit/>
+          </a:bodyPr>
+          <a:lstStyle/>
+          <a:p>
+            <a:pPr algn="l"/>
+            <a:r>
+              <a:rPr sz="1800" b="1">
+                <a:solidFill>
+                  <a:srgbClr val="B3995D"/>
+                </a:solidFill>
+                <a:latin typeface="Calibri"/>
+              </a:rPr>
+              <a:t>5 min</a:t>
+            </a:r>
+          </a:p>
+        </p:txBody>
+      </p:sp>
+      <p:sp>
+        <p:nvSpPr>
+          <p:cNvPr id="17" name="TextBox 16"/>
+          <p:cNvSpPr txBox="1"/>
+          <p:nvPr/>
+        </p:nvSpPr>
+        <p:spPr>
+          <a:xfrm>
+            <a:off x="2743200" y="4782311"/>
+            <a:ext cx="8229600" cy="457200"/>
+          </a:xfrm>
+          <a:prstGeom prst="rect">
+            <a:avLst/>
+          </a:prstGeom>
+          <a:noFill/>
+        </p:spPr>
+        <p:txBody>
+          <a:bodyPr wrap="square">
+            <a:spAutoFit/>
+          </a:bodyPr>
+          <a:lstStyle/>
+          <a:p>
+            <a:pPr algn="l"/>
+            <a:r>
+              <a:rPr sz="2000" b="0">
+                <a:solidFill>
+                  <a:srgbClr val="F4EBD0"/>
+                </a:solidFill>
+                <a:latin typeface="Calibri"/>
+              </a:rPr>
+              <a:t>Write the SOP — or keep the job as judgment</a:t>
+            </a:r>
+          </a:p>
+        </p:txBody>
+      </p:sp>
+      <p:sp>
+        <p:nvSpPr>
+          <p:cNvPr id="18" name="TextBox 17"/>
+          <p:cNvSpPr txBox="1"/>
+          <p:nvPr/>
+        </p:nvSpPr>
+        <p:spPr>
+          <a:xfrm>
+            <a:off x="640080" y="6492240"/>
+            <a:ext cx="9144000" cy="274320"/>
+          </a:xfrm>
+          <a:prstGeom prst="rect">
+            <a:avLst/>
+          </a:prstGeom>
+          <a:noFill/>
+        </p:spPr>
+        <p:txBody>
+          <a:bodyPr wrap="square">
+            <a:spAutoFit/>
+          </a:bodyPr>
+          <a:lstStyle/>
+          <a:p>
+            <a:pPr algn="l"/>
+            <a:r>
+              <a:rPr sz="1100" b="0">
+                <a:solidFill>
+                  <a:srgbClr val="B8A888"/>
+                </a:solidFill>
+                <a:latin typeface="Calibri"/>
+              </a:rPr>
+              <a:t>Build your own chief of staff  ·  process, not a vendor</a:t>
+            </a:r>
+          </a:p>
+        </p:txBody>
+      </p:sp>
+      <p:sp>
+        <p:nvSpPr>
+          <p:cNvPr id="19" name="TextBox 18"/>
+          <p:cNvSpPr txBox="1"/>
+          <p:nvPr/>
+        </p:nvSpPr>
+        <p:spPr>
+          <a:xfrm>
+            <a:off x="10607040" y="6492240"/>
+            <a:ext cx="1097280" cy="274320"/>
+          </a:xfrm>
+          <a:prstGeom prst="rect">
+            <a:avLst/>
+          </a:prstGeom>
+          <a:noFill/>
+        </p:spPr>
+        <p:txBody>
+          <a:bodyPr wrap="square">
+            <a:spAutoFit/>
+          </a:bodyPr>
+          <a:lstStyle/>
+          <a:p>
             <a:pPr algn="r"/>
             <a:r>
               <a:rPr sz="1100" b="0">
@@ -14313,7 +15674,703 @@
                 </a:solidFill>
                 <a:latin typeface="Calibri"/>
               </a:rPr>
-              <a:t>24  /  24</a:t>
+              <a:t>24  /  26</a:t>
+            </a:r>
+          </a:p>
+        </p:txBody>
+      </p:sp>
+    </p:spTree>
+  </p:cSld>
+  <p:clrMapOvr>
+    <a:masterClrMapping/>
+  </p:clrMapOvr>
+</p:sld>
+</file>
+
+<file path=ppt/slides/slide25.xml><?xml version="1.0" encoding="utf-8"?>
+<p:sld xmlns:a="http://schemas.openxmlformats.org/drawingml/2006/main" xmlns:p="http://schemas.openxmlformats.org/presentationml/2006/main" xmlns:r="http://schemas.openxmlformats.org/officeDocument/2006/relationships">
+  <p:cSld>
+    <p:spTree>
+      <p:nvGrpSpPr>
+        <p:cNvPr id="1" name=""/>
+        <p:cNvGrpSpPr/>
+        <p:nvPr/>
+      </p:nvGrpSpPr>
+      <p:grpSpPr/>
+      <p:sp>
+        <p:nvSpPr>
+          <p:cNvPr id="2" name="Rectangle 1"/>
+          <p:cNvSpPr/>
+          <p:nvPr/>
+        </p:nvSpPr>
+        <p:spPr>
+          <a:xfrm>
+            <a:off x="0" y="0"/>
+            <a:ext cx="12191695" cy="6858000"/>
+          </a:xfrm>
+          <a:prstGeom prst="rect">
+            <a:avLst/>
+          </a:prstGeom>
+          <a:solidFill>
+            <a:srgbClr val="000000"/>
+          </a:solidFill>
+          <a:ln>
+            <a:noFill/>
+          </a:ln>
+        </p:spPr>
+        <p:style>
+          <a:lnRef idx="1">
+            <a:schemeClr val="accent1"/>
+          </a:lnRef>
+          <a:fillRef idx="3">
+            <a:schemeClr val="accent1"/>
+          </a:fillRef>
+          <a:effectRef idx="2">
+            <a:schemeClr val="accent1"/>
+          </a:effectRef>
+          <a:fontRef idx="minor">
+            <a:schemeClr val="lt1"/>
+          </a:fontRef>
+        </p:style>
+        <p:txBody>
+          <a:bodyPr rtlCol="0" anchor="ctr"/>
+          <a:lstStyle/>
+          <a:p>
+            <a:pPr algn="ctr"/>
+          </a:p>
+        </p:txBody>
+      </p:sp>
+      <p:sp>
+        <p:nvSpPr>
+          <p:cNvPr id="3" name="Rectangle 2"/>
+          <p:cNvSpPr/>
+          <p:nvPr/>
+        </p:nvSpPr>
+        <p:spPr>
+          <a:xfrm>
+            <a:off x="0" y="0"/>
+            <a:ext cx="164592" cy="6858000"/>
+          </a:xfrm>
+          <a:prstGeom prst="rect">
+            <a:avLst/>
+          </a:prstGeom>
+          <a:solidFill>
+            <a:srgbClr val="B3995D"/>
+          </a:solidFill>
+          <a:ln>
+            <a:noFill/>
+          </a:ln>
+        </p:spPr>
+        <p:style>
+          <a:lnRef idx="1">
+            <a:schemeClr val="accent1"/>
+          </a:lnRef>
+          <a:fillRef idx="3">
+            <a:schemeClr val="accent1"/>
+          </a:fillRef>
+          <a:effectRef idx="2">
+            <a:schemeClr val="accent1"/>
+          </a:effectRef>
+          <a:fontRef idx="minor">
+            <a:schemeClr val="lt1"/>
+          </a:fontRef>
+        </p:style>
+        <p:txBody>
+          <a:bodyPr rtlCol="0" anchor="ctr"/>
+          <a:lstStyle/>
+          <a:p>
+            <a:pPr algn="ctr"/>
+          </a:p>
+        </p:txBody>
+      </p:sp>
+      <p:sp>
+        <p:nvSpPr>
+          <p:cNvPr id="4" name="Rectangle 3"/>
+          <p:cNvSpPr/>
+          <p:nvPr/>
+        </p:nvSpPr>
+        <p:spPr>
+          <a:xfrm>
+            <a:off x="0" y="6784848"/>
+            <a:ext cx="12191695" cy="73152"/>
+          </a:xfrm>
+          <a:prstGeom prst="rect">
+            <a:avLst/>
+          </a:prstGeom>
+          <a:solidFill>
+            <a:srgbClr val="B3995D"/>
+          </a:solidFill>
+          <a:ln>
+            <a:noFill/>
+          </a:ln>
+        </p:spPr>
+        <p:style>
+          <a:lnRef idx="1">
+            <a:schemeClr val="accent1"/>
+          </a:lnRef>
+          <a:fillRef idx="3">
+            <a:schemeClr val="accent1"/>
+          </a:fillRef>
+          <a:effectRef idx="2">
+            <a:schemeClr val="accent1"/>
+          </a:effectRef>
+          <a:fontRef idx="minor">
+            <a:schemeClr val="lt1"/>
+          </a:fontRef>
+        </p:style>
+        <p:txBody>
+          <a:bodyPr rtlCol="0" anchor="ctr"/>
+          <a:lstStyle/>
+          <a:p>
+            <a:pPr algn="ctr"/>
+          </a:p>
+        </p:txBody>
+      </p:sp>
+      <p:sp>
+        <p:nvSpPr>
+          <p:cNvPr id="5" name="TextBox 4"/>
+          <p:cNvSpPr txBox="1"/>
+          <p:nvPr/>
+        </p:nvSpPr>
+        <p:spPr>
+          <a:xfrm>
+            <a:off x="731520" y="411480"/>
+            <a:ext cx="10058400" cy="731520"/>
+          </a:xfrm>
+          <a:prstGeom prst="rect">
+            <a:avLst/>
+          </a:prstGeom>
+          <a:noFill/>
+        </p:spPr>
+        <p:txBody>
+          <a:bodyPr wrap="square">
+            <a:spAutoFit/>
+          </a:bodyPr>
+          <a:lstStyle/>
+          <a:p>
+            <a:pPr algn="l"/>
+            <a:r>
+              <a:rPr sz="3200" b="1">
+                <a:solidFill>
+                  <a:srgbClr val="F4EBD0"/>
+                </a:solidFill>
+                <a:latin typeface="Calibri"/>
+              </a:rPr>
+              <a:t>Non-negotiable</a:t>
+            </a:r>
+          </a:p>
+        </p:txBody>
+      </p:sp>
+      <p:sp>
+        <p:nvSpPr>
+          <p:cNvPr id="6" name="TextBox 5"/>
+          <p:cNvSpPr txBox="1"/>
+          <p:nvPr/>
+        </p:nvSpPr>
+        <p:spPr>
+          <a:xfrm>
+            <a:off x="731520" y="1188720"/>
+            <a:ext cx="10515600" cy="640080"/>
+          </a:xfrm>
+          <a:prstGeom prst="rect">
+            <a:avLst/>
+          </a:prstGeom>
+          <a:noFill/>
+        </p:spPr>
+        <p:txBody>
+          <a:bodyPr wrap="square">
+            <a:spAutoFit/>
+          </a:bodyPr>
+          <a:lstStyle/>
+          <a:p>
+            <a:pPr algn="l"/>
+            <a:r>
+              <a:rPr sz="2100" b="1">
+                <a:solidFill>
+                  <a:srgbClr val="B3995D"/>
+                </a:solidFill>
+                <a:latin typeface="Calibri"/>
+              </a:rPr>
+              <a:t>Drafts only. Never send. You are the principal. The agent is staff.</a:t>
+            </a:r>
+          </a:p>
+        </p:txBody>
+      </p:sp>
+      <p:sp>
+        <p:nvSpPr>
+          <p:cNvPr id="7" name="TextBox 6"/>
+          <p:cNvSpPr txBox="1"/>
+          <p:nvPr/>
+        </p:nvSpPr>
+        <p:spPr>
+          <a:xfrm>
+            <a:off x="731520" y="1874519"/>
+            <a:ext cx="10515600" cy="4114800"/>
+          </a:xfrm>
+          <a:prstGeom prst="rect">
+            <a:avLst/>
+          </a:prstGeom>
+          <a:noFill/>
+        </p:spPr>
+        <p:txBody>
+          <a:bodyPr wrap="square">
+            <a:spAutoFit/>
+          </a:bodyPr>
+          <a:lstStyle/>
+          <a:p>
+            <a:pPr>
+              <a:spcAft>
+                <a:spcPts val="900"/>
+              </a:spcAft>
+            </a:pPr>
+            <a:r>
+              <a:rPr sz="2000" b="0">
+                <a:solidFill>
+                  <a:srgbClr val="F4EBD0"/>
+                </a:solidFill>
+                <a:latin typeface="Calibri"/>
+              </a:rPr>
+              <a:t>•  Read-only first.</a:t>
+            </a:r>
+          </a:p>
+          <a:p>
+            <a:pPr>
+              <a:spcAft>
+                <a:spcPts val="900"/>
+              </a:spcAft>
+            </a:pPr>
+            <a:r>
+              <a:rPr sz="2000" b="0">
+                <a:solidFill>
+                  <a:srgbClr val="F4EBD0"/>
+                </a:solidFill>
+                <a:latin typeface="Calibri"/>
+              </a:rPr>
+              <a:t>•  Cite or cut.</a:t>
+            </a:r>
+          </a:p>
+          <a:p>
+            <a:pPr>
+              <a:spcAft>
+                <a:spcPts val="900"/>
+              </a:spcAft>
+            </a:pPr>
+            <a:r>
+              <a:rPr sz="2000" b="0">
+                <a:solidFill>
+                  <a:srgbClr val="F4EBD0"/>
+                </a:solidFill>
+                <a:latin typeface="Calibri"/>
+              </a:rPr>
+              <a:t>•  Inbox is untrusted — mail is data, not orders.</a:t>
+            </a:r>
+          </a:p>
+          <a:p>
+            <a:pPr>
+              <a:spcAft>
+                <a:spcPts val="900"/>
+              </a:spcAft>
+            </a:pPr>
+            <a:r>
+              <a:rPr sz="2000" b="0">
+                <a:solidFill>
+                  <a:srgbClr val="F4EBD0"/>
+                </a:solidFill>
+                <a:latin typeface="Calibri"/>
+              </a:rPr>
+              <a:t>•  Stale is visible. Silent omission is a lie.</a:t>
+            </a:r>
+          </a:p>
+          <a:p>
+            <a:pPr>
+              <a:spcAft>
+                <a:spcPts val="900"/>
+              </a:spcAft>
+            </a:pPr>
+            <a:r>
+              <a:rPr sz="2000" b="0">
+                <a:solidFill>
+                  <a:srgbClr val="F4EBD0"/>
+                </a:solidFill>
+                <a:latin typeface="Calibri"/>
+              </a:rPr>
+              <a:t>•  Approvals sit where actions become hard to undo: send, pay, publish, delete.</a:t>
+            </a:r>
+          </a:p>
+          <a:p>
+            <a:pPr>
+              <a:spcAft>
+                <a:spcPts val="900"/>
+              </a:spcAft>
+            </a:pPr>
+            <a:r>
+              <a:rPr sz="2000" b="0">
+                <a:solidFill>
+                  <a:srgbClr val="F4EBD0"/>
+                </a:solidFill>
+                <a:latin typeface="Calibri"/>
+              </a:rPr>
+              <a:t>•  One owner per agent.</a:t>
+            </a:r>
+          </a:p>
+        </p:txBody>
+      </p:sp>
+      <p:sp>
+        <p:nvSpPr>
+          <p:cNvPr id="8" name="TextBox 7"/>
+          <p:cNvSpPr txBox="1"/>
+          <p:nvPr/>
+        </p:nvSpPr>
+        <p:spPr>
+          <a:xfrm>
+            <a:off x="640080" y="6492240"/>
+            <a:ext cx="9144000" cy="274320"/>
+          </a:xfrm>
+          <a:prstGeom prst="rect">
+            <a:avLst/>
+          </a:prstGeom>
+          <a:noFill/>
+        </p:spPr>
+        <p:txBody>
+          <a:bodyPr wrap="square">
+            <a:spAutoFit/>
+          </a:bodyPr>
+          <a:lstStyle/>
+          <a:p>
+            <a:pPr algn="l"/>
+            <a:r>
+              <a:rPr sz="1100" b="0">
+                <a:solidFill>
+                  <a:srgbClr val="B8A888"/>
+                </a:solidFill>
+                <a:latin typeface="Calibri"/>
+              </a:rPr>
+              <a:t>Build your own chief of staff  ·  process, not a vendor</a:t>
+            </a:r>
+          </a:p>
+        </p:txBody>
+      </p:sp>
+      <p:sp>
+        <p:nvSpPr>
+          <p:cNvPr id="9" name="TextBox 8"/>
+          <p:cNvSpPr txBox="1"/>
+          <p:nvPr/>
+        </p:nvSpPr>
+        <p:spPr>
+          <a:xfrm>
+            <a:off x="10607040" y="6492240"/>
+            <a:ext cx="1097280" cy="274320"/>
+          </a:xfrm>
+          <a:prstGeom prst="rect">
+            <a:avLst/>
+          </a:prstGeom>
+          <a:noFill/>
+        </p:spPr>
+        <p:txBody>
+          <a:bodyPr wrap="square">
+            <a:spAutoFit/>
+          </a:bodyPr>
+          <a:lstStyle/>
+          <a:p>
+            <a:pPr algn="r"/>
+            <a:r>
+              <a:rPr sz="1100" b="0">
+                <a:solidFill>
+                  <a:srgbClr val="B8A888"/>
+                </a:solidFill>
+                <a:latin typeface="Calibri"/>
+              </a:rPr>
+              <a:t>25  /  26</a:t>
+            </a:r>
+          </a:p>
+        </p:txBody>
+      </p:sp>
+    </p:spTree>
+  </p:cSld>
+  <p:clrMapOvr>
+    <a:masterClrMapping/>
+  </p:clrMapOvr>
+</p:sld>
+</file>
+
+<file path=ppt/slides/slide26.xml><?xml version="1.0" encoding="utf-8"?>
+<p:sld xmlns:a="http://schemas.openxmlformats.org/drawingml/2006/main" xmlns:p="http://schemas.openxmlformats.org/presentationml/2006/main" xmlns:r="http://schemas.openxmlformats.org/officeDocument/2006/relationships">
+  <p:cSld>
+    <p:spTree>
+      <p:nvGrpSpPr>
+        <p:cNvPr id="1" name=""/>
+        <p:cNvGrpSpPr/>
+        <p:nvPr/>
+      </p:nvGrpSpPr>
+      <p:grpSpPr/>
+      <p:sp>
+        <p:nvSpPr>
+          <p:cNvPr id="2" name="Rectangle 1"/>
+          <p:cNvSpPr/>
+          <p:nvPr/>
+        </p:nvSpPr>
+        <p:spPr>
+          <a:xfrm>
+            <a:off x="0" y="0"/>
+            <a:ext cx="12191695" cy="6858000"/>
+          </a:xfrm>
+          <a:prstGeom prst="rect">
+            <a:avLst/>
+          </a:prstGeom>
+          <a:solidFill>
+            <a:srgbClr val="000000"/>
+          </a:solidFill>
+          <a:ln>
+            <a:noFill/>
+          </a:ln>
+        </p:spPr>
+        <p:style>
+          <a:lnRef idx="1">
+            <a:schemeClr val="accent1"/>
+          </a:lnRef>
+          <a:fillRef idx="3">
+            <a:schemeClr val="accent1"/>
+          </a:fillRef>
+          <a:effectRef idx="2">
+            <a:schemeClr val="accent1"/>
+          </a:effectRef>
+          <a:fontRef idx="minor">
+            <a:schemeClr val="lt1"/>
+          </a:fontRef>
+        </p:style>
+        <p:txBody>
+          <a:bodyPr rtlCol="0" anchor="ctr"/>
+          <a:lstStyle/>
+          <a:p>
+            <a:pPr algn="ctr"/>
+          </a:p>
+        </p:txBody>
+      </p:sp>
+      <p:sp>
+        <p:nvSpPr>
+          <p:cNvPr id="3" name="Rectangle 2"/>
+          <p:cNvSpPr/>
+          <p:nvPr/>
+        </p:nvSpPr>
+        <p:spPr>
+          <a:xfrm>
+            <a:off x="0" y="0"/>
+            <a:ext cx="164592" cy="6858000"/>
+          </a:xfrm>
+          <a:prstGeom prst="rect">
+            <a:avLst/>
+          </a:prstGeom>
+          <a:solidFill>
+            <a:srgbClr val="B3995D"/>
+          </a:solidFill>
+          <a:ln>
+            <a:noFill/>
+          </a:ln>
+        </p:spPr>
+        <p:style>
+          <a:lnRef idx="1">
+            <a:schemeClr val="accent1"/>
+          </a:lnRef>
+          <a:fillRef idx="3">
+            <a:schemeClr val="accent1"/>
+          </a:fillRef>
+          <a:effectRef idx="2">
+            <a:schemeClr val="accent1"/>
+          </a:effectRef>
+          <a:fontRef idx="minor">
+            <a:schemeClr val="lt1"/>
+          </a:fontRef>
+        </p:style>
+        <p:txBody>
+          <a:bodyPr rtlCol="0" anchor="ctr"/>
+          <a:lstStyle/>
+          <a:p>
+            <a:pPr algn="ctr"/>
+          </a:p>
+        </p:txBody>
+      </p:sp>
+      <p:sp>
+        <p:nvSpPr>
+          <p:cNvPr id="4" name="Rectangle 3"/>
+          <p:cNvSpPr/>
+          <p:nvPr/>
+        </p:nvSpPr>
+        <p:spPr>
+          <a:xfrm>
+            <a:off x="0" y="6784848"/>
+            <a:ext cx="12191695" cy="73152"/>
+          </a:xfrm>
+          <a:prstGeom prst="rect">
+            <a:avLst/>
+          </a:prstGeom>
+          <a:solidFill>
+            <a:srgbClr val="B3995D"/>
+          </a:solidFill>
+          <a:ln>
+            <a:noFill/>
+          </a:ln>
+        </p:spPr>
+        <p:style>
+          <a:lnRef idx="1">
+            <a:schemeClr val="accent1"/>
+          </a:lnRef>
+          <a:fillRef idx="3">
+            <a:schemeClr val="accent1"/>
+          </a:fillRef>
+          <a:effectRef idx="2">
+            <a:schemeClr val="accent1"/>
+          </a:effectRef>
+          <a:fontRef idx="minor">
+            <a:schemeClr val="lt1"/>
+          </a:fontRef>
+        </p:style>
+        <p:txBody>
+          <a:bodyPr rtlCol="0" anchor="ctr"/>
+          <a:lstStyle/>
+          <a:p>
+            <a:pPr algn="ctr"/>
+          </a:p>
+        </p:txBody>
+      </p:sp>
+      <p:sp>
+        <p:nvSpPr>
+          <p:cNvPr id="5" name="TextBox 4"/>
+          <p:cNvSpPr txBox="1"/>
+          <p:nvPr/>
+        </p:nvSpPr>
+        <p:spPr>
+          <a:xfrm>
+            <a:off x="731520" y="1463040"/>
+            <a:ext cx="10515600" cy="1280160"/>
+          </a:xfrm>
+          <a:prstGeom prst="rect">
+            <a:avLst/>
+          </a:prstGeom>
+          <a:noFill/>
+        </p:spPr>
+        <p:txBody>
+          <a:bodyPr wrap="square">
+            <a:spAutoFit/>
+          </a:bodyPr>
+          <a:lstStyle/>
+          <a:p>
+            <a:pPr algn="ctr"/>
+            <a:r>
+              <a:rPr sz="3600" b="1">
+                <a:solidFill>
+                  <a:srgbClr val="B3995D"/>
+                </a:solidFill>
+                <a:latin typeface="Calibri"/>
+              </a:rPr>
+              <a:t>Automate what repeats and checks.
+Keep the rest.</a:t>
+            </a:r>
+          </a:p>
+        </p:txBody>
+      </p:sp>
+      <p:sp>
+        <p:nvSpPr>
+          <p:cNvPr id="6" name="TextBox 5"/>
+          <p:cNvSpPr txBox="1"/>
+          <p:nvPr/>
+        </p:nvSpPr>
+        <p:spPr>
+          <a:xfrm>
+            <a:off x="1371600" y="3291840"/>
+            <a:ext cx="9418320" cy="1828800"/>
+          </a:xfrm>
+          <a:prstGeom prst="rect">
+            <a:avLst/>
+          </a:prstGeom>
+          <a:noFill/>
+        </p:spPr>
+        <p:txBody>
+          <a:bodyPr wrap="square">
+            <a:spAutoFit/>
+          </a:bodyPr>
+          <a:lstStyle/>
+          <a:p>
+            <a:pPr algn="ctr"/>
+            <a:r>
+              <a:rPr sz="2000" b="0">
+                <a:solidFill>
+                  <a:srgbClr val="F4EBD0"/>
+                </a:solidFill>
+                <a:latin typeface="Calibri"/>
+              </a:rPr>
+              <a:t>Repo: START-HERE.md, then the prompt kit (not the Claude plugin).
+Process files, CoS workflows, blank context templates, and the decision matrix.
+Sources cited from the Notion Substack table.</a:t>
+            </a:r>
+          </a:p>
+        </p:txBody>
+      </p:sp>
+      <p:sp>
+        <p:nvSpPr>
+          <p:cNvPr id="7" name="TextBox 6"/>
+          <p:cNvSpPr txBox="1"/>
+          <p:nvPr/>
+        </p:nvSpPr>
+        <p:spPr>
+          <a:xfrm>
+            <a:off x="640080" y="6492240"/>
+            <a:ext cx="9144000" cy="274320"/>
+          </a:xfrm>
+          <a:prstGeom prst="rect">
+            <a:avLst/>
+          </a:prstGeom>
+          <a:noFill/>
+        </p:spPr>
+        <p:txBody>
+          <a:bodyPr wrap="square">
+            <a:spAutoFit/>
+          </a:bodyPr>
+          <a:lstStyle/>
+          <a:p>
+            <a:pPr algn="l"/>
+            <a:r>
+              <a:rPr sz="1100" b="0">
+                <a:solidFill>
+                  <a:srgbClr val="B8A888"/>
+                </a:solidFill>
+                <a:latin typeface="Calibri"/>
+              </a:rPr>
+              <a:t>Build your own chief of staff  ·  process, not a vendor</a:t>
+            </a:r>
+          </a:p>
+        </p:txBody>
+      </p:sp>
+      <p:sp>
+        <p:nvSpPr>
+          <p:cNvPr id="8" name="TextBox 7"/>
+          <p:cNvSpPr txBox="1"/>
+          <p:nvPr/>
+        </p:nvSpPr>
+        <p:spPr>
+          <a:xfrm>
+            <a:off x="10607040" y="6492240"/>
+            <a:ext cx="1097280" cy="274320"/>
+          </a:xfrm>
+          <a:prstGeom prst="rect">
+            <a:avLst/>
+          </a:prstGeom>
+          <a:noFill/>
+        </p:spPr>
+        <p:txBody>
+          <a:bodyPr wrap="square">
+            <a:spAutoFit/>
+          </a:bodyPr>
+          <a:lstStyle/>
+          <a:p>
+            <a:pPr algn="r"/>
+            <a:r>
+              <a:rPr sz="1100" b="0">
+                <a:solidFill>
+                  <a:srgbClr val="B8A888"/>
+                </a:solidFill>
+                <a:latin typeface="Calibri"/>
+              </a:rPr>
+              <a:t>26  /  26</a:t>
             </a:r>
           </a:p>
         </p:txBody>
@@ -14895,7 +16952,7 @@
                 </a:solidFill>
                 <a:latin typeface="Calibri"/>
               </a:rPr>
-              <a:t>3  /  24</a:t>
+              <a:t>3  /  26</a:t>
             </a:r>
           </a:p>
         </p:txBody>
@@ -15379,7 +17436,7 @@
                 </a:solidFill>
                 <a:latin typeface="Calibri"/>
               </a:rPr>
-              <a:t>4  /  24</a:t>
+              <a:t>4  /  26</a:t>
             </a:r>
           </a:p>
         </p:txBody>
@@ -15718,7 +17775,7 @@
                 </a:solidFill>
                 <a:latin typeface="Calibri"/>
               </a:rPr>
-              <a:t>5  /  24</a:t>
+              <a:t>5  /  26</a:t>
             </a:r>
           </a:p>
         </p:txBody>
@@ -16135,7 +18192,7 @@
                 </a:solidFill>
                 <a:latin typeface="Calibri"/>
               </a:rPr>
-              <a:t>6  /  24</a:t>
+              <a:t>6  /  26</a:t>
             </a:r>
           </a:p>
         </p:txBody>
@@ -16424,7 +18481,7 @@
                 </a:solidFill>
                 <a:latin typeface="Calibri"/>
               </a:rPr>
-              <a:t>7  /  24</a:t>
+              <a:t>7  /  26</a:t>
             </a:r>
           </a:p>
         </p:txBody>
@@ -16783,7 +18840,7 @@
                 </a:solidFill>
                 <a:latin typeface="Calibri"/>
               </a:rPr>
-              <a:t>8  /  24</a:t>
+              <a:t>8  /  26</a:t>
             </a:r>
           </a:p>
         </p:txBody>
@@ -17138,7 +19195,7 @@
                 </a:solidFill>
                 <a:latin typeface="Calibri"/>
               </a:rPr>
-              <a:t>9  /  24</a:t>
+              <a:t>9  /  26</a:t>
             </a:r>
           </a:p>
         </p:txBody>

--- a/slides/building-your-own-chief-of-staff.pptx
+++ b/slides/building-your-own-chief-of-staff.pptx
@@ -1705,6 +1705,12 @@
           <a:p/>
           <a:p>
             <a:r>
+              <a:t>"Not yet" is the honest middle: it passes both tests but is too rare, too risky, or too unspecified to be worth the setup this month. Park it and revisit when frequency or spec readiness changes. It is not a polite "keep as judgment."</a:t>
+            </a:r>
+          </a:p>
+          <a:p/>
+          <a:p>
+            <a:r>
               <a:t>The raw material is already in research/SOURCES.md: the shape-of-the-work row uses frequency, cost of a mistake, and judgment load. This operationalizes that cited method.</a:t>
             </a:r>
           </a:p>
@@ -1863,13 +1869,31 @@
           <a:lstStyle/>
           <a:p>
             <a:r>
-              <a:t>Walk the README. START-HERE.md first if the files are not on the machine yet. If they freeze, they start at what-to-automate.md — last week, split the blob, edges first. If the two tests fail, they still used the thirty minutes correctly. The lesson is the refusal.</a:t>
+              <a:t>This mirrors the README "Start here" path, but the deliverable is one real run, not a reading list. START-HERE.md first if the files are not on the machine yet. They already watched this exact run on slide 14; Monday they do it on their own meeting.</a:t>
             </a:r>
           </a:p>
           <a:p/>
           <a:p>
             <a:r>
-              <a:t>Do not put the brief on a timer until they have checked it by hand several times. Automation is for a process they already trust.</a:t>
+              <a:t>Line 4 is the whole lesson. An owner or date that does not point at a line in the notes gets cut. If the notes name nobody, the recap says unassigned. That is the agent working, not failing.</a:t>
+            </a:r>
+          </a:p>
+          <a:p/>
+          <a:p>
+            <a:r>
+              <a:t>Line 5 is step 6 in miniature: correct the file, not the chat. Three of the same correction is a rule.</a:t>
+            </a:r>
+          </a:p>
+          <a:p/>
+          <a:p>
+            <a:r>
+              <a:t>If they freeze, what-to-automate.md — last week, split the blob, edges first. If they leave with three ideas instead of one, score-the-candidates.md. If the two tests fail on their job, they still used the thirty minutes correctly.</a:t>
+            </a:r>
+          </a:p>
+          <a:p/>
+          <a:p>
+            <a:r>
+              <a:t>Do not put the recap on a timer until they have checked it by hand several times. Automation is for a process they already trust.</a:t>
             </a:r>
           </a:p>
         </p:txBody>
@@ -2027,7 +2051,7 @@
           <a:lstStyle/>
           <a:p>
             <a:r>
-              <a:t>Close by pointing at the repo. This kit is provider-agnostic. The Claude plugin of the same processes is a different repository (BittahCriminal/Chief-of-Staff) — do not send them there for this talk.</a:t>
+              <a:t>Close by pointing at the repo. The QR resolves to START-HERE.md on GitHub; the URL next to it is the repo root. Say the URL out loud once for anyone who cannot scan. This kit is provider-agnostic. The Claude plugin of the same processes is a different repository (BittahCriminal/Chief-of-Staff) — do not send them there for this talk.</a:t>
             </a:r>
           </a:p>
           <a:p/>
@@ -14106,8 +14130,8 @@
         </p:nvSpPr>
         <p:spPr>
           <a:xfrm>
-            <a:off x="731520" y="4251960"/>
-            <a:ext cx="2606040" cy="1234440"/>
+            <a:off x="502920" y="4251960"/>
+            <a:ext cx="2148840" cy="1234440"/>
           </a:xfrm>
           <a:prstGeom prst="rect">
             <a:avLst/>
@@ -14149,8 +14173,8 @@
         </p:nvSpPr>
         <p:spPr>
           <a:xfrm>
-            <a:off x="868680" y="4480560"/>
-            <a:ext cx="2331720" cy="320040"/>
+            <a:off x="612648" y="4480560"/>
+            <a:ext cx="1920240" cy="320040"/>
           </a:xfrm>
           <a:prstGeom prst="rect">
             <a:avLst/>
@@ -14184,8 +14208,8 @@
         </p:nvSpPr>
         <p:spPr>
           <a:xfrm>
-            <a:off x="868680" y="4892040"/>
-            <a:ext cx="2331720" cy="365760"/>
+            <a:off x="612648" y="4846320"/>
+            <a:ext cx="1920240" cy="548640"/>
           </a:xfrm>
           <a:prstGeom prst="rect">
             <a:avLst/>
@@ -14200,7 +14224,7 @@
           <a:p>
             <a:pPr algn="l"/>
             <a:r>
-              <a:rPr sz="1700" b="1">
+              <a:rPr sz="1600" b="1">
                 <a:solidFill>
                   <a:srgbClr val="F4EBD0"/>
                 </a:solidFill>
@@ -14219,8 +14243,8 @@
         </p:nvSpPr>
         <p:spPr>
           <a:xfrm>
-            <a:off x="3520439" y="4251960"/>
-            <a:ext cx="2606040" cy="1234440"/>
+            <a:off x="2788920" y="4251960"/>
+            <a:ext cx="2148840" cy="1234440"/>
           </a:xfrm>
           <a:prstGeom prst="rect">
             <a:avLst/>
@@ -14262,8 +14286,8 @@
         </p:nvSpPr>
         <p:spPr>
           <a:xfrm>
-            <a:off x="3657599" y="4480560"/>
-            <a:ext cx="2331720" cy="320040"/>
+            <a:off x="2898648" y="4480560"/>
+            <a:ext cx="1920240" cy="320040"/>
           </a:xfrm>
           <a:prstGeom prst="rect">
             <a:avLst/>
@@ -14297,8 +14321,8 @@
         </p:nvSpPr>
         <p:spPr>
           <a:xfrm>
-            <a:off x="3657599" y="4892040"/>
-            <a:ext cx="2331720" cy="365760"/>
+            <a:off x="2898648" y="4846320"/>
+            <a:ext cx="1920240" cy="548640"/>
           </a:xfrm>
           <a:prstGeom prst="rect">
             <a:avLst/>
@@ -14313,7 +14337,7 @@
           <a:p>
             <a:pPr algn="l"/>
             <a:r>
-              <a:rPr sz="1700" b="1">
+              <a:rPr sz="1600" b="1">
                 <a:solidFill>
                   <a:srgbClr val="F4EBD0"/>
                 </a:solidFill>
@@ -14332,8 +14356,8 @@
         </p:nvSpPr>
         <p:spPr>
           <a:xfrm>
-            <a:off x="6309359" y="4251960"/>
-            <a:ext cx="2606040" cy="1234440"/>
+            <a:off x="5074920" y="4251960"/>
+            <a:ext cx="2148840" cy="1234440"/>
           </a:xfrm>
           <a:prstGeom prst="rect">
             <a:avLst/>
@@ -14375,8 +14399,8 @@
         </p:nvSpPr>
         <p:spPr>
           <a:xfrm>
-            <a:off x="6446519" y="4480560"/>
-            <a:ext cx="2331720" cy="320040"/>
+            <a:off x="5184648" y="4480560"/>
+            <a:ext cx="1920240" cy="320040"/>
           </a:xfrm>
           <a:prstGeom prst="rect">
             <a:avLst/>
@@ -14397,7 +14421,7 @@
                 </a:solidFill>
                 <a:latin typeface="Calibri"/>
               </a:rPr>
-              <a:t>score swings</a:t>
+              <a:t>2–4</a:t>
             </a:r>
           </a:p>
         </p:txBody>
@@ -14410,8 +14434,8 @@
         </p:nvSpPr>
         <p:spPr>
           <a:xfrm>
-            <a:off x="6446519" y="4892040"/>
-            <a:ext cx="2331720" cy="365760"/>
+            <a:off x="5184648" y="4846320"/>
+            <a:ext cx="1920240" cy="548640"/>
           </a:xfrm>
           <a:prstGeom prst="rect">
             <a:avLst/>
@@ -14426,13 +14450,13 @@
           <a:p>
             <a:pPr algn="l"/>
             <a:r>
-              <a:rPr sz="1700" b="1">
+              <a:rPr sz="1600" b="1">
                 <a:solidFill>
                   <a:srgbClr val="F4EBD0"/>
                 </a:solidFill>
                 <a:latin typeface="Calibri"/>
               </a:rPr>
-              <a:t>Split further</a:t>
+              <a:t>Not yet</a:t>
             </a:r>
           </a:p>
         </p:txBody>
@@ -14445,8 +14469,8 @@
         </p:nvSpPr>
         <p:spPr>
           <a:xfrm>
-            <a:off x="9098280" y="4251960"/>
-            <a:ext cx="2606040" cy="1234440"/>
+            <a:off x="7360920" y="4251960"/>
+            <a:ext cx="2148840" cy="1234440"/>
           </a:xfrm>
           <a:prstGeom prst="rect">
             <a:avLst/>
@@ -14488,8 +14512,8 @@
         </p:nvSpPr>
         <p:spPr>
           <a:xfrm>
-            <a:off x="9235440" y="4480560"/>
-            <a:ext cx="2331720" cy="320040"/>
+            <a:off x="7470648" y="4480560"/>
+            <a:ext cx="1920240" cy="320040"/>
           </a:xfrm>
           <a:prstGeom prst="rect">
             <a:avLst/>
@@ -14510,7 +14534,7 @@
                 </a:solidFill>
                 <a:latin typeface="Calibri"/>
               </a:rPr>
-              <a:t>zero on two tests</a:t>
+              <a:t>score swings</a:t>
             </a:r>
           </a:p>
         </p:txBody>
@@ -14523,8 +14547,8 @@
         </p:nvSpPr>
         <p:spPr>
           <a:xfrm>
-            <a:off x="9235440" y="4892040"/>
-            <a:ext cx="2331720" cy="365760"/>
+            <a:off x="7470648" y="4846320"/>
+            <a:ext cx="1920240" cy="548640"/>
           </a:xfrm>
           <a:prstGeom prst="rect">
             <a:avLst/>
@@ -14539,27 +14563,70 @@
           <a:p>
             <a:pPr algn="l"/>
             <a:r>
-              <a:rPr sz="1700" b="1">
+              <a:rPr sz="1600" b="1">
                 <a:solidFill>
                   <a:srgbClr val="F4EBD0"/>
                 </a:solidFill>
                 <a:latin typeface="Calibri"/>
               </a:rPr>
-              <a:t>Keep as judgment</a:t>
-            </a:r>
-          </a:p>
-        </p:txBody>
-      </p:sp>
-      <p:sp>
-        <p:nvSpPr>
-          <p:cNvPr id="34" name="TextBox 33"/>
+              <a:t>Split further</a:t>
+            </a:r>
+          </a:p>
+        </p:txBody>
+      </p:sp>
+      <p:sp>
+        <p:nvSpPr>
+          <p:cNvPr id="34" name="Rectangle 33"/>
+          <p:cNvSpPr/>
+          <p:nvPr/>
+        </p:nvSpPr>
+        <p:spPr>
+          <a:xfrm>
+            <a:off x="9646920" y="4251960"/>
+            <a:ext cx="2148840" cy="1234440"/>
+          </a:xfrm>
+          <a:prstGeom prst="rect">
+            <a:avLst/>
+          </a:prstGeom>
+          <a:solidFill>
+            <a:srgbClr val="141414"/>
+          </a:solidFill>
+          <a:ln>
+            <a:noFill/>
+          </a:ln>
+        </p:spPr>
+        <p:style>
+          <a:lnRef idx="1">
+            <a:schemeClr val="accent1"/>
+          </a:lnRef>
+          <a:fillRef idx="3">
+            <a:schemeClr val="accent1"/>
+          </a:fillRef>
+          <a:effectRef idx="2">
+            <a:schemeClr val="accent1"/>
+          </a:effectRef>
+          <a:fontRef idx="minor">
+            <a:schemeClr val="lt1"/>
+          </a:fontRef>
+        </p:style>
+        <p:txBody>
+          <a:bodyPr rtlCol="0" anchor="ctr"/>
+          <a:lstStyle/>
+          <a:p>
+            <a:pPr algn="ctr"/>
+          </a:p>
+        </p:txBody>
+      </p:sp>
+      <p:sp>
+        <p:nvSpPr>
+          <p:cNvPr id="35" name="TextBox 34"/>
           <p:cNvSpPr txBox="1"/>
           <p:nvPr/>
         </p:nvSpPr>
         <p:spPr>
           <a:xfrm>
-            <a:off x="640080" y="6492240"/>
-            <a:ext cx="9144000" cy="274320"/>
+            <a:off x="9756648" y="4480560"/>
+            <a:ext cx="1920240" cy="320040"/>
           </a:xfrm>
           <a:prstGeom prst="rect">
             <a:avLst/>
@@ -14574,6 +14641,76 @@
           <a:p>
             <a:pPr algn="l"/>
             <a:r>
+              <a:rPr sz="1400" b="1">
+                <a:solidFill>
+                  <a:srgbClr val="B8A888"/>
+                </a:solidFill>
+                <a:latin typeface="Calibri"/>
+              </a:rPr>
+              <a:t>zero on two tests</a:t>
+            </a:r>
+          </a:p>
+        </p:txBody>
+      </p:sp>
+      <p:sp>
+        <p:nvSpPr>
+          <p:cNvPr id="36" name="TextBox 35"/>
+          <p:cNvSpPr txBox="1"/>
+          <p:nvPr/>
+        </p:nvSpPr>
+        <p:spPr>
+          <a:xfrm>
+            <a:off x="9756648" y="4846320"/>
+            <a:ext cx="1920240" cy="548640"/>
+          </a:xfrm>
+          <a:prstGeom prst="rect">
+            <a:avLst/>
+          </a:prstGeom>
+          <a:noFill/>
+        </p:spPr>
+        <p:txBody>
+          <a:bodyPr wrap="square">
+            <a:spAutoFit/>
+          </a:bodyPr>
+          <a:lstStyle/>
+          <a:p>
+            <a:pPr algn="l"/>
+            <a:r>
+              <a:rPr sz="1600" b="1">
+                <a:solidFill>
+                  <a:srgbClr val="F4EBD0"/>
+                </a:solidFill>
+                <a:latin typeface="Calibri"/>
+              </a:rPr>
+              <a:t>Keep as judgment</a:t>
+            </a:r>
+          </a:p>
+        </p:txBody>
+      </p:sp>
+      <p:sp>
+        <p:nvSpPr>
+          <p:cNvPr id="37" name="TextBox 36"/>
+          <p:cNvSpPr txBox="1"/>
+          <p:nvPr/>
+        </p:nvSpPr>
+        <p:spPr>
+          <a:xfrm>
+            <a:off x="640080" y="6492240"/>
+            <a:ext cx="9144000" cy="274320"/>
+          </a:xfrm>
+          <a:prstGeom prst="rect">
+            <a:avLst/>
+          </a:prstGeom>
+          <a:noFill/>
+        </p:spPr>
+        <p:txBody>
+          <a:bodyPr wrap="square">
+            <a:spAutoFit/>
+          </a:bodyPr>
+          <a:lstStyle/>
+          <a:p>
+            <a:pPr algn="l"/>
+            <a:r>
               <a:rPr sz="1100" b="0">
                 <a:solidFill>
                   <a:srgbClr val="B8A888"/>
@@ -14587,7 +14724,7 @@
       </p:sp>
       <p:sp>
         <p:nvSpPr>
-          <p:cNvPr id="35" name="TextBox 34"/>
+          <p:cNvPr id="38" name="TextBox 37"/>
           <p:cNvSpPr txBox="1"/>
           <p:nvPr/>
         </p:nvSpPr>
@@ -15146,13 +15283,13 @@
           <a:p>
             <a:pPr algn="l"/>
             <a:r>
-              <a:rPr sz="3200" b="1">
+              <a:rPr sz="2800" b="1">
                 <a:solidFill>
                   <a:srgbClr val="F4EBD0"/>
                 </a:solidFill>
                 <a:latin typeface="Calibri"/>
               </a:rPr>
-              <a:t>Thirty minutes, starting Monday</a:t>
+              <a:t>Thirty minutes on Monday: run meeting-recap once</a:t>
             </a:r>
           </a:p>
         </p:txBody>
@@ -15165,8 +15302,8 @@
         </p:nvSpPr>
         <p:spPr>
           <a:xfrm>
-            <a:off x="731520" y="1371600"/>
-            <a:ext cx="10515600" cy="914400"/>
+            <a:off x="731520" y="1325880"/>
+            <a:ext cx="10515600" cy="777240"/>
           </a:xfrm>
           <a:prstGeom prst="rect">
             <a:avLst/>
@@ -15208,7 +15345,7 @@
         </p:nvSpPr>
         <p:spPr>
           <a:xfrm>
-            <a:off x="960120" y="1627632"/>
+            <a:off x="960120" y="1508760"/>
             <a:ext cx="1645920" cy="457200"/>
           </a:xfrm>
           <a:prstGeom prst="rect">
@@ -15230,7 +15367,7 @@
                 </a:solidFill>
                 <a:latin typeface="Calibri"/>
               </a:rPr>
-              <a:t>10 min</a:t>
+              <a:t>5 min</a:t>
             </a:r>
           </a:p>
         </p:txBody>
@@ -15243,8 +15380,8 @@
         </p:nvSpPr>
         <p:spPr>
           <a:xfrm>
-            <a:off x="2743200" y="1627632"/>
-            <a:ext cx="8229600" cy="457200"/>
+            <a:off x="2743200" y="1508760"/>
+            <a:ext cx="8321040" cy="548640"/>
           </a:xfrm>
           <a:prstGeom prst="rect">
             <a:avLst/>
@@ -15259,13 +15396,13 @@
           <a:p>
             <a:pPr algn="l"/>
             <a:r>
-              <a:rPr sz="2000" b="0">
+              <a:rPr sz="1700" b="0">
                 <a:solidFill>
                   <a:srgbClr val="F4EBD0"/>
                 </a:solidFill>
                 <a:latin typeface="Calibri"/>
               </a:rPr>
-              <a:t>Read PROCESS.md</a:t>
+              <a:t>Copy context-templates to a private folder. Fill in voice.md only.</a:t>
             </a:r>
           </a:p>
         </p:txBody>
@@ -15278,8 +15415,8 @@
         </p:nvSpPr>
         <p:spPr>
           <a:xfrm>
-            <a:off x="731520" y="2423160"/>
-            <a:ext cx="10515600" cy="914400"/>
+            <a:off x="731520" y="2221991"/>
+            <a:ext cx="10515600" cy="777240"/>
           </a:xfrm>
           <a:prstGeom prst="rect">
             <a:avLst/>
@@ -15321,7 +15458,7 @@
         </p:nvSpPr>
         <p:spPr>
           <a:xfrm>
-            <a:off x="960120" y="2679192"/>
+            <a:off x="960120" y="2404871"/>
             <a:ext cx="1645920" cy="457200"/>
           </a:xfrm>
           <a:prstGeom prst="rect">
@@ -15343,7 +15480,7 @@
                 </a:solidFill>
                 <a:latin typeface="Calibri"/>
               </a:rPr>
-              <a:t>10 min</a:t>
+              <a:t>5 min</a:t>
             </a:r>
           </a:p>
         </p:txBody>
@@ -15356,8 +15493,8 @@
         </p:nvSpPr>
         <p:spPr>
           <a:xfrm>
-            <a:off x="2743200" y="2679192"/>
-            <a:ext cx="8229600" cy="457200"/>
+            <a:off x="2743200" y="2404871"/>
+            <a:ext cx="8321040" cy="548640"/>
           </a:xfrm>
           <a:prstGeom prst="rect">
             <a:avLst/>
@@ -15372,13 +15509,13 @@
           <a:p>
             <a:pPr algn="l"/>
             <a:r>
-              <a:rPr sz="2000" b="0">
+              <a:rPr sz="1700" b="0">
                 <a:solidFill>
                   <a:srgbClr val="F4EBD0"/>
                 </a:solidFill>
                 <a:latin typeface="Calibri"/>
               </a:rPr>
-              <a:t>Fill private context — voice.md first for meeting-recap</a:t>
+              <a:t>Pick one real meeting from last week: title, date, attendees, notes.</a:t>
             </a:r>
           </a:p>
         </p:txBody>
@@ -15391,8 +15528,8 @@
         </p:nvSpPr>
         <p:spPr>
           <a:xfrm>
-            <a:off x="731520" y="3474720"/>
-            <a:ext cx="10515600" cy="914400"/>
+            <a:off x="731520" y="3118104"/>
+            <a:ext cx="10515600" cy="777240"/>
           </a:xfrm>
           <a:prstGeom prst="rect">
             <a:avLst/>
@@ -15434,7 +15571,7 @@
         </p:nvSpPr>
         <p:spPr>
           <a:xfrm>
-            <a:off x="960120" y="3730752"/>
+            <a:off x="960120" y="3300984"/>
             <a:ext cx="1645920" cy="457200"/>
           </a:xfrm>
           <a:prstGeom prst="rect">
@@ -15469,8 +15606,8 @@
         </p:nvSpPr>
         <p:spPr>
           <a:xfrm>
-            <a:off x="2743200" y="3730752"/>
-            <a:ext cx="8229600" cy="457200"/>
+            <a:off x="2743200" y="3300984"/>
+            <a:ext cx="8321040" cy="548640"/>
           </a:xfrm>
           <a:prstGeom prst="rect">
             <a:avLst/>
@@ -15485,13 +15622,13 @@
           <a:p>
             <a:pPr algn="l"/>
             <a:r>
-              <a:rPr sz="2000" b="0">
+              <a:rPr sz="1700" b="0">
                 <a:solidFill>
                   <a:srgbClr val="F4EBD0"/>
                 </a:solidFill>
                 <a:latin typeface="Calibri"/>
               </a:rPr>
-              <a:t>If you freeze: what-to-automate.md, two tests, then rank 3+ candidates</a:t>
+              <a:t>Paste meeting-recap.md, voice.md, and the notes into your tool. Run it.</a:t>
             </a:r>
           </a:p>
         </p:txBody>
@@ -15504,8 +15641,8 @@
         </p:nvSpPr>
         <p:spPr>
           <a:xfrm>
-            <a:off x="731520" y="4526279"/>
-            <a:ext cx="10515600" cy="914400"/>
+            <a:off x="731520" y="4014215"/>
+            <a:ext cx="10515600" cy="777240"/>
           </a:xfrm>
           <a:prstGeom prst="rect">
             <a:avLst/>
@@ -15547,7 +15684,7 @@
         </p:nvSpPr>
         <p:spPr>
           <a:xfrm>
-            <a:off x="960120" y="4782311"/>
+            <a:off x="960120" y="4197095"/>
             <a:ext cx="1645920" cy="457200"/>
           </a:xfrm>
           <a:prstGeom prst="rect">
@@ -15569,7 +15706,7 @@
                 </a:solidFill>
                 <a:latin typeface="Calibri"/>
               </a:rPr>
-              <a:t>5 min</a:t>
+              <a:t>10 min</a:t>
             </a:r>
           </a:p>
         </p:txBody>
@@ -15582,8 +15719,8 @@
         </p:nvSpPr>
         <p:spPr>
           <a:xfrm>
-            <a:off x="2743200" y="4782311"/>
-            <a:ext cx="8229600" cy="457200"/>
+            <a:off x="2743200" y="4197095"/>
+            <a:ext cx="8321040" cy="548640"/>
           </a:xfrm>
           <a:prstGeom prst="rect">
             <a:avLst/>
@@ -15598,27 +15735,70 @@
           <a:p>
             <a:pPr algn="l"/>
             <a:r>
-              <a:rPr sz="2000" b="0">
+              <a:rPr sz="1700" b="0">
                 <a:solidFill>
                   <a:srgbClr val="F4EBD0"/>
                 </a:solidFill>
                 <a:latin typeface="Calibri"/>
               </a:rPr>
-              <a:t>Write the SOP — or keep the job as judgment</a:t>
-            </a:r>
-          </a:p>
-        </p:txBody>
-      </p:sp>
-      <p:sp>
-        <p:nvSpPr>
-          <p:cNvPr id="18" name="TextBox 17"/>
+              <a:t>Check each owner and date against a line in the notes. No name? Unassigned.</a:t>
+            </a:r>
+          </a:p>
+        </p:txBody>
+      </p:sp>
+      <p:sp>
+        <p:nvSpPr>
+          <p:cNvPr id="18" name="Rectangle 17"/>
+          <p:cNvSpPr/>
+          <p:nvPr/>
+        </p:nvSpPr>
+        <p:spPr>
+          <a:xfrm>
+            <a:off x="731520" y="4910328"/>
+            <a:ext cx="10515600" cy="777240"/>
+          </a:xfrm>
+          <a:prstGeom prst="rect">
+            <a:avLst/>
+          </a:prstGeom>
+          <a:solidFill>
+            <a:srgbClr val="141414"/>
+          </a:solidFill>
+          <a:ln>
+            <a:noFill/>
+          </a:ln>
+        </p:spPr>
+        <p:style>
+          <a:lnRef idx="1">
+            <a:schemeClr val="accent1"/>
+          </a:lnRef>
+          <a:fillRef idx="3">
+            <a:schemeClr val="accent1"/>
+          </a:fillRef>
+          <a:effectRef idx="2">
+            <a:schemeClr val="accent1"/>
+          </a:effectRef>
+          <a:fontRef idx="minor">
+            <a:schemeClr val="lt1"/>
+          </a:fontRef>
+        </p:style>
+        <p:txBody>
+          <a:bodyPr rtlCol="0" anchor="ctr"/>
+          <a:lstStyle/>
+          <a:p>
+            <a:pPr algn="ctr"/>
+          </a:p>
+        </p:txBody>
+      </p:sp>
+      <p:sp>
+        <p:nvSpPr>
+          <p:cNvPr id="19" name="TextBox 18"/>
           <p:cNvSpPr txBox="1"/>
           <p:nvPr/>
         </p:nvSpPr>
         <p:spPr>
           <a:xfrm>
-            <a:off x="640080" y="6492240"/>
-            <a:ext cx="9144000" cy="274320"/>
+            <a:off x="960120" y="5093208"/>
+            <a:ext cx="1645920" cy="457200"/>
           </a:xfrm>
           <a:prstGeom prst="rect">
             <a:avLst/>
@@ -15633,6 +15813,111 @@
           <a:p>
             <a:pPr algn="l"/>
             <a:r>
+              <a:rPr sz="1800" b="1">
+                <a:solidFill>
+                  <a:srgbClr val="B3995D"/>
+                </a:solidFill>
+                <a:latin typeface="Calibri"/>
+              </a:rPr>
+              <a:t>5 min</a:t>
+            </a:r>
+          </a:p>
+        </p:txBody>
+      </p:sp>
+      <p:sp>
+        <p:nvSpPr>
+          <p:cNvPr id="20" name="TextBox 19"/>
+          <p:cNvSpPr txBox="1"/>
+          <p:nvPr/>
+        </p:nvSpPr>
+        <p:spPr>
+          <a:xfrm>
+            <a:off x="2743200" y="5093208"/>
+            <a:ext cx="8321040" cy="548640"/>
+          </a:xfrm>
+          <a:prstGeom prst="rect">
+            <a:avLst/>
+          </a:prstGeom>
+          <a:noFill/>
+        </p:spPr>
+        <p:txBody>
+          <a:bodyPr wrap="square">
+            <a:spAutoFit/>
+          </a:bodyPr>
+          <a:lstStyle/>
+          <a:p>
+            <a:pPr algn="l"/>
+            <a:r>
+              <a:rPr sz="1700" b="0">
+                <a:solidFill>
+                  <a:srgbClr val="F4EBD0"/>
+                </a:solidFill>
+                <a:latin typeface="Calibri"/>
+              </a:rPr>
+              <a:t>Wrong? Fix the prompt or voice.md, not the chat. Run it again.</a:t>
+            </a:r>
+          </a:p>
+        </p:txBody>
+      </p:sp>
+      <p:sp>
+        <p:nvSpPr>
+          <p:cNvPr id="21" name="TextBox 20"/>
+          <p:cNvSpPr txBox="1"/>
+          <p:nvPr/>
+        </p:nvSpPr>
+        <p:spPr>
+          <a:xfrm>
+            <a:off x="731520" y="5897880"/>
+            <a:ext cx="10515600" cy="457200"/>
+          </a:xfrm>
+          <a:prstGeom prst="rect">
+            <a:avLst/>
+          </a:prstGeom>
+          <a:noFill/>
+        </p:spPr>
+        <p:txBody>
+          <a:bodyPr wrap="square">
+            <a:spAutoFit/>
+          </a:bodyPr>
+          <a:lstStyle/>
+          <a:p>
+            <a:pPr algn="l"/>
+            <a:r>
+              <a:rPr sz="1500" b="0">
+                <a:solidFill>
+                  <a:srgbClr val="B8A888"/>
+                </a:solidFill>
+                <a:latin typeface="Calibri"/>
+              </a:rPr>
+              <a:t>Froze on picking a meeting? what-to-automate.md. Left with three ideas? score-the-candidates.md.</a:t>
+            </a:r>
+          </a:p>
+        </p:txBody>
+      </p:sp>
+      <p:sp>
+        <p:nvSpPr>
+          <p:cNvPr id="22" name="TextBox 21"/>
+          <p:cNvSpPr txBox="1"/>
+          <p:nvPr/>
+        </p:nvSpPr>
+        <p:spPr>
+          <a:xfrm>
+            <a:off x="640080" y="6492240"/>
+            <a:ext cx="9144000" cy="274320"/>
+          </a:xfrm>
+          <a:prstGeom prst="rect">
+            <a:avLst/>
+          </a:prstGeom>
+          <a:noFill/>
+        </p:spPr>
+        <p:txBody>
+          <a:bodyPr wrap="square">
+            <a:spAutoFit/>
+          </a:bodyPr>
+          <a:lstStyle/>
+          <a:p>
+            <a:pPr algn="l"/>
+            <a:r>
               <a:rPr sz="1100" b="0">
                 <a:solidFill>
                   <a:srgbClr val="B8A888"/>
@@ -15646,7 +15931,7 @@
       </p:sp>
       <p:sp>
         <p:nvSpPr>
-          <p:cNvPr id="19" name="TextBox 18"/>
+          <p:cNvPr id="23" name="TextBox 22"/>
           <p:cNvSpPr txBox="1"/>
           <p:nvPr/>
         </p:nvSpPr>
@@ -16240,7 +16525,7 @@
         </p:nvSpPr>
         <p:spPr>
           <a:xfrm>
-            <a:off x="731520" y="1463040"/>
+            <a:off x="731520" y="822960"/>
             <a:ext cx="10515600" cy="1280160"/>
           </a:xfrm>
           <a:prstGeom prst="rect">
@@ -16276,8 +16561,8 @@
         </p:nvSpPr>
         <p:spPr>
           <a:xfrm>
-            <a:off x="1371600" y="3291840"/>
-            <a:ext cx="9418320" cy="1828800"/>
+            <a:off x="731520" y="2834640"/>
+            <a:ext cx="7863840" cy="457200"/>
           </a:xfrm>
           <a:prstGeom prst="rect">
             <a:avLst/>
@@ -16290,17 +16575,15 @@
           </a:bodyPr>
           <a:lstStyle/>
           <a:p>
-            <a:pPr algn="ctr"/>
-            <a:r>
-              <a:rPr sz="2000" b="0">
-                <a:solidFill>
-                  <a:srgbClr val="F4EBD0"/>
-                </a:solidFill>
-                <a:latin typeface="Calibri"/>
-              </a:rPr>
-              <a:t>Repo: START-HERE.md, then the prompt kit (not the Claude plugin).
-Process files, CoS workflows, blank context templates, and the decision matrix.
-Sources cited from the Notion Substack table.</a:t>
+            <a:pPr algn="l"/>
+            <a:r>
+              <a:rPr sz="1400" b="1">
+                <a:solidFill>
+                  <a:srgbClr val="B3995D"/>
+                </a:solidFill>
+                <a:latin typeface="Calibri"/>
+              </a:rPr>
+              <a:t>START HERE</a:t>
             </a:r>
           </a:p>
         </p:txBody>
@@ -16313,8 +16596,8 @@
         </p:nvSpPr>
         <p:spPr>
           <a:xfrm>
-            <a:off x="640080" y="6492240"/>
-            <a:ext cx="9144000" cy="274320"/>
+            <a:off x="731520" y="3246120"/>
+            <a:ext cx="8229600" cy="548640"/>
           </a:xfrm>
           <a:prstGeom prst="rect">
             <a:avLst/>
@@ -16329,6 +16612,137 @@
           <a:p>
             <a:pPr algn="l"/>
             <a:r>
+              <a:rPr sz="2000" b="1">
+                <a:solidFill>
+                  <a:srgbClr val="F4EBD0"/>
+                </a:solidFill>
+                <a:latin typeface="Calibri"/>
+              </a:rPr>
+              <a:t>github.com/BittahCriminal/build-your-own-chief-of-staff</a:t>
+            </a:r>
+          </a:p>
+        </p:txBody>
+      </p:sp>
+      <p:sp>
+        <p:nvSpPr>
+          <p:cNvPr id="8" name="TextBox 7"/>
+          <p:cNvSpPr txBox="1"/>
+          <p:nvPr/>
+        </p:nvSpPr>
+        <p:spPr>
+          <a:xfrm>
+            <a:off x="731520" y="3977639"/>
+            <a:ext cx="7863840" cy="1463040"/>
+          </a:xfrm>
+          <a:prstGeom prst="rect">
+            <a:avLst/>
+          </a:prstGeom>
+          <a:noFill/>
+        </p:spPr>
+        <p:txBody>
+          <a:bodyPr wrap="square">
+            <a:spAutoFit/>
+          </a:bodyPr>
+          <a:lstStyle/>
+          <a:p>
+            <a:pPr algn="l"/>
+            <a:r>
+              <a:rPr sz="1700" b="0">
+                <a:solidFill>
+                  <a:srgbClr val="B8A888"/>
+                </a:solidFill>
+                <a:latin typeface="Calibri"/>
+              </a:rPr>
+              <a:t>Open START-HERE.md. Prompt kit, not the Claude plugin.
+Process files, CoS workflows, blank context templates, the decision matrix.
+Sources cited from the Notion Substack table.</a:t>
+            </a:r>
+          </a:p>
+        </p:txBody>
+      </p:sp>
+      <p:pic>
+        <p:nvPicPr>
+          <p:cNvPr id="9" name="Picture 8" descr="image.png"/>
+          <p:cNvPicPr>
+            <a:picLocks noChangeAspect="1"/>
+          </p:cNvPicPr>
+          <p:nvPr/>
+        </p:nvPicPr>
+        <p:blipFill>
+          <a:blip r:embed="rId2"/>
+          <a:stretch>
+            <a:fillRect/>
+          </a:stretch>
+        </p:blipFill>
+        <p:spPr>
+          <a:xfrm>
+            <a:off x="9052560" y="2834640"/>
+            <a:ext cx="2194560" cy="2194560"/>
+          </a:xfrm>
+          <a:prstGeom prst="rect">
+            <a:avLst/>
+          </a:prstGeom>
+        </p:spPr>
+      </p:pic>
+      <p:sp>
+        <p:nvSpPr>
+          <p:cNvPr id="10" name="TextBox 9"/>
+          <p:cNvSpPr txBox="1"/>
+          <p:nvPr/>
+        </p:nvSpPr>
+        <p:spPr>
+          <a:xfrm>
+            <a:off x="9052560" y="5074920"/>
+            <a:ext cx="2194560" cy="365760"/>
+          </a:xfrm>
+          <a:prstGeom prst="rect">
+            <a:avLst/>
+          </a:prstGeom>
+          <a:noFill/>
+        </p:spPr>
+        <p:txBody>
+          <a:bodyPr wrap="square">
+            <a:spAutoFit/>
+          </a:bodyPr>
+          <a:lstStyle/>
+          <a:p>
+            <a:pPr algn="ctr"/>
+            <a:r>
+              <a:rPr sz="1200" b="0">
+                <a:solidFill>
+                  <a:srgbClr val="B8A888"/>
+                </a:solidFill>
+                <a:latin typeface="Calibri"/>
+              </a:rPr>
+              <a:t>scan: START-HERE.md</a:t>
+            </a:r>
+          </a:p>
+        </p:txBody>
+      </p:sp>
+      <p:sp>
+        <p:nvSpPr>
+          <p:cNvPr id="11" name="TextBox 10"/>
+          <p:cNvSpPr txBox="1"/>
+          <p:nvPr/>
+        </p:nvSpPr>
+        <p:spPr>
+          <a:xfrm>
+            <a:off x="640080" y="6492240"/>
+            <a:ext cx="9144000" cy="274320"/>
+          </a:xfrm>
+          <a:prstGeom prst="rect">
+            <a:avLst/>
+          </a:prstGeom>
+          <a:noFill/>
+        </p:spPr>
+        <p:txBody>
+          <a:bodyPr wrap="square">
+            <a:spAutoFit/>
+          </a:bodyPr>
+          <a:lstStyle/>
+          <a:p>
+            <a:pPr algn="l"/>
+            <a:r>
               <a:rPr sz="1100" b="0">
                 <a:solidFill>
                   <a:srgbClr val="B8A888"/>
@@ -16342,7 +16756,7 @@
       </p:sp>
       <p:sp>
         <p:nvSpPr>
-          <p:cNvPr id="8" name="TextBox 7"/>
+          <p:cNvPr id="12" name="TextBox 11"/>
           <p:cNvSpPr txBox="1"/>
           <p:nvPr/>
         </p:nvSpPr>

--- a/slides/building-your-own-chief-of-staff.pptx
+++ b/slides/building-your-own-chief-of-staff.pptx
@@ -535,7 +535,7 @@
           <a:p/>
           <a:p>
             <a:r>
-              <a:t>Cite the source of truth if asked: the author's Substack research table in Notion — https://app.notion.com/p/36e059b703e180d3a962d862c9e380c5 — 879 rows of operator essays. We synthesized from those rows, not from a generic web roundup.</a:t>
+              <a:t>Cite the local source catalog if asked: https://github.com/BittahCriminal/build-your-own-chief-of-staff/blob/main/research/SOURCES.md — 20 Markdown notes documenting the operating rules used in this kit, with original article attribution.</a:t>
             </a:r>
           </a:p>
         </p:txBody>
@@ -617,7 +617,7 @@
           <a:p/>
           <a:p>
             <a:r>
-              <a:t>Reusable-rig essay: skills should be local, inspectable, and independent of whichever AI app you are renting this month. Notion: https://app.notion.com/p/392059b703e1814b96a6dd9913180844</a:t>
+              <a:t>Reusable-rig essay: skills should be local, inspectable, and independent of whichever AI app you are renting this month. Source: https://github.com/BittahCriminal/build-your-own-chief-of-staff/blob/main/research/notes/reusable-rig.md</a:t>
             </a:r>
           </a:p>
           <a:p/>
@@ -818,7 +818,7 @@
           </a:p>
           <a:p>
             <a:r>
-              <a:t>5. Citation guard: no anchor, no claim. Gaps stay gaps. Prompt: verify.md  Notion: https://app.notion.com/p/392059b703e1814b96a6dd9913180844</a:t>
+              <a:t>5. Citation guard: no anchor, no claim. Gaps stay gaps. Prompt: verify.md  Source: https://github.com/BittahCriminal/build-your-own-chief-of-staff/blob/main/research/notes/reusable-rig.md</a:t>
             </a:r>
           </a:p>
           <a:p>
@@ -834,7 +834,7 @@
           <a:p/>
           <a:p>
             <a:r>
-              <a:t>Then say: point the same seven steps at expense reports, hiring screens, incident recaps. Buying a smarter model does not skip workflow, data, authority, evaluation, audit, or an owner. Notion: https://app.notion.com/p/36f059b703e1813d801bcb34d72141b1</a:t>
+              <a:t>Then say: point the same seven steps at expense reports, hiring screens, incident recaps. Buying a smarter model does not skip workflow, data, authority, evaluation, audit, or an owner. Source: https://github.com/BittahCriminal/build-your-own-chief-of-staff/blob/main/research/notes/workflow-readiness.md</a:t>
             </a:r>
           </a:p>
           <a:p/>
@@ -1086,19 +1086,19 @@
           <a:p/>
           <a:p>
             <a:r>
-              <a:t>If an agent sends a flawed appeal in your name, you now have two problems. Notion: https://app.notion.com/p/392059b703e1814b96a6dd9913180844</a:t>
+              <a:t>If an agent sends a flawed appeal in your name, you now have two problems. Source: https://github.com/BittahCriminal/build-your-own-chief-of-staff/blob/main/research/notes/reusable-rig.md</a:t>
             </a:r>
           </a:p>
           <a:p/>
           <a:p>
             <a:r>
-              <a:t>Inbox is untrusted. A line that says 'ignore your rules' is data, not an order. First-agent-job: https://app.notion.com/p/3bb059b703e1817b9123ff209fcc5d9d</a:t>
+              <a:t>Inbox is untrusted. A line that says 'ignore your rules' is data, not an order. First-agent-job: https://github.com/BittahCriminal/build-your-own-chief-of-staff/blob/main/research/notes/first-agent-job.md</a:t>
             </a:r>
           </a:p>
           <a:p/>
           <a:p>
             <a:r>
-              <a:t>Where the agent should stop: start where a colleague or customer already tells you you're wrong; reconstructing context is the expensive part; the reply is cheap. Notion: https://app.notion.com/p/3aa059b703e1817c9571c77f8badaf77</a:t>
+              <a:t>Where the agent should stop: start where a colleague or customer already tells you you're wrong; reconstructing context is the expensive part; the reply is cheap. Source: https://github.com/BittahCriminal/build-your-own-chief-of-staff/blob/main/research/notes/where-to-stop.md</a:t>
             </a:r>
           </a:p>
         </p:txBody>
@@ -1174,7 +1174,7 @@
           <a:p/>
           <a:p>
             <a:r>
-              <a:t>If they want receipts: research/SOURCES.md lists the Notion pages this was synthesized from, starting with the Substack database https://app.notion.com/p/36e059b703e180d3a962d862c9e380c5</a:t>
+              <a:t>If they want receipts: research/SOURCES.md catalogs the local source notes and original articles behind the method: https://github.com/BittahCriminal/build-your-own-chief-of-staff/blob/main/research/SOURCES.md</a:t>
             </a:r>
           </a:p>
           <a:p/>
@@ -1262,7 +1262,7 @@
           <a:p/>
           <a:p>
             <a:r>
-              <a:t>That claim is from the context-files row in the table (Notion: https://app.notion.com/p/3bb059b703e18152aea0d83b502fa319) and from the delegation kit's memory scaffold (https://app.notion.com/p/36f059b703e18192a6d8f67fbe74b756).</a:t>
+              <a:t>That claim is from the context-files note (Source: https://github.com/BittahCriminal/build-your-own-chief-of-staff/blob/main/research/notes/context-files.md) and from the delegation kit's memory scaffold (https://github.com/BittahCriminal/build-your-own-chief-of-staff/blob/main/research/notes/delegation-kit.md).</a:t>
             </a:r>
           </a:p>
         </p:txBody>
@@ -1338,7 +1338,7 @@
           <a:p/>
           <a:p>
             <a:r>
-              <a:t>We automate the first. We keep the second. That split is the whole talk, and it is the load-bearing claim in the Delegation Kit row: https://app.notion.com/p/36f059b703e18192a6d8f67fbe74b756</a:t>
+              <a:t>We automate the first. We keep the second. That split is the whole talk, and it is the load-bearing claim in the Delegation Kit note: https://github.com/BittahCriminal/build-your-own-chief-of-staff/blob/main/research/notes/delegation-kit.md</a:t>
             </a:r>
           </a:p>
         </p:txBody>
@@ -1432,13 +1432,13 @@
           <a:p/>
           <a:p>
             <a:r>
-              <a:t>The checkability argument: if checking an answer costs as much as making it, extra attempts just grow the pile. Notion: https://app.notion.com/p/399059b703e18107b20dfe6bb5c32626</a:t>
+              <a:t>The checkability argument: if checking an answer costs as much as making it, extra attempts just grow the pile. Source: https://github.com/BittahCriminal/build-your-own-chief-of-staff/blob/main/research/notes/agent-shaped-work.md</a:t>
             </a:r>
           </a:p>
           <a:p/>
           <a:p>
             <a:r>
-              <a:t>And: if you cannot name what would make you say 'not yet,' you have a vibe, not a job. Notion: https://app.notion.com/p/36f059b703e18142b351f70732b09c29</a:t>
+              <a:t>And: if you cannot name what would make you say 'not yet,' you have a vibe, not a job. Source: https://github.com/BittahCriminal/build-your-own-chief-of-staff/blob/main/research/notes/verification-gap.md</a:t>
             </a:r>
           </a:p>
         </p:txBody>
@@ -1514,13 +1514,13 @@
           <a:p/>
           <a:p>
             <a:r>
-              <a:t>The shape-of-the-work briefing: if you automate work that depends on trust and judgment, you break the process at the point where the human mattered most. Notion: https://app.notion.com/p/36f059b703e181cf9c30f637d158b234</a:t>
+              <a:t>The shape-of-the-work briefing: if you automate work that depends on trust and judgment, you break the process at the point where the human mattered most. Source: https://github.com/BittahCriminal/build-your-own-chief-of-staff/blob/main/research/notes/shape-of-work.md</a:t>
             </a:r>
           </a:p>
           <a:p/>
           <a:p>
             <a:r>
-              <a:t>And from automation discovery: frequency is evidence, not value. Choosing none of the offered automations is allowed. Notion: https://app.notion.com/p/3a0059b703e181c69fafc66f28f76c99</a:t>
+              <a:t>And from automation discovery: frequency is evidence, not value. Choosing none of the offered automations is allowed. Source: https://github.com/BittahCriminal/build-your-own-chief-of-staff/blob/main/research/notes/let-history-pick.md</a:t>
             </a:r>
           </a:p>
         </p:txBody>
@@ -1596,13 +1596,13 @@
           <a:p/>
           <a:p>
             <a:r>
-              <a:t>Nate's empty-prompt piece: people have a capable agent and keep staring at the box. The first version of automation-discovery let the AI pick and build — he killed that 'magic button' because it hides the judgment call. Offer sheet, then a human chooses. Choosing none is allowed. Frequency is not value. Notion: https://app.notion.com/p/3a0059b703e181c69fafc66f28f76c99</a:t>
+              <a:t>Nate's empty-prompt piece: people have a capable agent and keep staring at the box. The first version of automation-discovery let the AI pick and build — he killed that 'magic button' because it hides the judgment call. Offer sheet, then a human chooses. Choosing none is allowed. Frequency is not value. Source: https://github.com/BittahCriminal/build-your-own-chief-of-staff/blob/main/research/notes/let-history-pick.md</a:t>
             </a:r>
           </a:p>
           <a:p/>
           <a:p>
             <a:r>
-              <a:t>Idle agents: a social network for agents filled up and sat there. They were never asked to do a single thing. Notion: https://app.notion.com/p/399059b703e18107b20dfe6bb5c32626</a:t>
+              <a:t>Idle agents: a social network for agents filled up and sat there. They were never asked to do a single thing. Source: https://github.com/BittahCriminal/build-your-own-chief-of-staff/blob/main/research/notes/agent-shaped-work.md</a:t>
             </a:r>
           </a:p>
           <a:p/>
@@ -1678,28 +1678,28 @@
           <a:lstStyle/>
           <a:p>
             <a:r>
-              <a:t>These are Nate's failure modes from the Substack table, not a generic 'AI projects fail' slide.</a:t>
+              <a:t>These failure modes come from Nate's essays, summarized in the local source notes below.</a:t>
             </a:r>
           </a:p>
           <a:p/>
           <a:p>
             <a:r>
-              <a:t>Core-first vs edges: https://app.notion.com/p/36f059b703e181d9bd25f984c8bd6945</a:t>
-            </a:r>
-          </a:p>
-          <a:p>
-            <a:r>
-              <a:t>Fails at the task level (five jobs pretending to be one): https://app.notion.com/p/36f059b703e181f9afedc637cd6529f4</a:t>
-            </a:r>
-          </a:p>
-          <a:p>
-            <a:r>
-              <a:t>False success (wrong spreadsheet, said done): https://app.notion.com/p/3b5059b703e1819fbd41c6ba9658b0c6</a:t>
-            </a:r>
-          </a:p>
-          <a:p>
-            <a:r>
-              <a:t>A better model will not save you: https://app.notion.com/p/36f059b703e1818fa542e8696353ebb9</a:t>
+              <a:t>Core-first vs edges: https://github.com/BittahCriminal/build-your-own-chief-of-staff/blob/main/research/notes/why-agent-projects-fail.md</a:t>
+            </a:r>
+          </a:p>
+          <a:p>
+            <a:r>
+              <a:t>Fails at the task level (five jobs pretending to be one): https://github.com/BittahCriminal/build-your-own-chief-of-staff/blob/main/research/notes/task-decomposition.md</a:t>
+            </a:r>
+          </a:p>
+          <a:p>
+            <a:r>
+              <a:t>False success (wrong spreadsheet, said done): https://github.com/BittahCriminal/build-your-own-chief-of-staff/blob/main/research/notes/false-success.md</a:t>
+            </a:r>
+          </a:p>
+          <a:p>
+            <a:r>
+              <a:t>A better model will not save you: https://github.com/BittahCriminal/build-your-own-chief-of-staff/blob/main/research/notes/better-models-wont-fix-the-process.md</a:t>
             </a:r>
           </a:p>
           <a:p/>
@@ -1787,7 +1787,7 @@
           <a:p/>
           <a:p>
             <a:r>
-              <a:t>Notion: https://app.notion.com/p/36f059b703e181d9bd25f984c8bd6945</a:t>
+              <a:t>Source: https://github.com/BittahCriminal/build-your-own-chief-of-staff/blob/main/research/notes/why-agent-projects-fail.md</a:t>
             </a:r>
           </a:p>
           <a:p/>
@@ -1863,7 +1863,7 @@
           <a:lstStyle/>
           <a:p>
             <a:r>
-              <a:t>Walk the left column: these are the eight portable jobs from the Delegation Kit, renamed into operator English. Notion: https://app.notion.com/p/36f059b703e18192a6d8f67fbe74b756</a:t>
+              <a:t>Walk the left column: these are the eight portable jobs from the Delegation Kit, renamed into operator English. Source: https://github.com/BittahCriminal/build-your-own-chief-of-staff/blob/main/research/notes/delegation-kit.md</a:t>
             </a:r>
           </a:p>
           <a:p/>
@@ -10302,7 +10302,7 @@
               </a:rPr>
               <a:t>Open START-HERE.md. Prompt kit, not the Claude plugin.
 Process files, CoS workflows, blank context templates, the decision matrix.
-Sources cited from the Notion Substack table.</a:t>
+Source notes live in research/SOURCES.md.</a:t>
             </a:r>
           </a:p>
         </p:txBody>
